--- a/a7/build/out/u3/A7 3.T1 Exponent Laws with Variable Bases - Slides.pptx
+++ b/a7/build/out/u3/A7 3.T1 Exponent Laws with Variable Bases - Slides.pptx
@@ -3129,7 +3129,7 @@
         </p:nvSpPr>
         <p:spPr>
           <a:xfrm>
-            <a:off x="777240" y="1691640"/>
+            <a:off x="777240" y="2148840"/>
             <a:ext cx="10607040" cy="347472"/>
           </a:xfrm>
           <a:prstGeom prst="rect">
@@ -3164,7 +3164,7 @@
         </p:nvSpPr>
         <p:spPr>
           <a:xfrm>
-            <a:off x="777240" y="2048256"/>
+            <a:off x="777240" y="2505456"/>
             <a:ext cx="10607040" cy="1005840"/>
           </a:xfrm>
           <a:prstGeom prst="rect">
@@ -3199,7 +3199,7 @@
         </p:nvCxnSpPr>
         <p:spPr>
           <a:xfrm>
-            <a:off x="3291840" y="3255264"/>
+            <a:off x="3291840" y="3712464"/>
             <a:ext cx="5577840" cy="0"/>
           </a:xfrm>
           <a:prstGeom prst="line">
@@ -3234,7 +3234,7 @@
         </p:nvCxnSpPr>
         <p:spPr>
           <a:xfrm>
-            <a:off x="3291840" y="3337560"/>
+            <a:off x="3291840" y="3794760"/>
             <a:ext cx="5577840" cy="0"/>
           </a:xfrm>
           <a:prstGeom prst="line">
@@ -3269,7 +3269,7 @@
         </p:nvSpPr>
         <p:spPr>
           <a:xfrm>
-            <a:off x="777240" y="3502152"/>
+            <a:off x="777240" y="3959352"/>
             <a:ext cx="10607040" cy="310896"/>
           </a:xfrm>
           <a:prstGeom prst="rect">
@@ -3304,7 +3304,7 @@
         </p:nvSpPr>
         <p:spPr>
           <a:xfrm>
-            <a:off x="777240" y="3840480"/>
+            <a:off x="777240" y="4297680"/>
             <a:ext cx="10607040" cy="731520"/>
           </a:xfrm>
           <a:prstGeom prst="rect">
@@ -3327,129 +3327,13 @@
                 <a:latin typeface="Century Schoolbook"/>
               </a:rPr>
               <a:t>I can multiply and divide monomials, and raise a monomial to a power, by applying the laws of exponents to variable bases.</a:t>
-            </a:r>
-          </a:p>
-        </p:txBody>
-      </p:sp>
-      <p:sp>
-        <p:nvSpPr>
-          <p:cNvPr id="8" name="Rectangle 7"/>
-          <p:cNvSpPr/>
-          <p:nvPr/>
-        </p:nvSpPr>
-        <p:spPr>
-          <a:xfrm>
-            <a:off x="2377440" y="4736592"/>
-            <a:ext cx="7406640" cy="1051560"/>
-          </a:xfrm>
-          <a:prstGeom prst="rect">
-            <a:avLst/>
-          </a:prstGeom>
-          <a:solidFill>
-            <a:srgbClr val="F2F2F0"/>
-          </a:solidFill>
-          <a:ln w="9525">
-            <a:solidFill>
-              <a:srgbClr val="BFBFBF"/>
-            </a:solidFill>
-          </a:ln>
-          <a:effectLst/>
-        </p:spPr>
-        <p:style>
-          <a:lnRef idx="1">
-            <a:schemeClr val="accent1"/>
-          </a:lnRef>
-          <a:fillRef idx="3">
-            <a:schemeClr val="accent1"/>
-          </a:fillRef>
-          <a:effectRef idx="2">
-            <a:schemeClr val="accent1"/>
-          </a:effectRef>
-          <a:fontRef idx="minor">
-            <a:schemeClr val="lt1"/>
-          </a:fontRef>
-        </p:style>
-        <p:txBody>
-          <a:bodyPr rtlCol="0" anchor="ctr"/>
-          <a:lstStyle/>
-          <a:p>
-            <a:pPr algn="ctr"/>
-          </a:p>
-        </p:txBody>
-      </p:sp>
-      <p:sp>
-        <p:nvSpPr>
-          <p:cNvPr id="9" name="TextBox 8"/>
-          <p:cNvSpPr txBox="1"/>
-          <p:nvPr/>
-        </p:nvSpPr>
-        <p:spPr>
-          <a:xfrm>
-            <a:off x="2606040" y="4892040"/>
-            <a:ext cx="6949440" cy="365760"/>
-          </a:xfrm>
-          <a:prstGeom prst="rect">
-            <a:avLst/>
-          </a:prstGeom>
-          <a:noFill/>
-        </p:spPr>
-        <p:txBody>
-          <a:bodyPr wrap="square" lIns="45720" rIns="45720" tIns="18288" bIns="18288" anchor="t">
-            <a:spAutoFit/>
-          </a:bodyPr>
-          <a:lstStyle/>
-          <a:p>
-            <a:pPr algn="ctr"/>
-            <a:r>
-              <a:rPr sz="1700" b="0" i="1">
-                <a:solidFill>
-                  <a:srgbClr val="6B6B6B"/>
-                </a:solidFill>
-                <a:latin typeface="Century Schoolbook"/>
-              </a:rPr>
-              <a:t>Yesterday the bases were all numbers.</a:t>
-            </a:r>
-          </a:p>
-        </p:txBody>
-      </p:sp>
-      <p:sp>
-        <p:nvSpPr>
-          <p:cNvPr id="10" name="TextBox 9"/>
-          <p:cNvSpPr txBox="1"/>
-          <p:nvPr/>
-        </p:nvSpPr>
-        <p:spPr>
-          <a:xfrm>
-            <a:off x="2606040" y="5276088"/>
-            <a:ext cx="6949440" cy="365760"/>
-          </a:xfrm>
-          <a:prstGeom prst="rect">
-            <a:avLst/>
-          </a:prstGeom>
-          <a:noFill/>
-        </p:spPr>
-        <p:txBody>
-          <a:bodyPr wrap="square" lIns="45720" rIns="45720" tIns="18288" bIns="18288" anchor="t">
-            <a:spAutoFit/>
-          </a:bodyPr>
-          <a:lstStyle/>
-          <a:p>
-            <a:pPr algn="ctr"/>
-            <a:r>
-              <a:rPr sz="1700" b="1" i="0">
-                <a:solidFill>
-                  <a:srgbClr val="1A1A1A"/>
-                </a:solidFill>
-                <a:latin typeface="Century Schoolbook"/>
-              </a:rPr>
-              <a:t>Today the base is a letter. Every law still works.</a:t>
             </a:r>
           </a:p>
         </p:txBody>
       </p:sp>
       <p:cxnSp>
         <p:nvCxnSpPr>
-          <p:cNvPr id="11" name="Connector 10"/>
+          <p:cNvPr id="8" name="Connector 7"/>
           <p:cNvCxnSpPr/>
           <p:nvPr/>
         </p:nvCxnSpPr>
@@ -3484,7 +3368,7 @@
       </p:cxnSp>
       <p:sp>
         <p:nvSpPr>
-          <p:cNvPr id="12" name="TextBox 11"/>
+          <p:cNvPr id="9" name="TextBox 8"/>
           <p:cNvSpPr txBox="1"/>
           <p:nvPr/>
         </p:nvSpPr>
@@ -3519,7 +3403,7 @@
       </p:sp>
       <p:sp>
         <p:nvSpPr>
-          <p:cNvPr id="13" name="TextBox 12"/>
+          <p:cNvPr id="10" name="TextBox 9"/>
           <p:cNvSpPr txBox="1"/>
           <p:nvPr/>
         </p:nvSpPr>
@@ -3675,44 +3559,9 @@
           </a:fontRef>
         </p:style>
       </p:cxnSp>
-      <p:sp>
-        <p:nvSpPr>
-          <p:cNvPr id="5" name="TextBox 4"/>
-          <p:cNvSpPr txBox="1"/>
-          <p:nvPr/>
-        </p:nvSpPr>
-        <p:spPr>
-          <a:xfrm>
-            <a:off x="777240" y="1261872"/>
-            <a:ext cx="10607040" cy="310896"/>
-          </a:xfrm>
-          <a:prstGeom prst="rect">
-            <a:avLst/>
-          </a:prstGeom>
-          <a:noFill/>
-        </p:spPr>
-        <p:txBody>
-          <a:bodyPr wrap="square" lIns="45720" rIns="45720" tIns="18288" bIns="18288" anchor="t">
-            <a:spAutoFit/>
-          </a:bodyPr>
-          <a:lstStyle/>
-          <a:p>
-            <a:pPr algn="l"/>
-            <a:r>
-              <a:rPr sz="1700" b="0" i="1">
-                <a:solidFill>
-                  <a:srgbClr val="6B6B6B"/>
-                </a:solidFill>
-                <a:latin typeface="Century Schoolbook"/>
-              </a:rPr>
-              <a:t>Answer.</a:t>
-            </a:r>
-          </a:p>
-        </p:txBody>
-      </p:sp>
       <p:cxnSp>
         <p:nvCxnSpPr>
-          <p:cNvPr id="6" name="Connector 5"/>
+          <p:cNvPr id="5" name="Connector 4"/>
           <p:cNvCxnSpPr/>
           <p:nvPr/>
         </p:nvCxnSpPr>
@@ -3747,7 +3596,7 @@
       </p:cxnSp>
       <p:sp>
         <p:nvSpPr>
-          <p:cNvPr id="7" name="TextBox 6"/>
+          <p:cNvPr id="6" name="TextBox 5"/>
           <p:cNvSpPr txBox="1"/>
           <p:nvPr/>
         </p:nvSpPr>
@@ -3782,7 +3631,7 @@
       </p:sp>
       <p:sp>
         <p:nvSpPr>
-          <p:cNvPr id="8" name="TextBox 7"/>
+          <p:cNvPr id="7" name="TextBox 6"/>
           <p:cNvSpPr txBox="1"/>
           <p:nvPr/>
         </p:nvSpPr>
@@ -3817,7 +3666,7 @@
       </p:sp>
       <p:pic>
         <p:nvPicPr>
-          <p:cNvPr id="9" name="Picture 8" descr="28700badd3bdf097.png"/>
+          <p:cNvPr id="8" name="Picture 7" descr="28700badd3bdf097.png"/>
           <p:cNvPicPr>
             <a:picLocks noChangeAspect="1"/>
           </p:cNvPicPr>
@@ -3841,105 +3690,42 @@
       </p:pic>
       <p:sp>
         <p:nvSpPr>
+          <p:cNvPr id="9" name="TextBox 8"/>
+          <p:cNvSpPr txBox="1"/>
+          <p:nvPr/>
+        </p:nvSpPr>
+        <p:spPr>
+          <a:xfrm>
+            <a:off x="777240" y="3215640"/>
+            <a:ext cx="10607040" cy="429370"/>
+          </a:xfrm>
+          <a:prstGeom prst="rect">
+            <a:avLst/>
+          </a:prstGeom>
+          <a:noFill/>
+        </p:spPr>
+        <p:txBody>
+          <a:bodyPr wrap="square" lIns="45720" rIns="45720" tIns="18288" bIns="18288" anchor="t">
+            <a:spAutoFit/>
+          </a:bodyPr>
+          <a:lstStyle/>
+          <a:p>
+            <a:pPr algn="ctr"/>
+            <a:r>
+              <a:rPr sz="2400" b="1" i="0">
+                <a:solidFill>
+                  <a:srgbClr val="1A1A1A"/>
+                </a:solidFill>
+                <a:latin typeface="Century Schoolbook"/>
+              </a:rPr>
+              <a:t>Write an equivalent expression as a single monomial.</a:t>
+            </a:r>
+          </a:p>
+        </p:txBody>
+      </p:sp>
+      <p:sp>
+        <p:nvSpPr>
           <p:cNvPr id="10" name="TextBox 9"/>
-          <p:cNvSpPr txBox="1"/>
-          <p:nvPr/>
-        </p:nvSpPr>
-        <p:spPr>
-          <a:xfrm>
-            <a:off x="777240" y="3032760"/>
-            <a:ext cx="10607040" cy="429370"/>
-          </a:xfrm>
-          <a:prstGeom prst="rect">
-            <a:avLst/>
-          </a:prstGeom>
-          <a:noFill/>
-        </p:spPr>
-        <p:txBody>
-          <a:bodyPr wrap="square" lIns="45720" rIns="45720" tIns="18288" bIns="18288" anchor="t">
-            <a:spAutoFit/>
-          </a:bodyPr>
-          <a:lstStyle/>
-          <a:p>
-            <a:pPr algn="ctr"/>
-            <a:r>
-              <a:rPr sz="2400" b="0" i="0">
-                <a:solidFill>
-                  <a:srgbClr val="6B6B6B"/>
-                </a:solidFill>
-                <a:latin typeface="Century Schoolbook"/>
-              </a:rPr>
-              <a:t>5 · 3, a</a:t>
-            </a:r>
-            <a:r>
-              <a:rPr sz="2400" b="0" i="0" baseline="30000">
-                <a:solidFill>
-                  <a:srgbClr val="6B6B6B"/>
-                </a:solidFill>
-                <a:latin typeface="Century Schoolbook"/>
-              </a:rPr>
-              <a:t>2</a:t>
-            </a:r>
-            <a:r>
-              <a:rPr sz="2400" b="0" i="0">
-                <a:solidFill>
-                  <a:srgbClr val="6B6B6B"/>
-                </a:solidFill>
-                <a:latin typeface="Century Schoolbook"/>
-              </a:rPr>
-              <a:t> · a</a:t>
-            </a:r>
-            <a:r>
-              <a:rPr sz="2400" b="0" i="0" baseline="30000">
-                <a:solidFill>
-                  <a:srgbClr val="6B6B6B"/>
-                </a:solidFill>
-                <a:latin typeface="Century Schoolbook"/>
-              </a:rPr>
-              <a:t>1</a:t>
-            </a:r>
-            <a:r>
-              <a:rPr sz="2400" b="0" i="0">
-                <a:solidFill>
-                  <a:srgbClr val="6B6B6B"/>
-                </a:solidFill>
-                <a:latin typeface="Century Schoolbook"/>
-              </a:rPr>
-              <a:t>, b</a:t>
-            </a:r>
-            <a:r>
-              <a:rPr sz="2400" b="0" i="0" baseline="30000">
-                <a:solidFill>
-                  <a:srgbClr val="6B6B6B"/>
-                </a:solidFill>
-                <a:latin typeface="Century Schoolbook"/>
-              </a:rPr>
-              <a:t>4</a:t>
-            </a:r>
-            <a:r>
-              <a:rPr sz="2400" b="0" i="0">
-                <a:solidFill>
-                  <a:srgbClr val="6B6B6B"/>
-                </a:solidFill>
-                <a:latin typeface="Century Schoolbook"/>
-              </a:rPr>
-              <a:t> · b</a:t>
-            </a:r>
-            <a:r>
-              <a:rPr sz="2400" b="0" i="0" baseline="30000">
-                <a:solidFill>
-                  <a:srgbClr val="6B6B6B"/>
-                </a:solidFill>
-                <a:latin typeface="Century Schoolbook"/>
-              </a:rPr>
-              <a:t>2</a:t>
-            </a:r>
-          </a:p>
-        </p:txBody>
-      </p:sp>
-      <p:sp>
-        <p:nvSpPr>
-          <p:cNvPr id="11" name="TextBox 10"/>
           <p:cNvSpPr txBox="1"/>
           <p:nvPr/>
         </p:nvSpPr>
@@ -4122,44 +3908,9 @@
           </a:fontRef>
         </p:style>
       </p:cxnSp>
-      <p:sp>
-        <p:nvSpPr>
-          <p:cNvPr id="5" name="TextBox 4"/>
-          <p:cNvSpPr txBox="1"/>
-          <p:nvPr/>
-        </p:nvSpPr>
-        <p:spPr>
-          <a:xfrm>
-            <a:off x="777240" y="1261872"/>
-            <a:ext cx="10607040" cy="310896"/>
-          </a:xfrm>
-          <a:prstGeom prst="rect">
-            <a:avLst/>
-          </a:prstGeom>
-          <a:noFill/>
-        </p:spPr>
-        <p:txBody>
-          <a:bodyPr wrap="square" lIns="45720" rIns="45720" tIns="18288" bIns="18288" anchor="t">
-            <a:spAutoFit/>
-          </a:bodyPr>
-          <a:lstStyle/>
-          <a:p>
-            <a:pPr algn="l"/>
-            <a:r>
-              <a:rPr sz="1700" b="0" i="1">
-                <a:solidFill>
-                  <a:srgbClr val="6B6B6B"/>
-                </a:solidFill>
-                <a:latin typeface="Century Schoolbook"/>
-              </a:rPr>
-              <a:t>A power of a product, then a quotient.</a:t>
-            </a:r>
-          </a:p>
-        </p:txBody>
-      </p:sp>
       <p:cxnSp>
         <p:nvCxnSpPr>
-          <p:cNvPr id="6" name="Connector 5"/>
+          <p:cNvPr id="5" name="Connector 4"/>
           <p:cNvCxnSpPr/>
           <p:nvPr/>
         </p:nvCxnSpPr>
@@ -4194,7 +3945,7 @@
       </p:cxnSp>
       <p:sp>
         <p:nvSpPr>
-          <p:cNvPr id="7" name="TextBox 6"/>
+          <p:cNvPr id="6" name="TextBox 5"/>
           <p:cNvSpPr txBox="1"/>
           <p:nvPr/>
         </p:nvSpPr>
@@ -4229,7 +3980,7 @@
       </p:sp>
       <p:sp>
         <p:nvSpPr>
-          <p:cNvPr id="8" name="TextBox 7"/>
+          <p:cNvPr id="7" name="TextBox 6"/>
           <p:cNvSpPr txBox="1"/>
           <p:nvPr/>
         </p:nvSpPr>
@@ -4264,7 +4015,7 @@
       </p:sp>
       <p:pic>
         <p:nvPicPr>
-          <p:cNvPr id="9" name="Picture 8" descr="b9dec83acdd34052.png"/>
+          <p:cNvPr id="8" name="Picture 7" descr="b9dec83acdd34052.png"/>
           <p:cNvPicPr>
             <a:picLocks noChangeAspect="1"/>
           </p:cNvPicPr>
@@ -4288,7 +4039,7 @@
       </p:pic>
       <p:sp>
         <p:nvSpPr>
-          <p:cNvPr id="10" name="TextBox 9"/>
+          <p:cNvPr id="9" name="TextBox 8"/>
           <p:cNvSpPr txBox="1"/>
           <p:nvPr/>
         </p:nvSpPr>
@@ -4444,44 +4195,9 @@
           </a:fontRef>
         </p:style>
       </p:cxnSp>
-      <p:sp>
-        <p:nvSpPr>
-          <p:cNvPr id="5" name="TextBox 4"/>
-          <p:cNvSpPr txBox="1"/>
-          <p:nvPr/>
-        </p:nvSpPr>
-        <p:spPr>
-          <a:xfrm>
-            <a:off x="777240" y="1261872"/>
-            <a:ext cx="10607040" cy="310896"/>
-          </a:xfrm>
-          <a:prstGeom prst="rect">
-            <a:avLst/>
-          </a:prstGeom>
-          <a:noFill/>
-        </p:spPr>
-        <p:txBody>
-          <a:bodyPr wrap="square" lIns="45720" rIns="45720" tIns="18288" bIns="18288" anchor="t">
-            <a:spAutoFit/>
-          </a:bodyPr>
-          <a:lstStyle/>
-          <a:p>
-            <a:pPr algn="l"/>
-            <a:r>
-              <a:rPr sz="1700" b="0" i="1">
-                <a:solidFill>
-                  <a:srgbClr val="6B6B6B"/>
-                </a:solidFill>
-                <a:latin typeface="Century Schoolbook"/>
-              </a:rPr>
-              <a:t>Worked.</a:t>
-            </a:r>
-          </a:p>
-        </p:txBody>
-      </p:sp>
       <p:cxnSp>
         <p:nvCxnSpPr>
-          <p:cNvPr id="6" name="Connector 5"/>
+          <p:cNvPr id="5" name="Connector 4"/>
           <p:cNvCxnSpPr/>
           <p:nvPr/>
         </p:nvCxnSpPr>
@@ -4516,7 +4232,7 @@
       </p:cxnSp>
       <p:sp>
         <p:nvSpPr>
-          <p:cNvPr id="7" name="TextBox 6"/>
+          <p:cNvPr id="6" name="TextBox 5"/>
           <p:cNvSpPr txBox="1"/>
           <p:nvPr/>
         </p:nvSpPr>
@@ -4551,7 +4267,7 @@
       </p:sp>
       <p:sp>
         <p:nvSpPr>
-          <p:cNvPr id="8" name="TextBox 7"/>
+          <p:cNvPr id="7" name="TextBox 6"/>
           <p:cNvSpPr txBox="1"/>
           <p:nvPr/>
         </p:nvSpPr>
@@ -4586,7 +4302,7 @@
       </p:sp>
       <p:pic>
         <p:nvPicPr>
-          <p:cNvPr id="9" name="Picture 8" descr="d5a2c92467f9be56.png"/>
+          <p:cNvPr id="8" name="Picture 7" descr="d5a2c92467f9be56.png"/>
           <p:cNvPicPr>
             <a:picLocks noChangeAspect="1"/>
           </p:cNvPicPr>
@@ -4608,44 +4324,9 @@
           </a:prstGeom>
         </p:spPr>
       </p:pic>
-      <p:sp>
-        <p:nvSpPr>
-          <p:cNvPr id="10" name="TextBox 9"/>
-          <p:cNvSpPr txBox="1"/>
-          <p:nvPr/>
-        </p:nvSpPr>
-        <p:spPr>
-          <a:xfrm>
-            <a:off x="5227320" y="1897380"/>
-            <a:ext cx="6156959" cy="502920"/>
-          </a:xfrm>
-          <a:prstGeom prst="rect">
-            <a:avLst/>
-          </a:prstGeom>
-          <a:noFill/>
-        </p:spPr>
-        <p:txBody>
-          <a:bodyPr wrap="square" lIns="45720" rIns="45720" tIns="18288" bIns="18288" anchor="ctr">
-            <a:spAutoFit/>
-          </a:bodyPr>
-          <a:lstStyle/>
-          <a:p>
-            <a:pPr algn="l"/>
-            <a:r>
-              <a:rPr sz="2100" b="0" i="1">
-                <a:solidFill>
-                  <a:srgbClr val="6B6B6B"/>
-                </a:solidFill>
-                <a:latin typeface="Century Schoolbook"/>
-              </a:rPr>
-              <a:t>power of a product: raise all three factors</a:t>
-            </a:r>
-          </a:p>
-        </p:txBody>
-      </p:sp>
       <p:pic>
         <p:nvPicPr>
-          <p:cNvPr id="11" name="Picture 10" descr="8affb1101a179d43.png"/>
+          <p:cNvPr id="9" name="Picture 8" descr="8affb1101a179d43.png"/>
           <p:cNvPicPr>
             <a:picLocks noChangeAspect="1"/>
           </p:cNvPicPr>
@@ -4669,42 +4350,7 @@
       </p:pic>
       <p:sp>
         <p:nvSpPr>
-          <p:cNvPr id="12" name="TextBox 11"/>
-          <p:cNvSpPr txBox="1"/>
-          <p:nvPr/>
-        </p:nvSpPr>
-        <p:spPr>
-          <a:xfrm>
-            <a:off x="7827263" y="2785872"/>
-            <a:ext cx="3557016" cy="502920"/>
-          </a:xfrm>
-          <a:prstGeom prst="rect">
-            <a:avLst/>
-          </a:prstGeom>
-          <a:noFill/>
-        </p:spPr>
-        <p:txBody>
-          <a:bodyPr wrap="square" lIns="45720" rIns="45720" tIns="18288" bIns="18288" anchor="ctr">
-            <a:spAutoFit/>
-          </a:bodyPr>
-          <a:lstStyle/>
-          <a:p>
-            <a:pPr algn="l"/>
-            <a:r>
-              <a:rPr sz="2100" b="0" i="1">
-                <a:solidFill>
-                  <a:srgbClr val="6B6B6B"/>
-                </a:solidFill>
-                <a:latin typeface="Century Schoolbook"/>
-              </a:rPr>
-              <a:t>divide coefficients; subtract exponents</a:t>
-            </a:r>
-          </a:p>
-        </p:txBody>
-      </p:sp>
-      <p:sp>
-        <p:nvSpPr>
-          <p:cNvPr id="13" name="TextBox 12"/>
+          <p:cNvPr id="10" name="TextBox 9"/>
           <p:cNvSpPr txBox="1"/>
           <p:nvPr/>
         </p:nvSpPr>
@@ -4887,44 +4533,9 @@
           </a:fontRef>
         </p:style>
       </p:cxnSp>
-      <p:sp>
-        <p:nvSpPr>
-          <p:cNvPr id="5" name="TextBox 4"/>
-          <p:cNvSpPr txBox="1"/>
-          <p:nvPr/>
-        </p:nvSpPr>
-        <p:spPr>
-          <a:xfrm>
-            <a:off x="777240" y="1261872"/>
-            <a:ext cx="10607040" cy="310896"/>
-          </a:xfrm>
-          <a:prstGeom prst="rect">
-            <a:avLst/>
-          </a:prstGeom>
-          <a:noFill/>
-        </p:spPr>
-        <p:txBody>
-          <a:bodyPr wrap="square" lIns="45720" rIns="45720" tIns="18288" bIns="18288" anchor="t">
-            <a:spAutoFit/>
-          </a:bodyPr>
-          <a:lstStyle/>
-          <a:p>
-            <a:pPr algn="l"/>
-            <a:r>
-              <a:rPr sz="1700" b="0" i="1">
-                <a:solidFill>
-                  <a:srgbClr val="6B6B6B"/>
-                </a:solidFill>
-                <a:latin typeface="Century Schoolbook"/>
-              </a:rPr>
-              <a:t>Same steps, your numbers. Boards up when done.</a:t>
-            </a:r>
-          </a:p>
-        </p:txBody>
-      </p:sp>
       <p:cxnSp>
         <p:nvCxnSpPr>
-          <p:cNvPr id="6" name="Connector 5"/>
+          <p:cNvPr id="5" name="Connector 4"/>
           <p:cNvCxnSpPr/>
           <p:nvPr/>
         </p:nvCxnSpPr>
@@ -4959,7 +4570,7 @@
       </p:cxnSp>
       <p:sp>
         <p:nvSpPr>
-          <p:cNvPr id="7" name="TextBox 6"/>
+          <p:cNvPr id="6" name="TextBox 5"/>
           <p:cNvSpPr txBox="1"/>
           <p:nvPr/>
         </p:nvSpPr>
@@ -4994,7 +4605,7 @@
       </p:sp>
       <p:sp>
         <p:nvSpPr>
-          <p:cNvPr id="8" name="TextBox 7"/>
+          <p:cNvPr id="7" name="TextBox 6"/>
           <p:cNvSpPr txBox="1"/>
           <p:nvPr/>
         </p:nvSpPr>
@@ -5029,7 +4640,7 @@
       </p:sp>
       <p:pic>
         <p:nvPicPr>
-          <p:cNvPr id="9" name="Picture 8" descr="c61e723e73851ee8.png"/>
+          <p:cNvPr id="8" name="Picture 7" descr="c61e723e73851ee8.png"/>
           <p:cNvPicPr>
             <a:picLocks noChangeAspect="1"/>
           </p:cNvPicPr>
@@ -5051,6 +4662,41 @@
           </a:prstGeom>
         </p:spPr>
       </p:pic>
+      <p:sp>
+        <p:nvSpPr>
+          <p:cNvPr id="9" name="TextBox 8"/>
+          <p:cNvSpPr txBox="1"/>
+          <p:nvPr/>
+        </p:nvSpPr>
+        <p:spPr>
+          <a:xfrm>
+            <a:off x="777240" y="3913632"/>
+            <a:ext cx="10607040" cy="429370"/>
+          </a:xfrm>
+          <a:prstGeom prst="rect">
+            <a:avLst/>
+          </a:prstGeom>
+          <a:noFill/>
+        </p:spPr>
+        <p:txBody>
+          <a:bodyPr wrap="square" lIns="45720" rIns="45720" tIns="18288" bIns="18288" anchor="t">
+            <a:spAutoFit/>
+          </a:bodyPr>
+          <a:lstStyle/>
+          <a:p>
+            <a:pPr algn="ctr"/>
+            <a:r>
+              <a:rPr sz="2400" b="1" i="0">
+                <a:solidFill>
+                  <a:srgbClr val="1A1A1A"/>
+                </a:solidFill>
+                <a:latin typeface="Century Schoolbook"/>
+              </a:rPr>
+              <a:t>Write an equivalent expression as a single monomial.</a:t>
+            </a:r>
+          </a:p>
+        </p:txBody>
+      </p:sp>
     </p:spTree>
   </p:cSld>
   <p:clrMapOvr>
@@ -5174,44 +4820,9 @@
           </a:fontRef>
         </p:style>
       </p:cxnSp>
-      <p:sp>
-        <p:nvSpPr>
-          <p:cNvPr id="5" name="TextBox 4"/>
-          <p:cNvSpPr txBox="1"/>
-          <p:nvPr/>
-        </p:nvSpPr>
-        <p:spPr>
-          <a:xfrm>
-            <a:off x="777240" y="1261872"/>
-            <a:ext cx="10607040" cy="310896"/>
-          </a:xfrm>
-          <a:prstGeom prst="rect">
-            <a:avLst/>
-          </a:prstGeom>
-          <a:noFill/>
-        </p:spPr>
-        <p:txBody>
-          <a:bodyPr wrap="square" lIns="45720" rIns="45720" tIns="18288" bIns="18288" anchor="t">
-            <a:spAutoFit/>
-          </a:bodyPr>
-          <a:lstStyle/>
-          <a:p>
-            <a:pPr algn="l"/>
-            <a:r>
-              <a:rPr sz="1700" b="0" i="1">
-                <a:solidFill>
-                  <a:srgbClr val="6B6B6B"/>
-                </a:solidFill>
-                <a:latin typeface="Century Schoolbook"/>
-              </a:rPr>
-              <a:t>Answer.</a:t>
-            </a:r>
-          </a:p>
-        </p:txBody>
-      </p:sp>
       <p:cxnSp>
         <p:nvCxnSpPr>
-          <p:cNvPr id="6" name="Connector 5"/>
+          <p:cNvPr id="5" name="Connector 4"/>
           <p:cNvCxnSpPr/>
           <p:nvPr/>
         </p:nvCxnSpPr>
@@ -5246,7 +4857,7 @@
       </p:cxnSp>
       <p:sp>
         <p:nvSpPr>
-          <p:cNvPr id="7" name="TextBox 6"/>
+          <p:cNvPr id="6" name="TextBox 5"/>
           <p:cNvSpPr txBox="1"/>
           <p:nvPr/>
         </p:nvSpPr>
@@ -5281,7 +4892,7 @@
       </p:sp>
       <p:sp>
         <p:nvSpPr>
-          <p:cNvPr id="8" name="TextBox 7"/>
+          <p:cNvPr id="7" name="TextBox 6"/>
           <p:cNvSpPr txBox="1"/>
           <p:nvPr/>
         </p:nvSpPr>
@@ -5316,7 +4927,7 @@
       </p:sp>
       <p:pic>
         <p:nvPicPr>
-          <p:cNvPr id="9" name="Picture 8" descr="192ab9962e6dc882.png"/>
+          <p:cNvPr id="8" name="Picture 7" descr="192ab9962e6dc882.png"/>
           <p:cNvPicPr>
             <a:picLocks noChangeAspect="1"/>
           </p:cNvPicPr>
@@ -5340,75 +4951,48 @@
       </p:pic>
       <p:sp>
         <p:nvSpPr>
+          <p:cNvPr id="9" name="TextBox 8"/>
+          <p:cNvSpPr txBox="1"/>
+          <p:nvPr/>
+        </p:nvSpPr>
+        <p:spPr>
+          <a:xfrm>
+            <a:off x="777240" y="3910583"/>
+            <a:ext cx="10607040" cy="429370"/>
+          </a:xfrm>
+          <a:prstGeom prst="rect">
+            <a:avLst/>
+          </a:prstGeom>
+          <a:noFill/>
+        </p:spPr>
+        <p:txBody>
+          <a:bodyPr wrap="square" lIns="45720" rIns="45720" tIns="18288" bIns="18288" anchor="t">
+            <a:spAutoFit/>
+          </a:bodyPr>
+          <a:lstStyle/>
+          <a:p>
+            <a:pPr algn="ctr"/>
+            <a:r>
+              <a:rPr sz="2400" b="1" i="0">
+                <a:solidFill>
+                  <a:srgbClr val="1A1A1A"/>
+                </a:solidFill>
+                <a:latin typeface="Century Schoolbook"/>
+              </a:rPr>
+              <a:t>Write an equivalent expression as a single monomial.</a:t>
+            </a:r>
+          </a:p>
+        </p:txBody>
+      </p:sp>
+      <p:sp>
+        <p:nvSpPr>
           <p:cNvPr id="10" name="TextBox 9"/>
           <p:cNvSpPr txBox="1"/>
           <p:nvPr/>
         </p:nvSpPr>
         <p:spPr>
           <a:xfrm>
-            <a:off x="777240" y="3727703"/>
-            <a:ext cx="10607040" cy="429370"/>
-          </a:xfrm>
-          <a:prstGeom prst="rect">
-            <a:avLst/>
-          </a:prstGeom>
-          <a:noFill/>
-        </p:spPr>
-        <p:txBody>
-          <a:bodyPr wrap="square" lIns="45720" rIns="45720" tIns="18288" bIns="18288" anchor="t">
-            <a:spAutoFit/>
-          </a:bodyPr>
-          <a:lstStyle/>
-          <a:p>
-            <a:pPr algn="ctr"/>
-            <a:r>
-              <a:rPr sz="2400" b="0" i="0">
-                <a:solidFill>
-                  <a:srgbClr val="6B6B6B"/>
-                </a:solidFill>
-                <a:latin typeface="Century Schoolbook"/>
-              </a:rPr>
-              <a:t>16p</a:t>
-            </a:r>
-            <a:r>
-              <a:rPr sz="2400" b="0" i="0" baseline="30000">
-                <a:solidFill>
-                  <a:srgbClr val="6B6B6B"/>
-                </a:solidFill>
-                <a:latin typeface="Century Schoolbook"/>
-              </a:rPr>
-              <a:t>12</a:t>
-            </a:r>
-            <a:r>
-              <a:rPr sz="2400" b="0" i="0">
-                <a:solidFill>
-                  <a:srgbClr val="6B6B6B"/>
-                </a:solidFill>
-                <a:latin typeface="Century Schoolbook"/>
-              </a:rPr>
-              <a:t> over 8p</a:t>
-            </a:r>
-            <a:r>
-              <a:rPr sz="2400" b="0" i="0" baseline="30000">
-                <a:solidFill>
-                  <a:srgbClr val="6B6B6B"/>
-                </a:solidFill>
-                <a:latin typeface="Century Schoolbook"/>
-              </a:rPr>
-              <a:t>5</a:t>
-            </a:r>
-          </a:p>
-        </p:txBody>
-      </p:sp>
-      <p:sp>
-        <p:nvSpPr>
-          <p:cNvPr id="11" name="TextBox 10"/>
-          <p:cNvSpPr txBox="1"/>
-          <p:nvPr/>
-        </p:nvSpPr>
-        <p:spPr>
-          <a:xfrm>
-            <a:off x="777240" y="4572000"/>
+            <a:off x="777240" y="4632562"/>
             <a:ext cx="10607040" cy="548640"/>
           </a:xfrm>
           <a:prstGeom prst="rect">
@@ -5567,44 +5151,9 @@
           </a:fontRef>
         </p:style>
       </p:cxnSp>
-      <p:sp>
-        <p:nvSpPr>
-          <p:cNvPr id="5" name="TextBox 4"/>
-          <p:cNvSpPr txBox="1"/>
-          <p:nvPr/>
-        </p:nvSpPr>
-        <p:spPr>
-          <a:xfrm>
-            <a:off x="777240" y="1261872"/>
-            <a:ext cx="10607040" cy="310896"/>
-          </a:xfrm>
-          <a:prstGeom prst="rect">
-            <a:avLst/>
-          </a:prstGeom>
-          <a:noFill/>
-        </p:spPr>
-        <p:txBody>
-          <a:bodyPr wrap="square" lIns="45720" rIns="45720" tIns="18288" bIns="18288" anchor="t">
-            <a:spAutoFit/>
-          </a:bodyPr>
-          <a:lstStyle/>
-          <a:p>
-            <a:pPr algn="l"/>
-            <a:r>
-              <a:rPr sz="1700" b="0" i="1">
-                <a:solidFill>
-                  <a:srgbClr val="6B6B6B"/>
-                </a:solidFill>
-                <a:latin typeface="Century Schoolbook"/>
-              </a:rPr>
-              <a:t>Boards up on three.</a:t>
-            </a:r>
-          </a:p>
-        </p:txBody>
-      </p:sp>
       <p:cxnSp>
         <p:nvCxnSpPr>
-          <p:cNvPr id="6" name="Connector 5"/>
+          <p:cNvPr id="5" name="Connector 4"/>
           <p:cNvCxnSpPr/>
           <p:nvPr/>
         </p:nvCxnSpPr>
@@ -5639,7 +5188,7 @@
       </p:cxnSp>
       <p:sp>
         <p:nvSpPr>
-          <p:cNvPr id="7" name="TextBox 6"/>
+          <p:cNvPr id="6" name="TextBox 5"/>
           <p:cNvSpPr txBox="1"/>
           <p:nvPr/>
         </p:nvSpPr>
@@ -5674,7 +5223,7 @@
       </p:sp>
       <p:sp>
         <p:nvSpPr>
-          <p:cNvPr id="8" name="TextBox 7"/>
+          <p:cNvPr id="7" name="TextBox 6"/>
           <p:cNvSpPr txBox="1"/>
           <p:nvPr/>
         </p:nvSpPr>
@@ -5709,7 +5258,7 @@
       </p:sp>
       <p:pic>
         <p:nvPicPr>
-          <p:cNvPr id="9" name="Picture 8" descr="d4d3158a21a48776.png"/>
+          <p:cNvPr id="8" name="Picture 7" descr="d4d3158a21a48776.png"/>
           <p:cNvPicPr>
             <a:picLocks noChangeAspect="1"/>
           </p:cNvPicPr>
@@ -5733,7 +5282,7 @@
       </p:pic>
       <p:sp>
         <p:nvSpPr>
-          <p:cNvPr id="10" name="TextBox 9"/>
+          <p:cNvPr id="9" name="TextBox 8"/>
           <p:cNvSpPr txBox="1"/>
           <p:nvPr/>
         </p:nvSpPr>
@@ -5762,41 +5311,6 @@
                 <a:latin typeface="Century Schoolbook"/>
               </a:rPr>
               <a:t>Answer it.</a:t>
-            </a:r>
-          </a:p>
-        </p:txBody>
-      </p:sp>
-      <p:sp>
-        <p:nvSpPr>
-          <p:cNvPr id="11" name="TextBox 10"/>
-          <p:cNvSpPr txBox="1"/>
-          <p:nvPr/>
-        </p:nvSpPr>
-        <p:spPr>
-          <a:xfrm>
-            <a:off x="777240" y="4828032"/>
-            <a:ext cx="10607040" cy="365760"/>
-          </a:xfrm>
-          <a:prstGeom prst="rect">
-            <a:avLst/>
-          </a:prstGeom>
-          <a:noFill/>
-        </p:spPr>
-        <p:txBody>
-          <a:bodyPr wrap="square" lIns="45720" rIns="45720" tIns="18288" bIns="18288" anchor="t">
-            <a:spAutoFit/>
-          </a:bodyPr>
-          <a:lstStyle/>
-          <a:p>
-            <a:pPr algn="ctr"/>
-            <a:r>
-              <a:rPr sz="1900" b="0" i="1">
-                <a:solidFill>
-                  <a:srgbClr val="6B6B6B"/>
-                </a:solidFill>
-                <a:latin typeface="Century Schoolbook"/>
-              </a:rPr>
-              <a:t>Write as a single power.</a:t>
             </a:r>
           </a:p>
         </p:txBody>
@@ -5924,44 +5438,9 @@
           </a:fontRef>
         </p:style>
       </p:cxnSp>
-      <p:sp>
-        <p:nvSpPr>
-          <p:cNvPr id="5" name="TextBox 4"/>
-          <p:cNvSpPr txBox="1"/>
-          <p:nvPr/>
-        </p:nvSpPr>
-        <p:spPr>
-          <a:xfrm>
-            <a:off x="777240" y="1261872"/>
-            <a:ext cx="10607040" cy="310896"/>
-          </a:xfrm>
-          <a:prstGeom prst="rect">
-            <a:avLst/>
-          </a:prstGeom>
-          <a:noFill/>
-        </p:spPr>
-        <p:txBody>
-          <a:bodyPr wrap="square" lIns="45720" rIns="45720" tIns="18288" bIns="18288" anchor="t">
-            <a:spAutoFit/>
-          </a:bodyPr>
-          <a:lstStyle/>
-          <a:p>
-            <a:pPr algn="l"/>
-            <a:r>
-              <a:rPr sz="1700" b="0" i="1">
-                <a:solidFill>
-                  <a:srgbClr val="6B6B6B"/>
-                </a:solidFill>
-                <a:latin typeface="Century Schoolbook"/>
-              </a:rPr>
-              <a:t>Answer.</a:t>
-            </a:r>
-          </a:p>
-        </p:txBody>
-      </p:sp>
       <p:cxnSp>
         <p:nvCxnSpPr>
-          <p:cNvPr id="6" name="Connector 5"/>
+          <p:cNvPr id="5" name="Connector 4"/>
           <p:cNvCxnSpPr/>
           <p:nvPr/>
         </p:nvCxnSpPr>
@@ -5996,7 +5475,7 @@
       </p:cxnSp>
       <p:sp>
         <p:nvSpPr>
-          <p:cNvPr id="7" name="TextBox 6"/>
+          <p:cNvPr id="6" name="TextBox 5"/>
           <p:cNvSpPr txBox="1"/>
           <p:nvPr/>
         </p:nvSpPr>
@@ -6031,7 +5510,7 @@
       </p:sp>
       <p:sp>
         <p:nvSpPr>
-          <p:cNvPr id="8" name="TextBox 7"/>
+          <p:cNvPr id="7" name="TextBox 6"/>
           <p:cNvSpPr txBox="1"/>
           <p:nvPr/>
         </p:nvSpPr>
@@ -6066,7 +5545,7 @@
       </p:sp>
       <p:pic>
         <p:nvPicPr>
-          <p:cNvPr id="9" name="Picture 8" descr="20123ea625216e42.png"/>
+          <p:cNvPr id="8" name="Picture 7" descr="20123ea625216e42.png"/>
           <p:cNvPicPr>
             <a:picLocks noChangeAspect="1"/>
           </p:cNvPicPr>
@@ -6090,42 +5569,7 @@
       </p:pic>
       <p:sp>
         <p:nvSpPr>
-          <p:cNvPr id="10" name="TextBox 9"/>
-          <p:cNvSpPr txBox="1"/>
-          <p:nvPr/>
-        </p:nvSpPr>
-        <p:spPr>
-          <a:xfrm>
-            <a:off x="1828800" y="2804160"/>
-            <a:ext cx="8503920" cy="548640"/>
-          </a:xfrm>
-          <a:prstGeom prst="rect">
-            <a:avLst/>
-          </a:prstGeom>
-          <a:noFill/>
-        </p:spPr>
-        <p:txBody>
-          <a:bodyPr wrap="square" lIns="45720" rIns="45720" tIns="18288" bIns="18288" anchor="t">
-            <a:spAutoFit/>
-          </a:bodyPr>
-          <a:lstStyle/>
-          <a:p>
-            <a:pPr algn="ctr"/>
-            <a:r>
-              <a:rPr sz="2400" b="0" i="0">
-                <a:solidFill>
-                  <a:srgbClr val="6B6B6B"/>
-                </a:solidFill>
-                <a:latin typeface="Century Schoolbook"/>
-              </a:rPr>
-              <a:t>like bases: add the exponents</a:t>
-            </a:r>
-          </a:p>
-        </p:txBody>
-      </p:sp>
-      <p:sp>
-        <p:nvSpPr>
-          <p:cNvPr id="11" name="TextBox 10"/>
+          <p:cNvPr id="9" name="TextBox 8"/>
           <p:cNvSpPr txBox="1"/>
           <p:nvPr/>
         </p:nvSpPr>
@@ -6160,7 +5604,7 @@
       </p:sp>
       <p:pic>
         <p:nvPicPr>
-          <p:cNvPr id="12" name="Picture 11" descr="ea1790c6884cea76.png"/>
+          <p:cNvPr id="10" name="Picture 9" descr="ea1790c6884cea76.png"/>
           <p:cNvPicPr>
             <a:picLocks noChangeAspect="1"/>
           </p:cNvPicPr>
@@ -6305,44 +5749,9 @@
           </a:fontRef>
         </p:style>
       </p:cxnSp>
-      <p:sp>
-        <p:nvSpPr>
-          <p:cNvPr id="5" name="TextBox 4"/>
-          <p:cNvSpPr txBox="1"/>
-          <p:nvPr/>
-        </p:nvSpPr>
-        <p:spPr>
-          <a:xfrm>
-            <a:off x="777240" y="1261872"/>
-            <a:ext cx="10607040" cy="310896"/>
-          </a:xfrm>
-          <a:prstGeom prst="rect">
-            <a:avLst/>
-          </a:prstGeom>
-          <a:noFill/>
-        </p:spPr>
-        <p:txBody>
-          <a:bodyPr wrap="square" lIns="45720" rIns="45720" tIns="18288" bIns="18288" anchor="t">
-            <a:spAutoFit/>
-          </a:bodyPr>
-          <a:lstStyle/>
-          <a:p>
-            <a:pPr algn="l"/>
-            <a:r>
-              <a:rPr sz="1700" b="0" i="1">
-                <a:solidFill>
-                  <a:srgbClr val="6B6B6B"/>
-                </a:solidFill>
-                <a:latin typeface="Century Schoolbook"/>
-              </a:rPr>
-              <a:t>Boards up on three.</a:t>
-            </a:r>
-          </a:p>
-        </p:txBody>
-      </p:sp>
       <p:cxnSp>
         <p:nvCxnSpPr>
-          <p:cNvPr id="6" name="Connector 5"/>
+          <p:cNvPr id="5" name="Connector 4"/>
           <p:cNvCxnSpPr/>
           <p:nvPr/>
         </p:nvCxnSpPr>
@@ -6377,7 +5786,7 @@
       </p:cxnSp>
       <p:sp>
         <p:nvSpPr>
-          <p:cNvPr id="7" name="TextBox 6"/>
+          <p:cNvPr id="6" name="TextBox 5"/>
           <p:cNvSpPr txBox="1"/>
           <p:nvPr/>
         </p:nvSpPr>
@@ -6412,7 +5821,7 @@
       </p:sp>
       <p:sp>
         <p:nvSpPr>
-          <p:cNvPr id="8" name="TextBox 7"/>
+          <p:cNvPr id="7" name="TextBox 6"/>
           <p:cNvSpPr txBox="1"/>
           <p:nvPr/>
         </p:nvSpPr>
@@ -6447,7 +5856,7 @@
       </p:sp>
       <p:pic>
         <p:nvPicPr>
-          <p:cNvPr id="9" name="Picture 8" descr="df024cff5e9ce158.png"/>
+          <p:cNvPr id="8" name="Picture 7" descr="df024cff5e9ce158.png"/>
           <p:cNvPicPr>
             <a:picLocks noChangeAspect="1"/>
           </p:cNvPicPr>
@@ -6471,7 +5880,7 @@
       </p:pic>
       <p:sp>
         <p:nvSpPr>
-          <p:cNvPr id="10" name="TextBox 9"/>
+          <p:cNvPr id="9" name="TextBox 8"/>
           <p:cNvSpPr txBox="1"/>
           <p:nvPr/>
         </p:nvSpPr>
@@ -6500,41 +5909,6 @@
                 <a:latin typeface="Century Schoolbook"/>
               </a:rPr>
               <a:t>Answer it.</a:t>
-            </a:r>
-          </a:p>
-        </p:txBody>
-      </p:sp>
-      <p:sp>
-        <p:nvSpPr>
-          <p:cNvPr id="11" name="TextBox 10"/>
-          <p:cNvSpPr txBox="1"/>
-          <p:nvPr/>
-        </p:nvSpPr>
-        <p:spPr>
-          <a:xfrm>
-            <a:off x="777240" y="4828032"/>
-            <a:ext cx="10607040" cy="365760"/>
-          </a:xfrm>
-          <a:prstGeom prst="rect">
-            <a:avLst/>
-          </a:prstGeom>
-          <a:noFill/>
-        </p:spPr>
-        <p:txBody>
-          <a:bodyPr wrap="square" lIns="45720" rIns="45720" tIns="18288" bIns="18288" anchor="t">
-            <a:spAutoFit/>
-          </a:bodyPr>
-          <a:lstStyle/>
-          <a:p>
-            <a:pPr algn="ctr"/>
-            <a:r>
-              <a:rPr sz="1900" b="0" i="1">
-                <a:solidFill>
-                  <a:srgbClr val="6B6B6B"/>
-                </a:solidFill>
-                <a:latin typeface="Century Schoolbook"/>
-              </a:rPr>
-              <a:t>Write as a single power.</a:t>
             </a:r>
           </a:p>
         </p:txBody>
@@ -6662,44 +6036,9 @@
           </a:fontRef>
         </p:style>
       </p:cxnSp>
-      <p:sp>
-        <p:nvSpPr>
-          <p:cNvPr id="5" name="TextBox 4"/>
-          <p:cNvSpPr txBox="1"/>
-          <p:nvPr/>
-        </p:nvSpPr>
-        <p:spPr>
-          <a:xfrm>
-            <a:off x="777240" y="1261872"/>
-            <a:ext cx="10607040" cy="310896"/>
-          </a:xfrm>
-          <a:prstGeom prst="rect">
-            <a:avLst/>
-          </a:prstGeom>
-          <a:noFill/>
-        </p:spPr>
-        <p:txBody>
-          <a:bodyPr wrap="square" lIns="45720" rIns="45720" tIns="18288" bIns="18288" anchor="t">
-            <a:spAutoFit/>
-          </a:bodyPr>
-          <a:lstStyle/>
-          <a:p>
-            <a:pPr algn="l"/>
-            <a:r>
-              <a:rPr sz="1700" b="0" i="1">
-                <a:solidFill>
-                  <a:srgbClr val="6B6B6B"/>
-                </a:solidFill>
-                <a:latin typeface="Century Schoolbook"/>
-              </a:rPr>
-              <a:t>Answer.</a:t>
-            </a:r>
-          </a:p>
-        </p:txBody>
-      </p:sp>
       <p:cxnSp>
         <p:nvCxnSpPr>
-          <p:cNvPr id="6" name="Connector 5"/>
+          <p:cNvPr id="5" name="Connector 4"/>
           <p:cNvCxnSpPr/>
           <p:nvPr/>
         </p:nvCxnSpPr>
@@ -6734,7 +6073,7 @@
       </p:cxnSp>
       <p:sp>
         <p:nvSpPr>
-          <p:cNvPr id="7" name="TextBox 6"/>
+          <p:cNvPr id="6" name="TextBox 5"/>
           <p:cNvSpPr txBox="1"/>
           <p:nvPr/>
         </p:nvSpPr>
@@ -6769,7 +6108,7 @@
       </p:sp>
       <p:sp>
         <p:nvSpPr>
-          <p:cNvPr id="8" name="TextBox 7"/>
+          <p:cNvPr id="7" name="TextBox 6"/>
           <p:cNvSpPr txBox="1"/>
           <p:nvPr/>
         </p:nvSpPr>
@@ -6804,7 +6143,7 @@
       </p:sp>
       <p:pic>
         <p:nvPicPr>
-          <p:cNvPr id="9" name="Picture 8" descr="00e7a99be8e12d37.png"/>
+          <p:cNvPr id="8" name="Picture 7" descr="00e7a99be8e12d37.png"/>
           <p:cNvPicPr>
             <a:picLocks noChangeAspect="1"/>
           </p:cNvPicPr>
@@ -6828,42 +6167,7 @@
       </p:pic>
       <p:sp>
         <p:nvSpPr>
-          <p:cNvPr id="10" name="TextBox 9"/>
-          <p:cNvSpPr txBox="1"/>
-          <p:nvPr/>
-        </p:nvSpPr>
-        <p:spPr>
-          <a:xfrm>
-            <a:off x="1828800" y="2901695"/>
-            <a:ext cx="8503920" cy="548640"/>
-          </a:xfrm>
-          <a:prstGeom prst="rect">
-            <a:avLst/>
-          </a:prstGeom>
-          <a:noFill/>
-        </p:spPr>
-        <p:txBody>
-          <a:bodyPr wrap="square" lIns="45720" rIns="45720" tIns="18288" bIns="18288" anchor="t">
-            <a:spAutoFit/>
-          </a:bodyPr>
-          <a:lstStyle/>
-          <a:p>
-            <a:pPr algn="ctr"/>
-            <a:r>
-              <a:rPr sz="2400" b="0" i="0">
-                <a:solidFill>
-                  <a:srgbClr val="6B6B6B"/>
-                </a:solidFill>
-                <a:latin typeface="Century Schoolbook"/>
-              </a:rPr>
-              <a:t>power of a power: multiply</a:t>
-            </a:r>
-          </a:p>
-        </p:txBody>
-      </p:sp>
-      <p:sp>
-        <p:nvSpPr>
-          <p:cNvPr id="11" name="TextBox 10"/>
+          <p:cNvPr id="9" name="TextBox 8"/>
           <p:cNvSpPr txBox="1"/>
           <p:nvPr/>
         </p:nvSpPr>
@@ -6898,7 +6202,7 @@
       </p:sp>
       <p:pic>
         <p:nvPicPr>
-          <p:cNvPr id="12" name="Picture 11" descr="5d59527968cea42f.png"/>
+          <p:cNvPr id="10" name="Picture 9" descr="5d59527968cea42f.png"/>
           <p:cNvPicPr>
             <a:picLocks noChangeAspect="1"/>
           </p:cNvPicPr>
@@ -7043,44 +6347,9 @@
           </a:fontRef>
         </p:style>
       </p:cxnSp>
-      <p:sp>
-        <p:nvSpPr>
-          <p:cNvPr id="5" name="TextBox 4"/>
-          <p:cNvSpPr txBox="1"/>
-          <p:nvPr/>
-        </p:nvSpPr>
-        <p:spPr>
-          <a:xfrm>
-            <a:off x="777240" y="1261872"/>
-            <a:ext cx="10607040" cy="310896"/>
-          </a:xfrm>
-          <a:prstGeom prst="rect">
-            <a:avLst/>
-          </a:prstGeom>
-          <a:noFill/>
-        </p:spPr>
-        <p:txBody>
-          <a:bodyPr wrap="square" lIns="45720" rIns="45720" tIns="18288" bIns="18288" anchor="t">
-            <a:spAutoFit/>
-          </a:bodyPr>
-          <a:lstStyle/>
-          <a:p>
-            <a:pPr algn="l"/>
-            <a:r>
-              <a:rPr sz="1700" b="0" i="1">
-                <a:solidFill>
-                  <a:srgbClr val="6B6B6B"/>
-                </a:solidFill>
-                <a:latin typeface="Century Schoolbook"/>
-              </a:rPr>
-              <a:t>Boards up on three.</a:t>
-            </a:r>
-          </a:p>
-        </p:txBody>
-      </p:sp>
       <p:cxnSp>
         <p:nvCxnSpPr>
-          <p:cNvPr id="6" name="Connector 5"/>
+          <p:cNvPr id="5" name="Connector 4"/>
           <p:cNvCxnSpPr/>
           <p:nvPr/>
         </p:nvCxnSpPr>
@@ -7115,7 +6384,7 @@
       </p:cxnSp>
       <p:sp>
         <p:nvSpPr>
-          <p:cNvPr id="7" name="TextBox 6"/>
+          <p:cNvPr id="6" name="TextBox 5"/>
           <p:cNvSpPr txBox="1"/>
           <p:nvPr/>
         </p:nvSpPr>
@@ -7150,7 +6419,7 @@
       </p:sp>
       <p:sp>
         <p:nvSpPr>
-          <p:cNvPr id="8" name="TextBox 7"/>
+          <p:cNvPr id="7" name="TextBox 6"/>
           <p:cNvSpPr txBox="1"/>
           <p:nvPr/>
         </p:nvSpPr>
@@ -7185,7 +6454,7 @@
       </p:sp>
       <p:sp>
         <p:nvSpPr>
-          <p:cNvPr id="9" name="TextBox 8"/>
+          <p:cNvPr id="8" name="TextBox 7"/>
           <p:cNvSpPr txBox="1"/>
           <p:nvPr/>
         </p:nvSpPr>
@@ -7220,7 +6489,7 @@
       </p:sp>
       <p:pic>
         <p:nvPicPr>
-          <p:cNvPr id="10" name="Picture 9" descr="1df02a95485ce3ed.png"/>
+          <p:cNvPr id="9" name="Picture 8" descr="1df02a95485ce3ed.png"/>
           <p:cNvPicPr>
             <a:picLocks noChangeAspect="1"/>
           </p:cNvPicPr>
@@ -7244,7 +6513,7 @@
       </p:pic>
       <p:sp>
         <p:nvSpPr>
-          <p:cNvPr id="11" name="TextBox 10"/>
+          <p:cNvPr id="10" name="TextBox 9"/>
           <p:cNvSpPr txBox="1"/>
           <p:nvPr/>
         </p:nvSpPr>
@@ -7279,7 +6548,7 @@
       </p:sp>
       <p:sp>
         <p:nvSpPr>
-          <p:cNvPr id="12" name="TextBox 11"/>
+          <p:cNvPr id="11" name="TextBox 10"/>
           <p:cNvSpPr txBox="1"/>
           <p:nvPr/>
         </p:nvSpPr>
@@ -7314,7 +6583,7 @@
       </p:sp>
       <p:pic>
         <p:nvPicPr>
-          <p:cNvPr id="13" name="Picture 12" descr="84641c90e2ee9154.png"/>
+          <p:cNvPr id="12" name="Picture 11" descr="84641c90e2ee9154.png"/>
           <p:cNvPicPr>
             <a:picLocks noChangeAspect="1"/>
           </p:cNvPicPr>
@@ -7338,7 +6607,7 @@
       </p:pic>
       <p:sp>
         <p:nvSpPr>
-          <p:cNvPr id="14" name="TextBox 13"/>
+          <p:cNvPr id="13" name="TextBox 12"/>
           <p:cNvSpPr txBox="1"/>
           <p:nvPr/>
         </p:nvSpPr>
@@ -7373,7 +6642,7 @@
       </p:sp>
       <p:sp>
         <p:nvSpPr>
-          <p:cNvPr id="15" name="TextBox 14"/>
+          <p:cNvPr id="14" name="TextBox 13"/>
           <p:cNvSpPr txBox="1"/>
           <p:nvPr/>
         </p:nvSpPr>
@@ -7408,7 +6677,7 @@
       </p:sp>
       <p:sp>
         <p:nvSpPr>
-          <p:cNvPr id="16" name="TextBox 15"/>
+          <p:cNvPr id="15" name="TextBox 14"/>
           <p:cNvSpPr txBox="1"/>
           <p:nvPr/>
         </p:nvSpPr>
@@ -7564,44 +6833,9 @@
           </a:fontRef>
         </p:style>
       </p:cxnSp>
-      <p:sp>
-        <p:nvSpPr>
-          <p:cNvPr id="5" name="TextBox 4"/>
-          <p:cNvSpPr txBox="1"/>
-          <p:nvPr/>
-        </p:nvSpPr>
-        <p:spPr>
-          <a:xfrm>
-            <a:off x="777240" y="1261872"/>
-            <a:ext cx="10607040" cy="310896"/>
-          </a:xfrm>
-          <a:prstGeom prst="rect">
-            <a:avLst/>
-          </a:prstGeom>
-          <a:noFill/>
-        </p:spPr>
-        <p:txBody>
-          <a:bodyPr wrap="square" lIns="45720" rIns="45720" tIns="18288" bIns="18288" anchor="t">
-            <a:spAutoFit/>
-          </a:bodyPr>
-          <a:lstStyle/>
-          <a:p>
-            <a:pPr algn="l"/>
-            <a:r>
-              <a:rPr sz="1700" b="0" i="1">
-                <a:solidFill>
-                  <a:srgbClr val="6B6B6B"/>
-                </a:solidFill>
-                <a:latin typeface="Century Schoolbook"/>
-              </a:rPr>
-              <a:t>On your own. Four minutes. No notes.</a:t>
-            </a:r>
-          </a:p>
-        </p:txBody>
-      </p:sp>
       <p:cxnSp>
         <p:nvCxnSpPr>
-          <p:cNvPr id="6" name="Connector 5"/>
+          <p:cNvPr id="5" name="Connector 4"/>
           <p:cNvCxnSpPr/>
           <p:nvPr/>
         </p:nvCxnSpPr>
@@ -7636,7 +6870,7 @@
       </p:cxnSp>
       <p:sp>
         <p:nvSpPr>
-          <p:cNvPr id="7" name="TextBox 6"/>
+          <p:cNvPr id="6" name="TextBox 5"/>
           <p:cNvSpPr txBox="1"/>
           <p:nvPr/>
         </p:nvSpPr>
@@ -7671,7 +6905,7 @@
       </p:sp>
       <p:sp>
         <p:nvSpPr>
-          <p:cNvPr id="8" name="TextBox 7"/>
+          <p:cNvPr id="7" name="TextBox 6"/>
           <p:cNvSpPr txBox="1"/>
           <p:nvPr/>
         </p:nvSpPr>
@@ -7706,13 +6940,13 @@
       </p:sp>
       <p:sp>
         <p:nvSpPr>
-          <p:cNvPr id="9" name="TextBox 8"/>
-          <p:cNvSpPr txBox="1"/>
-          <p:nvPr/>
-        </p:nvSpPr>
-        <p:spPr>
-          <a:xfrm>
-            <a:off x="1874519" y="1760220"/>
+          <p:cNvPr id="8" name="TextBox 7"/>
+          <p:cNvSpPr txBox="1"/>
+          <p:nvPr/>
+        </p:nvSpPr>
+        <p:spPr>
+          <a:xfrm>
+            <a:off x="1874519" y="1440180"/>
             <a:ext cx="3058734" cy="457200"/>
           </a:xfrm>
           <a:prstGeom prst="rect">
@@ -7741,7 +6975,7 @@
       </p:sp>
       <p:pic>
         <p:nvPicPr>
-          <p:cNvPr id="10" name="Picture 9" descr="d93a40084748b626.png"/>
+          <p:cNvPr id="9" name="Picture 8" descr="d93a40084748b626.png"/>
           <p:cNvPicPr>
             <a:picLocks noChangeAspect="1"/>
           </p:cNvPicPr>
@@ -7755,7 +6989,7 @@
         </p:blipFill>
         <p:spPr>
           <a:xfrm>
-            <a:off x="4796094" y="1821180"/>
+            <a:off x="4796094" y="1501140"/>
             <a:ext cx="1267968" cy="335280"/>
           </a:xfrm>
           <a:prstGeom prst="rect">
@@ -7765,13 +6999,13 @@
       </p:pic>
       <p:sp>
         <p:nvSpPr>
-          <p:cNvPr id="11" name="TextBox 10"/>
-          <p:cNvSpPr txBox="1"/>
-          <p:nvPr/>
-        </p:nvSpPr>
-        <p:spPr>
-          <a:xfrm>
-            <a:off x="1874519" y="2499360"/>
+          <p:cNvPr id="10" name="TextBox 9"/>
+          <p:cNvSpPr txBox="1"/>
+          <p:nvPr/>
+        </p:nvSpPr>
+        <p:spPr>
+          <a:xfrm>
+            <a:off x="1874519" y="2179320"/>
             <a:ext cx="3704805" cy="457200"/>
           </a:xfrm>
           <a:prstGeom prst="rect">
@@ -7800,7 +7034,7 @@
       </p:sp>
       <p:pic>
         <p:nvPicPr>
-          <p:cNvPr id="12" name="Picture 11" descr="9d90cf2f49ecc87f.png"/>
+          <p:cNvPr id="11" name="Picture 10" descr="9d90cf2f49ecc87f.png"/>
           <p:cNvPicPr>
             <a:picLocks noChangeAspect="1"/>
           </p:cNvPicPr>
@@ -7814,7 +7048,7 @@
         </p:blipFill>
         <p:spPr>
           <a:xfrm>
-            <a:off x="5442165" y="2395728"/>
+            <a:off x="5442165" y="2075688"/>
             <a:ext cx="304800" cy="664464"/>
           </a:xfrm>
           <a:prstGeom prst="rect">
@@ -7824,13 +7058,13 @@
       </p:pic>
       <p:sp>
         <p:nvSpPr>
-          <p:cNvPr id="13" name="TextBox 12"/>
-          <p:cNvSpPr txBox="1"/>
-          <p:nvPr/>
-        </p:nvSpPr>
-        <p:spPr>
-          <a:xfrm>
-            <a:off x="1874519" y="3238500"/>
+          <p:cNvPr id="12" name="TextBox 11"/>
+          <p:cNvSpPr txBox="1"/>
+          <p:nvPr/>
+        </p:nvSpPr>
+        <p:spPr>
+          <a:xfrm>
+            <a:off x="1874519" y="2918460"/>
             <a:ext cx="726811" cy="457200"/>
           </a:xfrm>
           <a:prstGeom prst="rect">
@@ -7859,7 +7093,7 @@
       </p:sp>
       <p:pic>
         <p:nvPicPr>
-          <p:cNvPr id="14" name="Picture 13" descr="697434924d454a71.png"/>
+          <p:cNvPr id="13" name="Picture 12" descr="697434924d454a71.png"/>
           <p:cNvPicPr>
             <a:picLocks noChangeAspect="1"/>
           </p:cNvPicPr>
@@ -7873,7 +7107,7 @@
         </p:blipFill>
         <p:spPr>
           <a:xfrm>
-            <a:off x="2464171" y="3262884"/>
+            <a:off x="2464171" y="2942844"/>
             <a:ext cx="688848" cy="408432"/>
           </a:xfrm>
           <a:prstGeom prst="rect">
@@ -7883,13 +7117,13 @@
       </p:pic>
       <p:sp>
         <p:nvSpPr>
-          <p:cNvPr id="15" name="TextBox 14"/>
-          <p:cNvSpPr txBox="1"/>
-          <p:nvPr/>
-        </p:nvSpPr>
-        <p:spPr>
-          <a:xfrm>
-            <a:off x="3153019" y="3238500"/>
+          <p:cNvPr id="14" name="TextBox 13"/>
+          <p:cNvSpPr txBox="1"/>
+          <p:nvPr/>
+        </p:nvSpPr>
+        <p:spPr>
+          <a:xfrm>
+            <a:off x="3153019" y="2918460"/>
             <a:ext cx="5733570" cy="457200"/>
           </a:xfrm>
           <a:prstGeom prst="rect">
@@ -7918,13 +7152,13 @@
       </p:sp>
       <p:sp>
         <p:nvSpPr>
-          <p:cNvPr id="16" name="TextBox 15"/>
-          <p:cNvSpPr txBox="1"/>
-          <p:nvPr/>
-        </p:nvSpPr>
-        <p:spPr>
-          <a:xfrm>
-            <a:off x="1874519" y="3851147"/>
+          <p:cNvPr id="15" name="TextBox 14"/>
+          <p:cNvSpPr txBox="1"/>
+          <p:nvPr/>
+        </p:nvSpPr>
+        <p:spPr>
+          <a:xfrm>
+            <a:off x="1874519" y="3531108"/>
             <a:ext cx="4347668" cy="457200"/>
           </a:xfrm>
           <a:prstGeom prst="rect">
@@ -7953,7 +7187,7 @@
       </p:sp>
       <p:pic>
         <p:nvPicPr>
-          <p:cNvPr id="17" name="Picture 16" descr="2cd7015fba8991e1.png"/>
+          <p:cNvPr id="16" name="Picture 15" descr="2cd7015fba8991e1.png"/>
           <p:cNvPicPr>
             <a:picLocks noChangeAspect="1"/>
           </p:cNvPicPr>
@@ -7967,7 +7201,7 @@
         </p:blipFill>
         <p:spPr>
           <a:xfrm>
-            <a:off x="6085028" y="3973068"/>
+            <a:off x="6085028" y="3653028"/>
             <a:ext cx="1499616" cy="213360"/>
           </a:xfrm>
           <a:prstGeom prst="rect">
@@ -8098,44 +7332,9 @@
           </a:fontRef>
         </p:style>
       </p:cxnSp>
-      <p:sp>
-        <p:nvSpPr>
-          <p:cNvPr id="5" name="TextBox 4"/>
-          <p:cNvSpPr txBox="1"/>
-          <p:nvPr/>
-        </p:nvSpPr>
-        <p:spPr>
-          <a:xfrm>
-            <a:off x="777240" y="1261872"/>
-            <a:ext cx="10607040" cy="310896"/>
-          </a:xfrm>
-          <a:prstGeom prst="rect">
-            <a:avLst/>
-          </a:prstGeom>
-          <a:noFill/>
-        </p:spPr>
-        <p:txBody>
-          <a:bodyPr wrap="square" lIns="45720" rIns="45720" tIns="18288" bIns="18288" anchor="t">
-            <a:spAutoFit/>
-          </a:bodyPr>
-          <a:lstStyle/>
-          <a:p>
-            <a:pPr algn="l"/>
-            <a:r>
-              <a:rPr sz="1700" b="0" i="1">
-                <a:solidFill>
-                  <a:srgbClr val="6B6B6B"/>
-                </a:solidFill>
-                <a:latin typeface="Century Schoolbook"/>
-              </a:rPr>
-              <a:t>Answer.</a:t>
-            </a:r>
-          </a:p>
-        </p:txBody>
-      </p:sp>
       <p:cxnSp>
         <p:nvCxnSpPr>
-          <p:cNvPr id="6" name="Connector 5"/>
+          <p:cNvPr id="5" name="Connector 4"/>
           <p:cNvCxnSpPr/>
           <p:nvPr/>
         </p:nvCxnSpPr>
@@ -8170,7 +7369,7 @@
       </p:cxnSp>
       <p:sp>
         <p:nvSpPr>
-          <p:cNvPr id="7" name="TextBox 6"/>
+          <p:cNvPr id="6" name="TextBox 5"/>
           <p:cNvSpPr txBox="1"/>
           <p:nvPr/>
         </p:nvSpPr>
@@ -8205,7 +7404,7 @@
       </p:sp>
       <p:sp>
         <p:nvSpPr>
-          <p:cNvPr id="8" name="TextBox 7"/>
+          <p:cNvPr id="7" name="TextBox 6"/>
           <p:cNvSpPr txBox="1"/>
           <p:nvPr/>
         </p:nvSpPr>
@@ -8240,7 +7439,7 @@
       </p:sp>
       <p:sp>
         <p:nvSpPr>
-          <p:cNvPr id="9" name="TextBox 8"/>
+          <p:cNvPr id="8" name="TextBox 7"/>
           <p:cNvSpPr txBox="1"/>
           <p:nvPr/>
         </p:nvSpPr>
@@ -8275,7 +7474,7 @@
       </p:sp>
       <p:pic>
         <p:nvPicPr>
-          <p:cNvPr id="10" name="Picture 9" descr="a28e2ea3731f9d8f.png"/>
+          <p:cNvPr id="9" name="Picture 8" descr="a28e2ea3731f9d8f.png"/>
           <p:cNvPicPr>
             <a:picLocks noChangeAspect="1"/>
           </p:cNvPicPr>
@@ -8299,7 +7498,7 @@
       </p:pic>
       <p:sp>
         <p:nvSpPr>
-          <p:cNvPr id="11" name="TextBox 10"/>
+          <p:cNvPr id="10" name="TextBox 9"/>
           <p:cNvSpPr txBox="1"/>
           <p:nvPr/>
         </p:nvSpPr>
@@ -8334,7 +7533,7 @@
       </p:sp>
       <p:sp>
         <p:nvSpPr>
-          <p:cNvPr id="12" name="TextBox 11"/>
+          <p:cNvPr id="11" name="TextBox 10"/>
           <p:cNvSpPr txBox="1"/>
           <p:nvPr/>
         </p:nvSpPr>
@@ -8369,7 +7568,7 @@
       </p:sp>
       <p:pic>
         <p:nvPicPr>
-          <p:cNvPr id="13" name="Picture 12" descr="627f906189b40b96.png"/>
+          <p:cNvPr id="12" name="Picture 11" descr="627f906189b40b96.png"/>
           <p:cNvPicPr>
             <a:picLocks noChangeAspect="1"/>
           </p:cNvPicPr>
@@ -8393,7 +7592,7 @@
       </p:pic>
       <p:sp>
         <p:nvSpPr>
-          <p:cNvPr id="14" name="TextBox 13"/>
+          <p:cNvPr id="13" name="TextBox 12"/>
           <p:cNvSpPr txBox="1"/>
           <p:nvPr/>
         </p:nvSpPr>
@@ -8428,7 +7627,7 @@
       </p:sp>
       <p:sp>
         <p:nvSpPr>
-          <p:cNvPr id="15" name="TextBox 14"/>
+          <p:cNvPr id="14" name="TextBox 13"/>
           <p:cNvSpPr txBox="1"/>
           <p:nvPr/>
         </p:nvSpPr>
@@ -8463,78 +7662,7 @@
       </p:sp>
       <p:sp>
         <p:nvSpPr>
-          <p:cNvPr id="16" name="TextBox 15"/>
-          <p:cNvSpPr txBox="1"/>
-          <p:nvPr/>
-        </p:nvSpPr>
-        <p:spPr>
-          <a:xfrm>
-            <a:off x="1828800" y="3730354"/>
-            <a:ext cx="8503920" cy="548640"/>
-          </a:xfrm>
-          <a:prstGeom prst="rect">
-            <a:avLst/>
-          </a:prstGeom>
-          <a:noFill/>
-        </p:spPr>
-        <p:txBody>
-          <a:bodyPr wrap="square" lIns="45720" rIns="45720" tIns="18288" bIns="18288" anchor="t">
-            <a:spAutoFit/>
-          </a:bodyPr>
-          <a:lstStyle/>
-          <a:p>
-            <a:pPr algn="ctr"/>
-            <a:r>
-              <a:rPr sz="2400" b="0" i="0">
-                <a:solidFill>
-                  <a:srgbClr val="6B6B6B"/>
-                </a:solidFill>
-                <a:latin typeface="Century Schoolbook"/>
-              </a:rPr>
-              <a:t>(2x</a:t>
-            </a:r>
-            <a:r>
-              <a:rPr sz="2400" b="0" i="0" baseline="30000">
-                <a:solidFill>
-                  <a:srgbClr val="6B6B6B"/>
-                </a:solidFill>
-                <a:latin typeface="Century Schoolbook"/>
-              </a:rPr>
-              <a:t>3</a:t>
-            </a:r>
-            <a:r>
-              <a:rPr sz="2400" b="0" i="0">
-                <a:solidFill>
-                  <a:srgbClr val="6B6B6B"/>
-                </a:solidFill>
-                <a:latin typeface="Century Schoolbook"/>
-              </a:rPr>
-              <a:t>)</a:t>
-            </a:r>
-            <a:r>
-              <a:rPr sz="2400" b="0" i="0" baseline="30000">
-                <a:solidFill>
-                  <a:srgbClr val="6B6B6B"/>
-                </a:solidFill>
-                <a:latin typeface="Century Schoolbook"/>
-              </a:rPr>
-              <a:t>3</a:t>
-            </a:r>
-            <a:r>
-              <a:rPr sz="2400" b="0" i="0">
-                <a:solidFill>
-                  <a:srgbClr val="6B6B6B"/>
-                </a:solidFill>
-                <a:latin typeface="Century Schoolbook"/>
-              </a:rPr>
-              <a:t>: raise the 2 as well</a:t>
-            </a:r>
-          </a:p>
-        </p:txBody>
-      </p:sp>
-      <p:sp>
-        <p:nvSpPr>
-          <p:cNvPr id="17" name="TextBox 16"/>
+          <p:cNvPr id="15" name="TextBox 14"/>
           <p:cNvSpPr txBox="1"/>
           <p:nvPr/>
         </p:nvSpPr>
@@ -8569,7 +7697,7 @@
       </p:sp>
       <p:pic>
         <p:nvPicPr>
-          <p:cNvPr id="18" name="Picture 17" descr="b5d97e94079cb0b8.png"/>
+          <p:cNvPr id="16" name="Picture 15" descr="b5d97e94079cb0b8.png"/>
           <p:cNvPicPr>
             <a:picLocks noChangeAspect="1"/>
           </p:cNvPicPr>
@@ -8714,44 +7842,9 @@
           </a:fontRef>
         </p:style>
       </p:cxnSp>
-      <p:sp>
-        <p:nvSpPr>
-          <p:cNvPr id="5" name="TextBox 4"/>
-          <p:cNvSpPr txBox="1"/>
-          <p:nvPr/>
-        </p:nvSpPr>
-        <p:spPr>
-          <a:xfrm>
-            <a:off x="777240" y="1261872"/>
-            <a:ext cx="10607040" cy="310896"/>
-          </a:xfrm>
-          <a:prstGeom prst="rect">
-            <a:avLst/>
-          </a:prstGeom>
-          <a:noFill/>
-        </p:spPr>
-        <p:txBody>
-          <a:bodyPr wrap="square" lIns="45720" rIns="45720" tIns="18288" bIns="18288" anchor="t">
-            <a:spAutoFit/>
-          </a:bodyPr>
-          <a:lstStyle/>
-          <a:p>
-            <a:pPr algn="l"/>
-            <a:r>
-              <a:rPr sz="1700" b="0" i="1">
-                <a:solidFill>
-                  <a:srgbClr val="6B6B6B"/>
-                </a:solidFill>
-                <a:latin typeface="Century Schoolbook"/>
-              </a:rPr>
-              <a:t>Boards up on three.</a:t>
-            </a:r>
-          </a:p>
-        </p:txBody>
-      </p:sp>
       <p:cxnSp>
         <p:nvCxnSpPr>
-          <p:cNvPr id="6" name="Connector 5"/>
+          <p:cNvPr id="5" name="Connector 4"/>
           <p:cNvCxnSpPr/>
           <p:nvPr/>
         </p:nvCxnSpPr>
@@ -8786,7 +7879,7 @@
       </p:cxnSp>
       <p:sp>
         <p:nvSpPr>
-          <p:cNvPr id="7" name="TextBox 6"/>
+          <p:cNvPr id="6" name="TextBox 5"/>
           <p:cNvSpPr txBox="1"/>
           <p:nvPr/>
         </p:nvSpPr>
@@ -8821,7 +7914,7 @@
       </p:sp>
       <p:sp>
         <p:nvSpPr>
-          <p:cNvPr id="8" name="TextBox 7"/>
+          <p:cNvPr id="7" name="TextBox 6"/>
           <p:cNvSpPr txBox="1"/>
           <p:nvPr/>
         </p:nvSpPr>
@@ -8856,7 +7949,7 @@
       </p:sp>
       <p:pic>
         <p:nvPicPr>
-          <p:cNvPr id="9" name="Picture 8" descr="4f0d74218b39c7b6.png"/>
+          <p:cNvPr id="8" name="Picture 7" descr="4f0d74218b39c7b6.png"/>
           <p:cNvPicPr>
             <a:picLocks noChangeAspect="1"/>
           </p:cNvPicPr>
@@ -8880,7 +7973,7 @@
       </p:pic>
       <p:sp>
         <p:nvSpPr>
-          <p:cNvPr id="10" name="TextBox 9"/>
+          <p:cNvPr id="9" name="TextBox 8"/>
           <p:cNvSpPr txBox="1"/>
           <p:nvPr/>
         </p:nvSpPr>
@@ -8909,41 +8002,6 @@
                 <a:latin typeface="Century Schoolbook"/>
               </a:rPr>
               <a:t>Answer it.</a:t>
-            </a:r>
-          </a:p>
-        </p:txBody>
-      </p:sp>
-      <p:sp>
-        <p:nvSpPr>
-          <p:cNvPr id="11" name="TextBox 10"/>
-          <p:cNvSpPr txBox="1"/>
-          <p:nvPr/>
-        </p:nvSpPr>
-        <p:spPr>
-          <a:xfrm>
-            <a:off x="777240" y="4828032"/>
-            <a:ext cx="10607040" cy="365760"/>
-          </a:xfrm>
-          <a:prstGeom prst="rect">
-            <a:avLst/>
-          </a:prstGeom>
-          <a:noFill/>
-        </p:spPr>
-        <p:txBody>
-          <a:bodyPr wrap="square" lIns="45720" rIns="45720" tIns="18288" bIns="18288" anchor="t">
-            <a:spAutoFit/>
-          </a:bodyPr>
-          <a:lstStyle/>
-          <a:p>
-            <a:pPr algn="ctr"/>
-            <a:r>
-              <a:rPr sz="1900" b="0" i="1">
-                <a:solidFill>
-                  <a:srgbClr val="6B6B6B"/>
-                </a:solidFill>
-                <a:latin typeface="Century Schoolbook"/>
-              </a:rPr>
-              <a:t>Write as a single monomial.</a:t>
             </a:r>
           </a:p>
         </p:txBody>
@@ -9071,44 +8129,9 @@
           </a:fontRef>
         </p:style>
       </p:cxnSp>
-      <p:sp>
-        <p:nvSpPr>
-          <p:cNvPr id="5" name="TextBox 4"/>
-          <p:cNvSpPr txBox="1"/>
-          <p:nvPr/>
-        </p:nvSpPr>
-        <p:spPr>
-          <a:xfrm>
-            <a:off x="777240" y="1261872"/>
-            <a:ext cx="10607040" cy="310896"/>
-          </a:xfrm>
-          <a:prstGeom prst="rect">
-            <a:avLst/>
-          </a:prstGeom>
-          <a:noFill/>
-        </p:spPr>
-        <p:txBody>
-          <a:bodyPr wrap="square" lIns="45720" rIns="45720" tIns="18288" bIns="18288" anchor="t">
-            <a:spAutoFit/>
-          </a:bodyPr>
-          <a:lstStyle/>
-          <a:p>
-            <a:pPr algn="l"/>
-            <a:r>
-              <a:rPr sz="1700" b="0" i="1">
-                <a:solidFill>
-                  <a:srgbClr val="6B6B6B"/>
-                </a:solidFill>
-                <a:latin typeface="Century Schoolbook"/>
-              </a:rPr>
-              <a:t>Answer.</a:t>
-            </a:r>
-          </a:p>
-        </p:txBody>
-      </p:sp>
       <p:cxnSp>
         <p:nvCxnSpPr>
-          <p:cNvPr id="6" name="Connector 5"/>
+          <p:cNvPr id="5" name="Connector 4"/>
           <p:cNvCxnSpPr/>
           <p:nvPr/>
         </p:nvCxnSpPr>
@@ -9143,7 +8166,7 @@
       </p:cxnSp>
       <p:sp>
         <p:nvSpPr>
-          <p:cNvPr id="7" name="TextBox 6"/>
+          <p:cNvPr id="6" name="TextBox 5"/>
           <p:cNvSpPr txBox="1"/>
           <p:nvPr/>
         </p:nvSpPr>
@@ -9178,7 +8201,7 @@
       </p:sp>
       <p:sp>
         <p:nvSpPr>
-          <p:cNvPr id="8" name="TextBox 7"/>
+          <p:cNvPr id="7" name="TextBox 6"/>
           <p:cNvSpPr txBox="1"/>
           <p:nvPr/>
         </p:nvSpPr>
@@ -9213,7 +8236,7 @@
       </p:sp>
       <p:pic>
         <p:nvPicPr>
-          <p:cNvPr id="9" name="Picture 8" descr="20518fcef0388b45.png"/>
+          <p:cNvPr id="8" name="Picture 7" descr="20518fcef0388b45.png"/>
           <p:cNvPicPr>
             <a:picLocks noChangeAspect="1"/>
           </p:cNvPicPr>
@@ -9237,69 +8260,7 @@
       </p:pic>
       <p:sp>
         <p:nvSpPr>
-          <p:cNvPr id="10" name="TextBox 9"/>
-          <p:cNvSpPr txBox="1"/>
-          <p:nvPr/>
-        </p:nvSpPr>
-        <p:spPr>
-          <a:xfrm>
-            <a:off x="1828800" y="2895599"/>
-            <a:ext cx="8503920" cy="548640"/>
-          </a:xfrm>
-          <a:prstGeom prst="rect">
-            <a:avLst/>
-          </a:prstGeom>
-          <a:noFill/>
-        </p:spPr>
-        <p:txBody>
-          <a:bodyPr wrap="square" lIns="45720" rIns="45720" tIns="18288" bIns="18288" anchor="t">
-            <a:spAutoFit/>
-          </a:bodyPr>
-          <a:lstStyle/>
-          <a:p>
-            <a:pPr algn="ctr"/>
-            <a:r>
-              <a:rPr sz="2400" b="0" i="0">
-                <a:solidFill>
-                  <a:srgbClr val="6B6B6B"/>
-                </a:solidFill>
-                <a:latin typeface="Century Schoolbook"/>
-              </a:rPr>
-              <a:t>3 · 4, a</a:t>
-            </a:r>
-            <a:r>
-              <a:rPr sz="2400" b="0" i="0" baseline="30000">
-                <a:solidFill>
-                  <a:srgbClr val="6B6B6B"/>
-                </a:solidFill>
-                <a:latin typeface="Century Schoolbook"/>
-              </a:rPr>
-              <a:t>2</a:t>
-            </a:r>
-            <a:r>
-              <a:rPr sz="2400" b="0" i="0">
-                <a:solidFill>
-                  <a:srgbClr val="6B6B6B"/>
-                </a:solidFill>
-                <a:latin typeface="Century Schoolbook"/>
-              </a:rPr>
-              <a:t> · a, b · b</a:t>
-            </a:r>
-            <a:r>
-              <a:rPr sz="2400" b="0" i="0" baseline="30000">
-                <a:solidFill>
-                  <a:srgbClr val="6B6B6B"/>
-                </a:solidFill>
-                <a:latin typeface="Century Schoolbook"/>
-              </a:rPr>
-              <a:t>5</a:t>
-            </a:r>
-          </a:p>
-        </p:txBody>
-      </p:sp>
-      <p:sp>
-        <p:nvSpPr>
-          <p:cNvPr id="11" name="TextBox 10"/>
+          <p:cNvPr id="9" name="TextBox 8"/>
           <p:cNvSpPr txBox="1"/>
           <p:nvPr/>
         </p:nvSpPr>
@@ -9334,7 +8295,7 @@
       </p:sp>
       <p:pic>
         <p:nvPicPr>
-          <p:cNvPr id="12" name="Picture 11" descr="53df2d82dfc94248.png"/>
+          <p:cNvPr id="10" name="Picture 9" descr="53df2d82dfc94248.png"/>
           <p:cNvPicPr>
             <a:picLocks noChangeAspect="1"/>
           </p:cNvPicPr>
@@ -9479,44 +8440,9 @@
           </a:fontRef>
         </p:style>
       </p:cxnSp>
-      <p:sp>
-        <p:nvSpPr>
-          <p:cNvPr id="5" name="TextBox 4"/>
-          <p:cNvSpPr txBox="1"/>
-          <p:nvPr/>
-        </p:nvSpPr>
-        <p:spPr>
-          <a:xfrm>
-            <a:off x="777240" y="1261872"/>
-            <a:ext cx="10607040" cy="310896"/>
-          </a:xfrm>
-          <a:prstGeom prst="rect">
-            <a:avLst/>
-          </a:prstGeom>
-          <a:noFill/>
-        </p:spPr>
-        <p:txBody>
-          <a:bodyPr wrap="square" lIns="45720" rIns="45720" tIns="18288" bIns="18288" anchor="t">
-            <a:spAutoFit/>
-          </a:bodyPr>
-          <a:lstStyle/>
-          <a:p>
-            <a:pPr algn="l"/>
-            <a:r>
-              <a:rPr sz="1700" b="0" i="1">
-                <a:solidFill>
-                  <a:srgbClr val="6B6B6B"/>
-                </a:solidFill>
-                <a:latin typeface="Century Schoolbook"/>
-              </a:rPr>
-              <a:t>Boards up on three.</a:t>
-            </a:r>
-          </a:p>
-        </p:txBody>
-      </p:sp>
       <p:cxnSp>
         <p:nvCxnSpPr>
-          <p:cNvPr id="6" name="Connector 5"/>
+          <p:cNvPr id="5" name="Connector 4"/>
           <p:cNvCxnSpPr/>
           <p:nvPr/>
         </p:nvCxnSpPr>
@@ -9551,7 +8477,7 @@
       </p:cxnSp>
       <p:sp>
         <p:nvSpPr>
-          <p:cNvPr id="7" name="TextBox 6"/>
+          <p:cNvPr id="6" name="TextBox 5"/>
           <p:cNvSpPr txBox="1"/>
           <p:nvPr/>
         </p:nvSpPr>
@@ -9586,7 +8512,7 @@
       </p:sp>
       <p:sp>
         <p:nvSpPr>
-          <p:cNvPr id="8" name="TextBox 7"/>
+          <p:cNvPr id="7" name="TextBox 6"/>
           <p:cNvSpPr txBox="1"/>
           <p:nvPr/>
         </p:nvSpPr>
@@ -9621,7 +8547,7 @@
       </p:sp>
       <p:pic>
         <p:nvPicPr>
-          <p:cNvPr id="9" name="Picture 8" descr="6cf649989ec0d514.png"/>
+          <p:cNvPr id="8" name="Picture 7" descr="6cf649989ec0d514.png"/>
           <p:cNvPicPr>
             <a:picLocks noChangeAspect="1"/>
           </p:cNvPicPr>
@@ -9645,7 +8571,7 @@
       </p:pic>
       <p:sp>
         <p:nvSpPr>
-          <p:cNvPr id="10" name="TextBox 9"/>
+          <p:cNvPr id="9" name="TextBox 8"/>
           <p:cNvSpPr txBox="1"/>
           <p:nvPr/>
         </p:nvSpPr>
@@ -9680,7 +8606,7 @@
       </p:sp>
       <p:sp>
         <p:nvSpPr>
-          <p:cNvPr id="11" name="TextBox 10"/>
+          <p:cNvPr id="10" name="TextBox 9"/>
           <p:cNvSpPr txBox="1"/>
           <p:nvPr/>
         </p:nvSpPr>
@@ -9733,7 +8659,7 @@
       </p:sp>
       <p:sp>
         <p:nvSpPr>
-          <p:cNvPr id="12" name="TextBox 11"/>
+          <p:cNvPr id="11" name="TextBox 10"/>
           <p:cNvSpPr txBox="1"/>
           <p:nvPr/>
         </p:nvSpPr>
@@ -9786,7 +8712,7 @@
       </p:sp>
       <p:sp>
         <p:nvSpPr>
-          <p:cNvPr id="13" name="TextBox 12"/>
+          <p:cNvPr id="12" name="TextBox 11"/>
           <p:cNvSpPr txBox="1"/>
           <p:nvPr/>
         </p:nvSpPr>
@@ -9839,7 +8765,7 @@
       </p:sp>
       <p:sp>
         <p:nvSpPr>
-          <p:cNvPr id="14" name="TextBox 13"/>
+          <p:cNvPr id="13" name="TextBox 12"/>
           <p:cNvSpPr txBox="1"/>
           <p:nvPr/>
         </p:nvSpPr>
@@ -9892,7 +8818,7 @@
       </p:sp>
       <p:sp>
         <p:nvSpPr>
-          <p:cNvPr id="15" name="TextBox 14"/>
+          <p:cNvPr id="14" name="TextBox 13"/>
           <p:cNvSpPr txBox="1"/>
           <p:nvPr/>
         </p:nvSpPr>
@@ -10048,44 +8974,9 @@
           </a:fontRef>
         </p:style>
       </p:cxnSp>
-      <p:sp>
-        <p:nvSpPr>
-          <p:cNvPr id="5" name="TextBox 4"/>
-          <p:cNvSpPr txBox="1"/>
-          <p:nvPr/>
-        </p:nvSpPr>
-        <p:spPr>
-          <a:xfrm>
-            <a:off x="777240" y="1261872"/>
-            <a:ext cx="10607040" cy="310896"/>
-          </a:xfrm>
-          <a:prstGeom prst="rect">
-            <a:avLst/>
-          </a:prstGeom>
-          <a:noFill/>
-        </p:spPr>
-        <p:txBody>
-          <a:bodyPr wrap="square" lIns="45720" rIns="45720" tIns="18288" bIns="18288" anchor="t">
-            <a:spAutoFit/>
-          </a:bodyPr>
-          <a:lstStyle/>
-          <a:p>
-            <a:pPr algn="l"/>
-            <a:r>
-              <a:rPr sz="1700" b="0" i="1">
-                <a:solidFill>
-                  <a:srgbClr val="6B6B6B"/>
-                </a:solidFill>
-                <a:latin typeface="Century Schoolbook"/>
-              </a:rPr>
-              <a:t>Answer.</a:t>
-            </a:r>
-          </a:p>
-        </p:txBody>
-      </p:sp>
       <p:cxnSp>
         <p:nvCxnSpPr>
-          <p:cNvPr id="6" name="Connector 5"/>
+          <p:cNvPr id="5" name="Connector 4"/>
           <p:cNvCxnSpPr/>
           <p:nvPr/>
         </p:nvCxnSpPr>
@@ -10120,7 +9011,7 @@
       </p:cxnSp>
       <p:sp>
         <p:nvSpPr>
-          <p:cNvPr id="7" name="TextBox 6"/>
+          <p:cNvPr id="6" name="TextBox 5"/>
           <p:cNvSpPr txBox="1"/>
           <p:nvPr/>
         </p:nvSpPr>
@@ -10155,7 +9046,7 @@
       </p:sp>
       <p:sp>
         <p:nvSpPr>
-          <p:cNvPr id="8" name="TextBox 7"/>
+          <p:cNvPr id="7" name="TextBox 6"/>
           <p:cNvSpPr txBox="1"/>
           <p:nvPr/>
         </p:nvSpPr>
@@ -10190,7 +9081,7 @@
       </p:sp>
       <p:pic>
         <p:nvPicPr>
-          <p:cNvPr id="9" name="Picture 8" descr="b63f3b3a75f7bb38.png"/>
+          <p:cNvPr id="8" name="Picture 7" descr="b63f3b3a75f7bb38.png"/>
           <p:cNvPicPr>
             <a:picLocks noChangeAspect="1"/>
           </p:cNvPicPr>
@@ -10214,7 +9105,7 @@
       </p:pic>
       <p:sp>
         <p:nvSpPr>
-          <p:cNvPr id="10" name="TextBox 9"/>
+          <p:cNvPr id="9" name="TextBox 8"/>
           <p:cNvSpPr txBox="1"/>
           <p:nvPr/>
         </p:nvSpPr>
@@ -10249,7 +9140,7 @@
       </p:sp>
       <p:sp>
         <p:nvSpPr>
-          <p:cNvPr id="11" name="TextBox 10"/>
+          <p:cNvPr id="10" name="TextBox 9"/>
           <p:cNvSpPr txBox="1"/>
           <p:nvPr/>
         </p:nvSpPr>
@@ -10302,7 +9193,7 @@
       </p:sp>
       <p:sp>
         <p:nvSpPr>
-          <p:cNvPr id="12" name="TextBox 11"/>
+          <p:cNvPr id="11" name="TextBox 10"/>
           <p:cNvSpPr txBox="1"/>
           <p:nvPr/>
         </p:nvSpPr>
@@ -10355,7 +9246,7 @@
       </p:sp>
       <p:sp>
         <p:nvSpPr>
-          <p:cNvPr id="13" name="TextBox 12"/>
+          <p:cNvPr id="12" name="TextBox 11"/>
           <p:cNvSpPr txBox="1"/>
           <p:nvPr/>
         </p:nvSpPr>
@@ -10408,7 +9299,7 @@
       </p:sp>
       <p:sp>
         <p:nvSpPr>
-          <p:cNvPr id="14" name="TextBox 13"/>
+          <p:cNvPr id="13" name="TextBox 12"/>
           <p:cNvSpPr txBox="1"/>
           <p:nvPr/>
         </p:nvSpPr>
@@ -10461,7 +9352,7 @@
       </p:sp>
       <p:sp>
         <p:nvSpPr>
-          <p:cNvPr id="15" name="TextBox 14"/>
+          <p:cNvPr id="14" name="TextBox 13"/>
           <p:cNvSpPr txBox="1"/>
           <p:nvPr/>
         </p:nvSpPr>
@@ -10626,44 +9517,9 @@
           </a:fontRef>
         </p:style>
       </p:cxnSp>
-      <p:sp>
-        <p:nvSpPr>
-          <p:cNvPr id="5" name="TextBox 4"/>
-          <p:cNvSpPr txBox="1"/>
-          <p:nvPr/>
-        </p:nvSpPr>
-        <p:spPr>
-          <a:xfrm>
-            <a:off x="777240" y="1261872"/>
-            <a:ext cx="10607040" cy="310896"/>
-          </a:xfrm>
-          <a:prstGeom prst="rect">
-            <a:avLst/>
-          </a:prstGeom>
-          <a:noFill/>
-        </p:spPr>
-        <p:txBody>
-          <a:bodyPr wrap="square" lIns="45720" rIns="45720" tIns="18288" bIns="18288" anchor="t">
-            <a:spAutoFit/>
-          </a:bodyPr>
-          <a:lstStyle/>
-          <a:p>
-            <a:pPr algn="l"/>
-            <a:r>
-              <a:rPr sz="1700" b="0" i="1">
-                <a:solidFill>
-                  <a:srgbClr val="6B6B6B"/>
-                </a:solidFill>
-                <a:latin typeface="Century Schoolbook"/>
-              </a:rPr>
-              <a:t>Boards up on three.</a:t>
-            </a:r>
-          </a:p>
-        </p:txBody>
-      </p:sp>
       <p:cxnSp>
         <p:nvCxnSpPr>
-          <p:cNvPr id="6" name="Connector 5"/>
+          <p:cNvPr id="5" name="Connector 4"/>
           <p:cNvCxnSpPr/>
           <p:nvPr/>
         </p:nvCxnSpPr>
@@ -10698,7 +9554,7 @@
       </p:cxnSp>
       <p:sp>
         <p:nvSpPr>
-          <p:cNvPr id="7" name="TextBox 6"/>
+          <p:cNvPr id="6" name="TextBox 5"/>
           <p:cNvSpPr txBox="1"/>
           <p:nvPr/>
         </p:nvSpPr>
@@ -10733,7 +9589,7 @@
       </p:sp>
       <p:sp>
         <p:nvSpPr>
-          <p:cNvPr id="8" name="TextBox 7"/>
+          <p:cNvPr id="7" name="TextBox 6"/>
           <p:cNvSpPr txBox="1"/>
           <p:nvPr/>
         </p:nvSpPr>
@@ -10768,7 +9624,7 @@
       </p:sp>
       <p:pic>
         <p:nvPicPr>
-          <p:cNvPr id="9" name="Picture 8" descr="a9b3bfaec72a6e92.png"/>
+          <p:cNvPr id="8" name="Picture 7" descr="a9b3bfaec72a6e92.png"/>
           <p:cNvPicPr>
             <a:picLocks noChangeAspect="1"/>
           </p:cNvPicPr>
@@ -10792,7 +9648,7 @@
       </p:pic>
       <p:sp>
         <p:nvSpPr>
-          <p:cNvPr id="10" name="TextBox 9"/>
+          <p:cNvPr id="9" name="TextBox 8"/>
           <p:cNvSpPr txBox="1"/>
           <p:nvPr/>
         </p:nvSpPr>
@@ -10827,7 +9683,7 @@
       </p:sp>
       <p:sp>
         <p:nvSpPr>
-          <p:cNvPr id="11" name="TextBox 10"/>
+          <p:cNvPr id="10" name="TextBox 9"/>
           <p:cNvSpPr txBox="1"/>
           <p:nvPr/>
         </p:nvSpPr>
@@ -10880,7 +9736,7 @@
       </p:sp>
       <p:sp>
         <p:nvSpPr>
-          <p:cNvPr id="12" name="TextBox 11"/>
+          <p:cNvPr id="11" name="TextBox 10"/>
           <p:cNvSpPr txBox="1"/>
           <p:nvPr/>
         </p:nvSpPr>
@@ -10933,7 +9789,7 @@
       </p:sp>
       <p:sp>
         <p:nvSpPr>
-          <p:cNvPr id="13" name="TextBox 12"/>
+          <p:cNvPr id="12" name="TextBox 11"/>
           <p:cNvSpPr txBox="1"/>
           <p:nvPr/>
         </p:nvSpPr>
@@ -10986,7 +9842,7 @@
       </p:sp>
       <p:sp>
         <p:nvSpPr>
-          <p:cNvPr id="14" name="TextBox 13"/>
+          <p:cNvPr id="13" name="TextBox 12"/>
           <p:cNvSpPr txBox="1"/>
           <p:nvPr/>
         </p:nvSpPr>
@@ -11039,7 +9895,7 @@
       </p:sp>
       <p:sp>
         <p:nvSpPr>
-          <p:cNvPr id="15" name="TextBox 14"/>
+          <p:cNvPr id="14" name="TextBox 13"/>
           <p:cNvSpPr txBox="1"/>
           <p:nvPr/>
         </p:nvSpPr>
@@ -11195,44 +10051,9 @@
           </a:fontRef>
         </p:style>
       </p:cxnSp>
-      <p:sp>
-        <p:nvSpPr>
-          <p:cNvPr id="5" name="TextBox 4"/>
-          <p:cNvSpPr txBox="1"/>
-          <p:nvPr/>
-        </p:nvSpPr>
-        <p:spPr>
-          <a:xfrm>
-            <a:off x="777240" y="1261872"/>
-            <a:ext cx="10607040" cy="310896"/>
-          </a:xfrm>
-          <a:prstGeom prst="rect">
-            <a:avLst/>
-          </a:prstGeom>
-          <a:noFill/>
-        </p:spPr>
-        <p:txBody>
-          <a:bodyPr wrap="square" lIns="45720" rIns="45720" tIns="18288" bIns="18288" anchor="t">
-            <a:spAutoFit/>
-          </a:bodyPr>
-          <a:lstStyle/>
-          <a:p>
-            <a:pPr algn="l"/>
-            <a:r>
-              <a:rPr sz="1700" b="0" i="1">
-                <a:solidFill>
-                  <a:srgbClr val="6B6B6B"/>
-                </a:solidFill>
-                <a:latin typeface="Century Schoolbook"/>
-              </a:rPr>
-              <a:t>Answer.</a:t>
-            </a:r>
-          </a:p>
-        </p:txBody>
-      </p:sp>
       <p:cxnSp>
         <p:nvCxnSpPr>
-          <p:cNvPr id="6" name="Connector 5"/>
+          <p:cNvPr id="5" name="Connector 4"/>
           <p:cNvCxnSpPr/>
           <p:nvPr/>
         </p:nvCxnSpPr>
@@ -11267,7 +10088,7 @@
       </p:cxnSp>
       <p:sp>
         <p:nvSpPr>
-          <p:cNvPr id="7" name="TextBox 6"/>
+          <p:cNvPr id="6" name="TextBox 5"/>
           <p:cNvSpPr txBox="1"/>
           <p:nvPr/>
         </p:nvSpPr>
@@ -11302,7 +10123,7 @@
       </p:sp>
       <p:sp>
         <p:nvSpPr>
-          <p:cNvPr id="8" name="TextBox 7"/>
+          <p:cNvPr id="7" name="TextBox 6"/>
           <p:cNvSpPr txBox="1"/>
           <p:nvPr/>
         </p:nvSpPr>
@@ -11337,7 +10158,7 @@
       </p:sp>
       <p:pic>
         <p:nvPicPr>
-          <p:cNvPr id="9" name="Picture 8" descr="57f74e63f18b45cb.png"/>
+          <p:cNvPr id="8" name="Picture 7" descr="57f74e63f18b45cb.png"/>
           <p:cNvPicPr>
             <a:picLocks noChangeAspect="1"/>
           </p:cNvPicPr>
@@ -11361,7 +10182,7 @@
       </p:pic>
       <p:sp>
         <p:nvSpPr>
-          <p:cNvPr id="10" name="TextBox 9"/>
+          <p:cNvPr id="9" name="TextBox 8"/>
           <p:cNvSpPr txBox="1"/>
           <p:nvPr/>
         </p:nvSpPr>
@@ -11396,7 +10217,7 @@
       </p:sp>
       <p:sp>
         <p:nvSpPr>
-          <p:cNvPr id="11" name="TextBox 10"/>
+          <p:cNvPr id="10" name="TextBox 9"/>
           <p:cNvSpPr txBox="1"/>
           <p:nvPr/>
         </p:nvSpPr>
@@ -11449,7 +10270,7 @@
       </p:sp>
       <p:sp>
         <p:nvSpPr>
-          <p:cNvPr id="12" name="TextBox 11"/>
+          <p:cNvPr id="11" name="TextBox 10"/>
           <p:cNvSpPr txBox="1"/>
           <p:nvPr/>
         </p:nvSpPr>
@@ -11502,7 +10323,7 @@
       </p:sp>
       <p:sp>
         <p:nvSpPr>
-          <p:cNvPr id="13" name="TextBox 12"/>
+          <p:cNvPr id="12" name="TextBox 11"/>
           <p:cNvSpPr txBox="1"/>
           <p:nvPr/>
         </p:nvSpPr>
@@ -11555,7 +10376,7 @@
       </p:sp>
       <p:sp>
         <p:nvSpPr>
-          <p:cNvPr id="14" name="TextBox 13"/>
+          <p:cNvPr id="13" name="TextBox 12"/>
           <p:cNvSpPr txBox="1"/>
           <p:nvPr/>
         </p:nvSpPr>
@@ -11608,7 +10429,7 @@
       </p:sp>
       <p:sp>
         <p:nvSpPr>
-          <p:cNvPr id="15" name="TextBox 14"/>
+          <p:cNvPr id="14" name="TextBox 13"/>
           <p:cNvSpPr txBox="1"/>
           <p:nvPr/>
         </p:nvSpPr>
@@ -11773,44 +10594,9 @@
           </a:fontRef>
         </p:style>
       </p:cxnSp>
-      <p:sp>
-        <p:nvSpPr>
-          <p:cNvPr id="5" name="TextBox 4"/>
-          <p:cNvSpPr txBox="1"/>
-          <p:nvPr/>
-        </p:nvSpPr>
-        <p:spPr>
-          <a:xfrm>
-            <a:off x="777240" y="1261872"/>
-            <a:ext cx="10607040" cy="310896"/>
-          </a:xfrm>
-          <a:prstGeom prst="rect">
-            <a:avLst/>
-          </a:prstGeom>
-          <a:noFill/>
-        </p:spPr>
-        <p:txBody>
-          <a:bodyPr wrap="square" lIns="45720" rIns="45720" tIns="18288" bIns="18288" anchor="t">
-            <a:spAutoFit/>
-          </a:bodyPr>
-          <a:lstStyle/>
-          <a:p>
-            <a:pPr algn="l"/>
-            <a:r>
-              <a:rPr sz="1700" b="0" i="1">
-                <a:solidFill>
-                  <a:srgbClr val="6B6B6B"/>
-                </a:solidFill>
-                <a:latin typeface="Century Schoolbook"/>
-              </a:rPr>
-              <a:t>Boards up on three.</a:t>
-            </a:r>
-          </a:p>
-        </p:txBody>
-      </p:sp>
       <p:cxnSp>
         <p:nvCxnSpPr>
-          <p:cNvPr id="6" name="Connector 5"/>
+          <p:cNvPr id="5" name="Connector 4"/>
           <p:cNvCxnSpPr/>
           <p:nvPr/>
         </p:nvCxnSpPr>
@@ -11845,7 +10631,7 @@
       </p:cxnSp>
       <p:sp>
         <p:nvSpPr>
-          <p:cNvPr id="7" name="TextBox 6"/>
+          <p:cNvPr id="6" name="TextBox 5"/>
           <p:cNvSpPr txBox="1"/>
           <p:nvPr/>
         </p:nvSpPr>
@@ -11880,7 +10666,7 @@
       </p:sp>
       <p:sp>
         <p:nvSpPr>
-          <p:cNvPr id="8" name="TextBox 7"/>
+          <p:cNvPr id="7" name="TextBox 6"/>
           <p:cNvSpPr txBox="1"/>
           <p:nvPr/>
         </p:nvSpPr>
@@ -11915,7 +10701,7 @@
       </p:sp>
       <p:pic>
         <p:nvPicPr>
-          <p:cNvPr id="9" name="Picture 8" descr="85c3b95db630c6f5.png"/>
+          <p:cNvPr id="8" name="Picture 7" descr="85c3b95db630c6f5.png"/>
           <p:cNvPicPr>
             <a:picLocks noChangeAspect="1"/>
           </p:cNvPicPr>
@@ -11939,7 +10725,7 @@
       </p:pic>
       <p:sp>
         <p:nvSpPr>
-          <p:cNvPr id="10" name="TextBox 9"/>
+          <p:cNvPr id="9" name="TextBox 8"/>
           <p:cNvSpPr txBox="1"/>
           <p:nvPr/>
         </p:nvSpPr>
@@ -11968,41 +10754,6 @@
                 <a:latin typeface="Century Schoolbook"/>
               </a:rPr>
               <a:t>Answer it.</a:t>
-            </a:r>
-          </a:p>
-        </p:txBody>
-      </p:sp>
-      <p:sp>
-        <p:nvSpPr>
-          <p:cNvPr id="11" name="TextBox 10"/>
-          <p:cNvSpPr txBox="1"/>
-          <p:nvPr/>
-        </p:nvSpPr>
-        <p:spPr>
-          <a:xfrm>
-            <a:off x="777240" y="4828032"/>
-            <a:ext cx="10607040" cy="365760"/>
-          </a:xfrm>
-          <a:prstGeom prst="rect">
-            <a:avLst/>
-          </a:prstGeom>
-          <a:noFill/>
-        </p:spPr>
-        <p:txBody>
-          <a:bodyPr wrap="square" lIns="45720" rIns="45720" tIns="18288" bIns="18288" anchor="t">
-            <a:spAutoFit/>
-          </a:bodyPr>
-          <a:lstStyle/>
-          <a:p>
-            <a:pPr algn="ctr"/>
-            <a:r>
-              <a:rPr sz="1900" b="0" i="1">
-                <a:solidFill>
-                  <a:srgbClr val="6B6B6B"/>
-                </a:solidFill>
-                <a:latin typeface="Century Schoolbook"/>
-              </a:rPr>
-              <a:t>Write as a single monomial.</a:t>
             </a:r>
           </a:p>
         </p:txBody>
@@ -12130,44 +10881,9 @@
           </a:fontRef>
         </p:style>
       </p:cxnSp>
-      <p:sp>
-        <p:nvSpPr>
-          <p:cNvPr id="5" name="TextBox 4"/>
-          <p:cNvSpPr txBox="1"/>
-          <p:nvPr/>
-        </p:nvSpPr>
-        <p:spPr>
-          <a:xfrm>
-            <a:off x="777240" y="1261872"/>
-            <a:ext cx="10607040" cy="310896"/>
-          </a:xfrm>
-          <a:prstGeom prst="rect">
-            <a:avLst/>
-          </a:prstGeom>
-          <a:noFill/>
-        </p:spPr>
-        <p:txBody>
-          <a:bodyPr wrap="square" lIns="45720" rIns="45720" tIns="18288" bIns="18288" anchor="t">
-            <a:spAutoFit/>
-          </a:bodyPr>
-          <a:lstStyle/>
-          <a:p>
-            <a:pPr algn="l"/>
-            <a:r>
-              <a:rPr sz="1700" b="0" i="1">
-                <a:solidFill>
-                  <a:srgbClr val="6B6B6B"/>
-                </a:solidFill>
-                <a:latin typeface="Century Schoolbook"/>
-              </a:rPr>
-              <a:t>Answer.</a:t>
-            </a:r>
-          </a:p>
-        </p:txBody>
-      </p:sp>
       <p:cxnSp>
         <p:nvCxnSpPr>
-          <p:cNvPr id="6" name="Connector 5"/>
+          <p:cNvPr id="5" name="Connector 4"/>
           <p:cNvCxnSpPr/>
           <p:nvPr/>
         </p:nvCxnSpPr>
@@ -12202,7 +10918,7 @@
       </p:cxnSp>
       <p:sp>
         <p:nvSpPr>
-          <p:cNvPr id="7" name="TextBox 6"/>
+          <p:cNvPr id="6" name="TextBox 5"/>
           <p:cNvSpPr txBox="1"/>
           <p:nvPr/>
         </p:nvSpPr>
@@ -12237,7 +10953,7 @@
       </p:sp>
       <p:sp>
         <p:nvSpPr>
-          <p:cNvPr id="8" name="TextBox 7"/>
+          <p:cNvPr id="7" name="TextBox 6"/>
           <p:cNvSpPr txBox="1"/>
           <p:nvPr/>
         </p:nvSpPr>
@@ -12272,7 +10988,7 @@
       </p:sp>
       <p:pic>
         <p:nvPicPr>
-          <p:cNvPr id="9" name="Picture 8" descr="b4ec42ed5af64daf.png"/>
+          <p:cNvPr id="8" name="Picture 7" descr="b4ec42ed5af64daf.png"/>
           <p:cNvPicPr>
             <a:picLocks noChangeAspect="1"/>
           </p:cNvPicPr>
@@ -12296,96 +11012,7 @@
       </p:pic>
       <p:sp>
         <p:nvSpPr>
-          <p:cNvPr id="10" name="TextBox 9"/>
-          <p:cNvSpPr txBox="1"/>
-          <p:nvPr/>
-        </p:nvSpPr>
-        <p:spPr>
-          <a:xfrm>
-            <a:off x="1828800" y="3392424"/>
-            <a:ext cx="8503920" cy="548640"/>
-          </a:xfrm>
-          <a:prstGeom prst="rect">
-            <a:avLst/>
-          </a:prstGeom>
-          <a:noFill/>
-        </p:spPr>
-        <p:txBody>
-          <a:bodyPr wrap="square" lIns="45720" rIns="45720" tIns="18288" bIns="18288" anchor="t">
-            <a:spAutoFit/>
-          </a:bodyPr>
-          <a:lstStyle/>
-          <a:p>
-            <a:pPr algn="ctr"/>
-            <a:r>
-              <a:rPr sz="2400" b="0" i="0">
-                <a:solidFill>
-                  <a:srgbClr val="6B6B6B"/>
-                </a:solidFill>
-                <a:latin typeface="Century Schoolbook"/>
-              </a:rPr>
-              <a:t>m</a:t>
-            </a:r>
-            <a:r>
-              <a:rPr sz="2400" b="0" i="0" baseline="30000">
-                <a:solidFill>
-                  <a:srgbClr val="6B6B6B"/>
-                </a:solidFill>
-                <a:latin typeface="Century Schoolbook"/>
-              </a:rPr>
-              <a:t>4</a:t>
-            </a:r>
-            <a:r>
-              <a:rPr sz="2400" b="0" i="0">
-                <a:solidFill>
-                  <a:srgbClr val="6B6B6B"/>
-                </a:solidFill>
-                <a:latin typeface="Century Schoolbook"/>
-              </a:rPr>
-              <a:t> · n</a:t>
-            </a:r>
-            <a:r>
-              <a:rPr sz="2400" b="0" i="0" baseline="30000">
-                <a:solidFill>
-                  <a:srgbClr val="6B6B6B"/>
-                </a:solidFill>
-                <a:latin typeface="Century Schoolbook"/>
-              </a:rPr>
-              <a:t>0</a:t>
-            </a:r>
-            <a:r>
-              <a:rPr sz="2400" b="0" i="0">
-                <a:solidFill>
-                  <a:srgbClr val="6B6B6B"/>
-                </a:solidFill>
-                <a:latin typeface="Century Schoolbook"/>
-              </a:rPr>
-              <a:t>, and n</a:t>
-            </a:r>
-            <a:r>
-              <a:rPr sz="2400" b="0" i="0" baseline="30000">
-                <a:solidFill>
-                  <a:srgbClr val="6B6B6B"/>
-                </a:solidFill>
-                <a:latin typeface="Century Schoolbook"/>
-              </a:rPr>
-              <a:t>0</a:t>
-            </a:r>
-            <a:r>
-              <a:rPr sz="2400" b="0" i="0">
-                <a:solidFill>
-                  <a:srgbClr val="6B6B6B"/>
-                </a:solidFill>
-                <a:latin typeface="Century Schoolbook"/>
-              </a:rPr>
-              <a:t> = 1</a:t>
-            </a:r>
-          </a:p>
-        </p:txBody>
-      </p:sp>
-      <p:sp>
-        <p:nvSpPr>
-          <p:cNvPr id="11" name="TextBox 10"/>
+          <p:cNvPr id="9" name="TextBox 8"/>
           <p:cNvSpPr txBox="1"/>
           <p:nvPr/>
         </p:nvSpPr>
@@ -12420,7 +11047,7 @@
       </p:sp>
       <p:pic>
         <p:nvPicPr>
-          <p:cNvPr id="12" name="Picture 11" descr="c33514adb2311b6f.png"/>
+          <p:cNvPr id="10" name="Picture 9" descr="c33514adb2311b6f.png"/>
           <p:cNvPicPr>
             <a:picLocks noChangeAspect="1"/>
           </p:cNvPicPr>
@@ -12565,44 +11192,9 @@
           </a:fontRef>
         </p:style>
       </p:cxnSp>
-      <p:sp>
-        <p:nvSpPr>
-          <p:cNvPr id="5" name="TextBox 4"/>
-          <p:cNvSpPr txBox="1"/>
-          <p:nvPr/>
-        </p:nvSpPr>
-        <p:spPr>
-          <a:xfrm>
-            <a:off x="777240" y="1261872"/>
-            <a:ext cx="10607040" cy="310896"/>
-          </a:xfrm>
-          <a:prstGeom prst="rect">
-            <a:avLst/>
-          </a:prstGeom>
-          <a:noFill/>
-        </p:spPr>
-        <p:txBody>
-          <a:bodyPr wrap="square" lIns="45720" rIns="45720" tIns="18288" bIns="18288" anchor="t">
-            <a:spAutoFit/>
-          </a:bodyPr>
-          <a:lstStyle/>
-          <a:p>
-            <a:pPr algn="l"/>
-            <a:r>
-              <a:rPr sz="1700" b="0" i="1">
-                <a:solidFill>
-                  <a:srgbClr val="6B6B6B"/>
-                </a:solidFill>
-                <a:latin typeface="Century Schoolbook"/>
-              </a:rPr>
-              <a:t>Boards up on three.</a:t>
-            </a:r>
-          </a:p>
-        </p:txBody>
-      </p:sp>
       <p:cxnSp>
         <p:nvCxnSpPr>
-          <p:cNvPr id="6" name="Connector 5"/>
+          <p:cNvPr id="5" name="Connector 4"/>
           <p:cNvCxnSpPr/>
           <p:nvPr/>
         </p:nvCxnSpPr>
@@ -12637,7 +11229,7 @@
       </p:cxnSp>
       <p:sp>
         <p:nvSpPr>
-          <p:cNvPr id="7" name="TextBox 6"/>
+          <p:cNvPr id="6" name="TextBox 5"/>
           <p:cNvSpPr txBox="1"/>
           <p:nvPr/>
         </p:nvSpPr>
@@ -12672,7 +11264,7 @@
       </p:sp>
       <p:sp>
         <p:nvSpPr>
-          <p:cNvPr id="8" name="TextBox 7"/>
+          <p:cNvPr id="7" name="TextBox 6"/>
           <p:cNvSpPr txBox="1"/>
           <p:nvPr/>
         </p:nvSpPr>
@@ -12707,7 +11299,7 @@
       </p:sp>
       <p:sp>
         <p:nvSpPr>
-          <p:cNvPr id="9" name="TextBox 8"/>
+          <p:cNvPr id="8" name="TextBox 7"/>
           <p:cNvSpPr txBox="1"/>
           <p:nvPr/>
         </p:nvSpPr>
@@ -12742,7 +11334,7 @@
       </p:sp>
       <p:pic>
         <p:nvPicPr>
-          <p:cNvPr id="10" name="Picture 9" descr="ce9b607ea85ce740.png"/>
+          <p:cNvPr id="9" name="Picture 8" descr="ce9b607ea85ce740.png"/>
           <p:cNvPicPr>
             <a:picLocks noChangeAspect="1"/>
           </p:cNvPicPr>
@@ -12766,7 +11358,7 @@
       </p:pic>
       <p:sp>
         <p:nvSpPr>
-          <p:cNvPr id="11" name="TextBox 10"/>
+          <p:cNvPr id="10" name="TextBox 9"/>
           <p:cNvSpPr txBox="1"/>
           <p:nvPr/>
         </p:nvSpPr>
@@ -12801,7 +11393,7 @@
       </p:sp>
       <p:pic>
         <p:nvPicPr>
-          <p:cNvPr id="12" name="Picture 11" descr="6af21d554c0d0371.png"/>
+          <p:cNvPr id="11" name="Picture 10" descr="6af21d554c0d0371.png"/>
           <p:cNvPicPr>
             <a:picLocks noChangeAspect="1"/>
           </p:cNvPicPr>
@@ -12825,7 +11417,7 @@
       </p:pic>
       <p:sp>
         <p:nvSpPr>
-          <p:cNvPr id="13" name="TextBox 12"/>
+          <p:cNvPr id="12" name="TextBox 11"/>
           <p:cNvSpPr txBox="1"/>
           <p:nvPr/>
         </p:nvSpPr>
@@ -12854,41 +11446,6 @@
                 <a:latin typeface="Century Schoolbook"/>
               </a:rPr>
               <a:t>Answer it.</a:t>
-            </a:r>
-          </a:p>
-        </p:txBody>
-      </p:sp>
-      <p:sp>
-        <p:nvSpPr>
-          <p:cNvPr id="14" name="TextBox 13"/>
-          <p:cNvSpPr txBox="1"/>
-          <p:nvPr/>
-        </p:nvSpPr>
-        <p:spPr>
-          <a:xfrm>
-            <a:off x="777240" y="4828032"/>
-            <a:ext cx="10607040" cy="365760"/>
-          </a:xfrm>
-          <a:prstGeom prst="rect">
-            <a:avLst/>
-          </a:prstGeom>
-          <a:noFill/>
-        </p:spPr>
-        <p:txBody>
-          <a:bodyPr wrap="square" lIns="45720" rIns="45720" tIns="18288" bIns="18288" anchor="t">
-            <a:spAutoFit/>
-          </a:bodyPr>
-          <a:lstStyle/>
-          <a:p>
-            <a:pPr algn="ctr"/>
-            <a:r>
-              <a:rPr sz="1900" b="0" i="1">
-                <a:solidFill>
-                  <a:srgbClr val="6B6B6B"/>
-                </a:solidFill>
-                <a:latin typeface="Century Schoolbook"/>
-              </a:rPr>
-              <a:t>Which law applies?</a:t>
             </a:r>
           </a:p>
         </p:txBody>
@@ -13016,44 +11573,9 @@
           </a:fontRef>
         </p:style>
       </p:cxnSp>
-      <p:sp>
-        <p:nvSpPr>
-          <p:cNvPr id="5" name="TextBox 4"/>
-          <p:cNvSpPr txBox="1"/>
-          <p:nvPr/>
-        </p:nvSpPr>
-        <p:spPr>
-          <a:xfrm>
-            <a:off x="777240" y="1261872"/>
-            <a:ext cx="10607040" cy="310896"/>
-          </a:xfrm>
-          <a:prstGeom prst="rect">
-            <a:avLst/>
-          </a:prstGeom>
-          <a:noFill/>
-        </p:spPr>
-        <p:txBody>
-          <a:bodyPr wrap="square" lIns="45720" rIns="45720" tIns="18288" bIns="18288" anchor="t">
-            <a:spAutoFit/>
-          </a:bodyPr>
-          <a:lstStyle/>
-          <a:p>
-            <a:pPr algn="l"/>
-            <a:r>
-              <a:rPr sz="1700" b="0" i="1">
-                <a:solidFill>
-                  <a:srgbClr val="6B6B6B"/>
-                </a:solidFill>
-                <a:latin typeface="Century Schoolbook"/>
-              </a:rPr>
-              <a:t>Answers.</a:t>
-            </a:r>
-          </a:p>
-        </p:txBody>
-      </p:sp>
       <p:cxnSp>
         <p:nvCxnSpPr>
-          <p:cNvPr id="6" name="Connector 5"/>
+          <p:cNvPr id="5" name="Connector 4"/>
           <p:cNvCxnSpPr/>
           <p:nvPr/>
         </p:nvCxnSpPr>
@@ -13088,7 +11610,7 @@
       </p:cxnSp>
       <p:sp>
         <p:nvSpPr>
-          <p:cNvPr id="7" name="TextBox 6"/>
+          <p:cNvPr id="6" name="TextBox 5"/>
           <p:cNvSpPr txBox="1"/>
           <p:nvPr/>
         </p:nvSpPr>
@@ -13123,7 +11645,7 @@
       </p:sp>
       <p:sp>
         <p:nvSpPr>
-          <p:cNvPr id="8" name="TextBox 7"/>
+          <p:cNvPr id="7" name="TextBox 6"/>
           <p:cNvSpPr txBox="1"/>
           <p:nvPr/>
         </p:nvSpPr>
@@ -13158,13 +11680,13 @@
       </p:sp>
       <p:sp>
         <p:nvSpPr>
-          <p:cNvPr id="9" name="TextBox 8"/>
-          <p:cNvSpPr txBox="1"/>
-          <p:nvPr/>
-        </p:nvSpPr>
-        <p:spPr>
-          <a:xfrm>
-            <a:off x="1874519" y="1760220"/>
+          <p:cNvPr id="8" name="TextBox 7"/>
+          <p:cNvSpPr txBox="1"/>
+          <p:nvPr/>
+        </p:nvSpPr>
+        <p:spPr>
+          <a:xfrm>
+            <a:off x="1874519" y="1440180"/>
             <a:ext cx="3058734" cy="457200"/>
           </a:xfrm>
           <a:prstGeom prst="rect">
@@ -13193,7 +11715,7 @@
       </p:sp>
       <p:pic>
         <p:nvPicPr>
-          <p:cNvPr id="10" name="Picture 9" descr="d93a40084748b626.png"/>
+          <p:cNvPr id="9" name="Picture 8" descr="d93a40084748b626.png"/>
           <p:cNvPicPr>
             <a:picLocks noChangeAspect="1"/>
           </p:cNvPicPr>
@@ -13207,7 +11729,7 @@
         </p:blipFill>
         <p:spPr>
           <a:xfrm>
-            <a:off x="4796094" y="1821180"/>
+            <a:off x="4796094" y="1501140"/>
             <a:ext cx="1267968" cy="335280"/>
           </a:xfrm>
           <a:prstGeom prst="rect">
@@ -13217,13 +11739,13 @@
       </p:pic>
       <p:sp>
         <p:nvSpPr>
-          <p:cNvPr id="11" name="TextBox 10"/>
-          <p:cNvSpPr txBox="1"/>
-          <p:nvPr/>
-        </p:nvSpPr>
-        <p:spPr>
-          <a:xfrm>
-            <a:off x="6612702" y="1760220"/>
+          <p:cNvPr id="10" name="TextBox 9"/>
+          <p:cNvSpPr txBox="1"/>
+          <p:nvPr/>
+        </p:nvSpPr>
+        <p:spPr>
+          <a:xfrm>
+            <a:off x="6612702" y="1440180"/>
             <a:ext cx="388052" cy="457200"/>
           </a:xfrm>
           <a:prstGeom prst="rect">
@@ -13252,13 +11774,13 @@
       </p:sp>
       <p:sp>
         <p:nvSpPr>
-          <p:cNvPr id="12" name="TextBox 11"/>
-          <p:cNvSpPr txBox="1"/>
-          <p:nvPr/>
-        </p:nvSpPr>
-        <p:spPr>
-          <a:xfrm>
-            <a:off x="1874519" y="2499360"/>
+          <p:cNvPr id="11" name="TextBox 10"/>
+          <p:cNvSpPr txBox="1"/>
+          <p:nvPr/>
+        </p:nvSpPr>
+        <p:spPr>
+          <a:xfrm>
+            <a:off x="1874519" y="2179320"/>
             <a:ext cx="3704805" cy="457200"/>
           </a:xfrm>
           <a:prstGeom prst="rect">
@@ -13287,7 +11809,7 @@
       </p:sp>
       <p:pic>
         <p:nvPicPr>
-          <p:cNvPr id="13" name="Picture 12" descr="9d90cf2f49ecc87f.png"/>
+          <p:cNvPr id="12" name="Picture 11" descr="9d90cf2f49ecc87f.png"/>
           <p:cNvPicPr>
             <a:picLocks noChangeAspect="1"/>
           </p:cNvPicPr>
@@ -13301,7 +11823,7 @@
         </p:blipFill>
         <p:spPr>
           <a:xfrm>
-            <a:off x="5442165" y="2395728"/>
+            <a:off x="5442165" y="2075688"/>
             <a:ext cx="304800" cy="664464"/>
           </a:xfrm>
           <a:prstGeom prst="rect">
@@ -13311,13 +11833,13 @@
       </p:pic>
       <p:sp>
         <p:nvSpPr>
-          <p:cNvPr id="14" name="TextBox 13"/>
-          <p:cNvSpPr txBox="1"/>
-          <p:nvPr/>
-        </p:nvSpPr>
-        <p:spPr>
-          <a:xfrm>
-            <a:off x="6295605" y="2372868"/>
+          <p:cNvPr id="13" name="TextBox 12"/>
+          <p:cNvSpPr txBox="1"/>
+          <p:nvPr/>
+        </p:nvSpPr>
+        <p:spPr>
+          <a:xfrm>
+            <a:off x="6295605" y="2052828"/>
             <a:ext cx="1215387" cy="457200"/>
           </a:xfrm>
           <a:prstGeom prst="rect">
@@ -13364,13 +11886,13 @@
       </p:sp>
       <p:sp>
         <p:nvSpPr>
-          <p:cNvPr id="15" name="TextBox 14"/>
-          <p:cNvSpPr txBox="1"/>
-          <p:nvPr/>
-        </p:nvSpPr>
-        <p:spPr>
-          <a:xfrm>
-            <a:off x="1874519" y="3238500"/>
+          <p:cNvPr id="14" name="TextBox 13"/>
+          <p:cNvSpPr txBox="1"/>
+          <p:nvPr/>
+        </p:nvSpPr>
+        <p:spPr>
+          <a:xfrm>
+            <a:off x="1874519" y="2918460"/>
             <a:ext cx="726811" cy="457200"/>
           </a:xfrm>
           <a:prstGeom prst="rect">
@@ -13399,7 +11921,7 @@
       </p:sp>
       <p:pic>
         <p:nvPicPr>
-          <p:cNvPr id="16" name="Picture 15" descr="697434924d454a71.png"/>
+          <p:cNvPr id="15" name="Picture 14" descr="697434924d454a71.png"/>
           <p:cNvPicPr>
             <a:picLocks noChangeAspect="1"/>
           </p:cNvPicPr>
@@ -13413,7 +11935,7 @@
         </p:blipFill>
         <p:spPr>
           <a:xfrm>
-            <a:off x="2464171" y="3262884"/>
+            <a:off x="2464171" y="2942844"/>
             <a:ext cx="688848" cy="408432"/>
           </a:xfrm>
           <a:prstGeom prst="rect">
@@ -13423,13 +11945,13 @@
       </p:pic>
       <p:sp>
         <p:nvSpPr>
-          <p:cNvPr id="17" name="TextBox 16"/>
-          <p:cNvSpPr txBox="1"/>
-          <p:nvPr/>
-        </p:nvSpPr>
-        <p:spPr>
-          <a:xfrm>
-            <a:off x="3153019" y="3238500"/>
+          <p:cNvPr id="16" name="TextBox 15"/>
+          <p:cNvSpPr txBox="1"/>
+          <p:nvPr/>
+        </p:nvSpPr>
+        <p:spPr>
+          <a:xfrm>
+            <a:off x="3153019" y="2918460"/>
             <a:ext cx="5733570" cy="457200"/>
           </a:xfrm>
           <a:prstGeom prst="rect">
@@ -13458,13 +11980,13 @@
       </p:sp>
       <p:sp>
         <p:nvSpPr>
-          <p:cNvPr id="18" name="TextBox 17"/>
-          <p:cNvSpPr txBox="1"/>
-          <p:nvPr/>
-        </p:nvSpPr>
-        <p:spPr>
-          <a:xfrm>
-            <a:off x="9298069" y="3238500"/>
+          <p:cNvPr id="17" name="TextBox 16"/>
+          <p:cNvSpPr txBox="1"/>
+          <p:nvPr/>
+        </p:nvSpPr>
+        <p:spPr>
+          <a:xfrm>
+            <a:off x="9298069" y="2918460"/>
             <a:ext cx="1351321" cy="457200"/>
           </a:xfrm>
           <a:prstGeom prst="rect">
@@ -13493,13 +12015,13 @@
       </p:sp>
       <p:sp>
         <p:nvSpPr>
-          <p:cNvPr id="19" name="TextBox 18"/>
-          <p:cNvSpPr txBox="1"/>
-          <p:nvPr/>
-        </p:nvSpPr>
-        <p:spPr>
-          <a:xfrm>
-            <a:off x="1874519" y="3851147"/>
+          <p:cNvPr id="18" name="TextBox 17"/>
+          <p:cNvSpPr txBox="1"/>
+          <p:nvPr/>
+        </p:nvSpPr>
+        <p:spPr>
+          <a:xfrm>
+            <a:off x="1874519" y="3531108"/>
             <a:ext cx="4347668" cy="457200"/>
           </a:xfrm>
           <a:prstGeom prst="rect">
@@ -13528,7 +12050,7 @@
       </p:sp>
       <p:pic>
         <p:nvPicPr>
-          <p:cNvPr id="20" name="Picture 19" descr="2cd7015fba8991e1.png"/>
+          <p:cNvPr id="19" name="Picture 18" descr="2cd7015fba8991e1.png"/>
           <p:cNvPicPr>
             <a:picLocks noChangeAspect="1"/>
           </p:cNvPicPr>
@@ -13542,7 +12064,7 @@
         </p:blipFill>
         <p:spPr>
           <a:xfrm>
-            <a:off x="6085028" y="3973068"/>
+            <a:off x="6085028" y="3653028"/>
             <a:ext cx="1499616" cy="213360"/>
           </a:xfrm>
           <a:prstGeom prst="rect">
@@ -13552,7 +12074,7 @@
       </p:pic>
       <p:pic>
         <p:nvPicPr>
-          <p:cNvPr id="21" name="Picture 20" descr="cb1e58e520118543.png"/>
+          <p:cNvPr id="20" name="Picture 19" descr="cb1e58e520118543.png"/>
           <p:cNvPicPr>
             <a:picLocks noChangeAspect="1"/>
           </p:cNvPicPr>
@@ -13566,7 +12088,7 @@
         </p:blipFill>
         <p:spPr>
           <a:xfrm>
-            <a:off x="8133284" y="3909059"/>
+            <a:off x="8133284" y="3589020"/>
             <a:ext cx="280416" cy="341376"/>
           </a:xfrm>
           <a:prstGeom prst="rect">
@@ -13697,44 +12219,9 @@
           </a:fontRef>
         </p:style>
       </p:cxnSp>
-      <p:sp>
-        <p:nvSpPr>
-          <p:cNvPr id="5" name="TextBox 4"/>
-          <p:cNvSpPr txBox="1"/>
-          <p:nvPr/>
-        </p:nvSpPr>
-        <p:spPr>
-          <a:xfrm>
-            <a:off x="777240" y="1261872"/>
-            <a:ext cx="10607040" cy="310896"/>
-          </a:xfrm>
-          <a:prstGeom prst="rect">
-            <a:avLst/>
-          </a:prstGeom>
-          <a:noFill/>
-        </p:spPr>
-        <p:txBody>
-          <a:bodyPr wrap="square" lIns="45720" rIns="45720" tIns="18288" bIns="18288" anchor="t">
-            <a:spAutoFit/>
-          </a:bodyPr>
-          <a:lstStyle/>
-          <a:p>
-            <a:pPr algn="l"/>
-            <a:r>
-              <a:rPr sz="1700" b="0" i="1">
-                <a:solidFill>
-                  <a:srgbClr val="6B6B6B"/>
-                </a:solidFill>
-                <a:latin typeface="Century Schoolbook"/>
-              </a:rPr>
-              <a:t>Answer.</a:t>
-            </a:r>
-          </a:p>
-        </p:txBody>
-      </p:sp>
       <p:cxnSp>
         <p:nvCxnSpPr>
-          <p:cNvPr id="6" name="Connector 5"/>
+          <p:cNvPr id="5" name="Connector 4"/>
           <p:cNvCxnSpPr/>
           <p:nvPr/>
         </p:nvCxnSpPr>
@@ -13769,7 +12256,7 @@
       </p:cxnSp>
       <p:sp>
         <p:nvSpPr>
-          <p:cNvPr id="7" name="TextBox 6"/>
+          <p:cNvPr id="6" name="TextBox 5"/>
           <p:cNvSpPr txBox="1"/>
           <p:nvPr/>
         </p:nvSpPr>
@@ -13804,7 +12291,7 @@
       </p:sp>
       <p:sp>
         <p:nvSpPr>
-          <p:cNvPr id="8" name="TextBox 7"/>
+          <p:cNvPr id="7" name="TextBox 6"/>
           <p:cNvSpPr txBox="1"/>
           <p:nvPr/>
         </p:nvSpPr>
@@ -13839,7 +12326,7 @@
       </p:sp>
       <p:sp>
         <p:nvSpPr>
-          <p:cNvPr id="9" name="TextBox 8"/>
+          <p:cNvPr id="8" name="TextBox 7"/>
           <p:cNvSpPr txBox="1"/>
           <p:nvPr/>
         </p:nvSpPr>
@@ -13874,7 +12361,7 @@
       </p:sp>
       <p:pic>
         <p:nvPicPr>
-          <p:cNvPr id="10" name="Picture 9" descr="ce9b607ea85ce740.png"/>
+          <p:cNvPr id="9" name="Picture 8" descr="ce9b607ea85ce740.png"/>
           <p:cNvPicPr>
             <a:picLocks noChangeAspect="1"/>
           </p:cNvPicPr>
@@ -13898,7 +12385,7 @@
       </p:pic>
       <p:sp>
         <p:nvSpPr>
-          <p:cNvPr id="11" name="TextBox 10"/>
+          <p:cNvPr id="10" name="TextBox 9"/>
           <p:cNvSpPr txBox="1"/>
           <p:nvPr/>
         </p:nvSpPr>
@@ -13933,7 +12420,7 @@
       </p:sp>
       <p:pic>
         <p:nvPicPr>
-          <p:cNvPr id="12" name="Picture 11" descr="9b87377120470530.png"/>
+          <p:cNvPr id="11" name="Picture 10" descr="9b87377120470530.png"/>
           <p:cNvPicPr>
             <a:picLocks noChangeAspect="1"/>
           </p:cNvPicPr>
@@ -13957,42 +12444,7 @@
       </p:pic>
       <p:sp>
         <p:nvSpPr>
-          <p:cNvPr id="13" name="TextBox 12"/>
-          <p:cNvSpPr txBox="1"/>
-          <p:nvPr/>
-        </p:nvSpPr>
-        <p:spPr>
-          <a:xfrm>
-            <a:off x="1828800" y="3520439"/>
-            <a:ext cx="8503920" cy="548640"/>
-          </a:xfrm>
-          <a:prstGeom prst="rect">
-            <a:avLst/>
-          </a:prstGeom>
-          <a:noFill/>
-        </p:spPr>
-        <p:txBody>
-          <a:bodyPr wrap="square" lIns="45720" rIns="45720" tIns="18288" bIns="18288" anchor="t">
-            <a:spAutoFit/>
-          </a:bodyPr>
-          <a:lstStyle/>
-          <a:p>
-            <a:pPr algn="ctr"/>
-            <a:r>
-              <a:rPr sz="2400" b="0" i="0">
-                <a:solidFill>
-                  <a:srgbClr val="6B6B6B"/>
-                </a:solidFill>
-                <a:latin typeface="Century Schoolbook"/>
-              </a:rPr>
-              <a:t>3 + n = 11</a:t>
-            </a:r>
-          </a:p>
-        </p:txBody>
-      </p:sp>
-      <p:sp>
-        <p:nvSpPr>
-          <p:cNvPr id="14" name="TextBox 13"/>
+          <p:cNvPr id="12" name="TextBox 11"/>
           <p:cNvSpPr txBox="1"/>
           <p:nvPr/>
         </p:nvSpPr>
@@ -14148,44 +12600,9 @@
           </a:fontRef>
         </p:style>
       </p:cxnSp>
-      <p:sp>
-        <p:nvSpPr>
-          <p:cNvPr id="5" name="TextBox 4"/>
-          <p:cNvSpPr txBox="1"/>
-          <p:nvPr/>
-        </p:nvSpPr>
-        <p:spPr>
-          <a:xfrm>
-            <a:off x="777240" y="1261872"/>
-            <a:ext cx="10607040" cy="310896"/>
-          </a:xfrm>
-          <a:prstGeom prst="rect">
-            <a:avLst/>
-          </a:prstGeom>
-          <a:noFill/>
-        </p:spPr>
-        <p:txBody>
-          <a:bodyPr wrap="square" lIns="45720" rIns="45720" tIns="18288" bIns="18288" anchor="t">
-            <a:spAutoFit/>
-          </a:bodyPr>
-          <a:lstStyle/>
-          <a:p>
-            <a:pPr algn="l"/>
-            <a:r>
-              <a:rPr sz="1700" b="0" i="1">
-                <a:solidFill>
-                  <a:srgbClr val="6B6B6B"/>
-                </a:solidFill>
-                <a:latin typeface="Century Schoolbook"/>
-              </a:rPr>
-              <a:t>Take your time. Boards up when you have written it.</a:t>
-            </a:r>
-          </a:p>
-        </p:txBody>
-      </p:sp>
       <p:cxnSp>
         <p:nvCxnSpPr>
-          <p:cNvPr id="6" name="Connector 5"/>
+          <p:cNvPr id="5" name="Connector 4"/>
           <p:cNvCxnSpPr/>
           <p:nvPr/>
         </p:nvCxnSpPr>
@@ -14220,7 +12637,7 @@
       </p:cxnSp>
       <p:sp>
         <p:nvSpPr>
-          <p:cNvPr id="7" name="TextBox 6"/>
+          <p:cNvPr id="6" name="TextBox 5"/>
           <p:cNvSpPr txBox="1"/>
           <p:nvPr/>
         </p:nvSpPr>
@@ -14255,7 +12672,7 @@
       </p:sp>
       <p:sp>
         <p:nvSpPr>
-          <p:cNvPr id="8" name="TextBox 7"/>
+          <p:cNvPr id="7" name="TextBox 6"/>
           <p:cNvSpPr txBox="1"/>
           <p:nvPr/>
         </p:nvSpPr>
@@ -14290,7 +12707,7 @@
       </p:sp>
       <p:sp>
         <p:nvSpPr>
-          <p:cNvPr id="9" name="TextBox 8"/>
+          <p:cNvPr id="8" name="TextBox 7"/>
           <p:cNvSpPr txBox="1"/>
           <p:nvPr/>
         </p:nvSpPr>
@@ -14325,7 +12742,7 @@
       </p:sp>
       <p:pic>
         <p:nvPicPr>
-          <p:cNvPr id="10" name="Picture 9" descr="a608046776132776.png"/>
+          <p:cNvPr id="9" name="Picture 8" descr="a608046776132776.png"/>
           <p:cNvPicPr>
             <a:picLocks noChangeAspect="1"/>
           </p:cNvPicPr>
@@ -14349,7 +12766,7 @@
       </p:pic>
       <p:sp>
         <p:nvSpPr>
-          <p:cNvPr id="11" name="TextBox 10"/>
+          <p:cNvPr id="10" name="TextBox 9"/>
           <p:cNvSpPr txBox="1"/>
           <p:nvPr/>
         </p:nvSpPr>
@@ -14384,7 +12801,7 @@
       </p:sp>
       <p:pic>
         <p:nvPicPr>
-          <p:cNvPr id="12" name="Picture 11" descr="300f952ef0d53b3a.png"/>
+          <p:cNvPr id="11" name="Picture 10" descr="300f952ef0d53b3a.png"/>
           <p:cNvPicPr>
             <a:picLocks noChangeAspect="1"/>
           </p:cNvPicPr>
@@ -14408,7 +12825,7 @@
       </p:pic>
       <p:sp>
         <p:nvSpPr>
-          <p:cNvPr id="13" name="TextBox 12"/>
+          <p:cNvPr id="12" name="TextBox 11"/>
           <p:cNvSpPr txBox="1"/>
           <p:nvPr/>
         </p:nvSpPr>
@@ -14443,7 +12860,7 @@
       </p:sp>
       <p:sp>
         <p:nvSpPr>
-          <p:cNvPr id="14" name="TextBox 13"/>
+          <p:cNvPr id="13" name="TextBox 12"/>
           <p:cNvSpPr txBox="1"/>
           <p:nvPr/>
         </p:nvSpPr>
@@ -14478,7 +12895,7 @@
       </p:sp>
       <p:pic>
         <p:nvPicPr>
-          <p:cNvPr id="15" name="Picture 14" descr="7c47cd9abe6657c3.png"/>
+          <p:cNvPr id="14" name="Picture 13" descr="7c47cd9abe6657c3.png"/>
           <p:cNvPicPr>
             <a:picLocks noChangeAspect="1"/>
           </p:cNvPicPr>
@@ -14502,7 +12919,7 @@
       </p:pic>
       <p:sp>
         <p:nvSpPr>
-          <p:cNvPr id="16" name="TextBox 15"/>
+          <p:cNvPr id="15" name="TextBox 14"/>
           <p:cNvSpPr txBox="1"/>
           <p:nvPr/>
         </p:nvSpPr>
@@ -14537,7 +12954,7 @@
       </p:sp>
       <p:sp>
         <p:nvSpPr>
-          <p:cNvPr id="17" name="TextBox 16"/>
+          <p:cNvPr id="16" name="TextBox 15"/>
           <p:cNvSpPr txBox="1"/>
           <p:nvPr/>
         </p:nvSpPr>
@@ -14566,41 +12983,6 @@
                 <a:latin typeface="Century Schoolbook"/>
               </a:rPr>
               <a:t>Write your answer in sentences.</a:t>
-            </a:r>
-          </a:p>
-        </p:txBody>
-      </p:sp>
-      <p:sp>
-        <p:nvSpPr>
-          <p:cNvPr id="18" name="TextBox 17"/>
-          <p:cNvSpPr txBox="1"/>
-          <p:nvPr/>
-        </p:nvSpPr>
-        <p:spPr>
-          <a:xfrm>
-            <a:off x="777240" y="4828032"/>
-            <a:ext cx="10607040" cy="365760"/>
-          </a:xfrm>
-          <a:prstGeom prst="rect">
-            <a:avLst/>
-          </a:prstGeom>
-          <a:noFill/>
-        </p:spPr>
-        <p:txBody>
-          <a:bodyPr wrap="square" lIns="45720" rIns="45720" tIns="18288" bIns="18288" anchor="t">
-            <a:spAutoFit/>
-          </a:bodyPr>
-          <a:lstStyle/>
-          <a:p>
-            <a:pPr algn="ctr"/>
-            <a:r>
-              <a:rPr sz="1900" b="0" i="1">
-                <a:solidFill>
-                  <a:srgbClr val="6B6B6B"/>
-                </a:solidFill>
-                <a:latin typeface="Century Schoolbook"/>
-              </a:rPr>
-              <a:t>Say what each of them did.</a:t>
             </a:r>
           </a:p>
         </p:txBody>
@@ -14728,44 +13110,9 @@
           </a:fontRef>
         </p:style>
       </p:cxnSp>
-      <p:sp>
-        <p:nvSpPr>
-          <p:cNvPr id="5" name="TextBox 4"/>
-          <p:cNvSpPr txBox="1"/>
-          <p:nvPr/>
-        </p:nvSpPr>
-        <p:spPr>
-          <a:xfrm>
-            <a:off x="777240" y="1261872"/>
-            <a:ext cx="10607040" cy="310896"/>
-          </a:xfrm>
-          <a:prstGeom prst="rect">
-            <a:avLst/>
-          </a:prstGeom>
-          <a:noFill/>
-        </p:spPr>
-        <p:txBody>
-          <a:bodyPr wrap="square" lIns="45720" rIns="45720" tIns="18288" bIns="18288" anchor="t">
-            <a:spAutoFit/>
-          </a:bodyPr>
-          <a:lstStyle/>
-          <a:p>
-            <a:pPr algn="l"/>
-            <a:r>
-              <a:rPr sz="1700" b="0" i="1">
-                <a:solidFill>
-                  <a:srgbClr val="6B6B6B"/>
-                </a:solidFill>
-                <a:latin typeface="Century Schoolbook"/>
-              </a:rPr>
-              <a:t>Answer.</a:t>
-            </a:r>
-          </a:p>
-        </p:txBody>
-      </p:sp>
       <p:cxnSp>
         <p:nvCxnSpPr>
-          <p:cNvPr id="6" name="Connector 5"/>
+          <p:cNvPr id="5" name="Connector 4"/>
           <p:cNvCxnSpPr/>
           <p:nvPr/>
         </p:nvCxnSpPr>
@@ -14800,7 +13147,7 @@
       </p:cxnSp>
       <p:sp>
         <p:nvSpPr>
-          <p:cNvPr id="7" name="TextBox 6"/>
+          <p:cNvPr id="6" name="TextBox 5"/>
           <p:cNvSpPr txBox="1"/>
           <p:nvPr/>
         </p:nvSpPr>
@@ -14835,7 +13182,7 @@
       </p:sp>
       <p:sp>
         <p:nvSpPr>
-          <p:cNvPr id="8" name="TextBox 7"/>
+          <p:cNvPr id="7" name="TextBox 6"/>
           <p:cNvSpPr txBox="1"/>
           <p:nvPr/>
         </p:nvSpPr>
@@ -14870,7 +13217,7 @@
       </p:sp>
       <p:sp>
         <p:nvSpPr>
-          <p:cNvPr id="9" name="TextBox 8"/>
+          <p:cNvPr id="8" name="TextBox 7"/>
           <p:cNvSpPr txBox="1"/>
           <p:nvPr/>
         </p:nvSpPr>
@@ -14905,7 +13252,7 @@
       </p:sp>
       <p:pic>
         <p:nvPicPr>
-          <p:cNvPr id="10" name="Picture 9" descr="c182d5e9af300148.png"/>
+          <p:cNvPr id="9" name="Picture 8" descr="c182d5e9af300148.png"/>
           <p:cNvPicPr>
             <a:picLocks noChangeAspect="1"/>
           </p:cNvPicPr>
@@ -14929,7 +13276,7 @@
       </p:pic>
       <p:sp>
         <p:nvSpPr>
-          <p:cNvPr id="11" name="TextBox 10"/>
+          <p:cNvPr id="10" name="TextBox 9"/>
           <p:cNvSpPr txBox="1"/>
           <p:nvPr/>
         </p:nvSpPr>
@@ -14964,7 +13311,7 @@
       </p:sp>
       <p:pic>
         <p:nvPicPr>
-          <p:cNvPr id="12" name="Picture 11" descr="633192d31288b52d.png"/>
+          <p:cNvPr id="11" name="Picture 10" descr="633192d31288b52d.png"/>
           <p:cNvPicPr>
             <a:picLocks noChangeAspect="1"/>
           </p:cNvPicPr>
@@ -14988,7 +13335,7 @@
       </p:pic>
       <p:sp>
         <p:nvSpPr>
-          <p:cNvPr id="13" name="TextBox 12"/>
+          <p:cNvPr id="12" name="TextBox 11"/>
           <p:cNvSpPr txBox="1"/>
           <p:nvPr/>
         </p:nvSpPr>
@@ -15023,7 +13370,7 @@
       </p:sp>
       <p:sp>
         <p:nvSpPr>
-          <p:cNvPr id="14" name="TextBox 13"/>
+          <p:cNvPr id="13" name="TextBox 12"/>
           <p:cNvSpPr txBox="1"/>
           <p:nvPr/>
         </p:nvSpPr>
@@ -15058,7 +13405,7 @@
       </p:sp>
       <p:pic>
         <p:nvPicPr>
-          <p:cNvPr id="15" name="Picture 14" descr="9c1cc680a1f0e7b2.png"/>
+          <p:cNvPr id="14" name="Picture 13" descr="9c1cc680a1f0e7b2.png"/>
           <p:cNvPicPr>
             <a:picLocks noChangeAspect="1"/>
           </p:cNvPicPr>
@@ -15082,7 +13429,7 @@
       </p:pic>
       <p:sp>
         <p:nvSpPr>
-          <p:cNvPr id="16" name="TextBox 15"/>
+          <p:cNvPr id="15" name="TextBox 14"/>
           <p:cNvSpPr txBox="1"/>
           <p:nvPr/>
         </p:nvSpPr>
@@ -15117,42 +13464,7 @@
       </p:sp>
       <p:sp>
         <p:nvSpPr>
-          <p:cNvPr id="17" name="TextBox 16"/>
-          <p:cNvSpPr txBox="1"/>
-          <p:nvPr/>
-        </p:nvSpPr>
-        <p:spPr>
-          <a:xfrm>
-            <a:off x="1828800" y="3541775"/>
-            <a:ext cx="8503920" cy="548640"/>
-          </a:xfrm>
-          <a:prstGeom prst="rect">
-            <a:avLst/>
-          </a:prstGeom>
-          <a:noFill/>
-        </p:spPr>
-        <p:txBody>
-          <a:bodyPr wrap="square" lIns="45720" rIns="45720" tIns="18288" bIns="18288" anchor="t">
-            <a:spAutoFit/>
-          </a:bodyPr>
-          <a:lstStyle/>
-          <a:p>
-            <a:pPr algn="ctr"/>
-            <a:r>
-              <a:rPr sz="2400" b="0" i="0">
-                <a:solidFill>
-                  <a:srgbClr val="6B6B6B"/>
-                </a:solidFill>
-                <a:latin typeface="Century Schoolbook"/>
-              </a:rPr>
-              <a:t>both — Justina's is Rachel's product, multiplied out</a:t>
-            </a:r>
-          </a:p>
-        </p:txBody>
-      </p:sp>
-      <p:sp>
-        <p:nvSpPr>
-          <p:cNvPr id="18" name="TextBox 17"/>
+          <p:cNvPr id="16" name="TextBox 15"/>
           <p:cNvSpPr txBox="1"/>
           <p:nvPr/>
         </p:nvSpPr>
@@ -15362,44 +13674,9 @@
           </a:fontRef>
         </p:style>
       </p:cxnSp>
-      <p:sp>
-        <p:nvSpPr>
-          <p:cNvPr id="5" name="TextBox 4"/>
-          <p:cNvSpPr txBox="1"/>
-          <p:nvPr/>
-        </p:nvSpPr>
-        <p:spPr>
-          <a:xfrm>
-            <a:off x="777240" y="1261872"/>
-            <a:ext cx="10607040" cy="310896"/>
-          </a:xfrm>
-          <a:prstGeom prst="rect">
-            <a:avLst/>
-          </a:prstGeom>
-          <a:noFill/>
-        </p:spPr>
-        <p:txBody>
-          <a:bodyPr wrap="square" lIns="45720" rIns="45720" tIns="18288" bIns="18288" anchor="t">
-            <a:spAutoFit/>
-          </a:bodyPr>
-          <a:lstStyle/>
-          <a:p>
-            <a:pPr algn="l"/>
-            <a:r>
-              <a:rPr sz="1700" b="0" i="1">
-                <a:solidFill>
-                  <a:srgbClr val="6B6B6B"/>
-                </a:solidFill>
-                <a:latin typeface="Century Schoolbook"/>
-              </a:rPr>
-              <a:t>Six questions. On your own, in silence.</a:t>
-            </a:r>
-          </a:p>
-        </p:txBody>
-      </p:sp>
       <p:cxnSp>
         <p:nvCxnSpPr>
-          <p:cNvPr id="6" name="Connector 5"/>
+          <p:cNvPr id="5" name="Connector 4"/>
           <p:cNvCxnSpPr/>
           <p:nvPr/>
         </p:nvCxnSpPr>
@@ -15434,7 +13711,7 @@
       </p:cxnSp>
       <p:sp>
         <p:nvSpPr>
-          <p:cNvPr id="7" name="TextBox 6"/>
+          <p:cNvPr id="6" name="TextBox 5"/>
           <p:cNvSpPr txBox="1"/>
           <p:nvPr/>
         </p:nvSpPr>
@@ -15469,7 +13746,7 @@
       </p:sp>
       <p:sp>
         <p:nvSpPr>
-          <p:cNvPr id="8" name="TextBox 7"/>
+          <p:cNvPr id="7" name="TextBox 6"/>
           <p:cNvSpPr txBox="1"/>
           <p:nvPr/>
         </p:nvSpPr>
@@ -15504,7 +13781,7 @@
       </p:sp>
       <p:sp>
         <p:nvSpPr>
-          <p:cNvPr id="9" name="TextBox 8"/>
+          <p:cNvPr id="8" name="TextBox 7"/>
           <p:cNvSpPr txBox="1"/>
           <p:nvPr/>
         </p:nvSpPr>
@@ -15539,7 +13816,7 @@
       </p:sp>
       <p:sp>
         <p:nvSpPr>
-          <p:cNvPr id="10" name="TextBox 9"/>
+          <p:cNvPr id="9" name="TextBox 8"/>
           <p:cNvSpPr txBox="1"/>
           <p:nvPr/>
         </p:nvSpPr>
@@ -15574,7 +13851,7 @@
       </p:sp>
       <p:sp>
         <p:nvSpPr>
-          <p:cNvPr id="11" name="TextBox 10"/>
+          <p:cNvPr id="10" name="TextBox 9"/>
           <p:cNvSpPr txBox="1"/>
           <p:nvPr/>
         </p:nvSpPr>
@@ -15609,7 +13886,7 @@
       </p:sp>
       <p:sp>
         <p:nvSpPr>
-          <p:cNvPr id="12" name="TextBox 11"/>
+          <p:cNvPr id="11" name="TextBox 10"/>
           <p:cNvSpPr txBox="1"/>
           <p:nvPr/>
         </p:nvSpPr>
@@ -15644,7 +13921,7 @@
       </p:sp>
       <p:sp>
         <p:nvSpPr>
-          <p:cNvPr id="13" name="TextBox 12"/>
+          <p:cNvPr id="12" name="TextBox 11"/>
           <p:cNvSpPr txBox="1"/>
           <p:nvPr/>
         </p:nvSpPr>
@@ -15679,7 +13956,7 @@
       </p:sp>
       <p:sp>
         <p:nvSpPr>
-          <p:cNvPr id="14" name="TextBox 13"/>
+          <p:cNvPr id="13" name="TextBox 12"/>
           <p:cNvSpPr txBox="1"/>
           <p:nvPr/>
         </p:nvSpPr>
@@ -15835,44 +14112,9 @@
           </a:fontRef>
         </p:style>
       </p:cxnSp>
-      <p:sp>
-        <p:nvSpPr>
-          <p:cNvPr id="5" name="TextBox 4"/>
-          <p:cNvSpPr txBox="1"/>
-          <p:nvPr/>
-        </p:nvSpPr>
-        <p:spPr>
-          <a:xfrm>
-            <a:off x="777240" y="1261872"/>
-            <a:ext cx="10607040" cy="310896"/>
-          </a:xfrm>
-          <a:prstGeom prst="rect">
-            <a:avLst/>
-          </a:prstGeom>
-          <a:noFill/>
-        </p:spPr>
-        <p:txBody>
-          <a:bodyPr wrap="square" lIns="45720" rIns="45720" tIns="18288" bIns="18288" anchor="t">
-            <a:spAutoFit/>
-          </a:bodyPr>
-          <a:lstStyle/>
-          <a:p>
-            <a:pPr algn="l"/>
-            <a:r>
-              <a:rPr sz="1700" b="0" i="1">
-                <a:solidFill>
-                  <a:srgbClr val="6B6B6B"/>
-                </a:solidFill>
-                <a:latin typeface="Century Schoolbook"/>
-              </a:rPr>
-              <a:t>Last five minutes.</a:t>
-            </a:r>
-          </a:p>
-        </p:txBody>
-      </p:sp>
       <p:cxnSp>
         <p:nvCxnSpPr>
-          <p:cNvPr id="6" name="Connector 5"/>
+          <p:cNvPr id="5" name="Connector 4"/>
           <p:cNvCxnSpPr/>
           <p:nvPr/>
         </p:nvCxnSpPr>
@@ -15907,7 +14149,7 @@
       </p:cxnSp>
       <p:sp>
         <p:nvSpPr>
-          <p:cNvPr id="7" name="TextBox 6"/>
+          <p:cNvPr id="6" name="TextBox 5"/>
           <p:cNvSpPr txBox="1"/>
           <p:nvPr/>
         </p:nvSpPr>
@@ -15942,7 +14184,7 @@
       </p:sp>
       <p:sp>
         <p:nvSpPr>
-          <p:cNvPr id="8" name="TextBox 7"/>
+          <p:cNvPr id="7" name="TextBox 6"/>
           <p:cNvSpPr txBox="1"/>
           <p:nvPr/>
         </p:nvSpPr>
@@ -15977,7 +14219,7 @@
       </p:sp>
       <p:sp>
         <p:nvSpPr>
-          <p:cNvPr id="9" name="TextBox 8"/>
+          <p:cNvPr id="8" name="TextBox 7"/>
           <p:cNvSpPr txBox="1"/>
           <p:nvPr/>
         </p:nvSpPr>
@@ -16012,7 +14254,7 @@
       </p:sp>
       <p:sp>
         <p:nvSpPr>
-          <p:cNvPr id="10" name="TextBox 9"/>
+          <p:cNvPr id="9" name="TextBox 8"/>
           <p:cNvSpPr txBox="1"/>
           <p:nvPr/>
         </p:nvSpPr>
@@ -16047,7 +14289,7 @@
       </p:sp>
       <p:sp>
         <p:nvSpPr>
-          <p:cNvPr id="11" name="TextBox 10"/>
+          <p:cNvPr id="10" name="TextBox 9"/>
           <p:cNvSpPr txBox="1"/>
           <p:nvPr/>
         </p:nvSpPr>
@@ -16082,7 +14324,7 @@
       </p:sp>
       <p:sp>
         <p:nvSpPr>
-          <p:cNvPr id="12" name="TextBox 11"/>
+          <p:cNvPr id="11" name="TextBox 10"/>
           <p:cNvSpPr txBox="1"/>
           <p:nvPr/>
         </p:nvSpPr>
@@ -16117,7 +14359,7 @@
       </p:sp>
       <p:sp>
         <p:nvSpPr>
-          <p:cNvPr id="13" name="TextBox 12"/>
+          <p:cNvPr id="12" name="TextBox 11"/>
           <p:cNvSpPr txBox="1"/>
           <p:nvPr/>
         </p:nvSpPr>
@@ -16152,7 +14394,7 @@
       </p:sp>
       <p:sp>
         <p:nvSpPr>
-          <p:cNvPr id="14" name="TextBox 13"/>
+          <p:cNvPr id="13" name="TextBox 12"/>
           <p:cNvSpPr txBox="1"/>
           <p:nvPr/>
         </p:nvSpPr>
@@ -16187,7 +14429,7 @@
       </p:sp>
       <p:sp>
         <p:nvSpPr>
-          <p:cNvPr id="15" name="TextBox 14"/>
+          <p:cNvPr id="14" name="TextBox 13"/>
           <p:cNvSpPr txBox="1"/>
           <p:nvPr/>
         </p:nvSpPr>
@@ -16222,7 +14464,7 @@
       </p:sp>
       <p:sp>
         <p:nvSpPr>
-          <p:cNvPr id="16" name="TextBox 15"/>
+          <p:cNvPr id="15" name="TextBox 14"/>
           <p:cNvSpPr txBox="1"/>
           <p:nvPr/>
         </p:nvSpPr>
@@ -16257,7 +14499,7 @@
       </p:sp>
       <p:sp>
         <p:nvSpPr>
-          <p:cNvPr id="17" name="TextBox 16"/>
+          <p:cNvPr id="16" name="TextBox 15"/>
           <p:cNvSpPr txBox="1"/>
           <p:nvPr/>
         </p:nvSpPr>
@@ -16292,7 +14534,7 @@
       </p:sp>
       <p:sp>
         <p:nvSpPr>
-          <p:cNvPr id="18" name="TextBox 17"/>
+          <p:cNvPr id="17" name="TextBox 16"/>
           <p:cNvSpPr txBox="1"/>
           <p:nvPr/>
         </p:nvSpPr>
@@ -16448,44 +14690,9 @@
           </a:fontRef>
         </p:style>
       </p:cxnSp>
-      <p:sp>
-        <p:nvSpPr>
-          <p:cNvPr id="5" name="TextBox 4"/>
-          <p:cNvSpPr txBox="1"/>
-          <p:nvPr/>
-        </p:nvSpPr>
-        <p:spPr>
-          <a:xfrm>
-            <a:off x="777240" y="1261872"/>
-            <a:ext cx="10607040" cy="310896"/>
-          </a:xfrm>
-          <a:prstGeom prst="rect">
-            <a:avLst/>
-          </a:prstGeom>
-          <a:noFill/>
-        </p:spPr>
-        <p:txBody>
-          <a:bodyPr wrap="square" lIns="45720" rIns="45720" tIns="18288" bIns="18288" anchor="t">
-            <a:spAutoFit/>
-          </a:bodyPr>
-          <a:lstStyle/>
-          <a:p>
-            <a:pPr algn="l"/>
-            <a:r>
-              <a:rPr sz="1700" b="0" i="1">
-                <a:solidFill>
-                  <a:srgbClr val="6B6B6B"/>
-                </a:solidFill>
-                <a:latin typeface="Century Schoolbook"/>
-              </a:rPr>
-              <a:t>Copy both lines.</a:t>
-            </a:r>
-          </a:p>
-        </p:txBody>
-      </p:sp>
       <p:cxnSp>
         <p:nvCxnSpPr>
-          <p:cNvPr id="6" name="Connector 5"/>
+          <p:cNvPr id="5" name="Connector 4"/>
           <p:cNvCxnSpPr/>
           <p:nvPr/>
         </p:nvCxnSpPr>
@@ -16520,7 +14727,7 @@
       </p:cxnSp>
       <p:sp>
         <p:nvSpPr>
-          <p:cNvPr id="7" name="TextBox 6"/>
+          <p:cNvPr id="6" name="TextBox 5"/>
           <p:cNvSpPr txBox="1"/>
           <p:nvPr/>
         </p:nvSpPr>
@@ -16555,7 +14762,7 @@
       </p:sp>
       <p:sp>
         <p:nvSpPr>
-          <p:cNvPr id="8" name="TextBox 7"/>
+          <p:cNvPr id="7" name="TextBox 6"/>
           <p:cNvSpPr txBox="1"/>
           <p:nvPr/>
         </p:nvSpPr>
@@ -16590,13 +14797,13 @@
       </p:sp>
       <p:sp>
         <p:nvSpPr>
-          <p:cNvPr id="9" name="TextBox 8"/>
-          <p:cNvSpPr txBox="1"/>
-          <p:nvPr/>
-        </p:nvSpPr>
-        <p:spPr>
-          <a:xfrm>
-            <a:off x="777240" y="1737360"/>
+          <p:cNvPr id="8" name="TextBox 7"/>
+          <p:cNvSpPr txBox="1"/>
+          <p:nvPr/>
+        </p:nvSpPr>
+        <p:spPr>
+          <a:xfrm>
+            <a:off x="777240" y="1389888"/>
             <a:ext cx="10607040" cy="402336"/>
           </a:xfrm>
           <a:prstGeom prst="rect">
@@ -16625,13 +14832,13 @@
       </p:sp>
       <p:cxnSp>
         <p:nvCxnSpPr>
-          <p:cNvPr id="10" name="Connector 9"/>
+          <p:cNvPr id="9" name="Connector 8"/>
           <p:cNvCxnSpPr/>
           <p:nvPr/>
         </p:nvCxnSpPr>
         <p:spPr>
           <a:xfrm>
-            <a:off x="777240" y="2176272"/>
+            <a:off x="777240" y="1828800"/>
             <a:ext cx="10607040" cy="0"/>
           </a:xfrm>
           <a:prstGeom prst="line">
@@ -16660,7 +14867,7 @@
       </p:cxnSp>
       <p:pic>
         <p:nvPicPr>
-          <p:cNvPr id="11" name="Picture 10" descr="7f4dc7bb52f34966.png"/>
+          <p:cNvPr id="10" name="Picture 9" descr="7f4dc7bb52f34966.png"/>
           <p:cNvPicPr>
             <a:picLocks noChangeAspect="1"/>
           </p:cNvPicPr>
@@ -16674,7 +14881,7 @@
         </p:blipFill>
         <p:spPr>
           <a:xfrm>
-            <a:off x="2304024" y="2340864"/>
+            <a:off x="2304024" y="1993392"/>
             <a:ext cx="4245864" cy="411480"/>
           </a:xfrm>
           <a:prstGeom prst="rect">
@@ -16684,13 +14891,13 @@
       </p:pic>
       <p:sp>
         <p:nvSpPr>
-          <p:cNvPr id="12" name="TextBox 11"/>
-          <p:cNvSpPr txBox="1"/>
-          <p:nvPr/>
-        </p:nvSpPr>
-        <p:spPr>
-          <a:xfrm>
-            <a:off x="6549888" y="2318004"/>
+          <p:cNvPr id="11" name="TextBox 10"/>
+          <p:cNvSpPr txBox="1"/>
+          <p:nvPr/>
+        </p:nvSpPr>
+        <p:spPr>
+          <a:xfrm>
+            <a:off x="6549888" y="1970532"/>
             <a:ext cx="1183151" cy="457200"/>
           </a:xfrm>
           <a:prstGeom prst="rect">
@@ -16719,7 +14926,7 @@
       </p:sp>
       <p:pic>
         <p:nvPicPr>
-          <p:cNvPr id="13" name="Picture 12" descr="4bb1e456c94b13a6.png"/>
+          <p:cNvPr id="12" name="Picture 11" descr="4bb1e456c94b13a6.png"/>
           <p:cNvPicPr>
             <a:picLocks noChangeAspect="1"/>
           </p:cNvPicPr>
@@ -16733,7 +14940,7 @@
         </p:blipFill>
         <p:spPr>
           <a:xfrm>
-            <a:off x="7595879" y="2391156"/>
+            <a:off x="7595879" y="2043684"/>
             <a:ext cx="2261616" cy="310896"/>
           </a:xfrm>
           <a:prstGeom prst="rect">
@@ -16743,7 +14950,7 @@
       </p:pic>
       <p:pic>
         <p:nvPicPr>
-          <p:cNvPr id="14" name="Picture 13" descr="a285865d99a08fcf.png"/>
+          <p:cNvPr id="13" name="Picture 12" descr="a285865d99a08fcf.png"/>
           <p:cNvPicPr>
             <a:picLocks noChangeAspect="1"/>
           </p:cNvPicPr>
@@ -16757,7 +14964,7 @@
         </p:blipFill>
         <p:spPr>
           <a:xfrm>
-            <a:off x="3560064" y="3026664"/>
+            <a:off x="3560064" y="2679192"/>
             <a:ext cx="5041392" cy="411480"/>
           </a:xfrm>
           <a:prstGeom prst="rect">
@@ -16767,48 +14974,48 @@
       </p:pic>
       <p:sp>
         <p:nvSpPr>
+          <p:cNvPr id="14" name="TextBox 13"/>
+          <p:cNvSpPr txBox="1"/>
+          <p:nvPr/>
+        </p:nvSpPr>
+        <p:spPr>
+          <a:xfrm>
+            <a:off x="987552" y="3429000"/>
+            <a:ext cx="10131551" cy="475488"/>
+          </a:xfrm>
+          <a:prstGeom prst="rect">
+            <a:avLst/>
+          </a:prstGeom>
+          <a:noFill/>
+        </p:spPr>
+        <p:txBody>
+          <a:bodyPr wrap="square" lIns="45720" rIns="45720" tIns="18288" bIns="18288" anchor="t">
+            <a:spAutoFit/>
+          </a:bodyPr>
+          <a:lstStyle/>
+          <a:p>
+            <a:pPr algn="l"/>
+            <a:r>
+              <a:rPr sz="2300" b="1" i="0">
+                <a:solidFill>
+                  <a:srgbClr val="1A1A1A"/>
+                </a:solidFill>
+                <a:latin typeface="Century Schoolbook"/>
+              </a:rPr>
+              <a:t>Multiply the coefficients. Add the exponents of like bases.</a:t>
+            </a:r>
+          </a:p>
+        </p:txBody>
+      </p:sp>
+      <p:sp>
+        <p:nvSpPr>
           <p:cNvPr id="15" name="TextBox 14"/>
           <p:cNvSpPr txBox="1"/>
           <p:nvPr/>
         </p:nvSpPr>
         <p:spPr>
           <a:xfrm>
-            <a:off x="987552" y="3776472"/>
-            <a:ext cx="10131551" cy="475488"/>
-          </a:xfrm>
-          <a:prstGeom prst="rect">
-            <a:avLst/>
-          </a:prstGeom>
-          <a:noFill/>
-        </p:spPr>
-        <p:txBody>
-          <a:bodyPr wrap="square" lIns="45720" rIns="45720" tIns="18288" bIns="18288" anchor="t">
-            <a:spAutoFit/>
-          </a:bodyPr>
-          <a:lstStyle/>
-          <a:p>
-            <a:pPr algn="l"/>
-            <a:r>
-              <a:rPr sz="2300" b="1" i="0">
-                <a:solidFill>
-                  <a:srgbClr val="1A1A1A"/>
-                </a:solidFill>
-                <a:latin typeface="Century Schoolbook"/>
-              </a:rPr>
-              <a:t>Multiply the coefficients. Add the exponents of like bases.</a:t>
-            </a:r>
-          </a:p>
-        </p:txBody>
-      </p:sp>
-      <p:sp>
-        <p:nvSpPr>
-          <p:cNvPr id="16" name="TextBox 15"/>
-          <p:cNvSpPr txBox="1"/>
-          <p:nvPr/>
-        </p:nvSpPr>
-        <p:spPr>
-          <a:xfrm>
-            <a:off x="987552" y="4472940"/>
+            <a:off x="987552" y="4125468"/>
             <a:ext cx="5144240" cy="457200"/>
           </a:xfrm>
           <a:prstGeom prst="rect">
@@ -16837,7 +15044,7 @@
       </p:sp>
       <p:pic>
         <p:nvPicPr>
-          <p:cNvPr id="17" name="Picture 16" descr="2a950411e1004bb4.png"/>
+          <p:cNvPr id="16" name="Picture 15" descr="2a950411e1004bb4.png"/>
           <p:cNvPicPr>
             <a:picLocks noChangeAspect="1"/>
           </p:cNvPicPr>
@@ -16851,7 +15058,7 @@
         </p:blipFill>
         <p:spPr>
           <a:xfrm>
-            <a:off x="5994632" y="4489704"/>
+            <a:off x="5994632" y="4142232"/>
             <a:ext cx="2618232" cy="423672"/>
           </a:xfrm>
           <a:prstGeom prst="rect">
@@ -17095,7 +15302,7 @@
         </p:nvSpPr>
         <p:spPr>
           <a:xfrm>
-            <a:off x="777240" y="1737360"/>
+            <a:off x="777240" y="1389888"/>
             <a:ext cx="10607040" cy="402336"/>
           </a:xfrm>
           <a:prstGeom prst="rect">
@@ -17130,7 +15337,7 @@
         </p:nvCxnSpPr>
         <p:spPr>
           <a:xfrm>
-            <a:off x="777240" y="2176272"/>
+            <a:off x="777240" y="1828800"/>
             <a:ext cx="10607040" cy="0"/>
           </a:xfrm>
           <a:prstGeom prst="line">
@@ -17173,7 +15380,7 @@
         </p:blipFill>
         <p:spPr>
           <a:xfrm>
-            <a:off x="2547864" y="2340864"/>
+            <a:off x="2547864" y="1993392"/>
             <a:ext cx="4227576" cy="411480"/>
           </a:xfrm>
           <a:prstGeom prst="rect">
@@ -17189,7 +15396,7 @@
         </p:nvSpPr>
         <p:spPr>
           <a:xfrm>
-            <a:off x="6775440" y="2318004"/>
+            <a:off x="6775440" y="1970532"/>
             <a:ext cx="1183151" cy="457200"/>
           </a:xfrm>
           <a:prstGeom prst="rect">
@@ -17232,7 +15439,7 @@
         </p:blipFill>
         <p:spPr>
           <a:xfrm>
-            <a:off x="7821431" y="2372868"/>
+            <a:off x="7821431" y="2025396"/>
             <a:ext cx="1792224" cy="347472"/>
           </a:xfrm>
           <a:prstGeom prst="rect">
@@ -17256,7 +15463,7 @@
         </p:blipFill>
         <p:spPr>
           <a:xfrm>
-            <a:off x="1999224" y="3026664"/>
+            <a:off x="1999224" y="2679192"/>
             <a:ext cx="3727704" cy="423672"/>
           </a:xfrm>
           <a:prstGeom prst="rect">
@@ -17272,7 +15479,7 @@
         </p:nvSpPr>
         <p:spPr>
           <a:xfrm>
-            <a:off x="5726928" y="3009900"/>
+            <a:off x="5726928" y="2662428"/>
             <a:ext cx="1183151" cy="457200"/>
           </a:xfrm>
           <a:prstGeom prst="rect">
@@ -17315,7 +15522,7 @@
         </p:blipFill>
         <p:spPr>
           <a:xfrm>
-            <a:off x="6772919" y="3026664"/>
+            <a:off x="6772919" y="2679192"/>
             <a:ext cx="3389376" cy="423672"/>
           </a:xfrm>
           <a:prstGeom prst="rect">
@@ -17331,7 +15538,7 @@
         </p:nvSpPr>
         <p:spPr>
           <a:xfrm>
-            <a:off x="987552" y="3788664"/>
+            <a:off x="987552" y="3441192"/>
             <a:ext cx="10131551" cy="950976"/>
           </a:xfrm>
           <a:prstGeom prst="rect">
@@ -17594,7 +15801,7 @@
         </p:nvSpPr>
         <p:spPr>
           <a:xfrm>
-            <a:off x="777240" y="1737360"/>
+            <a:off x="777240" y="1389888"/>
             <a:ext cx="10607040" cy="402336"/>
           </a:xfrm>
           <a:prstGeom prst="rect">
@@ -17629,7 +15836,7 @@
         </p:nvCxnSpPr>
         <p:spPr>
           <a:xfrm>
-            <a:off x="777240" y="2176272"/>
+            <a:off x="777240" y="1828800"/>
             <a:ext cx="10607040" cy="0"/>
           </a:xfrm>
           <a:prstGeom prst="line">
@@ -17672,7 +15879,7 @@
         </p:blipFill>
         <p:spPr>
           <a:xfrm>
-            <a:off x="2566152" y="2340864"/>
+            <a:off x="2566152" y="1993392"/>
             <a:ext cx="4270248" cy="804672"/>
           </a:xfrm>
           <a:prstGeom prst="rect">
@@ -17688,7 +15895,7 @@
         </p:nvSpPr>
         <p:spPr>
           <a:xfrm>
-            <a:off x="6836400" y="2514600"/>
+            <a:off x="6836400" y="2167128"/>
             <a:ext cx="1183151" cy="457200"/>
           </a:xfrm>
           <a:prstGeom prst="rect">
@@ -17731,7 +15938,7 @@
         </p:blipFill>
         <p:spPr>
           <a:xfrm>
-            <a:off x="7882391" y="2406396"/>
+            <a:off x="7882391" y="2058924"/>
             <a:ext cx="1712976" cy="673608"/>
           </a:xfrm>
           <a:prstGeom prst="rect">
@@ -17755,7 +15962,7 @@
         </p:blipFill>
         <p:spPr>
           <a:xfrm>
-            <a:off x="3140700" y="3419856"/>
+            <a:off x="3140700" y="3072384"/>
             <a:ext cx="1801368" cy="810768"/>
           </a:xfrm>
           <a:prstGeom prst="rect">
@@ -17771,7 +15978,7 @@
         </p:nvSpPr>
         <p:spPr>
           <a:xfrm>
-            <a:off x="4942068" y="3596640"/>
+            <a:off x="4942068" y="3249168"/>
             <a:ext cx="1183151" cy="457200"/>
           </a:xfrm>
           <a:prstGeom prst="rect">
@@ -17814,7 +16021,7 @@
         </p:blipFill>
         <p:spPr>
           <a:xfrm>
-            <a:off x="5988059" y="3421379"/>
+            <a:off x="5988059" y="3073907"/>
             <a:ext cx="3032760" cy="807720"/>
           </a:xfrm>
           <a:prstGeom prst="rect">
@@ -17830,7 +16037,7 @@
         </p:nvSpPr>
         <p:spPr>
           <a:xfrm>
-            <a:off x="987552" y="4568952"/>
+            <a:off x="987552" y="4221480"/>
             <a:ext cx="10131551" cy="475488"/>
           </a:xfrm>
           <a:prstGeom prst="rect">
@@ -17980,44 +16187,9 @@
           </a:fontRef>
         </p:style>
       </p:cxnSp>
-      <p:sp>
-        <p:nvSpPr>
-          <p:cNvPr id="5" name="TextBox 4"/>
-          <p:cNvSpPr txBox="1"/>
-          <p:nvPr/>
-        </p:nvSpPr>
-        <p:spPr>
-          <a:xfrm>
-            <a:off x="777240" y="1261872"/>
-            <a:ext cx="10607040" cy="310896"/>
-          </a:xfrm>
-          <a:prstGeom prst="rect">
-            <a:avLst/>
-          </a:prstGeom>
-          <a:noFill/>
-        </p:spPr>
-        <p:txBody>
-          <a:bodyPr wrap="square" lIns="45720" rIns="45720" tIns="18288" bIns="18288" anchor="t">
-            <a:spAutoFit/>
-          </a:bodyPr>
-          <a:lstStyle/>
-          <a:p>
-            <a:pPr algn="l"/>
-            <a:r>
-              <a:rPr sz="1700" b="0" i="1">
-                <a:solidFill>
-                  <a:srgbClr val="6B6B6B"/>
-                </a:solidFill>
-                <a:latin typeface="Century Schoolbook"/>
-              </a:rPr>
-              <a:t>Multiplying two monomials.</a:t>
-            </a:r>
-          </a:p>
-        </p:txBody>
-      </p:sp>
       <p:cxnSp>
         <p:nvCxnSpPr>
-          <p:cNvPr id="6" name="Connector 5"/>
+          <p:cNvPr id="5" name="Connector 4"/>
           <p:cNvCxnSpPr/>
           <p:nvPr/>
         </p:nvCxnSpPr>
@@ -18052,7 +16224,7 @@
       </p:cxnSp>
       <p:sp>
         <p:nvSpPr>
-          <p:cNvPr id="7" name="TextBox 6"/>
+          <p:cNvPr id="6" name="TextBox 5"/>
           <p:cNvSpPr txBox="1"/>
           <p:nvPr/>
         </p:nvSpPr>
@@ -18087,7 +16259,7 @@
       </p:sp>
       <p:sp>
         <p:nvSpPr>
-          <p:cNvPr id="8" name="TextBox 7"/>
+          <p:cNvPr id="7" name="TextBox 6"/>
           <p:cNvSpPr txBox="1"/>
           <p:nvPr/>
         </p:nvSpPr>
@@ -18122,7 +16294,7 @@
       </p:sp>
       <p:pic>
         <p:nvPicPr>
-          <p:cNvPr id="9" name="Picture 8" descr="a0894cd9a5ccf63d.png"/>
+          <p:cNvPr id="8" name="Picture 7" descr="a0894cd9a5ccf63d.png"/>
           <p:cNvPicPr>
             <a:picLocks noChangeAspect="1"/>
           </p:cNvPicPr>
@@ -18146,7 +16318,7 @@
       </p:pic>
       <p:sp>
         <p:nvSpPr>
-          <p:cNvPr id="10" name="TextBox 9"/>
+          <p:cNvPr id="9" name="TextBox 8"/>
           <p:cNvSpPr txBox="1"/>
           <p:nvPr/>
         </p:nvSpPr>
@@ -18302,44 +16474,9 @@
           </a:fontRef>
         </p:style>
       </p:cxnSp>
-      <p:sp>
-        <p:nvSpPr>
-          <p:cNvPr id="5" name="TextBox 4"/>
-          <p:cNvSpPr txBox="1"/>
-          <p:nvPr/>
-        </p:nvSpPr>
-        <p:spPr>
-          <a:xfrm>
-            <a:off x="777240" y="1261872"/>
-            <a:ext cx="10607040" cy="310896"/>
-          </a:xfrm>
-          <a:prstGeom prst="rect">
-            <a:avLst/>
-          </a:prstGeom>
-          <a:noFill/>
-        </p:spPr>
-        <p:txBody>
-          <a:bodyPr wrap="square" lIns="45720" rIns="45720" tIns="18288" bIns="18288" anchor="t">
-            <a:spAutoFit/>
-          </a:bodyPr>
-          <a:lstStyle/>
-          <a:p>
-            <a:pPr algn="l"/>
-            <a:r>
-              <a:rPr sz="1700" b="0" i="1">
-                <a:solidFill>
-                  <a:srgbClr val="6B6B6B"/>
-                </a:solidFill>
-                <a:latin typeface="Century Schoolbook"/>
-              </a:rPr>
-              <a:t>Worked.</a:t>
-            </a:r>
-          </a:p>
-        </p:txBody>
-      </p:sp>
       <p:cxnSp>
         <p:nvCxnSpPr>
-          <p:cNvPr id="6" name="Connector 5"/>
+          <p:cNvPr id="5" name="Connector 4"/>
           <p:cNvCxnSpPr/>
           <p:nvPr/>
         </p:nvCxnSpPr>
@@ -18374,7 +16511,7 @@
       </p:cxnSp>
       <p:sp>
         <p:nvSpPr>
-          <p:cNvPr id="7" name="TextBox 6"/>
+          <p:cNvPr id="6" name="TextBox 5"/>
           <p:cNvSpPr txBox="1"/>
           <p:nvPr/>
         </p:nvSpPr>
@@ -18409,7 +16546,7 @@
       </p:sp>
       <p:sp>
         <p:nvSpPr>
-          <p:cNvPr id="8" name="TextBox 7"/>
+          <p:cNvPr id="7" name="TextBox 6"/>
           <p:cNvSpPr txBox="1"/>
           <p:nvPr/>
         </p:nvSpPr>
@@ -18444,7 +16581,7 @@
       </p:sp>
       <p:pic>
         <p:nvPicPr>
-          <p:cNvPr id="9" name="Picture 8" descr="de63dedae86b58c0.png"/>
+          <p:cNvPr id="8" name="Picture 7" descr="de63dedae86b58c0.png"/>
           <p:cNvPicPr>
             <a:picLocks noChangeAspect="1"/>
           </p:cNvPicPr>
@@ -18466,44 +16603,9 @@
           </a:prstGeom>
         </p:spPr>
       </p:pic>
-      <p:sp>
-        <p:nvSpPr>
-          <p:cNvPr id="10" name="TextBox 9"/>
-          <p:cNvSpPr txBox="1"/>
-          <p:nvPr/>
-        </p:nvSpPr>
-        <p:spPr>
-          <a:xfrm>
-            <a:off x="8290560" y="1903476"/>
-            <a:ext cx="3093719" cy="502920"/>
-          </a:xfrm>
-          <a:prstGeom prst="rect">
-            <a:avLst/>
-          </a:prstGeom>
-          <a:noFill/>
-        </p:spPr>
-        <p:txBody>
-          <a:bodyPr wrap="square" lIns="45720" rIns="45720" tIns="18288" bIns="18288" anchor="ctr">
-            <a:spAutoFit/>
-          </a:bodyPr>
-          <a:lstStyle/>
-          <a:p>
-            <a:pPr algn="l"/>
-            <a:r>
-              <a:rPr sz="2100" b="0" i="1">
-                <a:solidFill>
-                  <a:srgbClr val="6B6B6B"/>
-                </a:solidFill>
-                <a:latin typeface="Century Schoolbook"/>
-              </a:rPr>
-              <a:t>regroup: coefficients, x's, y's</a:t>
-            </a:r>
-          </a:p>
-        </p:txBody>
-      </p:sp>
       <p:pic>
         <p:nvPicPr>
-          <p:cNvPr id="11" name="Picture 10" descr="2f53120bf9dfffe2.png"/>
+          <p:cNvPr id="9" name="Picture 8" descr="2f53120bf9dfffe2.png"/>
           <p:cNvPicPr>
             <a:picLocks noChangeAspect="1"/>
           </p:cNvPicPr>
@@ -18527,42 +16629,7 @@
       </p:pic>
       <p:sp>
         <p:nvSpPr>
-          <p:cNvPr id="12" name="TextBox 11"/>
-          <p:cNvSpPr txBox="1"/>
-          <p:nvPr/>
-        </p:nvSpPr>
-        <p:spPr>
-          <a:xfrm>
-            <a:off x="5867399" y="2601468"/>
-            <a:ext cx="5516880" cy="502920"/>
-          </a:xfrm>
-          <a:prstGeom prst="rect">
-            <a:avLst/>
-          </a:prstGeom>
-          <a:noFill/>
-        </p:spPr>
-        <p:txBody>
-          <a:bodyPr wrap="square" lIns="45720" rIns="45720" tIns="18288" bIns="18288" anchor="ctr">
-            <a:spAutoFit/>
-          </a:bodyPr>
-          <a:lstStyle/>
-          <a:p>
-            <a:pPr algn="l"/>
-            <a:r>
-              <a:rPr sz="2100" b="0" i="1">
-                <a:solidFill>
-                  <a:srgbClr val="6B6B6B"/>
-                </a:solidFill>
-                <a:latin typeface="Century Schoolbook"/>
-              </a:rPr>
-              <a:t>multiply coefficients; add exponents</a:t>
-            </a:r>
-          </a:p>
-        </p:txBody>
-      </p:sp>
-      <p:sp>
-        <p:nvSpPr>
-          <p:cNvPr id="13" name="TextBox 12"/>
+          <p:cNvPr id="10" name="TextBox 9"/>
           <p:cNvSpPr txBox="1"/>
           <p:nvPr/>
         </p:nvSpPr>
@@ -18745,44 +16812,9 @@
           </a:fontRef>
         </p:style>
       </p:cxnSp>
-      <p:sp>
-        <p:nvSpPr>
-          <p:cNvPr id="5" name="TextBox 4"/>
-          <p:cNvSpPr txBox="1"/>
-          <p:nvPr/>
-        </p:nvSpPr>
-        <p:spPr>
-          <a:xfrm>
-            <a:off x="777240" y="1261872"/>
-            <a:ext cx="10607040" cy="310896"/>
-          </a:xfrm>
-          <a:prstGeom prst="rect">
-            <a:avLst/>
-          </a:prstGeom>
-          <a:noFill/>
-        </p:spPr>
-        <p:txBody>
-          <a:bodyPr wrap="square" lIns="45720" rIns="45720" tIns="18288" bIns="18288" anchor="t">
-            <a:spAutoFit/>
-          </a:bodyPr>
-          <a:lstStyle/>
-          <a:p>
-            <a:pPr algn="l"/>
-            <a:r>
-              <a:rPr sz="1700" b="0" i="1">
-                <a:solidFill>
-                  <a:srgbClr val="6B6B6B"/>
-                </a:solidFill>
-                <a:latin typeface="Century Schoolbook"/>
-              </a:rPr>
-              <a:t>Same steps, your numbers. Boards up when done.</a:t>
-            </a:r>
-          </a:p>
-        </p:txBody>
-      </p:sp>
       <p:cxnSp>
         <p:nvCxnSpPr>
-          <p:cNvPr id="6" name="Connector 5"/>
+          <p:cNvPr id="5" name="Connector 4"/>
           <p:cNvCxnSpPr/>
           <p:nvPr/>
         </p:nvCxnSpPr>
@@ -18817,7 +16849,7 @@
       </p:cxnSp>
       <p:sp>
         <p:nvSpPr>
-          <p:cNvPr id="7" name="TextBox 6"/>
+          <p:cNvPr id="6" name="TextBox 5"/>
           <p:cNvSpPr txBox="1"/>
           <p:nvPr/>
         </p:nvSpPr>
@@ -18852,7 +16884,7 @@
       </p:sp>
       <p:sp>
         <p:nvSpPr>
-          <p:cNvPr id="8" name="TextBox 7"/>
+          <p:cNvPr id="7" name="TextBox 6"/>
           <p:cNvSpPr txBox="1"/>
           <p:nvPr/>
         </p:nvSpPr>
@@ -18887,7 +16919,7 @@
       </p:sp>
       <p:pic>
         <p:nvPicPr>
-          <p:cNvPr id="9" name="Picture 8" descr="83ae14ddaf39e79e.png"/>
+          <p:cNvPr id="8" name="Picture 7" descr="83ae14ddaf39e79e.png"/>
           <p:cNvPicPr>
             <a:picLocks noChangeAspect="1"/>
           </p:cNvPicPr>
@@ -18909,6 +16941,41 @@
           </a:prstGeom>
         </p:spPr>
       </p:pic>
+      <p:sp>
+        <p:nvSpPr>
+          <p:cNvPr id="9" name="TextBox 8"/>
+          <p:cNvSpPr txBox="1"/>
+          <p:nvPr/>
+        </p:nvSpPr>
+        <p:spPr>
+          <a:xfrm>
+            <a:off x="777240" y="3215640"/>
+            <a:ext cx="10607040" cy="429370"/>
+          </a:xfrm>
+          <a:prstGeom prst="rect">
+            <a:avLst/>
+          </a:prstGeom>
+          <a:noFill/>
+        </p:spPr>
+        <p:txBody>
+          <a:bodyPr wrap="square" lIns="45720" rIns="45720" tIns="18288" bIns="18288" anchor="t">
+            <a:spAutoFit/>
+          </a:bodyPr>
+          <a:lstStyle/>
+          <a:p>
+            <a:pPr algn="ctr"/>
+            <a:r>
+              <a:rPr sz="2400" b="1" i="0">
+                <a:solidFill>
+                  <a:srgbClr val="1A1A1A"/>
+                </a:solidFill>
+                <a:latin typeface="Century Schoolbook"/>
+              </a:rPr>
+              <a:t>Write an equivalent expression as a single monomial.</a:t>
+            </a:r>
+          </a:p>
+        </p:txBody>
+      </p:sp>
     </p:spTree>
   </p:cSld>
   <p:clrMapOvr>

--- a/a7/build/out/u3/A7 3.T1 Exponent Laws with Variable Bases - Slides.pptx
+++ b/a7/build/out/u3/A7 3.T1 Exponent Laws with Variable Bases - Slides.pptx
@@ -13787,23 +13787,23 @@
         </p:nvSpPr>
         <p:spPr>
           <a:xfrm>
-            <a:off x="960120" y="2011680"/>
-            <a:ext cx="548640" cy="356616"/>
-          </a:xfrm>
-          <a:prstGeom prst="rect">
-            <a:avLst/>
-          </a:prstGeom>
-          <a:noFill/>
-        </p:spPr>
-        <p:txBody>
-          <a:bodyPr wrap="square" lIns="45720" rIns="45720" tIns="18288" bIns="18288" anchor="t">
+            <a:off x="960120" y="1495043"/>
+            <a:ext cx="548640" cy="457200"/>
+          </a:xfrm>
+          <a:prstGeom prst="rect">
+            <a:avLst/>
+          </a:prstGeom>
+          <a:noFill/>
+        </p:spPr>
+        <p:txBody>
+          <a:bodyPr wrap="square" lIns="45720" rIns="45720" tIns="18288" bIns="18288" anchor="ctr">
             <a:spAutoFit/>
           </a:bodyPr>
           <a:lstStyle/>
           <a:p>
             <a:pPr algn="l"/>
             <a:r>
-              <a:rPr sz="2100" b="1" i="0">
+              <a:rPr sz="2300" b="1" i="0">
                 <a:solidFill>
                   <a:srgbClr val="0B5394"/>
                 </a:solidFill>
@@ -13822,173 +13822,586 @@
         </p:nvSpPr>
         <p:spPr>
           <a:xfrm>
-            <a:off x="1554480" y="2011680"/>
-            <a:ext cx="9829800" cy="411480"/>
-          </a:xfrm>
-          <a:prstGeom prst="rect">
-            <a:avLst/>
-          </a:prstGeom>
-          <a:noFill/>
-        </p:spPr>
-        <p:txBody>
-          <a:bodyPr wrap="square" lIns="45720" rIns="45720" tIns="18288" bIns="18288" anchor="t">
+            <a:off x="1554480" y="1495044"/>
+            <a:ext cx="3168165" cy="457200"/>
+          </a:xfrm>
+          <a:prstGeom prst="rect">
+            <a:avLst/>
+          </a:prstGeom>
+          <a:noFill/>
+        </p:spPr>
+        <p:txBody>
+          <a:bodyPr wrap="none" lIns="45720" rIns="45720" tIns="18288" bIns="18288" anchor="ctr">
+            <a:noAutofit/>
+          </a:bodyPr>
+          <a:lstStyle/>
+          <a:p>
+            <a:pPr algn="l"/>
+            <a:r>
+              <a:rPr sz="2300" b="0" i="0">
+                <a:solidFill>
+                  <a:srgbClr val="1A1A1A"/>
+                </a:solidFill>
+                <a:latin typeface="Century Schoolbook"/>
+              </a:rPr>
+              <a:t>Write as one power.  </a:t>
+            </a:r>
+          </a:p>
+        </p:txBody>
+      </p:sp>
+      <p:pic>
+        <p:nvPicPr>
+          <p:cNvPr id="10" name="Picture 9" descr="f0610eb235266464.png"/>
+          <p:cNvPicPr>
+            <a:picLocks noChangeAspect="1"/>
+          </p:cNvPicPr>
+          <p:nvPr/>
+        </p:nvPicPr>
+        <p:blipFill>
+          <a:blip r:embed="rId2"/>
+          <a:stretch>
+            <a:fillRect/>
+          </a:stretch>
+        </p:blipFill>
+        <p:spPr>
+          <a:xfrm>
+            <a:off x="4585485" y="1584959"/>
+            <a:ext cx="771144" cy="277368"/>
+          </a:xfrm>
+          <a:prstGeom prst="rect">
+            <a:avLst/>
+          </a:prstGeom>
+        </p:spPr>
+      </p:pic>
+      <p:sp>
+        <p:nvSpPr>
+          <p:cNvPr id="11" name="TextBox 10"/>
+          <p:cNvSpPr txBox="1"/>
+          <p:nvPr/>
+        </p:nvSpPr>
+        <p:spPr>
+          <a:xfrm>
+            <a:off x="960120" y="2089403"/>
+            <a:ext cx="548640" cy="457200"/>
+          </a:xfrm>
+          <a:prstGeom prst="rect">
+            <a:avLst/>
+          </a:prstGeom>
+          <a:noFill/>
+        </p:spPr>
+        <p:txBody>
+          <a:bodyPr wrap="square" lIns="45720" rIns="45720" tIns="18288" bIns="18288" anchor="ctr">
             <a:spAutoFit/>
           </a:bodyPr>
           <a:lstStyle/>
           <a:p>
             <a:pPr algn="l"/>
             <a:r>
-              <a:rPr sz="2100" b="0" i="0">
+              <a:rPr sz="2300" b="1" i="0">
+                <a:solidFill>
+                  <a:srgbClr val="0B5394"/>
+                </a:solidFill>
+                <a:latin typeface="Century Schoolbook"/>
+              </a:rPr>
+              <a:t>2.</a:t>
+            </a:r>
+          </a:p>
+        </p:txBody>
+      </p:sp>
+      <p:sp>
+        <p:nvSpPr>
+          <p:cNvPr id="12" name="TextBox 11"/>
+          <p:cNvSpPr txBox="1"/>
+          <p:nvPr/>
+        </p:nvSpPr>
+        <p:spPr>
+          <a:xfrm>
+            <a:off x="1554480" y="2089403"/>
+            <a:ext cx="4364338" cy="457200"/>
+          </a:xfrm>
+          <a:prstGeom prst="rect">
+            <a:avLst/>
+          </a:prstGeom>
+          <a:noFill/>
+        </p:spPr>
+        <p:txBody>
+          <a:bodyPr wrap="none" lIns="45720" rIns="45720" tIns="18288" bIns="18288" anchor="ctr">
+            <a:noAutofit/>
+          </a:bodyPr>
+          <a:lstStyle/>
+          <a:p>
+            <a:pPr algn="l"/>
+            <a:r>
+              <a:rPr sz="2300" b="0" i="0">
                 <a:solidFill>
                   <a:srgbClr val="1A1A1A"/>
                 </a:solidFill>
                 <a:latin typeface="Century Schoolbook"/>
               </a:rPr>
-              <a:t>Six questions. Work down the page.</a:t>
-            </a:r>
-          </a:p>
-        </p:txBody>
-      </p:sp>
-      <p:sp>
-        <p:nvSpPr>
-          <p:cNvPr id="10" name="TextBox 9"/>
-          <p:cNvSpPr txBox="1"/>
-          <p:nvPr/>
-        </p:nvSpPr>
-        <p:spPr>
-          <a:xfrm>
-            <a:off x="960120" y="2551176"/>
-            <a:ext cx="548640" cy="356616"/>
-          </a:xfrm>
-          <a:prstGeom prst="rect">
-            <a:avLst/>
-          </a:prstGeom>
-          <a:noFill/>
-        </p:spPr>
-        <p:txBody>
-          <a:bodyPr wrap="square" lIns="45720" rIns="45720" tIns="18288" bIns="18288" anchor="t">
+              <a:t>Write as a single monomial.  </a:t>
+            </a:r>
+          </a:p>
+        </p:txBody>
+      </p:sp>
+      <p:pic>
+        <p:nvPicPr>
+          <p:cNvPr id="13" name="Picture 12" descr="f4d6cfbb8675d9ad.png"/>
+          <p:cNvPicPr>
+            <a:picLocks noChangeAspect="1"/>
+          </p:cNvPicPr>
+          <p:nvPr/>
+        </p:nvPicPr>
+        <p:blipFill>
+          <a:blip r:embed="rId3"/>
+          <a:stretch>
+            <a:fillRect/>
+          </a:stretch>
+        </p:blipFill>
+        <p:spPr>
+          <a:xfrm>
+            <a:off x="5781658" y="2150363"/>
+            <a:ext cx="633984" cy="335280"/>
+          </a:xfrm>
+          <a:prstGeom prst="rect">
+            <a:avLst/>
+          </a:prstGeom>
+        </p:spPr>
+      </p:pic>
+      <p:sp>
+        <p:nvSpPr>
+          <p:cNvPr id="14" name="TextBox 13"/>
+          <p:cNvSpPr txBox="1"/>
+          <p:nvPr/>
+        </p:nvSpPr>
+        <p:spPr>
+          <a:xfrm>
+            <a:off x="960120" y="2683763"/>
+            <a:ext cx="548640" cy="457200"/>
+          </a:xfrm>
+          <a:prstGeom prst="rect">
+            <a:avLst/>
+          </a:prstGeom>
+          <a:noFill/>
+        </p:spPr>
+        <p:txBody>
+          <a:bodyPr wrap="square" lIns="45720" rIns="45720" tIns="18288" bIns="18288" anchor="ctr">
             <a:spAutoFit/>
           </a:bodyPr>
           <a:lstStyle/>
           <a:p>
             <a:pPr algn="l"/>
             <a:r>
-              <a:rPr sz="2100" b="1" i="0">
+              <a:rPr sz="2300" b="1" i="0">
                 <a:solidFill>
                   <a:srgbClr val="0B5394"/>
                 </a:solidFill>
                 <a:latin typeface="Century Schoolbook"/>
               </a:rPr>
-              <a:t>2.</a:t>
-            </a:r>
-          </a:p>
-        </p:txBody>
-      </p:sp>
-      <p:sp>
-        <p:nvSpPr>
-          <p:cNvPr id="11" name="TextBox 10"/>
-          <p:cNvSpPr txBox="1"/>
-          <p:nvPr/>
-        </p:nvSpPr>
-        <p:spPr>
-          <a:xfrm>
-            <a:off x="1554480" y="2551176"/>
-            <a:ext cx="9829800" cy="411480"/>
-          </a:xfrm>
-          <a:prstGeom prst="rect">
-            <a:avLst/>
-          </a:prstGeom>
-          <a:noFill/>
-        </p:spPr>
-        <p:txBody>
-          <a:bodyPr wrap="square" lIns="45720" rIns="45720" tIns="18288" bIns="18288" anchor="t">
+              <a:t>3.</a:t>
+            </a:r>
+          </a:p>
+        </p:txBody>
+      </p:sp>
+      <p:sp>
+        <p:nvSpPr>
+          <p:cNvPr id="15" name="TextBox 14"/>
+          <p:cNvSpPr txBox="1"/>
+          <p:nvPr/>
+        </p:nvSpPr>
+        <p:spPr>
+          <a:xfrm>
+            <a:off x="1554480" y="2683763"/>
+            <a:ext cx="4364338" cy="457200"/>
+          </a:xfrm>
+          <a:prstGeom prst="rect">
+            <a:avLst/>
+          </a:prstGeom>
+          <a:noFill/>
+        </p:spPr>
+        <p:txBody>
+          <a:bodyPr wrap="none" lIns="45720" rIns="45720" tIns="18288" bIns="18288" anchor="ctr">
+            <a:noAutofit/>
+          </a:bodyPr>
+          <a:lstStyle/>
+          <a:p>
+            <a:pPr algn="l"/>
+            <a:r>
+              <a:rPr sz="2300" b="0" i="0">
+                <a:solidFill>
+                  <a:srgbClr val="1A1A1A"/>
+                </a:solidFill>
+                <a:latin typeface="Century Schoolbook"/>
+              </a:rPr>
+              <a:t>Write as a single monomial.  </a:t>
+            </a:r>
+          </a:p>
+        </p:txBody>
+      </p:sp>
+      <p:pic>
+        <p:nvPicPr>
+          <p:cNvPr id="16" name="Picture 15" descr="620cb7f114546ac7.png"/>
+          <p:cNvPicPr>
+            <a:picLocks noChangeAspect="1"/>
+          </p:cNvPicPr>
+          <p:nvPr/>
+        </p:nvPicPr>
+        <p:blipFill>
+          <a:blip r:embed="rId4"/>
+          <a:stretch>
+            <a:fillRect/>
+          </a:stretch>
+        </p:blipFill>
+        <p:spPr>
+          <a:xfrm>
+            <a:off x="5781658" y="2741675"/>
+            <a:ext cx="786384" cy="341376"/>
+          </a:xfrm>
+          <a:prstGeom prst="rect">
+            <a:avLst/>
+          </a:prstGeom>
+        </p:spPr>
+      </p:pic>
+      <p:sp>
+        <p:nvSpPr>
+          <p:cNvPr id="17" name="TextBox 16"/>
+          <p:cNvSpPr txBox="1"/>
+          <p:nvPr/>
+        </p:nvSpPr>
+        <p:spPr>
+          <a:xfrm>
+            <a:off x="960120" y="3278123"/>
+            <a:ext cx="548640" cy="457200"/>
+          </a:xfrm>
+          <a:prstGeom prst="rect">
+            <a:avLst/>
+          </a:prstGeom>
+          <a:noFill/>
+        </p:spPr>
+        <p:txBody>
+          <a:bodyPr wrap="square" lIns="45720" rIns="45720" tIns="18288" bIns="18288" anchor="ctr">
             <a:spAutoFit/>
           </a:bodyPr>
           <a:lstStyle/>
           <a:p>
             <a:pPr algn="l"/>
             <a:r>
-              <a:rPr sz="2100" b="0" i="0">
+              <a:rPr sz="2300" b="1" i="0">
+                <a:solidFill>
+                  <a:srgbClr val="0B5394"/>
+                </a:solidFill>
+                <a:latin typeface="Century Schoolbook"/>
+              </a:rPr>
+              <a:t>4.</a:t>
+            </a:r>
+          </a:p>
+        </p:txBody>
+      </p:sp>
+      <p:sp>
+        <p:nvSpPr>
+          <p:cNvPr id="18" name="TextBox 17"/>
+          <p:cNvSpPr txBox="1"/>
+          <p:nvPr/>
+        </p:nvSpPr>
+        <p:spPr>
+          <a:xfrm>
+            <a:off x="1554480" y="3278123"/>
+            <a:ext cx="4364338" cy="457200"/>
+          </a:xfrm>
+          <a:prstGeom prst="rect">
+            <a:avLst/>
+          </a:prstGeom>
+          <a:noFill/>
+        </p:spPr>
+        <p:txBody>
+          <a:bodyPr wrap="none" lIns="45720" rIns="45720" tIns="18288" bIns="18288" anchor="ctr">
+            <a:noAutofit/>
+          </a:bodyPr>
+          <a:lstStyle/>
+          <a:p>
+            <a:pPr algn="l"/>
+            <a:r>
+              <a:rPr sz="2300" b="0" i="0">
                 <a:solidFill>
                   <a:srgbClr val="1A1A1A"/>
                 </a:solidFill>
                 <a:latin typeface="Century Schoolbook"/>
               </a:rPr>
-              <a:t>Show the step that does the work, not just the answer.</a:t>
-            </a:r>
-          </a:p>
-        </p:txBody>
-      </p:sp>
-      <p:sp>
-        <p:nvSpPr>
-          <p:cNvPr id="12" name="TextBox 11"/>
-          <p:cNvSpPr txBox="1"/>
-          <p:nvPr/>
-        </p:nvSpPr>
-        <p:spPr>
-          <a:xfrm>
-            <a:off x="960120" y="3090672"/>
-            <a:ext cx="548640" cy="356616"/>
-          </a:xfrm>
-          <a:prstGeom prst="rect">
-            <a:avLst/>
-          </a:prstGeom>
-          <a:noFill/>
-        </p:spPr>
-        <p:txBody>
-          <a:bodyPr wrap="square" lIns="45720" rIns="45720" tIns="18288" bIns="18288" anchor="t">
+              <a:t>Write as a single monomial.  </a:t>
+            </a:r>
+          </a:p>
+        </p:txBody>
+      </p:sp>
+      <p:pic>
+        <p:nvPicPr>
+          <p:cNvPr id="19" name="Picture 18" descr="c3a1d706675437f4.png"/>
+          <p:cNvPicPr>
+            <a:picLocks noChangeAspect="1"/>
+          </p:cNvPicPr>
+          <p:nvPr/>
+        </p:nvPicPr>
+        <p:blipFill>
+          <a:blip r:embed="rId5"/>
+          <a:stretch>
+            <a:fillRect/>
+          </a:stretch>
+        </p:blipFill>
+        <p:spPr>
+          <a:xfrm>
+            <a:off x="5781658" y="3339083"/>
+            <a:ext cx="1517904" cy="335280"/>
+          </a:xfrm>
+          <a:prstGeom prst="rect">
+            <a:avLst/>
+          </a:prstGeom>
+        </p:spPr>
+      </p:pic>
+      <p:sp>
+        <p:nvSpPr>
+          <p:cNvPr id="20" name="TextBox 19"/>
+          <p:cNvSpPr txBox="1"/>
+          <p:nvPr/>
+        </p:nvSpPr>
+        <p:spPr>
+          <a:xfrm>
+            <a:off x="960120" y="3997451"/>
+            <a:ext cx="548640" cy="457200"/>
+          </a:xfrm>
+          <a:prstGeom prst="rect">
+            <a:avLst/>
+          </a:prstGeom>
+          <a:noFill/>
+        </p:spPr>
+        <p:txBody>
+          <a:bodyPr wrap="square" lIns="45720" rIns="45720" tIns="18288" bIns="18288" anchor="ctr">
             <a:spAutoFit/>
           </a:bodyPr>
           <a:lstStyle/>
           <a:p>
             <a:pPr algn="l"/>
             <a:r>
-              <a:rPr sz="2100" b="1" i="0">
+              <a:rPr sz="2300" b="1" i="0">
                 <a:solidFill>
                   <a:srgbClr val="0B5394"/>
                 </a:solidFill>
                 <a:latin typeface="Century Schoolbook"/>
               </a:rPr>
-              <a:t>3.</a:t>
-            </a:r>
-          </a:p>
-        </p:txBody>
-      </p:sp>
-      <p:sp>
-        <p:nvSpPr>
-          <p:cNvPr id="13" name="TextBox 12"/>
-          <p:cNvSpPr txBox="1"/>
-          <p:nvPr/>
-        </p:nvSpPr>
-        <p:spPr>
-          <a:xfrm>
-            <a:off x="1554480" y="3090672"/>
-            <a:ext cx="9829800" cy="411480"/>
-          </a:xfrm>
-          <a:prstGeom prst="rect">
-            <a:avLst/>
-          </a:prstGeom>
-          <a:noFill/>
-        </p:spPr>
-        <p:txBody>
-          <a:bodyPr wrap="square" lIns="45720" rIns="45720" tIns="18288" bIns="18288" anchor="t">
+              <a:t>5.</a:t>
+            </a:r>
+          </a:p>
+        </p:txBody>
+      </p:sp>
+      <p:sp>
+        <p:nvSpPr>
+          <p:cNvPr id="21" name="TextBox 20"/>
+          <p:cNvSpPr txBox="1"/>
+          <p:nvPr/>
+        </p:nvSpPr>
+        <p:spPr>
+          <a:xfrm>
+            <a:off x="1554480" y="3997451"/>
+            <a:ext cx="4364338" cy="457200"/>
+          </a:xfrm>
+          <a:prstGeom prst="rect">
+            <a:avLst/>
+          </a:prstGeom>
+          <a:noFill/>
+        </p:spPr>
+        <p:txBody>
+          <a:bodyPr wrap="none" lIns="45720" rIns="45720" tIns="18288" bIns="18288" anchor="ctr">
+            <a:noAutofit/>
+          </a:bodyPr>
+          <a:lstStyle/>
+          <a:p>
+            <a:pPr algn="l"/>
+            <a:r>
+              <a:rPr sz="2300" b="0" i="0">
+                <a:solidFill>
+                  <a:srgbClr val="1A1A1A"/>
+                </a:solidFill>
+                <a:latin typeface="Century Schoolbook"/>
+              </a:rPr>
+              <a:t>Write as a single monomial.  </a:t>
+            </a:r>
+          </a:p>
+        </p:txBody>
+      </p:sp>
+      <p:pic>
+        <p:nvPicPr>
+          <p:cNvPr id="22" name="Picture 21" descr="0130a9e18efff1cc.png"/>
+          <p:cNvPicPr>
+            <a:picLocks noChangeAspect="1"/>
+          </p:cNvPicPr>
+          <p:nvPr/>
+        </p:nvPicPr>
+        <p:blipFill>
+          <a:blip r:embed="rId6"/>
+          <a:stretch>
+            <a:fillRect/>
+          </a:stretch>
+        </p:blipFill>
+        <p:spPr>
+          <a:xfrm>
+            <a:off x="5781658" y="3895344"/>
+            <a:ext cx="630936" cy="661416"/>
+          </a:xfrm>
+          <a:prstGeom prst="rect">
+            <a:avLst/>
+          </a:prstGeom>
+        </p:spPr>
+      </p:pic>
+      <p:sp>
+        <p:nvSpPr>
+          <p:cNvPr id="23" name="TextBox 22"/>
+          <p:cNvSpPr txBox="1"/>
+          <p:nvPr/>
+        </p:nvSpPr>
+        <p:spPr>
+          <a:xfrm>
+            <a:off x="960120" y="4716780"/>
+            <a:ext cx="548640" cy="457200"/>
+          </a:xfrm>
+          <a:prstGeom prst="rect">
+            <a:avLst/>
+          </a:prstGeom>
+          <a:noFill/>
+        </p:spPr>
+        <p:txBody>
+          <a:bodyPr wrap="square" lIns="45720" rIns="45720" tIns="18288" bIns="18288" anchor="ctr">
             <a:spAutoFit/>
           </a:bodyPr>
           <a:lstStyle/>
           <a:p>
             <a:pPr algn="l"/>
             <a:r>
-              <a:rPr sz="2100" b="0" i="0">
+              <a:rPr sz="2300" b="1" i="0">
+                <a:solidFill>
+                  <a:srgbClr val="0B5394"/>
+                </a:solidFill>
+                <a:latin typeface="Century Schoolbook"/>
+              </a:rPr>
+              <a:t>6.</a:t>
+            </a:r>
+          </a:p>
+        </p:txBody>
+      </p:sp>
+      <p:sp>
+        <p:nvSpPr>
+          <p:cNvPr id="24" name="TextBox 23"/>
+          <p:cNvSpPr txBox="1"/>
+          <p:nvPr/>
+        </p:nvSpPr>
+        <p:spPr>
+          <a:xfrm>
+            <a:off x="1554480" y="4716780"/>
+            <a:ext cx="2720291" cy="457200"/>
+          </a:xfrm>
+          <a:prstGeom prst="rect">
+            <a:avLst/>
+          </a:prstGeom>
+          <a:noFill/>
+        </p:spPr>
+        <p:txBody>
+          <a:bodyPr wrap="none" lIns="45720" rIns="45720" tIns="18288" bIns="18288" anchor="ctr">
+            <a:noAutofit/>
+          </a:bodyPr>
+          <a:lstStyle/>
+          <a:p>
+            <a:pPr algn="l"/>
+            <a:r>
+              <a:rPr sz="2300" b="0" i="0">
                 <a:solidFill>
                   <a:srgbClr val="1A1A1A"/>
                 </a:solidFill>
                 <a:latin typeface="Century Schoolbook"/>
               </a:rPr>
-              <a:t>Silence until the six minutes are up.</a:t>
-            </a:r>
-          </a:p>
-        </p:txBody>
-      </p:sp>
+              <a:t>Find the value of </a:t>
+            </a:r>
+          </a:p>
+        </p:txBody>
+      </p:sp>
+      <p:pic>
+        <p:nvPicPr>
+          <p:cNvPr id="25" name="Picture 24" descr="0afe177f69dd5e06.png"/>
+          <p:cNvPicPr>
+            <a:picLocks noChangeAspect="1"/>
+          </p:cNvPicPr>
+          <p:nvPr/>
+        </p:nvPicPr>
+        <p:blipFill>
+          <a:blip r:embed="rId7"/>
+          <a:stretch>
+            <a:fillRect/>
+          </a:stretch>
+        </p:blipFill>
+        <p:spPr>
+          <a:xfrm>
+            <a:off x="4137611" y="4870704"/>
+            <a:ext cx="155448" cy="149352"/>
+          </a:xfrm>
+          <a:prstGeom prst="rect">
+            <a:avLst/>
+          </a:prstGeom>
+        </p:spPr>
+      </p:pic>
+      <p:sp>
+        <p:nvSpPr>
+          <p:cNvPr id="26" name="TextBox 25"/>
+          <p:cNvSpPr txBox="1"/>
+          <p:nvPr/>
+        </p:nvSpPr>
+        <p:spPr>
+          <a:xfrm>
+            <a:off x="4293059" y="4716780"/>
+            <a:ext cx="468561" cy="457200"/>
+          </a:xfrm>
+          <a:prstGeom prst="rect">
+            <a:avLst/>
+          </a:prstGeom>
+          <a:noFill/>
+        </p:spPr>
+        <p:txBody>
+          <a:bodyPr wrap="none" lIns="45720" rIns="45720" tIns="18288" bIns="18288" anchor="ctr">
+            <a:noAutofit/>
+          </a:bodyPr>
+          <a:lstStyle/>
+          <a:p>
+            <a:pPr algn="l"/>
+            <a:r>
+              <a:rPr sz="2300" b="0" i="0">
+                <a:solidFill>
+                  <a:srgbClr val="1A1A1A"/>
+                </a:solidFill>
+                <a:latin typeface="Century Schoolbook"/>
+              </a:rPr>
+              <a:t>.  </a:t>
+            </a:r>
+          </a:p>
+        </p:txBody>
+      </p:sp>
+      <p:pic>
+        <p:nvPicPr>
+          <p:cNvPr id="27" name="Picture 26" descr="a0f60224273681e1.png"/>
+          <p:cNvPicPr>
+            <a:picLocks noChangeAspect="1"/>
+          </p:cNvPicPr>
+          <p:nvPr/>
+        </p:nvPicPr>
+        <p:blipFill>
+          <a:blip r:embed="rId8"/>
+          <a:stretch>
+            <a:fillRect/>
+          </a:stretch>
+        </p:blipFill>
+        <p:spPr>
+          <a:xfrm>
+            <a:off x="4624460" y="4774692"/>
+            <a:ext cx="1511808" cy="341376"/>
+          </a:xfrm>
+          <a:prstGeom prst="rect">
+            <a:avLst/>
+          </a:prstGeom>
+        </p:spPr>
+      </p:pic>
     </p:spTree>
   </p:cSld>
   <p:clrMapOvr>

--- a/a7/build/out/u3/A7 3.T1 Exponent Laws with Variable Bases - Slides.pptx
+++ b/a7/build/out/u3/A7 3.T1 Exponent Laws with Variable Bases - Slides.pptx
@@ -3145,11 +3145,11 @@
           <a:p>
             <a:pPr algn="ctr"/>
             <a:r>
-              <a:rPr sz="1500" b="0" i="0">
+              <a:rPr sz="1420" b="0" i="0">
                 <a:solidFill>
                   <a:srgbClr val="6B6B6B"/>
                 </a:solidFill>
-                <a:latin typeface="Century Schoolbook"/>
+                <a:latin typeface="Lexend"/>
               </a:rPr>
               <a:t>GRADE 7 ACCELERATED  ·  UNIT 3  ·  THREAD A · DAY 1</a:t>
             </a:r>
@@ -3180,11 +3180,11 @@
           <a:p>
             <a:pPr algn="ctr"/>
             <a:r>
-              <a:rPr sz="3400" b="1" i="0">
+              <a:rPr sz="3229" b="1" i="0">
                 <a:solidFill>
                   <a:srgbClr val="1A1A1A"/>
                 </a:solidFill>
-                <a:latin typeface="Century Schoolbook"/>
+                <a:latin typeface="Lexend"/>
               </a:rPr>
               <a:t>Exponent Laws with Variable Bases</a:t>
             </a:r>
@@ -3285,11 +3285,11 @@
           <a:p>
             <a:pPr algn="ctr"/>
             <a:r>
-              <a:rPr sz="1600" b="1" i="0">
+              <a:rPr sz="1520" b="1" i="0">
                 <a:solidFill>
                   <a:srgbClr val="1A1A1A"/>
                 </a:solidFill>
-                <a:latin typeface="Century Schoolbook"/>
+                <a:latin typeface="Lexend"/>
               </a:rPr>
               <a:t>MA.8.AR.1.1</a:t>
             </a:r>
@@ -3320,11 +3320,11 @@
           <a:p>
             <a:pPr algn="ctr"/>
             <a:r>
-              <a:rPr sz="1900" b="0" i="1">
+              <a:rPr sz="1810" b="0" i="0">
                 <a:solidFill>
                   <a:srgbClr val="1A1A1A"/>
                 </a:solidFill>
-                <a:latin typeface="Century Schoolbook"/>
+                <a:latin typeface="Lexend"/>
               </a:rPr>
               <a:t>I can multiply and divide monomials, and raise a monomial to a power, by applying the laws of exponents to variable bases.</a:t>
             </a:r>
@@ -3390,11 +3390,11 @@
           <a:p>
             <a:pPr algn="l"/>
             <a:r>
-              <a:rPr sz="1100" b="0" i="1">
+              <a:rPr sz="1040" b="0" i="0">
                 <a:solidFill>
                   <a:srgbClr val="6B6B6B"/>
                 </a:solidFill>
-                <a:latin typeface="Century Schoolbook"/>
+                <a:latin typeface="Lexend"/>
               </a:rPr>
               <a:t>Grade 7 Accelerated · Unit 3 · Thread A · Day 1 — Exponent Laws with Variable Bases</a:t>
             </a:r>
@@ -3425,11 +3425,11 @@
           <a:p>
             <a:pPr algn="r"/>
             <a:r>
-              <a:rPr sz="1100" b="0" i="0">
+              <a:rPr sz="1040" b="0" i="0">
                 <a:solidFill>
                   <a:srgbClr val="6B6B6B"/>
                 </a:solidFill>
-                <a:latin typeface="Century Schoolbook"/>
+                <a:latin typeface="Lexend"/>
               </a:rPr>
               <a:t>1</a:t>
             </a:r>
@@ -3478,11 +3478,11 @@
           <a:p>
             <a:pPr algn="l"/>
             <a:r>
-              <a:rPr sz="3600" b="1" i="0">
+              <a:rPr sz="3420" b="1" i="0">
                 <a:solidFill>
                   <a:srgbClr val="1A1A1A"/>
                 </a:solidFill>
-                <a:latin typeface="Century Schoolbook"/>
+                <a:latin typeface="Lexend"/>
               </a:rPr>
               <a:t>Your Turn</a:t>
             </a:r>
@@ -3618,11 +3618,11 @@
           <a:p>
             <a:pPr algn="l"/>
             <a:r>
-              <a:rPr sz="1100" b="0" i="1">
+              <a:rPr sz="1040" b="0" i="0">
                 <a:solidFill>
                   <a:srgbClr val="6B6B6B"/>
                 </a:solidFill>
-                <a:latin typeface="Century Schoolbook"/>
+                <a:latin typeface="Lexend"/>
               </a:rPr>
               <a:t>Grade 7 Accelerated · Unit 3 · Thread A · Day 1 — Exponent Laws with Variable Bases</a:t>
             </a:r>
@@ -3653,11 +3653,11 @@
           <a:p>
             <a:pPr algn="r"/>
             <a:r>
-              <a:rPr sz="1100" b="0" i="0">
+              <a:rPr sz="1040" b="0" i="0">
                 <a:solidFill>
                   <a:srgbClr val="6B6B6B"/>
                 </a:solidFill>
-                <a:latin typeface="Century Schoolbook"/>
+                <a:latin typeface="Lexend"/>
               </a:rPr>
               <a:t>10</a:t>
             </a:r>
@@ -3666,7 +3666,7 @@
       </p:sp>
       <p:pic>
         <p:nvPicPr>
-          <p:cNvPr id="8" name="Picture 7" descr="28700badd3bdf097.png"/>
+          <p:cNvPr id="8" name="Picture 7" descr="44018e03469d2a5d.png"/>
           <p:cNvPicPr>
             <a:picLocks noChangeAspect="1"/>
           </p:cNvPicPr>
@@ -3680,8 +3680,8 @@
         </p:blipFill>
         <p:spPr>
           <a:xfrm>
-            <a:off x="4629911" y="2194560"/>
-            <a:ext cx="2901696" cy="518160"/>
+            <a:off x="4515611" y="1600200"/>
+            <a:ext cx="3130296" cy="509016"/>
           </a:xfrm>
           <a:prstGeom prst="rect">
             <a:avLst/>
@@ -3696,7 +3696,7 @@
         </p:nvSpPr>
         <p:spPr>
           <a:xfrm>
-            <a:off x="777240" y="3215640"/>
+            <a:off x="777240" y="2612136"/>
             <a:ext cx="10607040" cy="429370"/>
           </a:xfrm>
           <a:prstGeom prst="rect">
@@ -3712,11 +3712,11 @@
           <a:p>
             <a:pPr algn="ctr"/>
             <a:r>
-              <a:rPr sz="2400" b="1" i="0">
+              <a:rPr sz="2280" b="1" i="0">
                 <a:solidFill>
                   <a:srgbClr val="1A1A1A"/>
                 </a:solidFill>
-                <a:latin typeface="Century Schoolbook"/>
+                <a:latin typeface="Lexend"/>
               </a:rPr>
               <a:t>Write an equivalent expression as a single monomial.</a:t>
             </a:r>
@@ -3731,7 +3731,184 @@
         </p:nvSpPr>
         <p:spPr>
           <a:xfrm>
-            <a:off x="777240" y="4572000"/>
+            <a:off x="4217719" y="3201526"/>
+            <a:ext cx="1841196" cy="457200"/>
+          </a:xfrm>
+          <a:prstGeom prst="rect">
+            <a:avLst/>
+          </a:prstGeom>
+          <a:noFill/>
+        </p:spPr>
+        <p:txBody>
+          <a:bodyPr wrap="none" lIns="45720" rIns="45720" tIns="18288" bIns="18288" anchor="ctr">
+            <a:noAutofit/>
+          </a:bodyPr>
+          <a:lstStyle/>
+          <a:p>
+            <a:pPr algn="l"/>
+            <a:r>
+              <a:rPr sz="2330" b="0" i="0">
+                <a:solidFill>
+                  <a:srgbClr val="1A1A1A"/>
+                </a:solidFill>
+                <a:latin typeface="Lexend"/>
+              </a:rPr>
+              <a:t>Numbers:  </a:t>
+            </a:r>
+          </a:p>
+        </p:txBody>
+      </p:sp>
+      <p:pic>
+        <p:nvPicPr>
+          <p:cNvPr id="11" name="Picture 10" descr="1f9f47243b423b43.png"/>
+          <p:cNvPicPr>
+            <a:picLocks noChangeAspect="1"/>
+          </p:cNvPicPr>
+          <p:nvPr/>
+        </p:nvPicPr>
+        <p:blipFill>
+          <a:blip r:embed="rId3"/>
+          <a:stretch>
+            <a:fillRect/>
+          </a:stretch>
+        </p:blipFill>
+        <p:spPr>
+          <a:xfrm>
+            <a:off x="5921756" y="3323446"/>
+            <a:ext cx="1072896" cy="213360"/>
+          </a:xfrm>
+          <a:prstGeom prst="rect">
+            <a:avLst/>
+          </a:prstGeom>
+        </p:spPr>
+      </p:pic>
+      <p:sp>
+        <p:nvSpPr>
+          <p:cNvPr id="12" name="TextBox 11"/>
+          <p:cNvSpPr txBox="1"/>
+          <p:nvPr/>
+        </p:nvSpPr>
+        <p:spPr>
+          <a:xfrm>
+            <a:off x="4217719" y="3704446"/>
+            <a:ext cx="1508085" cy="457200"/>
+          </a:xfrm>
+          <a:prstGeom prst="rect">
+            <a:avLst/>
+          </a:prstGeom>
+          <a:noFill/>
+        </p:spPr>
+        <p:txBody>
+          <a:bodyPr wrap="none" lIns="45720" rIns="45720" tIns="18288" bIns="18288" anchor="ctr">
+            <a:noAutofit/>
+          </a:bodyPr>
+          <a:lstStyle/>
+          <a:p>
+            <a:pPr algn="l"/>
+            <a:r>
+              <a:rPr sz="2330" b="0" i="0">
+                <a:solidFill>
+                  <a:srgbClr val="1A1A1A"/>
+                </a:solidFill>
+                <a:latin typeface="Lexend"/>
+              </a:rPr>
+              <a:t>The a's:  </a:t>
+            </a:r>
+          </a:p>
+        </p:txBody>
+      </p:sp>
+      <p:pic>
+        <p:nvPicPr>
+          <p:cNvPr id="13" name="Picture 12" descr="5f3fb78ccfb86d87.png"/>
+          <p:cNvPicPr>
+            <a:picLocks noChangeAspect="1"/>
+          </p:cNvPicPr>
+          <p:nvPr/>
+        </p:nvPicPr>
+        <p:blipFill>
+          <a:blip r:embed="rId4"/>
+          <a:stretch>
+            <a:fillRect/>
+          </a:stretch>
+        </p:blipFill>
+        <p:spPr>
+          <a:xfrm>
+            <a:off x="5588645" y="3801982"/>
+            <a:ext cx="2282952" cy="262128"/>
+          </a:xfrm>
+          <a:prstGeom prst="rect">
+            <a:avLst/>
+          </a:prstGeom>
+        </p:spPr>
+      </p:pic>
+      <p:sp>
+        <p:nvSpPr>
+          <p:cNvPr id="14" name="TextBox 13"/>
+          <p:cNvSpPr txBox="1"/>
+          <p:nvPr/>
+        </p:nvSpPr>
+        <p:spPr>
+          <a:xfrm>
+            <a:off x="4217719" y="4207366"/>
+            <a:ext cx="1507136" cy="457200"/>
+          </a:xfrm>
+          <a:prstGeom prst="rect">
+            <a:avLst/>
+          </a:prstGeom>
+          <a:noFill/>
+        </p:spPr>
+        <p:txBody>
+          <a:bodyPr wrap="none" lIns="45720" rIns="45720" tIns="18288" bIns="18288" anchor="ctr">
+            <a:noAutofit/>
+          </a:bodyPr>
+          <a:lstStyle/>
+          <a:p>
+            <a:pPr algn="l"/>
+            <a:r>
+              <a:rPr sz="2330" b="0" i="0">
+                <a:solidFill>
+                  <a:srgbClr val="1A1A1A"/>
+                </a:solidFill>
+                <a:latin typeface="Lexend"/>
+              </a:rPr>
+              <a:t>The b's:  </a:t>
+            </a:r>
+          </a:p>
+        </p:txBody>
+      </p:sp>
+      <p:pic>
+        <p:nvPicPr>
+          <p:cNvPr id="15" name="Picture 14" descr="795cd8a8804113ae.png"/>
+          <p:cNvPicPr>
+            <a:picLocks noChangeAspect="1"/>
+          </p:cNvPicPr>
+          <p:nvPr/>
+        </p:nvPicPr>
+        <p:blipFill>
+          <a:blip r:embed="rId5"/>
+          <a:stretch>
+            <a:fillRect/>
+          </a:stretch>
+        </p:blipFill>
+        <p:spPr>
+          <a:xfrm>
+            <a:off x="5587696" y="4304902"/>
+            <a:ext cx="2362200" cy="262128"/>
+          </a:xfrm>
+          <a:prstGeom prst="rect">
+            <a:avLst/>
+          </a:prstGeom>
+        </p:spPr>
+      </p:pic>
+      <p:sp>
+        <p:nvSpPr>
+          <p:cNvPr id="16" name="TextBox 15"/>
+          <p:cNvSpPr txBox="1"/>
+          <p:nvPr/>
+        </p:nvSpPr>
+        <p:spPr>
+          <a:xfrm>
+            <a:off x="777240" y="4778866"/>
             <a:ext cx="10607040" cy="548640"/>
           </a:xfrm>
           <a:prstGeom prst="rect">
@@ -3747,38 +3924,38 @@
           <a:p>
             <a:pPr algn="ctr"/>
             <a:r>
-              <a:rPr sz="3200" b="1" i="0">
+              <a:rPr sz="3040" b="1" i="0">
                 <a:solidFill>
                   <a:srgbClr val="9E1B32"/>
                 </a:solidFill>
-                <a:latin typeface="Century Schoolbook"/>
+                <a:latin typeface="Lexend"/>
               </a:rPr>
               <a:t>Answer:   15a</a:t>
             </a:r>
             <a:r>
-              <a:rPr sz="3200" b="1" i="0" baseline="30000">
+              <a:rPr sz="3040" b="1" i="0" baseline="30000">
                 <a:solidFill>
                   <a:srgbClr val="9E1B32"/>
                 </a:solidFill>
-                <a:latin typeface="Century Schoolbook"/>
+                <a:latin typeface="Lexend"/>
               </a:rPr>
               <a:t>3</a:t>
             </a:r>
             <a:r>
-              <a:rPr sz="3200" b="1" i="0">
+              <a:rPr sz="3040" b="1" i="0">
                 <a:solidFill>
                   <a:srgbClr val="9E1B32"/>
                 </a:solidFill>
-                <a:latin typeface="Century Schoolbook"/>
+                <a:latin typeface="Lexend"/>
               </a:rPr>
               <a:t>b</a:t>
             </a:r>
             <a:r>
-              <a:rPr sz="3200" b="1" i="0" baseline="30000">
+              <a:rPr sz="3040" b="1" i="0" baseline="30000">
                 <a:solidFill>
                   <a:srgbClr val="9E1B32"/>
                 </a:solidFill>
-                <a:latin typeface="Century Schoolbook"/>
+                <a:latin typeface="Lexend"/>
               </a:rPr>
               <a:t>6</a:t>
             </a:r>
@@ -3827,11 +4004,11 @@
           <a:p>
             <a:pPr algn="l"/>
             <a:r>
-              <a:rPr sz="3600" b="1" i="0">
+              <a:rPr sz="3420" b="1" i="0">
                 <a:solidFill>
                   <a:srgbClr val="1A1A1A"/>
                 </a:solidFill>
-                <a:latin typeface="Century Schoolbook"/>
+                <a:latin typeface="Lexend"/>
               </a:rPr>
               <a:t>Example 2</a:t>
             </a:r>
@@ -3967,11 +4144,11 @@
           <a:p>
             <a:pPr algn="l"/>
             <a:r>
-              <a:rPr sz="1100" b="0" i="1">
+              <a:rPr sz="1040" b="0" i="0">
                 <a:solidFill>
                   <a:srgbClr val="6B6B6B"/>
                 </a:solidFill>
-                <a:latin typeface="Century Schoolbook"/>
+                <a:latin typeface="Lexend"/>
               </a:rPr>
               <a:t>Grade 7 Accelerated · Unit 3 · Thread A · Day 1 — Exponent Laws with Variable Bases</a:t>
             </a:r>
@@ -4002,11 +4179,11 @@
           <a:p>
             <a:pPr algn="r"/>
             <a:r>
-              <a:rPr sz="1100" b="0" i="0">
+              <a:rPr sz="1040" b="0" i="0">
                 <a:solidFill>
                   <a:srgbClr val="6B6B6B"/>
                 </a:solidFill>
-                <a:latin typeface="Century Schoolbook"/>
+                <a:latin typeface="Lexend"/>
               </a:rPr>
               <a:t>11</a:t>
             </a:r>
@@ -4015,7 +4192,7 @@
       </p:sp>
       <p:pic>
         <p:nvPicPr>
-          <p:cNvPr id="8" name="Picture 7" descr="b9dec83acdd34052.png"/>
+          <p:cNvPr id="8" name="Picture 7" descr="b9b17b427698fae8.png"/>
           <p:cNvPicPr>
             <a:picLocks noChangeAspect="1"/>
           </p:cNvPicPr>
@@ -4029,8 +4206,8 @@
         </p:blipFill>
         <p:spPr>
           <a:xfrm>
-            <a:off x="5417820" y="2103120"/>
-            <a:ext cx="1325880" cy="890016"/>
+            <a:off x="5376671" y="2103120"/>
+            <a:ext cx="1408176" cy="865632"/>
           </a:xfrm>
           <a:prstGeom prst="rect">
             <a:avLst/>
@@ -4045,7 +4222,7 @@
         </p:nvSpPr>
         <p:spPr>
           <a:xfrm>
-            <a:off x="777240" y="3496056"/>
+            <a:off x="777240" y="3471672"/>
             <a:ext cx="10607040" cy="429370"/>
           </a:xfrm>
           <a:prstGeom prst="rect">
@@ -4061,11 +4238,11 @@
           <a:p>
             <a:pPr algn="ctr"/>
             <a:r>
-              <a:rPr sz="2400" b="1" i="0">
+              <a:rPr sz="2280" b="1" i="0">
                 <a:solidFill>
                   <a:srgbClr val="1A1A1A"/>
                 </a:solidFill>
-                <a:latin typeface="Century Schoolbook"/>
+                <a:latin typeface="Lexend"/>
               </a:rPr>
               <a:t>Write an equivalent expression as a single monomial.</a:t>
             </a:r>
@@ -4114,11 +4291,11 @@
           <a:p>
             <a:pPr algn="l"/>
             <a:r>
-              <a:rPr sz="3600" b="1" i="0">
+              <a:rPr sz="3420" b="1" i="0">
                 <a:solidFill>
                   <a:srgbClr val="1A1A1A"/>
                 </a:solidFill>
-                <a:latin typeface="Century Schoolbook"/>
+                <a:latin typeface="Lexend"/>
               </a:rPr>
               <a:t>Example 2</a:t>
             </a:r>
@@ -4254,11 +4431,11 @@
           <a:p>
             <a:pPr algn="l"/>
             <a:r>
-              <a:rPr sz="1100" b="0" i="1">
+              <a:rPr sz="1040" b="0" i="0">
                 <a:solidFill>
                   <a:srgbClr val="6B6B6B"/>
                 </a:solidFill>
-                <a:latin typeface="Century Schoolbook"/>
+                <a:latin typeface="Lexend"/>
               </a:rPr>
               <a:t>Grade 7 Accelerated · Unit 3 · Thread A · Day 1 — Exponent Laws with Variable Bases</a:t>
             </a:r>
@@ -4289,11 +4466,11 @@
           <a:p>
             <a:pPr algn="r"/>
             <a:r>
-              <a:rPr sz="1100" b="0" i="0">
+              <a:rPr sz="1040" b="0" i="0">
                 <a:solidFill>
                   <a:srgbClr val="6B6B6B"/>
                 </a:solidFill>
-                <a:latin typeface="Century Schoolbook"/>
+                <a:latin typeface="Lexend"/>
               </a:rPr>
               <a:t>12</a:t>
             </a:r>
@@ -4302,7 +4479,7 @@
       </p:sp>
       <p:pic>
         <p:nvPicPr>
-          <p:cNvPr id="8" name="Picture 7" descr="d5a2c92467f9be56.png"/>
+          <p:cNvPr id="8" name="Picture 7" descr="c921a6ad516c950a.png"/>
           <p:cNvPicPr>
             <a:picLocks noChangeAspect="1"/>
           </p:cNvPicPr>
@@ -4317,7 +4494,7 @@
         <p:spPr>
           <a:xfrm>
             <a:off x="1828800" y="1920240"/>
-            <a:ext cx="2941320" cy="411480"/>
+            <a:ext cx="3087624" cy="414528"/>
           </a:xfrm>
           <a:prstGeom prst="rect">
             <a:avLst/>
@@ -4326,7 +4503,7 @@
       </p:pic>
       <p:pic>
         <p:nvPicPr>
-          <p:cNvPr id="9" name="Picture 8" descr="8affb1101a179d43.png"/>
+          <p:cNvPr id="9" name="Picture 8" descr="69e7633d2c21fbf2.png"/>
           <p:cNvPicPr>
             <a:picLocks noChangeAspect="1"/>
           </p:cNvPicPr>
@@ -4340,8 +4517,8 @@
         </p:blipFill>
         <p:spPr>
           <a:xfrm>
-            <a:off x="1828800" y="2606040"/>
-            <a:ext cx="5541264" cy="816864"/>
+            <a:off x="1828800" y="2609087"/>
+            <a:ext cx="5672328" cy="789432"/>
           </a:xfrm>
           <a:prstGeom prst="rect">
             <a:avLst/>
@@ -4372,38 +4549,38 @@
           <a:p>
             <a:pPr algn="ctr"/>
             <a:r>
-              <a:rPr sz="3200" b="1" i="0">
+              <a:rPr sz="3040" b="1" i="0">
                 <a:solidFill>
                   <a:srgbClr val="9E1B32"/>
                 </a:solidFill>
-                <a:latin typeface="Century Schoolbook"/>
+                <a:latin typeface="Lexend"/>
               </a:rPr>
               <a:t>Answer:   3m</a:t>
             </a:r>
             <a:r>
-              <a:rPr sz="3200" b="1" i="0" baseline="30000">
+              <a:rPr sz="3040" b="1" i="0" baseline="30000">
                 <a:solidFill>
                   <a:srgbClr val="9E1B32"/>
                 </a:solidFill>
-                <a:latin typeface="Century Schoolbook"/>
+                <a:latin typeface="Lexend"/>
               </a:rPr>
               <a:t>2</a:t>
             </a:r>
             <a:r>
-              <a:rPr sz="3200" b="1" i="0">
+              <a:rPr sz="3040" b="1" i="0">
                 <a:solidFill>
                   <a:srgbClr val="9E1B32"/>
                 </a:solidFill>
-                <a:latin typeface="Century Schoolbook"/>
+                <a:latin typeface="Lexend"/>
               </a:rPr>
               <a:t>n</a:t>
             </a:r>
             <a:r>
-              <a:rPr sz="3200" b="1" i="0" baseline="30000">
+              <a:rPr sz="3040" b="1" i="0" baseline="30000">
                 <a:solidFill>
                   <a:srgbClr val="9E1B32"/>
                 </a:solidFill>
-                <a:latin typeface="Century Schoolbook"/>
+                <a:latin typeface="Lexend"/>
               </a:rPr>
               <a:t>2</a:t>
             </a:r>
@@ -4452,11 +4629,11 @@
           <a:p>
             <a:pPr algn="l"/>
             <a:r>
-              <a:rPr sz="3600" b="1" i="0">
+              <a:rPr sz="3420" b="1" i="0">
                 <a:solidFill>
                   <a:srgbClr val="1A1A1A"/>
                 </a:solidFill>
-                <a:latin typeface="Century Schoolbook"/>
+                <a:latin typeface="Lexend"/>
               </a:rPr>
               <a:t>Your Turn</a:t>
             </a:r>
@@ -4592,11 +4769,11 @@
           <a:p>
             <a:pPr algn="l"/>
             <a:r>
-              <a:rPr sz="1100" b="0" i="1">
+              <a:rPr sz="1040" b="0" i="0">
                 <a:solidFill>
                   <a:srgbClr val="6B6B6B"/>
                 </a:solidFill>
-                <a:latin typeface="Century Schoolbook"/>
+                <a:latin typeface="Lexend"/>
               </a:rPr>
               <a:t>Grade 7 Accelerated · Unit 3 · Thread A · Day 1 — Exponent Laws with Variable Bases</a:t>
             </a:r>
@@ -4627,11 +4804,11 @@
           <a:p>
             <a:pPr algn="r"/>
             <a:r>
-              <a:rPr sz="1100" b="0" i="0">
+              <a:rPr sz="1040" b="0" i="0">
                 <a:solidFill>
                   <a:srgbClr val="6B6B6B"/>
                 </a:solidFill>
-                <a:latin typeface="Century Schoolbook"/>
+                <a:latin typeface="Lexend"/>
               </a:rPr>
               <a:t>13</a:t>
             </a:r>
@@ -4640,7 +4817,7 @@
       </p:sp>
       <p:pic>
         <p:nvPicPr>
-          <p:cNvPr id="8" name="Picture 7" descr="c61e723e73851ee8.png"/>
+          <p:cNvPr id="8" name="Picture 7" descr="8188cd9592de45bd.png"/>
           <p:cNvPicPr>
             <a:picLocks noChangeAspect="1"/>
           </p:cNvPicPr>
@@ -4654,8 +4831,8 @@
         </p:blipFill>
         <p:spPr>
           <a:xfrm>
-            <a:off x="5434583" y="2194560"/>
-            <a:ext cx="1292352" cy="1216152"/>
+            <a:off x="5398007" y="1600200"/>
+            <a:ext cx="1365504" cy="1191768"/>
           </a:xfrm>
           <a:prstGeom prst="rect">
             <a:avLst/>
@@ -4670,7 +4847,7 @@
         </p:nvSpPr>
         <p:spPr>
           <a:xfrm>
-            <a:off x="777240" y="3913632"/>
+            <a:off x="777240" y="3294888"/>
             <a:ext cx="10607040" cy="429370"/>
           </a:xfrm>
           <a:prstGeom prst="rect">
@@ -4686,11 +4863,11 @@
           <a:p>
             <a:pPr algn="ctr"/>
             <a:r>
-              <a:rPr sz="2400" b="1" i="0">
+              <a:rPr sz="2280" b="1" i="0">
                 <a:solidFill>
                   <a:srgbClr val="1A1A1A"/>
                 </a:solidFill>
-                <a:latin typeface="Century Schoolbook"/>
+                <a:latin typeface="Lexend"/>
               </a:rPr>
               <a:t>Write an equivalent expression as a single monomial.</a:t>
             </a:r>
@@ -4739,11 +4916,11 @@
           <a:p>
             <a:pPr algn="l"/>
             <a:r>
-              <a:rPr sz="3600" b="1" i="0">
+              <a:rPr sz="3420" b="1" i="0">
                 <a:solidFill>
                   <a:srgbClr val="1A1A1A"/>
                 </a:solidFill>
-                <a:latin typeface="Century Schoolbook"/>
+                <a:latin typeface="Lexend"/>
               </a:rPr>
               <a:t>Your Turn</a:t>
             </a:r>
@@ -4879,11 +5056,11 @@
           <a:p>
             <a:pPr algn="l"/>
             <a:r>
-              <a:rPr sz="1100" b="0" i="1">
+              <a:rPr sz="1040" b="0" i="0">
                 <a:solidFill>
                   <a:srgbClr val="6B6B6B"/>
                 </a:solidFill>
-                <a:latin typeface="Century Schoolbook"/>
+                <a:latin typeface="Lexend"/>
               </a:rPr>
               <a:t>Grade 7 Accelerated · Unit 3 · Thread A · Day 1 — Exponent Laws with Variable Bases</a:t>
             </a:r>
@@ -4914,11 +5091,11 @@
           <a:p>
             <a:pPr algn="r"/>
             <a:r>
-              <a:rPr sz="1100" b="0" i="0">
+              <a:rPr sz="1040" b="0" i="0">
                 <a:solidFill>
                   <a:srgbClr val="6B6B6B"/>
                 </a:solidFill>
-                <a:latin typeface="Century Schoolbook"/>
+                <a:latin typeface="Lexend"/>
               </a:rPr>
               <a:t>14</a:t>
             </a:r>
@@ -4927,7 +5104,7 @@
       </p:sp>
       <p:pic>
         <p:nvPicPr>
-          <p:cNvPr id="8" name="Picture 7" descr="192ab9962e6dc882.png"/>
+          <p:cNvPr id="8" name="Picture 7" descr="3fd6aa4af28a3902.png"/>
           <p:cNvPicPr>
             <a:picLocks noChangeAspect="1"/>
           </p:cNvPicPr>
@@ -4941,8 +5118,8 @@
         </p:blipFill>
         <p:spPr>
           <a:xfrm>
-            <a:off x="5436107" y="2194560"/>
-            <a:ext cx="1289304" cy="1213104"/>
+            <a:off x="5399531" y="1600200"/>
+            <a:ext cx="1362456" cy="1191768"/>
           </a:xfrm>
           <a:prstGeom prst="rect">
             <a:avLst/>
@@ -4957,7 +5134,7 @@
         </p:nvSpPr>
         <p:spPr>
           <a:xfrm>
-            <a:off x="777240" y="3910583"/>
+            <a:off x="777240" y="3294888"/>
             <a:ext cx="10607040" cy="429370"/>
           </a:xfrm>
           <a:prstGeom prst="rect">
@@ -4973,11 +5150,11 @@
           <a:p>
             <a:pPr algn="ctr"/>
             <a:r>
-              <a:rPr sz="2400" b="1" i="0">
+              <a:rPr sz="2280" b="1" i="0">
                 <a:solidFill>
                   <a:srgbClr val="1A1A1A"/>
                 </a:solidFill>
-                <a:latin typeface="Century Schoolbook"/>
+                <a:latin typeface="Lexend"/>
               </a:rPr>
               <a:t>Write an equivalent expression as a single monomial.</a:t>
             </a:r>
@@ -4992,7 +5169,184 @@
         </p:nvSpPr>
         <p:spPr>
           <a:xfrm>
-            <a:off x="777240" y="4632562"/>
+            <a:off x="3726286" y="3884278"/>
+            <a:ext cx="1691426" cy="457200"/>
+          </a:xfrm>
+          <a:prstGeom prst="rect">
+            <a:avLst/>
+          </a:prstGeom>
+          <a:noFill/>
+        </p:spPr>
+        <p:txBody>
+          <a:bodyPr wrap="none" lIns="45720" rIns="45720" tIns="18288" bIns="18288" anchor="ctr">
+            <a:noAutofit/>
+          </a:bodyPr>
+          <a:lstStyle/>
+          <a:p>
+            <a:pPr algn="l"/>
+            <a:r>
+              <a:rPr sz="2330" b="0" i="0">
+                <a:solidFill>
+                  <a:srgbClr val="1A1A1A"/>
+                </a:solidFill>
+                <a:latin typeface="Lexend"/>
+              </a:rPr>
+              <a:t>Top first:  </a:t>
+            </a:r>
+          </a:p>
+        </p:txBody>
+      </p:sp>
+      <p:pic>
+        <p:nvPicPr>
+          <p:cNvPr id="11" name="Picture 10" descr="0a070322ca6b9f4b.png"/>
+          <p:cNvPicPr>
+            <a:picLocks noChangeAspect="1"/>
+          </p:cNvPicPr>
+          <p:nvPr/>
+        </p:nvPicPr>
+        <p:blipFill>
+          <a:blip r:embed="rId3"/>
+          <a:stretch>
+            <a:fillRect/>
+          </a:stretch>
+        </p:blipFill>
+        <p:spPr>
+          <a:xfrm>
+            <a:off x="5280553" y="3951334"/>
+            <a:ext cx="3151632" cy="323088"/>
+          </a:xfrm>
+          <a:prstGeom prst="rect">
+            <a:avLst/>
+          </a:prstGeom>
+        </p:spPr>
+      </p:pic>
+      <p:sp>
+        <p:nvSpPr>
+          <p:cNvPr id="12" name="TextBox 11"/>
+          <p:cNvSpPr txBox="1"/>
+          <p:nvPr/>
+        </p:nvSpPr>
+        <p:spPr>
+          <a:xfrm>
+            <a:off x="3726286" y="4387198"/>
+            <a:ext cx="1841196" cy="457200"/>
+          </a:xfrm>
+          <a:prstGeom prst="rect">
+            <a:avLst/>
+          </a:prstGeom>
+          <a:noFill/>
+        </p:spPr>
+        <p:txBody>
+          <a:bodyPr wrap="none" lIns="45720" rIns="45720" tIns="18288" bIns="18288" anchor="ctr">
+            <a:noAutofit/>
+          </a:bodyPr>
+          <a:lstStyle/>
+          <a:p>
+            <a:pPr algn="l"/>
+            <a:r>
+              <a:rPr sz="2330" b="0" i="0">
+                <a:solidFill>
+                  <a:srgbClr val="1A1A1A"/>
+                </a:solidFill>
+                <a:latin typeface="Lexend"/>
+              </a:rPr>
+              <a:t>Numbers:  </a:t>
+            </a:r>
+          </a:p>
+        </p:txBody>
+      </p:sp>
+      <p:pic>
+        <p:nvPicPr>
+          <p:cNvPr id="13" name="Picture 12" descr="6dd81528b6eb1093.png"/>
+          <p:cNvPicPr>
+            <a:picLocks noChangeAspect="1"/>
+          </p:cNvPicPr>
+          <p:nvPr/>
+        </p:nvPicPr>
+        <p:blipFill>
+          <a:blip r:embed="rId4"/>
+          <a:stretch>
+            <a:fillRect/>
+          </a:stretch>
+        </p:blipFill>
+        <p:spPr>
+          <a:xfrm>
+            <a:off x="5430323" y="4510642"/>
+            <a:ext cx="1176528" cy="210312"/>
+          </a:xfrm>
+          <a:prstGeom prst="rect">
+            <a:avLst/>
+          </a:prstGeom>
+        </p:spPr>
+      </p:pic>
+      <p:sp>
+        <p:nvSpPr>
+          <p:cNvPr id="14" name="TextBox 13"/>
+          <p:cNvSpPr txBox="1"/>
+          <p:nvPr/>
+        </p:nvSpPr>
+        <p:spPr>
+          <a:xfrm>
+            <a:off x="3726286" y="4890118"/>
+            <a:ext cx="1507486" cy="457200"/>
+          </a:xfrm>
+          <a:prstGeom prst="rect">
+            <a:avLst/>
+          </a:prstGeom>
+          <a:noFill/>
+        </p:spPr>
+        <p:txBody>
+          <a:bodyPr wrap="none" lIns="45720" rIns="45720" tIns="18288" bIns="18288" anchor="ctr">
+            <a:noAutofit/>
+          </a:bodyPr>
+          <a:lstStyle/>
+          <a:p>
+            <a:pPr algn="l"/>
+            <a:r>
+              <a:rPr sz="2330" b="0" i="0">
+                <a:solidFill>
+                  <a:srgbClr val="1A1A1A"/>
+                </a:solidFill>
+                <a:latin typeface="Lexend"/>
+              </a:rPr>
+              <a:t>The p's:  </a:t>
+            </a:r>
+          </a:p>
+        </p:txBody>
+      </p:sp>
+      <p:pic>
+        <p:nvPicPr>
+          <p:cNvPr id="15" name="Picture 14" descr="234d1df8f51eff7d.png"/>
+          <p:cNvPicPr>
+            <a:picLocks noChangeAspect="1"/>
+          </p:cNvPicPr>
+          <p:nvPr/>
+        </p:nvPicPr>
+        <p:blipFill>
+          <a:blip r:embed="rId5"/>
+          <a:stretch>
+            <a:fillRect/>
+          </a:stretch>
+        </p:blipFill>
+        <p:spPr>
+          <a:xfrm>
+            <a:off x="5096612" y="4957174"/>
+            <a:ext cx="2609088" cy="323088"/>
+          </a:xfrm>
+          <a:prstGeom prst="rect">
+            <a:avLst/>
+          </a:prstGeom>
+        </p:spPr>
+      </p:pic>
+      <p:sp>
+        <p:nvSpPr>
+          <p:cNvPr id="16" name="TextBox 15"/>
+          <p:cNvSpPr txBox="1"/>
+          <p:nvPr/>
+        </p:nvSpPr>
+        <p:spPr>
+          <a:xfrm>
+            <a:off x="777240" y="5461618"/>
             <a:ext cx="10607040" cy="548640"/>
           </a:xfrm>
           <a:prstGeom prst="rect">
@@ -5008,20 +5362,20 @@
           <a:p>
             <a:pPr algn="ctr"/>
             <a:r>
-              <a:rPr sz="3200" b="1" i="0">
+              <a:rPr sz="3040" b="1" i="0">
                 <a:solidFill>
                   <a:srgbClr val="9E1B32"/>
                 </a:solidFill>
-                <a:latin typeface="Century Schoolbook"/>
+                <a:latin typeface="Lexend"/>
               </a:rPr>
               <a:t>Answer:   2p</a:t>
             </a:r>
             <a:r>
-              <a:rPr sz="3200" b="1" i="0" baseline="30000">
+              <a:rPr sz="3040" b="1" i="0" baseline="30000">
                 <a:solidFill>
                   <a:srgbClr val="9E1B32"/>
                 </a:solidFill>
-                <a:latin typeface="Century Schoolbook"/>
+                <a:latin typeface="Lexend"/>
               </a:rPr>
               <a:t>7</a:t>
             </a:r>
@@ -5070,11 +5424,11 @@
           <a:p>
             <a:pPr algn="l"/>
             <a:r>
-              <a:rPr sz="3400" b="1" i="0">
+              <a:rPr sz="3229" b="1" i="0">
                 <a:solidFill>
                   <a:srgbClr val="1A1A1A"/>
                 </a:solidFill>
-                <a:latin typeface="Century Schoolbook"/>
+                <a:latin typeface="Lexend"/>
               </a:rPr>
               <a:t>Whiteboards   ·   Question 1 of 9</a:t>
             </a:r>
@@ -5210,11 +5564,11 @@
           <a:p>
             <a:pPr algn="l"/>
             <a:r>
-              <a:rPr sz="1100" b="0" i="1">
+              <a:rPr sz="1040" b="0" i="0">
                 <a:solidFill>
                   <a:srgbClr val="6B6B6B"/>
                 </a:solidFill>
-                <a:latin typeface="Century Schoolbook"/>
+                <a:latin typeface="Lexend"/>
               </a:rPr>
               <a:t>Grade 7 Accelerated · Unit 3 · Thread A · Day 1 — Exponent Laws with Variable Bases</a:t>
             </a:r>
@@ -5245,11 +5599,11 @@
           <a:p>
             <a:pPr algn="r"/>
             <a:r>
-              <a:rPr sz="1100" b="0" i="0">
+              <a:rPr sz="1040" b="0" i="0">
                 <a:solidFill>
                   <a:srgbClr val="6B6B6B"/>
                 </a:solidFill>
-                <a:latin typeface="Century Schoolbook"/>
+                <a:latin typeface="Lexend"/>
               </a:rPr>
               <a:t>15</a:t>
             </a:r>
@@ -5258,7 +5612,7 @@
       </p:sp>
       <p:pic>
         <p:nvPicPr>
-          <p:cNvPr id="8" name="Picture 7" descr="d4d3158a21a48776.png"/>
+          <p:cNvPr id="8" name="Picture 7" descr="c22a98d40a0fe398.png"/>
           <p:cNvPicPr>
             <a:picLocks noChangeAspect="1"/>
           </p:cNvPicPr>
@@ -5272,8 +5626,8 @@
         </p:blipFill>
         <p:spPr>
           <a:xfrm>
-            <a:off x="5490971" y="2194560"/>
-            <a:ext cx="1179576" cy="426720"/>
+            <a:off x="5452872" y="2194560"/>
+            <a:ext cx="1255776" cy="417576"/>
           </a:xfrm>
           <a:prstGeom prst="rect">
             <a:avLst/>
@@ -5304,11 +5658,11 @@
           <a:p>
             <a:pPr algn="ctr"/>
             <a:r>
-              <a:rPr sz="2600" b="1" i="0">
+              <a:rPr sz="2470" b="1" i="0">
                 <a:solidFill>
                   <a:srgbClr val="1A1A1A"/>
                 </a:solidFill>
-                <a:latin typeface="Century Schoolbook"/>
+                <a:latin typeface="Lexend"/>
               </a:rPr>
               <a:t>Answer it.</a:t>
             </a:r>
@@ -5357,11 +5711,11 @@
           <a:p>
             <a:pPr algn="l"/>
             <a:r>
-              <a:rPr sz="3400" b="1" i="0">
+              <a:rPr sz="3229" b="1" i="0">
                 <a:solidFill>
                   <a:srgbClr val="1A1A1A"/>
                 </a:solidFill>
-                <a:latin typeface="Century Schoolbook"/>
+                <a:latin typeface="Lexend"/>
               </a:rPr>
               <a:t>Whiteboards   ·   Question 1 of 9</a:t>
             </a:r>
@@ -5497,11 +5851,11 @@
           <a:p>
             <a:pPr algn="l"/>
             <a:r>
-              <a:rPr sz="1100" b="0" i="1">
+              <a:rPr sz="1040" b="0" i="0">
                 <a:solidFill>
                   <a:srgbClr val="6B6B6B"/>
                 </a:solidFill>
-                <a:latin typeface="Century Schoolbook"/>
+                <a:latin typeface="Lexend"/>
               </a:rPr>
               <a:t>Grade 7 Accelerated · Unit 3 · Thread A · Day 1 — Exponent Laws with Variable Bases</a:t>
             </a:r>
@@ -5532,11 +5886,11 @@
           <a:p>
             <a:pPr algn="r"/>
             <a:r>
-              <a:rPr sz="1100" b="0" i="0">
+              <a:rPr sz="1040" b="0" i="0">
                 <a:solidFill>
                   <a:srgbClr val="6B6B6B"/>
                 </a:solidFill>
-                <a:latin typeface="Century Schoolbook"/>
+                <a:latin typeface="Lexend"/>
               </a:rPr>
               <a:t>16</a:t>
             </a:r>
@@ -5545,7 +5899,7 @@
       </p:sp>
       <p:pic>
         <p:nvPicPr>
-          <p:cNvPr id="8" name="Picture 7" descr="20123ea625216e42.png"/>
+          <p:cNvPr id="8" name="Picture 7" descr="7057d29314ff5376.png"/>
           <p:cNvPicPr>
             <a:picLocks noChangeAspect="1"/>
           </p:cNvPicPr>
@@ -5559,52 +5913,17 @@
         </p:blipFill>
         <p:spPr>
           <a:xfrm>
-            <a:off x="5490971" y="2103120"/>
-            <a:ext cx="1179576" cy="426720"/>
+            <a:off x="5449823" y="2103120"/>
+            <a:ext cx="1261872" cy="417576"/>
           </a:xfrm>
           <a:prstGeom prst="rect">
             <a:avLst/>
           </a:prstGeom>
         </p:spPr>
       </p:pic>
-      <p:sp>
-        <p:nvSpPr>
-          <p:cNvPr id="9" name="TextBox 8"/>
-          <p:cNvSpPr txBox="1"/>
-          <p:nvPr/>
-        </p:nvSpPr>
-        <p:spPr>
-          <a:xfrm>
-            <a:off x="4817363" y="4604003"/>
-            <a:ext cx="1920240" cy="548640"/>
-          </a:xfrm>
-          <a:prstGeom prst="rect">
-            <a:avLst/>
-          </a:prstGeom>
-          <a:noFill/>
-        </p:spPr>
-        <p:txBody>
-          <a:bodyPr wrap="square" lIns="45720" rIns="45720" tIns="18288" bIns="18288" anchor="ctr">
-            <a:spAutoFit/>
-          </a:bodyPr>
-          <a:lstStyle/>
-          <a:p>
-            <a:pPr algn="l"/>
-            <a:r>
-              <a:rPr sz="3200" b="1" i="0">
-                <a:solidFill>
-                  <a:srgbClr val="9E1B32"/>
-                </a:solidFill>
-                <a:latin typeface="Century Schoolbook"/>
-              </a:rPr>
-              <a:t>Answer:</a:t>
-            </a:r>
-          </a:p>
-        </p:txBody>
-      </p:sp>
       <p:pic>
         <p:nvPicPr>
-          <p:cNvPr id="10" name="Picture 9" descr="ea1790c6884cea76.png"/>
+          <p:cNvPr id="9" name="Picture 8" descr="5c18f5c8d8075427.png"/>
           <p:cNvPicPr>
             <a:picLocks noChangeAspect="1"/>
           </p:cNvPicPr>
@@ -5618,8 +5937,67 @@
         </p:blipFill>
         <p:spPr>
           <a:xfrm>
-            <a:off x="6737603" y="4663440"/>
-            <a:ext cx="606552" cy="429768"/>
+            <a:off x="4745735" y="2877312"/>
+            <a:ext cx="2779776" cy="301752"/>
+          </a:xfrm>
+          <a:prstGeom prst="rect">
+            <a:avLst/>
+          </a:prstGeom>
+        </p:spPr>
+      </p:pic>
+      <p:sp>
+        <p:nvSpPr>
+          <p:cNvPr id="10" name="TextBox 9"/>
+          <p:cNvSpPr txBox="1"/>
+          <p:nvPr/>
+        </p:nvSpPr>
+        <p:spPr>
+          <a:xfrm>
+            <a:off x="4809744" y="4599431"/>
+            <a:ext cx="1920240" cy="548640"/>
+          </a:xfrm>
+          <a:prstGeom prst="rect">
+            <a:avLst/>
+          </a:prstGeom>
+          <a:noFill/>
+        </p:spPr>
+        <p:txBody>
+          <a:bodyPr wrap="square" lIns="45720" rIns="45720" tIns="18288" bIns="18288" anchor="ctr">
+            <a:spAutoFit/>
+          </a:bodyPr>
+          <a:lstStyle/>
+          <a:p>
+            <a:pPr algn="l"/>
+            <a:r>
+              <a:rPr sz="3040" b="1" i="0">
+                <a:solidFill>
+                  <a:srgbClr val="9E1B32"/>
+                </a:solidFill>
+                <a:latin typeface="Lexend"/>
+              </a:rPr>
+              <a:t>Answer:</a:t>
+            </a:r>
+          </a:p>
+        </p:txBody>
+      </p:sp>
+      <p:pic>
+        <p:nvPicPr>
+          <p:cNvPr id="11" name="Picture 10" descr="f1aeccb44d2ab979.png"/>
+          <p:cNvPicPr>
+            <a:picLocks noChangeAspect="1"/>
+          </p:cNvPicPr>
+          <p:nvPr/>
+        </p:nvPicPr>
+        <p:blipFill>
+          <a:blip r:embed="rId4"/>
+          <a:stretch>
+            <a:fillRect/>
+          </a:stretch>
+        </p:blipFill>
+        <p:spPr>
+          <a:xfrm>
+            <a:off x="6729983" y="4663440"/>
+            <a:ext cx="621792" cy="420624"/>
           </a:xfrm>
           <a:prstGeom prst="rect">
             <a:avLst/>
@@ -5668,11 +6046,11 @@
           <a:p>
             <a:pPr algn="l"/>
             <a:r>
-              <a:rPr sz="3400" b="1" i="0">
+              <a:rPr sz="3229" b="1" i="0">
                 <a:solidFill>
                   <a:srgbClr val="1A1A1A"/>
                 </a:solidFill>
-                <a:latin typeface="Century Schoolbook"/>
+                <a:latin typeface="Lexend"/>
               </a:rPr>
               <a:t>Whiteboards   ·   Question 2 of 9</a:t>
             </a:r>
@@ -5808,11 +6186,11 @@
           <a:p>
             <a:pPr algn="l"/>
             <a:r>
-              <a:rPr sz="1100" b="0" i="1">
+              <a:rPr sz="1040" b="0" i="0">
                 <a:solidFill>
                   <a:srgbClr val="6B6B6B"/>
                 </a:solidFill>
-                <a:latin typeface="Century Schoolbook"/>
+                <a:latin typeface="Lexend"/>
               </a:rPr>
               <a:t>Grade 7 Accelerated · Unit 3 · Thread A · Day 1 — Exponent Laws with Variable Bases</a:t>
             </a:r>
@@ -5843,11 +6221,11 @@
           <a:p>
             <a:pPr algn="r"/>
             <a:r>
-              <a:rPr sz="1100" b="0" i="0">
+              <a:rPr sz="1040" b="0" i="0">
                 <a:solidFill>
                   <a:srgbClr val="6B6B6B"/>
                 </a:solidFill>
-                <a:latin typeface="Century Schoolbook"/>
+                <a:latin typeface="Lexend"/>
               </a:rPr>
               <a:t>17</a:t>
             </a:r>
@@ -5856,7 +6234,7 @@
       </p:sp>
       <p:pic>
         <p:nvPicPr>
-          <p:cNvPr id="8" name="Picture 7" descr="df024cff5e9ce158.png"/>
+          <p:cNvPr id="8" name="Picture 7" descr="d27a1b65e2e808f9.png"/>
           <p:cNvPicPr>
             <a:picLocks noChangeAspect="1"/>
           </p:cNvPicPr>
@@ -5870,8 +6248,8 @@
         </p:blipFill>
         <p:spPr>
           <a:xfrm>
-            <a:off x="5614416" y="2194560"/>
-            <a:ext cx="932688" cy="530352"/>
+            <a:off x="5565647" y="2194560"/>
+            <a:ext cx="1030224" cy="524256"/>
           </a:xfrm>
           <a:prstGeom prst="rect">
             <a:avLst/>
@@ -5902,11 +6280,11 @@
           <a:p>
             <a:pPr algn="ctr"/>
             <a:r>
-              <a:rPr sz="2600" b="1" i="0">
+              <a:rPr sz="2470" b="1" i="0">
                 <a:solidFill>
                   <a:srgbClr val="1A1A1A"/>
                 </a:solidFill>
-                <a:latin typeface="Century Schoolbook"/>
+                <a:latin typeface="Lexend"/>
               </a:rPr>
               <a:t>Answer it.</a:t>
             </a:r>
@@ -5955,11 +6333,11 @@
           <a:p>
             <a:pPr algn="l"/>
             <a:r>
-              <a:rPr sz="3400" b="1" i="0">
+              <a:rPr sz="3229" b="1" i="0">
                 <a:solidFill>
                   <a:srgbClr val="1A1A1A"/>
                 </a:solidFill>
-                <a:latin typeface="Century Schoolbook"/>
+                <a:latin typeface="Lexend"/>
               </a:rPr>
               <a:t>Whiteboards   ·   Question 2 of 9</a:t>
             </a:r>
@@ -6095,11 +6473,11 @@
           <a:p>
             <a:pPr algn="l"/>
             <a:r>
-              <a:rPr sz="1100" b="0" i="1">
+              <a:rPr sz="1040" b="0" i="0">
                 <a:solidFill>
                   <a:srgbClr val="6B6B6B"/>
                 </a:solidFill>
-                <a:latin typeface="Century Schoolbook"/>
+                <a:latin typeface="Lexend"/>
               </a:rPr>
               <a:t>Grade 7 Accelerated · Unit 3 · Thread A · Day 1 — Exponent Laws with Variable Bases</a:t>
             </a:r>
@@ -6130,11 +6508,11 @@
           <a:p>
             <a:pPr algn="r"/>
             <a:r>
-              <a:rPr sz="1100" b="0" i="0">
+              <a:rPr sz="1040" b="0" i="0">
                 <a:solidFill>
                   <a:srgbClr val="6B6B6B"/>
                 </a:solidFill>
-                <a:latin typeface="Century Schoolbook"/>
+                <a:latin typeface="Lexend"/>
               </a:rPr>
               <a:t>18</a:t>
             </a:r>
@@ -6143,7 +6521,7 @@
       </p:sp>
       <p:pic>
         <p:nvPicPr>
-          <p:cNvPr id="8" name="Picture 7" descr="00e7a99be8e12d37.png"/>
+          <p:cNvPr id="8" name="Picture 7" descr="b08eef5dde2a507c.png"/>
           <p:cNvPicPr>
             <a:picLocks noChangeAspect="1"/>
           </p:cNvPicPr>
@@ -6157,52 +6535,17 @@
         </p:blipFill>
         <p:spPr>
           <a:xfrm>
-            <a:off x="5612891" y="2103120"/>
-            <a:ext cx="935736" cy="524256"/>
+            <a:off x="5565647" y="2103120"/>
+            <a:ext cx="1030224" cy="524256"/>
           </a:xfrm>
           <a:prstGeom prst="rect">
             <a:avLst/>
           </a:prstGeom>
         </p:spPr>
       </p:pic>
-      <p:sp>
-        <p:nvSpPr>
-          <p:cNvPr id="9" name="TextBox 8"/>
-          <p:cNvSpPr txBox="1"/>
-          <p:nvPr/>
-        </p:nvSpPr>
-        <p:spPr>
-          <a:xfrm>
-            <a:off x="4812791" y="4654296"/>
-            <a:ext cx="1920240" cy="548640"/>
-          </a:xfrm>
-          <a:prstGeom prst="rect">
-            <a:avLst/>
-          </a:prstGeom>
-          <a:noFill/>
-        </p:spPr>
-        <p:txBody>
-          <a:bodyPr wrap="square" lIns="45720" rIns="45720" tIns="18288" bIns="18288" anchor="ctr">
-            <a:spAutoFit/>
-          </a:bodyPr>
-          <a:lstStyle/>
-          <a:p>
-            <a:pPr algn="l"/>
-            <a:r>
-              <a:rPr sz="3200" b="1" i="0">
-                <a:solidFill>
-                  <a:srgbClr val="9E1B32"/>
-                </a:solidFill>
-                <a:latin typeface="Century Schoolbook"/>
-              </a:rPr>
-              <a:t>Answer:</a:t>
-            </a:r>
-          </a:p>
-        </p:txBody>
-      </p:sp>
       <p:pic>
         <p:nvPicPr>
-          <p:cNvPr id="10" name="Picture 9" descr="5d59527968cea42f.png"/>
+          <p:cNvPr id="9" name="Picture 8" descr="4ee0afac3f899134.png"/>
           <p:cNvPicPr>
             <a:picLocks noChangeAspect="1"/>
           </p:cNvPicPr>
@@ -6216,8 +6559,67 @@
         </p:blipFill>
         <p:spPr>
           <a:xfrm>
-            <a:off x="6733032" y="4663440"/>
-            <a:ext cx="615696" cy="530352"/>
+            <a:off x="4863083" y="2942844"/>
+            <a:ext cx="2542032" cy="384048"/>
+          </a:xfrm>
+          <a:prstGeom prst="rect">
+            <a:avLst/>
+          </a:prstGeom>
+        </p:spPr>
+      </p:pic>
+      <p:sp>
+        <p:nvSpPr>
+          <p:cNvPr id="10" name="TextBox 9"/>
+          <p:cNvSpPr txBox="1"/>
+          <p:nvPr/>
+        </p:nvSpPr>
+        <p:spPr>
+          <a:xfrm>
+            <a:off x="4797551" y="4654296"/>
+            <a:ext cx="1920240" cy="548640"/>
+          </a:xfrm>
+          <a:prstGeom prst="rect">
+            <a:avLst/>
+          </a:prstGeom>
+          <a:noFill/>
+        </p:spPr>
+        <p:txBody>
+          <a:bodyPr wrap="square" lIns="45720" rIns="45720" tIns="18288" bIns="18288" anchor="ctr">
+            <a:spAutoFit/>
+          </a:bodyPr>
+          <a:lstStyle/>
+          <a:p>
+            <a:pPr algn="l"/>
+            <a:r>
+              <a:rPr sz="3040" b="1" i="0">
+                <a:solidFill>
+                  <a:srgbClr val="9E1B32"/>
+                </a:solidFill>
+                <a:latin typeface="Lexend"/>
+              </a:rPr>
+              <a:t>Answer:</a:t>
+            </a:r>
+          </a:p>
+        </p:txBody>
+      </p:sp>
+      <p:pic>
+        <p:nvPicPr>
+          <p:cNvPr id="11" name="Picture 10" descr="aa93a227db193edf.png"/>
+          <p:cNvPicPr>
+            <a:picLocks noChangeAspect="1"/>
+          </p:cNvPicPr>
+          <p:nvPr/>
+        </p:nvPicPr>
+        <p:blipFill>
+          <a:blip r:embed="rId4"/>
+          <a:stretch>
+            <a:fillRect/>
+          </a:stretch>
+        </p:blipFill>
+        <p:spPr>
+          <a:xfrm>
+            <a:off x="6717791" y="4663440"/>
+            <a:ext cx="646176" cy="530352"/>
           </a:xfrm>
           <a:prstGeom prst="rect">
             <a:avLst/>
@@ -6266,11 +6668,11 @@
           <a:p>
             <a:pPr algn="l"/>
             <a:r>
-              <a:rPr sz="3400" b="1" i="0">
+              <a:rPr sz="3229" b="1" i="0">
                 <a:solidFill>
                   <a:srgbClr val="1A1A1A"/>
                 </a:solidFill>
-                <a:latin typeface="Century Schoolbook"/>
+                <a:latin typeface="Lexend"/>
               </a:rPr>
               <a:t>Whiteboards   ·   Question 3 of 9</a:t>
             </a:r>
@@ -6406,11 +6808,11 @@
           <a:p>
             <a:pPr algn="l"/>
             <a:r>
-              <a:rPr sz="1100" b="0" i="1">
+              <a:rPr sz="1040" b="0" i="0">
                 <a:solidFill>
                   <a:srgbClr val="6B6B6B"/>
                 </a:solidFill>
-                <a:latin typeface="Century Schoolbook"/>
+                <a:latin typeface="Lexend"/>
               </a:rPr>
               <a:t>Grade 7 Accelerated · Unit 3 · Thread A · Day 1 — Exponent Laws with Variable Bases</a:t>
             </a:r>
@@ -6441,11 +6843,11 @@
           <a:p>
             <a:pPr algn="r"/>
             <a:r>
-              <a:rPr sz="1100" b="0" i="0">
+              <a:rPr sz="1040" b="0" i="0">
                 <a:solidFill>
                   <a:srgbClr val="6B6B6B"/>
                 </a:solidFill>
-                <a:latin typeface="Century Schoolbook"/>
+                <a:latin typeface="Lexend"/>
               </a:rPr>
               <a:t>19</a:t>
             </a:r>
@@ -6461,7 +6863,7 @@
         <p:spPr>
           <a:xfrm>
             <a:off x="1234440" y="1851660"/>
-            <a:ext cx="2931371" cy="457200"/>
+            <a:ext cx="3002338" cy="457200"/>
           </a:xfrm>
           <a:prstGeom prst="rect">
             <a:avLst/>
@@ -6476,11 +6878,11 @@
           <a:p>
             <a:pPr algn="l"/>
             <a:r>
-              <a:rPr sz="2400" b="0" i="0">
+              <a:rPr sz="2280" b="0" i="0">
                 <a:solidFill>
                   <a:srgbClr val="1A1A1A"/>
                 </a:solidFill>
-                <a:latin typeface="Century Schoolbook"/>
+                <a:latin typeface="Lexend"/>
               </a:rPr>
               <a:t>A cube has edges  </a:t>
             </a:r>
@@ -6489,7 +6891,7 @@
       </p:sp>
       <p:pic>
         <p:nvPicPr>
-          <p:cNvPr id="9" name="Picture 8" descr="1df02a95485ce3ed.png"/>
+          <p:cNvPr id="9" name="Picture 8" descr="b2218f1b6cc7bf2d.png"/>
           <p:cNvPicPr>
             <a:picLocks noChangeAspect="1"/>
           </p:cNvPicPr>
@@ -6503,8 +6905,8 @@
         </p:blipFill>
         <p:spPr>
           <a:xfrm>
-            <a:off x="4028651" y="1941575"/>
-            <a:ext cx="423672" cy="277368"/>
+            <a:off x="4099618" y="1946147"/>
+            <a:ext cx="454152" cy="268224"/>
           </a:xfrm>
           <a:prstGeom prst="rect">
             <a:avLst/>
@@ -6519,8 +6921,8 @@
         </p:nvSpPr>
         <p:spPr>
           <a:xfrm>
-            <a:off x="4452323" y="1851660"/>
-            <a:ext cx="2957822" cy="457200"/>
+            <a:off x="4553770" y="1851660"/>
+            <a:ext cx="2941941" cy="457200"/>
           </a:xfrm>
           <a:prstGeom prst="rect">
             <a:avLst/>
@@ -6535,11 +6937,11 @@
           <a:p>
             <a:pPr algn="l"/>
             <a:r>
-              <a:rPr sz="2400" b="0" i="0">
+              <a:rPr sz="2280" b="0" i="0">
                 <a:solidFill>
                   <a:srgbClr val="1A1A1A"/>
                 </a:solidFill>
-                <a:latin typeface="Century Schoolbook"/>
+                <a:latin typeface="Lexend"/>
               </a:rPr>
               <a:t>  centimeters long.</a:t>
             </a:r>
@@ -6555,7 +6957,7 @@
         <p:spPr>
           <a:xfrm>
             <a:off x="1234440" y="2464308"/>
-            <a:ext cx="3066149" cy="457200"/>
+            <a:ext cx="3084617" cy="457200"/>
           </a:xfrm>
           <a:prstGeom prst="rect">
             <a:avLst/>
@@ -6570,11 +6972,11 @@
           <a:p>
             <a:pPr algn="l"/>
             <a:r>
-              <a:rPr sz="2400" b="0" i="0">
+              <a:rPr sz="2280" b="0" i="0">
                 <a:solidFill>
                   <a:srgbClr val="1A1A1A"/>
                 </a:solidFill>
-                <a:latin typeface="Century Schoolbook"/>
+                <a:latin typeface="Lexend"/>
               </a:rPr>
               <a:t>Its surface area is  </a:t>
             </a:r>
@@ -6583,7 +6985,7 @@
       </p:sp>
       <p:pic>
         <p:nvPicPr>
-          <p:cNvPr id="12" name="Picture 11" descr="84641c90e2ee9154.png"/>
+          <p:cNvPr id="12" name="Picture 11" descr="c9ee10aba4762736.png"/>
           <p:cNvPicPr>
             <a:picLocks noChangeAspect="1"/>
           </p:cNvPicPr>
@@ -6597,8 +6999,8 @@
         </p:blipFill>
         <p:spPr>
           <a:xfrm>
-            <a:off x="4163429" y="2554224"/>
-            <a:ext cx="597408" cy="277368"/>
+            <a:off x="4181897" y="2557272"/>
+            <a:ext cx="655320" cy="271272"/>
           </a:xfrm>
           <a:prstGeom prst="rect">
             <a:avLst/>
@@ -6613,8 +7015,8 @@
         </p:nvSpPr>
         <p:spPr>
           <a:xfrm>
-            <a:off x="4760837" y="2464308"/>
-            <a:ext cx="3331708" cy="457200"/>
+            <a:off x="4837217" y="2464308"/>
+            <a:ext cx="3314517" cy="457200"/>
           </a:xfrm>
           <a:prstGeom prst="rect">
             <a:avLst/>
@@ -6629,11 +7031,11 @@
           <a:p>
             <a:pPr algn="l"/>
             <a:r>
-              <a:rPr sz="2400" b="0" i="0">
+              <a:rPr sz="2280" b="0" i="0">
                 <a:solidFill>
                   <a:srgbClr val="1A1A1A"/>
                 </a:solidFill>
-                <a:latin typeface="Century Schoolbook"/>
+                <a:latin typeface="Lexend"/>
               </a:rPr>
               <a:t>  square centimeters.</a:t>
             </a:r>
@@ -6664,11 +7066,11 @@
           <a:p>
             <a:pPr algn="l"/>
             <a:r>
-              <a:rPr sz="2400" b="1" i="0">
+              <a:rPr sz="2280" b="1" i="0">
                 <a:solidFill>
                   <a:srgbClr val="1A1A1A"/>
                 </a:solidFill>
-                <a:latin typeface="Century Schoolbook"/>
+                <a:latin typeface="Lexend"/>
               </a:rPr>
               <a:t>What is the volume of the cube, in cubic centimeters?</a:t>
             </a:r>
@@ -6699,11 +7101,11 @@
           <a:p>
             <a:pPr algn="ctr"/>
             <a:r>
-              <a:rPr sz="2600" b="1" i="0">
+              <a:rPr sz="2470" b="1" i="0">
                 <a:solidFill>
                   <a:srgbClr val="1A1A1A"/>
                 </a:solidFill>
-                <a:latin typeface="Century Schoolbook"/>
+                <a:latin typeface="Lexend"/>
               </a:rPr>
               <a:t>Answer it.</a:t>
             </a:r>
@@ -6752,11 +7154,11 @@
           <a:p>
             <a:pPr algn="l"/>
             <a:r>
-              <a:rPr sz="3600" b="1" i="0">
+              <a:rPr sz="3420" b="1" i="0">
                 <a:solidFill>
                   <a:srgbClr val="1A1A1A"/>
                 </a:solidFill>
-                <a:latin typeface="Century Schoolbook"/>
+                <a:latin typeface="Lexend"/>
               </a:rPr>
               <a:t>Warm-Up</a:t>
             </a:r>
@@ -6892,11 +7294,11 @@
           <a:p>
             <a:pPr algn="l"/>
             <a:r>
-              <a:rPr sz="1100" b="0" i="1">
+              <a:rPr sz="1040" b="0" i="0">
                 <a:solidFill>
                   <a:srgbClr val="6B6B6B"/>
                 </a:solidFill>
-                <a:latin typeface="Century Schoolbook"/>
+                <a:latin typeface="Lexend"/>
               </a:rPr>
               <a:t>Grade 7 Accelerated · Unit 3 · Thread A · Day 1 — Exponent Laws with Variable Bases</a:t>
             </a:r>
@@ -6927,11 +7329,11 @@
           <a:p>
             <a:pPr algn="r"/>
             <a:r>
-              <a:rPr sz="1100" b="0" i="0">
+              <a:rPr sz="1040" b="0" i="0">
                 <a:solidFill>
                   <a:srgbClr val="6B6B6B"/>
                 </a:solidFill>
-                <a:latin typeface="Century Schoolbook"/>
+                <a:latin typeface="Lexend"/>
               </a:rPr>
               <a:t>2</a:t>
             </a:r>
@@ -6947,7 +7349,7 @@
         <p:spPr>
           <a:xfrm>
             <a:off x="1874519" y="1440180"/>
-            <a:ext cx="3058734" cy="457200"/>
+            <a:ext cx="2921808" cy="457200"/>
           </a:xfrm>
           <a:prstGeom prst="rect">
             <a:avLst/>
@@ -6962,11 +7364,11 @@
           <a:p>
             <a:pPr algn="l"/>
             <a:r>
-              <a:rPr sz="2300" b="0" i="0">
+              <a:rPr sz="2180" b="0" i="0">
                 <a:solidFill>
                   <a:srgbClr val="1A1A1A"/>
                 </a:solidFill>
-                <a:latin typeface="Century Schoolbook"/>
+                <a:latin typeface="Lexend"/>
               </a:rPr>
               <a:t>1.   Find the value:  </a:t>
             </a:r>
@@ -6975,7 +7377,7 @@
       </p:sp>
       <p:pic>
         <p:nvPicPr>
-          <p:cNvPr id="9" name="Picture 8" descr="d93a40084748b626.png"/>
+          <p:cNvPr id="9" name="Picture 8" descr="84532672c5136f11.png"/>
           <p:cNvPicPr>
             <a:picLocks noChangeAspect="1"/>
           </p:cNvPicPr>
@@ -6989,7 +7391,7 @@
         </p:blipFill>
         <p:spPr>
           <a:xfrm>
-            <a:off x="4796094" y="1501140"/>
+            <a:off x="4659168" y="1501140"/>
             <a:ext cx="1267968" cy="335280"/>
           </a:xfrm>
           <a:prstGeom prst="rect">
@@ -7005,8 +7407,8 @@
         </p:nvSpPr>
         <p:spPr>
           <a:xfrm>
-            <a:off x="1874519" y="2179320"/>
-            <a:ext cx="3704805" cy="457200"/>
+            <a:off x="1874519" y="2164080"/>
+            <a:ext cx="3678551" cy="457200"/>
           </a:xfrm>
           <a:prstGeom prst="rect">
             <a:avLst/>
@@ -7021,11 +7423,11 @@
           <a:p>
             <a:pPr algn="l"/>
             <a:r>
-              <a:rPr sz="2300" b="0" i="0">
+              <a:rPr sz="2180" b="0" i="0">
                 <a:solidFill>
                   <a:srgbClr val="1A1A1A"/>
                 </a:solidFill>
-                <a:latin typeface="Century Schoolbook"/>
+                <a:latin typeface="Lexend"/>
               </a:rPr>
               <a:t>2.   Write as one power:  </a:t>
             </a:r>
@@ -7034,7 +7436,7 @@
       </p:sp>
       <p:pic>
         <p:nvPicPr>
-          <p:cNvPr id="11" name="Picture 10" descr="9d90cf2f49ecc87f.png"/>
+          <p:cNvPr id="11" name="Picture 10" descr="dea7bce85a13542a.png"/>
           <p:cNvPicPr>
             <a:picLocks noChangeAspect="1"/>
           </p:cNvPicPr>
@@ -7048,8 +7450,8 @@
         </p:blipFill>
         <p:spPr>
           <a:xfrm>
-            <a:off x="5442165" y="2075688"/>
-            <a:ext cx="304800" cy="664464"/>
+            <a:off x="5415911" y="2075688"/>
+            <a:ext cx="313944" cy="633984"/>
           </a:xfrm>
           <a:prstGeom prst="rect">
             <a:avLst/>
@@ -7064,8 +7466,8 @@
         </p:nvSpPr>
         <p:spPr>
           <a:xfrm>
-            <a:off x="1874519" y="2918460"/>
-            <a:ext cx="726811" cy="457200"/>
+            <a:off x="1874519" y="2887980"/>
+            <a:ext cx="680104" cy="457200"/>
           </a:xfrm>
           <a:prstGeom prst="rect">
             <a:avLst/>
@@ -7080,11 +7482,11 @@
           <a:p>
             <a:pPr algn="l"/>
             <a:r>
-              <a:rPr sz="2300" b="0" i="0">
+              <a:rPr sz="2180" b="0" i="0">
                 <a:solidFill>
                   <a:srgbClr val="1A1A1A"/>
                 </a:solidFill>
-                <a:latin typeface="Century Schoolbook"/>
+                <a:latin typeface="Lexend"/>
               </a:rPr>
               <a:t>3.   </a:t>
             </a:r>
@@ -7093,7 +7495,7 @@
       </p:sp>
       <p:pic>
         <p:nvPicPr>
-          <p:cNvPr id="13" name="Picture 12" descr="697434924d454a71.png"/>
+          <p:cNvPr id="13" name="Picture 12" descr="bcdd97740536927b.png"/>
           <p:cNvPicPr>
             <a:picLocks noChangeAspect="1"/>
           </p:cNvPicPr>
@@ -7107,8 +7509,8 @@
         </p:blipFill>
         <p:spPr>
           <a:xfrm>
-            <a:off x="2464171" y="2942844"/>
-            <a:ext cx="688848" cy="408432"/>
+            <a:off x="2417464" y="2921508"/>
+            <a:ext cx="710184" cy="390144"/>
           </a:xfrm>
           <a:prstGeom prst="rect">
             <a:avLst/>
@@ -7123,8 +7525,8 @@
         </p:nvSpPr>
         <p:spPr>
           <a:xfrm>
-            <a:off x="3153019" y="2918460"/>
-            <a:ext cx="5733570" cy="457200"/>
+            <a:off x="3127648" y="2887980"/>
+            <a:ext cx="5723277" cy="457200"/>
           </a:xfrm>
           <a:prstGeom prst="rect">
             <a:avLst/>
@@ -7139,11 +7541,11 @@
           <a:p>
             <a:pPr algn="l"/>
             <a:r>
-              <a:rPr sz="2300" b="0" i="0">
+              <a:rPr sz="2180" b="0" i="0">
                 <a:solidFill>
                   <a:srgbClr val="1A1A1A"/>
                 </a:solidFill>
-                <a:latin typeface="Century Schoolbook"/>
+                <a:latin typeface="Lexend"/>
               </a:rPr>
               <a:t> is between which two whole numbers?</a:t>
             </a:r>
@@ -7158,8 +7560,8 @@
         </p:nvSpPr>
         <p:spPr>
           <a:xfrm>
-            <a:off x="1874519" y="3531108"/>
-            <a:ext cx="4347668" cy="457200"/>
+            <a:off x="1874519" y="3500628"/>
+            <a:ext cx="4266791" cy="457200"/>
           </a:xfrm>
           <a:prstGeom prst="rect">
             <a:avLst/>
@@ -7174,11 +7576,11 @@
           <a:p>
             <a:pPr algn="l"/>
             <a:r>
-              <a:rPr sz="2300" b="0" i="0">
+              <a:rPr sz="2180" b="0" i="0">
                 <a:solidFill>
                   <a:srgbClr val="1A1A1A"/>
                 </a:solidFill>
-                <a:latin typeface="Century Schoolbook"/>
+                <a:latin typeface="Lexend"/>
               </a:rPr>
               <a:t>4.   Write with an exponent:  </a:t>
             </a:r>
@@ -7187,7 +7589,7 @@
       </p:sp>
       <p:pic>
         <p:nvPicPr>
-          <p:cNvPr id="16" name="Picture 15" descr="2cd7015fba8991e1.png"/>
+          <p:cNvPr id="16" name="Picture 15" descr="10f3e19ce6b19344.png"/>
           <p:cNvPicPr>
             <a:picLocks noChangeAspect="1"/>
           </p:cNvPicPr>
@@ -7201,8 +7603,8 @@
         </p:blipFill>
         <p:spPr>
           <a:xfrm>
-            <a:off x="6085028" y="3653028"/>
-            <a:ext cx="1499616" cy="213360"/>
+            <a:off x="6004151" y="3610356"/>
+            <a:ext cx="1679448" cy="237744"/>
           </a:xfrm>
           <a:prstGeom prst="rect">
             <a:avLst/>
@@ -7251,11 +7653,11 @@
           <a:p>
             <a:pPr algn="l"/>
             <a:r>
-              <a:rPr sz="3400" b="1" i="0">
+              <a:rPr sz="3229" b="1" i="0">
                 <a:solidFill>
                   <a:srgbClr val="1A1A1A"/>
                 </a:solidFill>
-                <a:latin typeface="Century Schoolbook"/>
+                <a:latin typeface="Lexend"/>
               </a:rPr>
               <a:t>Whiteboards   ·   Question 3 of 9</a:t>
             </a:r>
@@ -7391,11 +7793,11 @@
           <a:p>
             <a:pPr algn="l"/>
             <a:r>
-              <a:rPr sz="1100" b="0" i="1">
+              <a:rPr sz="1040" b="0" i="0">
                 <a:solidFill>
                   <a:srgbClr val="6B6B6B"/>
                 </a:solidFill>
-                <a:latin typeface="Century Schoolbook"/>
+                <a:latin typeface="Lexend"/>
               </a:rPr>
               <a:t>Grade 7 Accelerated · Unit 3 · Thread A · Day 1 — Exponent Laws with Variable Bases</a:t>
             </a:r>
@@ -7426,11 +7828,11 @@
           <a:p>
             <a:pPr algn="r"/>
             <a:r>
-              <a:rPr sz="1100" b="0" i="0">
+              <a:rPr sz="1040" b="0" i="0">
                 <a:solidFill>
                   <a:srgbClr val="6B6B6B"/>
                 </a:solidFill>
-                <a:latin typeface="Century Schoolbook"/>
+                <a:latin typeface="Lexend"/>
               </a:rPr>
               <a:t>20</a:t>
             </a:r>
@@ -7446,7 +7848,7 @@
         <p:spPr>
           <a:xfrm>
             <a:off x="1234440" y="1851660"/>
-            <a:ext cx="2931371" cy="457200"/>
+            <a:ext cx="3002338" cy="457200"/>
           </a:xfrm>
           <a:prstGeom prst="rect">
             <a:avLst/>
@@ -7461,11 +7863,11 @@
           <a:p>
             <a:pPr algn="l"/>
             <a:r>
-              <a:rPr sz="2400" b="0" i="0">
+              <a:rPr sz="2280" b="0" i="0">
                 <a:solidFill>
                   <a:srgbClr val="1A1A1A"/>
                 </a:solidFill>
-                <a:latin typeface="Century Schoolbook"/>
+                <a:latin typeface="Lexend"/>
               </a:rPr>
               <a:t>A cube has edges  </a:t>
             </a:r>
@@ -7474,7 +7876,7 @@
       </p:sp>
       <p:pic>
         <p:nvPicPr>
-          <p:cNvPr id="9" name="Picture 8" descr="a28e2ea3731f9d8f.png"/>
+          <p:cNvPr id="9" name="Picture 8" descr="47e41d1215f68ba1.png"/>
           <p:cNvPicPr>
             <a:picLocks noChangeAspect="1"/>
           </p:cNvPicPr>
@@ -7488,8 +7890,8 @@
         </p:blipFill>
         <p:spPr>
           <a:xfrm>
-            <a:off x="4028651" y="1941575"/>
-            <a:ext cx="423672" cy="277368"/>
+            <a:off x="4099618" y="1946147"/>
+            <a:ext cx="457200" cy="268224"/>
           </a:xfrm>
           <a:prstGeom prst="rect">
             <a:avLst/>
@@ -7504,8 +7906,8 @@
         </p:nvSpPr>
         <p:spPr>
           <a:xfrm>
-            <a:off x="4452323" y="1851660"/>
-            <a:ext cx="2957822" cy="457200"/>
+            <a:off x="4556818" y="1851660"/>
+            <a:ext cx="2941941" cy="457200"/>
           </a:xfrm>
           <a:prstGeom prst="rect">
             <a:avLst/>
@@ -7520,11 +7922,11 @@
           <a:p>
             <a:pPr algn="l"/>
             <a:r>
-              <a:rPr sz="2400" b="0" i="0">
+              <a:rPr sz="2280" b="0" i="0">
                 <a:solidFill>
                   <a:srgbClr val="1A1A1A"/>
                 </a:solidFill>
-                <a:latin typeface="Century Schoolbook"/>
+                <a:latin typeface="Lexend"/>
               </a:rPr>
               <a:t>  centimeters long.</a:t>
             </a:r>
@@ -7540,7 +7942,7 @@
         <p:spPr>
           <a:xfrm>
             <a:off x="1234440" y="2464308"/>
-            <a:ext cx="3066149" cy="457200"/>
+            <a:ext cx="3084617" cy="457200"/>
           </a:xfrm>
           <a:prstGeom prst="rect">
             <a:avLst/>
@@ -7555,11 +7957,11 @@
           <a:p>
             <a:pPr algn="l"/>
             <a:r>
-              <a:rPr sz="2400" b="0" i="0">
+              <a:rPr sz="2280" b="0" i="0">
                 <a:solidFill>
                   <a:srgbClr val="1A1A1A"/>
                 </a:solidFill>
-                <a:latin typeface="Century Schoolbook"/>
+                <a:latin typeface="Lexend"/>
               </a:rPr>
               <a:t>Its surface area is  </a:t>
             </a:r>
@@ -7568,7 +7970,7 @@
       </p:sp>
       <p:pic>
         <p:nvPicPr>
-          <p:cNvPr id="12" name="Picture 11" descr="627f906189b40b96.png"/>
+          <p:cNvPr id="12" name="Picture 11" descr="e168afa666552cb0.png"/>
           <p:cNvPicPr>
             <a:picLocks noChangeAspect="1"/>
           </p:cNvPicPr>
@@ -7582,8 +7984,8 @@
         </p:blipFill>
         <p:spPr>
           <a:xfrm>
-            <a:off x="4163429" y="2554224"/>
-            <a:ext cx="600456" cy="277368"/>
+            <a:off x="4181897" y="2555748"/>
+            <a:ext cx="658368" cy="274320"/>
           </a:xfrm>
           <a:prstGeom prst="rect">
             <a:avLst/>
@@ -7598,8 +8000,8 @@
         </p:nvSpPr>
         <p:spPr>
           <a:xfrm>
-            <a:off x="4763885" y="2464308"/>
-            <a:ext cx="3331708" cy="457200"/>
+            <a:off x="4840265" y="2464308"/>
+            <a:ext cx="3314517" cy="457200"/>
           </a:xfrm>
           <a:prstGeom prst="rect">
             <a:avLst/>
@@ -7614,11 +8016,11 @@
           <a:p>
             <a:pPr algn="l"/>
             <a:r>
-              <a:rPr sz="2400" b="0" i="0">
+              <a:rPr sz="2280" b="0" i="0">
                 <a:solidFill>
                   <a:srgbClr val="1A1A1A"/>
                 </a:solidFill>
-                <a:latin typeface="Century Schoolbook"/>
+                <a:latin typeface="Lexend"/>
               </a:rPr>
               <a:t>  square centimeters.</a:t>
             </a:r>
@@ -7649,11 +8051,11 @@
           <a:p>
             <a:pPr algn="l"/>
             <a:r>
-              <a:rPr sz="2400" b="1" i="0">
+              <a:rPr sz="2280" b="1" i="0">
                 <a:solidFill>
                   <a:srgbClr val="1A1A1A"/>
                 </a:solidFill>
-                <a:latin typeface="Century Schoolbook"/>
+                <a:latin typeface="Lexend"/>
               </a:rPr>
               <a:t>What is the volume of the cube, in cubic centimeters?</a:t>
             </a:r>
@@ -7668,36 +8070,36 @@
         </p:nvSpPr>
         <p:spPr>
           <a:xfrm>
-            <a:off x="4797551" y="4605528"/>
-            <a:ext cx="1920240" cy="548640"/>
-          </a:xfrm>
-          <a:prstGeom prst="rect">
-            <a:avLst/>
-          </a:prstGeom>
-          <a:noFill/>
-        </p:spPr>
-        <p:txBody>
-          <a:bodyPr wrap="square" lIns="45720" rIns="45720" tIns="18288" bIns="18288" anchor="ctr">
-            <a:spAutoFit/>
+            <a:off x="2809370" y="3734926"/>
+            <a:ext cx="5771635" cy="457200"/>
+          </a:xfrm>
+          <a:prstGeom prst="rect">
+            <a:avLst/>
+          </a:prstGeom>
+          <a:noFill/>
+        </p:spPr>
+        <p:txBody>
+          <a:bodyPr wrap="none" lIns="45720" rIns="45720" tIns="18288" bIns="18288" anchor="ctr">
+            <a:noAutofit/>
           </a:bodyPr>
           <a:lstStyle/>
           <a:p>
             <a:pPr algn="l"/>
             <a:r>
-              <a:rPr sz="3200" b="1" i="0">
-                <a:solidFill>
-                  <a:srgbClr val="9E1B32"/>
-                </a:solidFill>
-                <a:latin typeface="Century Schoolbook"/>
-              </a:rPr>
-              <a:t>Answer:</a:t>
+              <a:rPr sz="2750" b="0" i="0">
+                <a:solidFill>
+                  <a:srgbClr val="1A1A1A"/>
+                </a:solidFill>
+                <a:latin typeface="Lexend"/>
+              </a:rPr>
+              <a:t>Volume = edge × edge × edge:  </a:t>
             </a:r>
           </a:p>
         </p:txBody>
       </p:sp>
       <p:pic>
         <p:nvPicPr>
-          <p:cNvPr id="16" name="Picture 15" descr="b5d97e94079cb0b8.png"/>
+          <p:cNvPr id="16" name="Picture 15" descr="f2db44398d05b71c.png"/>
           <p:cNvPicPr>
             <a:picLocks noChangeAspect="1"/>
           </p:cNvPicPr>
@@ -7711,8 +8113,91 @@
         </p:blipFill>
         <p:spPr>
           <a:xfrm>
-            <a:off x="6717791" y="4663440"/>
-            <a:ext cx="646176" cy="432816"/>
+            <a:off x="8443845" y="3779122"/>
+            <a:ext cx="908304" cy="368808"/>
+          </a:xfrm>
+          <a:prstGeom prst="rect">
+            <a:avLst/>
+          </a:prstGeom>
+        </p:spPr>
+      </p:pic>
+      <p:pic>
+        <p:nvPicPr>
+          <p:cNvPr id="17" name="Picture 16" descr="83e03eeb2170371d.png"/>
+          <p:cNvPicPr>
+            <a:picLocks noChangeAspect="1"/>
+          </p:cNvPicPr>
+          <p:nvPr/>
+        </p:nvPicPr>
+        <p:blipFill>
+          <a:blip r:embed="rId5"/>
+          <a:stretch>
+            <a:fillRect/>
+          </a:stretch>
+        </p:blipFill>
+        <p:spPr>
+          <a:xfrm>
+            <a:off x="2864234" y="4315570"/>
+            <a:ext cx="3297936" cy="374904"/>
+          </a:xfrm>
+          <a:prstGeom prst="rect">
+            <a:avLst/>
+          </a:prstGeom>
+        </p:spPr>
+      </p:pic>
+      <p:sp>
+        <p:nvSpPr>
+          <p:cNvPr id="18" name="TextBox 17"/>
+          <p:cNvSpPr txBox="1"/>
+          <p:nvPr/>
+        </p:nvSpPr>
+        <p:spPr>
+          <a:xfrm>
+            <a:off x="4759451" y="4780390"/>
+            <a:ext cx="1920240" cy="548640"/>
+          </a:xfrm>
+          <a:prstGeom prst="rect">
+            <a:avLst/>
+          </a:prstGeom>
+          <a:noFill/>
+        </p:spPr>
+        <p:txBody>
+          <a:bodyPr wrap="square" lIns="45720" rIns="45720" tIns="18288" bIns="18288" anchor="ctr">
+            <a:spAutoFit/>
+          </a:bodyPr>
+          <a:lstStyle/>
+          <a:p>
+            <a:pPr algn="l"/>
+            <a:r>
+              <a:rPr sz="3040" b="1" i="0">
+                <a:solidFill>
+                  <a:srgbClr val="9E1B32"/>
+                </a:solidFill>
+                <a:latin typeface="Lexend"/>
+              </a:rPr>
+              <a:t>Answer:</a:t>
+            </a:r>
+          </a:p>
+        </p:txBody>
+      </p:sp>
+      <p:pic>
+        <p:nvPicPr>
+          <p:cNvPr id="19" name="Picture 18" descr="930c42f7a917cf6b.png"/>
+          <p:cNvPicPr>
+            <a:picLocks noChangeAspect="1"/>
+          </p:cNvPicPr>
+          <p:nvPr/>
+        </p:nvPicPr>
+        <p:blipFill>
+          <a:blip r:embed="rId6"/>
+          <a:stretch>
+            <a:fillRect/>
+          </a:stretch>
+        </p:blipFill>
+        <p:spPr>
+          <a:xfrm>
+            <a:off x="6679692" y="4845922"/>
+            <a:ext cx="722376" cy="417576"/>
           </a:xfrm>
           <a:prstGeom prst="rect">
             <a:avLst/>
@@ -7761,11 +8246,11 @@
           <a:p>
             <a:pPr algn="l"/>
             <a:r>
-              <a:rPr sz="3400" b="1" i="0">
+              <a:rPr sz="3229" b="1" i="0">
                 <a:solidFill>
                   <a:srgbClr val="1A1A1A"/>
                 </a:solidFill>
-                <a:latin typeface="Century Schoolbook"/>
+                <a:latin typeface="Lexend"/>
               </a:rPr>
               <a:t>Whiteboards   ·   Question 4 of 9</a:t>
             </a:r>
@@ -7901,11 +8386,11 @@
           <a:p>
             <a:pPr algn="l"/>
             <a:r>
-              <a:rPr sz="1100" b="0" i="1">
+              <a:rPr sz="1040" b="0" i="0">
                 <a:solidFill>
                   <a:srgbClr val="6B6B6B"/>
                 </a:solidFill>
-                <a:latin typeface="Century Schoolbook"/>
+                <a:latin typeface="Lexend"/>
               </a:rPr>
               <a:t>Grade 7 Accelerated · Unit 3 · Thread A · Day 1 — Exponent Laws with Variable Bases</a:t>
             </a:r>
@@ -7936,11 +8421,11 @@
           <a:p>
             <a:pPr algn="r"/>
             <a:r>
-              <a:rPr sz="1100" b="0" i="0">
+              <a:rPr sz="1040" b="0" i="0">
                 <a:solidFill>
                   <a:srgbClr val="6B6B6B"/>
                 </a:solidFill>
-                <a:latin typeface="Century Schoolbook"/>
+                <a:latin typeface="Lexend"/>
               </a:rPr>
               <a:t>21</a:t>
             </a:r>
@@ -7949,7 +8434,7 @@
       </p:sp>
       <p:pic>
         <p:nvPicPr>
-          <p:cNvPr id="8" name="Picture 7" descr="4f0d74218b39c7b6.png"/>
+          <p:cNvPr id="8" name="Picture 7" descr="94ae5c6bf68c5fbd.png"/>
           <p:cNvPicPr>
             <a:picLocks noChangeAspect="1"/>
           </p:cNvPicPr>
@@ -7963,8 +8448,8 @@
         </p:blipFill>
         <p:spPr>
           <a:xfrm>
-            <a:off x="4759451" y="2194560"/>
-            <a:ext cx="2642616" cy="515112"/>
+            <a:off x="4629911" y="2194560"/>
+            <a:ext cx="2901696" cy="509016"/>
           </a:xfrm>
           <a:prstGeom prst="rect">
             <a:avLst/>
@@ -7995,11 +8480,11 @@
           <a:p>
             <a:pPr algn="ctr"/>
             <a:r>
-              <a:rPr sz="2600" b="1" i="0">
+              <a:rPr sz="2470" b="1" i="0">
                 <a:solidFill>
                   <a:srgbClr val="1A1A1A"/>
                 </a:solidFill>
-                <a:latin typeface="Century Schoolbook"/>
+                <a:latin typeface="Lexend"/>
               </a:rPr>
               <a:t>Answer it.</a:t>
             </a:r>
@@ -8048,11 +8533,11 @@
           <a:p>
             <a:pPr algn="l"/>
             <a:r>
-              <a:rPr sz="3400" b="1" i="0">
+              <a:rPr sz="3229" b="1" i="0">
                 <a:solidFill>
                   <a:srgbClr val="1A1A1A"/>
                 </a:solidFill>
-                <a:latin typeface="Century Schoolbook"/>
+                <a:latin typeface="Lexend"/>
               </a:rPr>
               <a:t>Whiteboards   ·   Question 4 of 9</a:t>
             </a:r>
@@ -8188,11 +8673,11 @@
           <a:p>
             <a:pPr algn="l"/>
             <a:r>
-              <a:rPr sz="1100" b="0" i="1">
+              <a:rPr sz="1040" b="0" i="0">
                 <a:solidFill>
                   <a:srgbClr val="6B6B6B"/>
                 </a:solidFill>
-                <a:latin typeface="Century Schoolbook"/>
+                <a:latin typeface="Lexend"/>
               </a:rPr>
               <a:t>Grade 7 Accelerated · Unit 3 · Thread A · Day 1 — Exponent Laws with Variable Bases</a:t>
             </a:r>
@@ -8223,11 +8708,11 @@
           <a:p>
             <a:pPr algn="r"/>
             <a:r>
-              <a:rPr sz="1100" b="0" i="0">
+              <a:rPr sz="1040" b="0" i="0">
                 <a:solidFill>
                   <a:srgbClr val="6B6B6B"/>
                 </a:solidFill>
-                <a:latin typeface="Century Schoolbook"/>
+                <a:latin typeface="Lexend"/>
               </a:rPr>
               <a:t>22</a:t>
             </a:r>
@@ -8236,7 +8721,7 @@
       </p:sp>
       <p:pic>
         <p:nvPicPr>
-          <p:cNvPr id="8" name="Picture 7" descr="20518fcef0388b45.png"/>
+          <p:cNvPr id="8" name="Picture 7" descr="c5f8cdff3a58f645.png"/>
           <p:cNvPicPr>
             <a:picLocks noChangeAspect="1"/>
           </p:cNvPicPr>
@@ -8250,8 +8735,8 @@
         </p:blipFill>
         <p:spPr>
           <a:xfrm>
-            <a:off x="4757928" y="2103120"/>
-            <a:ext cx="2645664" cy="518160"/>
+            <a:off x="4628387" y="2103120"/>
+            <a:ext cx="2904744" cy="509016"/>
           </a:xfrm>
           <a:prstGeom prst="rect">
             <a:avLst/>
@@ -8266,36 +8751,36 @@
         </p:nvSpPr>
         <p:spPr>
           <a:xfrm>
-            <a:off x="4411979" y="4605528"/>
-            <a:ext cx="1920240" cy="548640"/>
-          </a:xfrm>
-          <a:prstGeom prst="rect">
-            <a:avLst/>
-          </a:prstGeom>
-          <a:noFill/>
-        </p:spPr>
-        <p:txBody>
-          <a:bodyPr wrap="square" lIns="45720" rIns="45720" tIns="18288" bIns="18288" anchor="ctr">
-            <a:spAutoFit/>
+            <a:off x="4237531" y="2891028"/>
+            <a:ext cx="1841196" cy="457200"/>
+          </a:xfrm>
+          <a:prstGeom prst="rect">
+            <a:avLst/>
+          </a:prstGeom>
+          <a:noFill/>
+        </p:spPr>
+        <p:txBody>
+          <a:bodyPr wrap="none" lIns="45720" rIns="45720" tIns="18288" bIns="18288" anchor="ctr">
+            <a:noAutofit/>
           </a:bodyPr>
           <a:lstStyle/>
           <a:p>
             <a:pPr algn="l"/>
             <a:r>
-              <a:rPr sz="3200" b="1" i="0">
-                <a:solidFill>
-                  <a:srgbClr val="9E1B32"/>
-                </a:solidFill>
-                <a:latin typeface="Century Schoolbook"/>
-              </a:rPr>
-              <a:t>Answer:</a:t>
+              <a:rPr sz="2330" b="0" i="0">
+                <a:solidFill>
+                  <a:srgbClr val="1A1A1A"/>
+                </a:solidFill>
+                <a:latin typeface="Lexend"/>
+              </a:rPr>
+              <a:t>Numbers:  </a:t>
             </a:r>
           </a:p>
         </p:txBody>
       </p:sp>
       <p:pic>
         <p:nvPicPr>
-          <p:cNvPr id="10" name="Picture 9" descr="53df2d82dfc94248.png"/>
+          <p:cNvPr id="10" name="Picture 9" descr="10283f176991c3b6.png"/>
           <p:cNvPicPr>
             <a:picLocks noChangeAspect="1"/>
           </p:cNvPicPr>
@@ -8309,8 +8794,185 @@
         </p:blipFill>
         <p:spPr>
           <a:xfrm>
-            <a:off x="6332219" y="4663440"/>
-            <a:ext cx="1417320" cy="432816"/>
+            <a:off x="5941568" y="3012948"/>
+            <a:ext cx="1091184" cy="213360"/>
+          </a:xfrm>
+          <a:prstGeom prst="rect">
+            <a:avLst/>
+          </a:prstGeom>
+        </p:spPr>
+      </p:pic>
+      <p:sp>
+        <p:nvSpPr>
+          <p:cNvPr id="11" name="TextBox 10"/>
+          <p:cNvSpPr txBox="1"/>
+          <p:nvPr/>
+        </p:nvSpPr>
+        <p:spPr>
+          <a:xfrm>
+            <a:off x="4237531" y="3393948"/>
+            <a:ext cx="1508085" cy="457200"/>
+          </a:xfrm>
+          <a:prstGeom prst="rect">
+            <a:avLst/>
+          </a:prstGeom>
+          <a:noFill/>
+        </p:spPr>
+        <p:txBody>
+          <a:bodyPr wrap="none" lIns="45720" rIns="45720" tIns="18288" bIns="18288" anchor="ctr">
+            <a:noAutofit/>
+          </a:bodyPr>
+          <a:lstStyle/>
+          <a:p>
+            <a:pPr algn="l"/>
+            <a:r>
+              <a:rPr sz="2330" b="0" i="0">
+                <a:solidFill>
+                  <a:srgbClr val="1A1A1A"/>
+                </a:solidFill>
+                <a:latin typeface="Lexend"/>
+              </a:rPr>
+              <a:t>The a's:  </a:t>
+            </a:r>
+          </a:p>
+        </p:txBody>
+      </p:sp>
+      <p:pic>
+        <p:nvPicPr>
+          <p:cNvPr id="12" name="Picture 11" descr="5f3fb78ccfb86d87.png"/>
+          <p:cNvPicPr>
+            <a:picLocks noChangeAspect="1"/>
+          </p:cNvPicPr>
+          <p:nvPr/>
+        </p:nvPicPr>
+        <p:blipFill>
+          <a:blip r:embed="rId4"/>
+          <a:stretch>
+            <a:fillRect/>
+          </a:stretch>
+        </p:blipFill>
+        <p:spPr>
+          <a:xfrm>
+            <a:off x="5608457" y="3491483"/>
+            <a:ext cx="2282952" cy="262128"/>
+          </a:xfrm>
+          <a:prstGeom prst="rect">
+            <a:avLst/>
+          </a:prstGeom>
+        </p:spPr>
+      </p:pic>
+      <p:sp>
+        <p:nvSpPr>
+          <p:cNvPr id="13" name="TextBox 12"/>
+          <p:cNvSpPr txBox="1"/>
+          <p:nvPr/>
+        </p:nvSpPr>
+        <p:spPr>
+          <a:xfrm>
+            <a:off x="4237531" y="3896867"/>
+            <a:ext cx="1507136" cy="457200"/>
+          </a:xfrm>
+          <a:prstGeom prst="rect">
+            <a:avLst/>
+          </a:prstGeom>
+          <a:noFill/>
+        </p:spPr>
+        <p:txBody>
+          <a:bodyPr wrap="none" lIns="45720" rIns="45720" tIns="18288" bIns="18288" anchor="ctr">
+            <a:noAutofit/>
+          </a:bodyPr>
+          <a:lstStyle/>
+          <a:p>
+            <a:pPr algn="l"/>
+            <a:r>
+              <a:rPr sz="2330" b="0" i="0">
+                <a:solidFill>
+                  <a:srgbClr val="1A1A1A"/>
+                </a:solidFill>
+                <a:latin typeface="Lexend"/>
+              </a:rPr>
+              <a:t>The b's:  </a:t>
+            </a:r>
+          </a:p>
+        </p:txBody>
+      </p:sp>
+      <p:pic>
+        <p:nvPicPr>
+          <p:cNvPr id="14" name="Picture 13" descr="32bbfbda57c94e67.png"/>
+          <p:cNvPicPr>
+            <a:picLocks noChangeAspect="1"/>
+          </p:cNvPicPr>
+          <p:nvPr/>
+        </p:nvPicPr>
+        <p:blipFill>
+          <a:blip r:embed="rId5"/>
+          <a:stretch>
+            <a:fillRect/>
+          </a:stretch>
+        </p:blipFill>
+        <p:spPr>
+          <a:xfrm>
+            <a:off x="5607508" y="3994404"/>
+            <a:ext cx="2319528" cy="262128"/>
+          </a:xfrm>
+          <a:prstGeom prst="rect">
+            <a:avLst/>
+          </a:prstGeom>
+        </p:spPr>
+      </p:pic>
+      <p:sp>
+        <p:nvSpPr>
+          <p:cNvPr id="15" name="TextBox 14"/>
+          <p:cNvSpPr txBox="1"/>
+          <p:nvPr/>
+        </p:nvSpPr>
+        <p:spPr>
+          <a:xfrm>
+            <a:off x="4370831" y="4602480"/>
+            <a:ext cx="1920240" cy="548640"/>
+          </a:xfrm>
+          <a:prstGeom prst="rect">
+            <a:avLst/>
+          </a:prstGeom>
+          <a:noFill/>
+        </p:spPr>
+        <p:txBody>
+          <a:bodyPr wrap="square" lIns="45720" rIns="45720" tIns="18288" bIns="18288" anchor="ctr">
+            <a:spAutoFit/>
+          </a:bodyPr>
+          <a:lstStyle/>
+          <a:p>
+            <a:pPr algn="l"/>
+            <a:r>
+              <a:rPr sz="3040" b="1" i="0">
+                <a:solidFill>
+                  <a:srgbClr val="9E1B32"/>
+                </a:solidFill>
+                <a:latin typeface="Lexend"/>
+              </a:rPr>
+              <a:t>Answer:</a:t>
+            </a:r>
+          </a:p>
+        </p:txBody>
+      </p:sp>
+      <p:pic>
+        <p:nvPicPr>
+          <p:cNvPr id="16" name="Picture 15" descr="36d05054388e0f59.png"/>
+          <p:cNvPicPr>
+            <a:picLocks noChangeAspect="1"/>
+          </p:cNvPicPr>
+          <p:nvPr/>
+        </p:nvPicPr>
+        <p:blipFill>
+          <a:blip r:embed="rId6"/>
+          <a:stretch>
+            <a:fillRect/>
+          </a:stretch>
+        </p:blipFill>
+        <p:spPr>
+          <a:xfrm>
+            <a:off x="6291071" y="4663440"/>
+            <a:ext cx="1499616" cy="426720"/>
           </a:xfrm>
           <a:prstGeom prst="rect">
             <a:avLst/>
@@ -8359,11 +9021,11 @@
           <a:p>
             <a:pPr algn="l"/>
             <a:r>
-              <a:rPr sz="3400" b="1" i="0">
+              <a:rPr sz="3229" b="1" i="0">
                 <a:solidFill>
                   <a:srgbClr val="1A1A1A"/>
                 </a:solidFill>
-                <a:latin typeface="Century Schoolbook"/>
+                <a:latin typeface="Lexend"/>
               </a:rPr>
               <a:t>Whiteboards   ·   Question 5 of 9</a:t>
             </a:r>
@@ -8499,11 +9161,11 @@
           <a:p>
             <a:pPr algn="l"/>
             <a:r>
-              <a:rPr sz="1100" b="0" i="1">
+              <a:rPr sz="1040" b="0" i="0">
                 <a:solidFill>
                   <a:srgbClr val="6B6B6B"/>
                 </a:solidFill>
-                <a:latin typeface="Century Schoolbook"/>
+                <a:latin typeface="Lexend"/>
               </a:rPr>
               <a:t>Grade 7 Accelerated · Unit 3 · Thread A · Day 1 — Exponent Laws with Variable Bases</a:t>
             </a:r>
@@ -8534,11 +9196,11 @@
           <a:p>
             <a:pPr algn="r"/>
             <a:r>
-              <a:rPr sz="1100" b="0" i="0">
+              <a:rPr sz="1040" b="0" i="0">
                 <a:solidFill>
                   <a:srgbClr val="6B6B6B"/>
                 </a:solidFill>
-                <a:latin typeface="Century Schoolbook"/>
+                <a:latin typeface="Lexend"/>
               </a:rPr>
               <a:t>23</a:t>
             </a:r>
@@ -8547,7 +9209,7 @@
       </p:sp>
       <p:pic>
         <p:nvPicPr>
-          <p:cNvPr id="8" name="Picture 7" descr="6cf649989ec0d514.png"/>
+          <p:cNvPr id="8" name="Picture 7" descr="54d7a3db40dafecc.png"/>
           <p:cNvPicPr>
             <a:picLocks noChangeAspect="1"/>
           </p:cNvPicPr>
@@ -8561,8 +9223,8 @@
         </p:blipFill>
         <p:spPr>
           <a:xfrm>
-            <a:off x="5408675" y="2194560"/>
-            <a:ext cx="1344168" cy="518160"/>
+            <a:off x="5356859" y="2194560"/>
+            <a:ext cx="1447800" cy="509016"/>
           </a:xfrm>
           <a:prstGeom prst="rect">
             <a:avLst/>
@@ -8577,7 +9239,7 @@
         </p:nvSpPr>
         <p:spPr>
           <a:xfrm>
-            <a:off x="777240" y="2941320"/>
+            <a:off x="777240" y="2932176"/>
             <a:ext cx="10607040" cy="465151"/>
           </a:xfrm>
           <a:prstGeom prst="rect">
@@ -8593,11 +9255,11 @@
           <a:p>
             <a:pPr algn="ctr"/>
             <a:r>
-              <a:rPr sz="2600" b="0" i="0">
+              <a:rPr sz="2470" b="0" i="0">
                 <a:solidFill>
                   <a:srgbClr val="1A1A1A"/>
                 </a:solidFill>
-                <a:latin typeface="Century Schoolbook"/>
+                <a:latin typeface="Lexend"/>
               </a:rPr>
               <a:t>Which expression is equivalent?</a:t>
             </a:r>
@@ -8612,7 +9274,7 @@
         </p:nvSpPr>
         <p:spPr>
           <a:xfrm>
-            <a:off x="1874519" y="3607639"/>
+            <a:off x="1874519" y="3598495"/>
             <a:ext cx="4572000" cy="548640"/>
           </a:xfrm>
           <a:prstGeom prst="rect">
@@ -8628,29 +9290,29 @@
           <a:p>
             <a:pPr algn="l"/>
             <a:r>
-              <a:rPr sz="2400" b="1" i="0">
+              <a:rPr sz="2280" b="1" i="0">
                 <a:solidFill>
                   <a:srgbClr val="1A1A1A"/>
                 </a:solidFill>
-                <a:latin typeface="Century Schoolbook"/>
+                <a:latin typeface="Lexend"/>
               </a:rPr>
               <a:t>A.   </a:t>
             </a:r>
             <a:r>
-              <a:rPr sz="2400" b="0" i="0">
+              <a:rPr sz="2280" b="0" i="0">
                 <a:solidFill>
                   <a:srgbClr val="1A1A1A"/>
                 </a:solidFill>
-                <a:latin typeface="Century Schoolbook"/>
+                <a:latin typeface="Lexend"/>
               </a:rPr>
               <a:t>25m</a:t>
             </a:r>
             <a:r>
-              <a:rPr sz="2400" b="0" i="0" baseline="30000">
+              <a:rPr sz="2280" b="0" i="0" baseline="30000">
                 <a:solidFill>
                   <a:srgbClr val="1A1A1A"/>
                 </a:solidFill>
-                <a:latin typeface="Century Schoolbook"/>
+                <a:latin typeface="Lexend"/>
               </a:rPr>
               <a:t>6</a:t>
             </a:r>
@@ -8665,7 +9327,7 @@
         </p:nvSpPr>
         <p:spPr>
           <a:xfrm>
-            <a:off x="6629400" y="3607639"/>
+            <a:off x="6629400" y="3598495"/>
             <a:ext cx="4572000" cy="548640"/>
           </a:xfrm>
           <a:prstGeom prst="rect">
@@ -8681,29 +9343,29 @@
           <a:p>
             <a:pPr algn="l"/>
             <a:r>
-              <a:rPr sz="2400" b="1" i="0">
+              <a:rPr sz="2280" b="1" i="0">
                 <a:solidFill>
                   <a:srgbClr val="1A1A1A"/>
                 </a:solidFill>
-                <a:latin typeface="Century Schoolbook"/>
+                <a:latin typeface="Lexend"/>
               </a:rPr>
               <a:t>B.   </a:t>
             </a:r>
             <a:r>
-              <a:rPr sz="2400" b="0" i="0">
+              <a:rPr sz="2280" b="0" i="0">
                 <a:solidFill>
                   <a:srgbClr val="1A1A1A"/>
                 </a:solidFill>
-                <a:latin typeface="Century Schoolbook"/>
+                <a:latin typeface="Lexend"/>
               </a:rPr>
               <a:t>10m</a:t>
             </a:r>
             <a:r>
-              <a:rPr sz="2400" b="0" i="0" baseline="30000">
+              <a:rPr sz="2280" b="0" i="0" baseline="30000">
                 <a:solidFill>
                   <a:srgbClr val="1A1A1A"/>
                 </a:solidFill>
-                <a:latin typeface="Century Schoolbook"/>
+                <a:latin typeface="Lexend"/>
               </a:rPr>
               <a:t>6</a:t>
             </a:r>
@@ -8718,7 +9380,7 @@
         </p:nvSpPr>
         <p:spPr>
           <a:xfrm>
-            <a:off x="1874519" y="4293439"/>
+            <a:off x="1874519" y="4284295"/>
             <a:ext cx="4572000" cy="548640"/>
           </a:xfrm>
           <a:prstGeom prst="rect">
@@ -8734,29 +9396,29 @@
           <a:p>
             <a:pPr algn="l"/>
             <a:r>
-              <a:rPr sz="2400" b="1" i="0">
+              <a:rPr sz="2280" b="1" i="0">
                 <a:solidFill>
                   <a:srgbClr val="1A1A1A"/>
                 </a:solidFill>
-                <a:latin typeface="Century Schoolbook"/>
+                <a:latin typeface="Lexend"/>
               </a:rPr>
               <a:t>C.   </a:t>
             </a:r>
             <a:r>
-              <a:rPr sz="2400" b="0" i="0">
+              <a:rPr sz="2280" b="0" i="0">
                 <a:solidFill>
                   <a:srgbClr val="1A1A1A"/>
                 </a:solidFill>
-                <a:latin typeface="Century Schoolbook"/>
+                <a:latin typeface="Lexend"/>
               </a:rPr>
               <a:t>25m</a:t>
             </a:r>
             <a:r>
-              <a:rPr sz="2400" b="0" i="0" baseline="30000">
+              <a:rPr sz="2280" b="0" i="0" baseline="30000">
                 <a:solidFill>
                   <a:srgbClr val="1A1A1A"/>
                 </a:solidFill>
-                <a:latin typeface="Century Schoolbook"/>
+                <a:latin typeface="Lexend"/>
               </a:rPr>
               <a:t>5</a:t>
             </a:r>
@@ -8771,7 +9433,7 @@
         </p:nvSpPr>
         <p:spPr>
           <a:xfrm>
-            <a:off x="6629400" y="4293439"/>
+            <a:off x="6629400" y="4284295"/>
             <a:ext cx="4572000" cy="548640"/>
           </a:xfrm>
           <a:prstGeom prst="rect">
@@ -8787,29 +9449,29 @@
           <a:p>
             <a:pPr algn="l"/>
             <a:r>
-              <a:rPr sz="2400" b="1" i="0">
+              <a:rPr sz="2280" b="1" i="0">
                 <a:solidFill>
                   <a:srgbClr val="1A1A1A"/>
                 </a:solidFill>
-                <a:latin typeface="Century Schoolbook"/>
+                <a:latin typeface="Lexend"/>
               </a:rPr>
               <a:t>D.   </a:t>
             </a:r>
             <a:r>
-              <a:rPr sz="2400" b="0" i="0">
+              <a:rPr sz="2280" b="0" i="0">
                 <a:solidFill>
                   <a:srgbClr val="1A1A1A"/>
                 </a:solidFill>
-                <a:latin typeface="Century Schoolbook"/>
+                <a:latin typeface="Lexend"/>
               </a:rPr>
               <a:t>5m</a:t>
             </a:r>
             <a:r>
-              <a:rPr sz="2400" b="0" i="0" baseline="30000">
+              <a:rPr sz="2280" b="0" i="0" baseline="30000">
                 <a:solidFill>
                   <a:srgbClr val="1A1A1A"/>
                 </a:solidFill>
-                <a:latin typeface="Century Schoolbook"/>
+                <a:latin typeface="Lexend"/>
               </a:rPr>
               <a:t>6</a:t>
             </a:r>
@@ -8824,7 +9486,7 @@
         </p:nvSpPr>
         <p:spPr>
           <a:xfrm>
-            <a:off x="777240" y="5299279"/>
+            <a:off x="777240" y="5290135"/>
             <a:ext cx="10607040" cy="457200"/>
           </a:xfrm>
           <a:prstGeom prst="rect">
@@ -8840,11 +9502,11 @@
           <a:p>
             <a:pPr algn="ctr"/>
             <a:r>
-              <a:rPr sz="2600" b="1" i="0">
+              <a:rPr sz="2470" b="1" i="0">
                 <a:solidFill>
                   <a:srgbClr val="1A1A1A"/>
                 </a:solidFill>
-                <a:latin typeface="Century Schoolbook"/>
+                <a:latin typeface="Lexend"/>
               </a:rPr>
               <a:t>Answer it.</a:t>
             </a:r>
@@ -8893,11 +9555,11 @@
           <a:p>
             <a:pPr algn="l"/>
             <a:r>
-              <a:rPr sz="3400" b="1" i="0">
+              <a:rPr sz="3229" b="1" i="0">
                 <a:solidFill>
                   <a:srgbClr val="1A1A1A"/>
                 </a:solidFill>
-                <a:latin typeface="Century Schoolbook"/>
+                <a:latin typeface="Lexend"/>
               </a:rPr>
               <a:t>Whiteboards   ·   Question 5 of 9</a:t>
             </a:r>
@@ -9033,11 +9695,11 @@
           <a:p>
             <a:pPr algn="l"/>
             <a:r>
-              <a:rPr sz="1100" b="0" i="1">
+              <a:rPr sz="1040" b="0" i="0">
                 <a:solidFill>
                   <a:srgbClr val="6B6B6B"/>
                 </a:solidFill>
-                <a:latin typeface="Century Schoolbook"/>
+                <a:latin typeface="Lexend"/>
               </a:rPr>
               <a:t>Grade 7 Accelerated · Unit 3 · Thread A · Day 1 — Exponent Laws with Variable Bases</a:t>
             </a:r>
@@ -9068,11 +9730,11 @@
           <a:p>
             <a:pPr algn="r"/>
             <a:r>
-              <a:rPr sz="1100" b="0" i="0">
+              <a:rPr sz="1040" b="0" i="0">
                 <a:solidFill>
                   <a:srgbClr val="6B6B6B"/>
                 </a:solidFill>
-                <a:latin typeface="Century Schoolbook"/>
+                <a:latin typeface="Lexend"/>
               </a:rPr>
               <a:t>24</a:t>
             </a:r>
@@ -9081,7 +9743,7 @@
       </p:sp>
       <p:pic>
         <p:nvPicPr>
-          <p:cNvPr id="8" name="Picture 7" descr="b63f3b3a75f7bb38.png"/>
+          <p:cNvPr id="8" name="Picture 7" descr="71344e364b98fdb5.png"/>
           <p:cNvPicPr>
             <a:picLocks noChangeAspect="1"/>
           </p:cNvPicPr>
@@ -9095,8 +9757,8 @@
         </p:blipFill>
         <p:spPr>
           <a:xfrm>
-            <a:off x="5407152" y="2103120"/>
-            <a:ext cx="1347216" cy="518160"/>
+            <a:off x="5355336" y="2103120"/>
+            <a:ext cx="1450848" cy="509016"/>
           </a:xfrm>
           <a:prstGeom prst="rect">
             <a:avLst/>
@@ -9111,7 +9773,7 @@
         </p:nvSpPr>
         <p:spPr>
           <a:xfrm>
-            <a:off x="777240" y="2849879"/>
+            <a:off x="777240" y="2840736"/>
             <a:ext cx="10607040" cy="465151"/>
           </a:xfrm>
           <a:prstGeom prst="rect">
@@ -9127,27 +9789,51 @@
           <a:p>
             <a:pPr algn="ctr"/>
             <a:r>
-              <a:rPr sz="2600" b="0" i="0">
+              <a:rPr sz="2470" b="0" i="0">
                 <a:solidFill>
                   <a:srgbClr val="1A1A1A"/>
                 </a:solidFill>
-                <a:latin typeface="Century Schoolbook"/>
+                <a:latin typeface="Lexend"/>
               </a:rPr>
               <a:t>Which expression is equivalent?</a:t>
             </a:r>
           </a:p>
         </p:txBody>
       </p:sp>
-      <p:sp>
-        <p:nvSpPr>
-          <p:cNvPr id="10" name="TextBox 9"/>
-          <p:cNvSpPr txBox="1"/>
-          <p:nvPr/>
-        </p:nvSpPr>
-        <p:spPr>
-          <a:xfrm>
-            <a:off x="1874519" y="3516199"/>
-            <a:ext cx="4572000" cy="548640"/>
+      <p:pic>
+        <p:nvPicPr>
+          <p:cNvPr id="10" name="Picture 9" descr="6dcc307e4b4bb3d7.png"/>
+          <p:cNvPicPr>
+            <a:picLocks noChangeAspect="1"/>
+          </p:cNvPicPr>
+          <p:nvPr/>
+        </p:nvPicPr>
+        <p:blipFill>
+          <a:blip r:embed="rId3"/>
+          <a:stretch>
+            <a:fillRect/>
+          </a:stretch>
+        </p:blipFill>
+        <p:spPr>
+          <a:xfrm>
+            <a:off x="4187951" y="3508579"/>
+            <a:ext cx="3892296" cy="371856"/>
+          </a:xfrm>
+          <a:prstGeom prst="rect">
+            <a:avLst/>
+          </a:prstGeom>
+        </p:spPr>
+      </p:pic>
+      <p:sp>
+        <p:nvSpPr>
+          <p:cNvPr id="11" name="TextBox 10"/>
+          <p:cNvSpPr txBox="1"/>
+          <p:nvPr/>
+        </p:nvSpPr>
+        <p:spPr>
+          <a:xfrm>
+            <a:off x="777240" y="4663440"/>
+            <a:ext cx="10607040" cy="548640"/>
           </a:xfrm>
           <a:prstGeom prst="rect">
             <a:avLst/>
@@ -9160,234 +9846,22 @@
           </a:bodyPr>
           <a:lstStyle/>
           <a:p>
-            <a:pPr algn="l"/>
-            <a:r>
-              <a:rPr sz="2400" b="1" i="0">
+            <a:pPr algn="ctr"/>
+            <a:r>
+              <a:rPr sz="3040" b="1" i="0">
                 <a:solidFill>
                   <a:srgbClr val="9E1B32"/>
                 </a:solidFill>
-                <a:latin typeface="Century Schoolbook"/>
-              </a:rPr>
-              <a:t>A.   </a:t>
-            </a:r>
-            <a:r>
-              <a:rPr sz="2400" b="1" i="0">
+                <a:latin typeface="Lexend"/>
+              </a:rPr>
+              <a:t>Answer:   A — 25m</a:t>
+            </a:r>
+            <a:r>
+              <a:rPr sz="3040" b="1" i="0" baseline="30000">
                 <a:solidFill>
                   <a:srgbClr val="9E1B32"/>
                 </a:solidFill>
-                <a:latin typeface="Century Schoolbook"/>
-              </a:rPr>
-              <a:t>25m</a:t>
-            </a:r>
-            <a:r>
-              <a:rPr sz="2400" b="1" i="0" baseline="30000">
-                <a:solidFill>
-                  <a:srgbClr val="9E1B32"/>
-                </a:solidFill>
-                <a:latin typeface="Century Schoolbook"/>
-              </a:rPr>
-              <a:t>6</a:t>
-            </a:r>
-          </a:p>
-        </p:txBody>
-      </p:sp>
-      <p:sp>
-        <p:nvSpPr>
-          <p:cNvPr id="11" name="TextBox 10"/>
-          <p:cNvSpPr txBox="1"/>
-          <p:nvPr/>
-        </p:nvSpPr>
-        <p:spPr>
-          <a:xfrm>
-            <a:off x="6629400" y="3516199"/>
-            <a:ext cx="4572000" cy="548640"/>
-          </a:xfrm>
-          <a:prstGeom prst="rect">
-            <a:avLst/>
-          </a:prstGeom>
-          <a:noFill/>
-        </p:spPr>
-        <p:txBody>
-          <a:bodyPr wrap="square" lIns="45720" rIns="45720" tIns="18288" bIns="18288" anchor="t">
-            <a:spAutoFit/>
-          </a:bodyPr>
-          <a:lstStyle/>
-          <a:p>
-            <a:pPr algn="l"/>
-            <a:r>
-              <a:rPr sz="2400" b="1" i="0">
-                <a:solidFill>
-                  <a:srgbClr val="1A1A1A"/>
-                </a:solidFill>
-                <a:latin typeface="Century Schoolbook"/>
-              </a:rPr>
-              <a:t>B.   </a:t>
-            </a:r>
-            <a:r>
-              <a:rPr sz="2400" b="0" i="0">
-                <a:solidFill>
-                  <a:srgbClr val="1A1A1A"/>
-                </a:solidFill>
-                <a:latin typeface="Century Schoolbook"/>
-              </a:rPr>
-              <a:t>10m</a:t>
-            </a:r>
-            <a:r>
-              <a:rPr sz="2400" b="0" i="0" baseline="30000">
-                <a:solidFill>
-                  <a:srgbClr val="1A1A1A"/>
-                </a:solidFill>
-                <a:latin typeface="Century Schoolbook"/>
-              </a:rPr>
-              <a:t>6</a:t>
-            </a:r>
-          </a:p>
-        </p:txBody>
-      </p:sp>
-      <p:sp>
-        <p:nvSpPr>
-          <p:cNvPr id="12" name="TextBox 11"/>
-          <p:cNvSpPr txBox="1"/>
-          <p:nvPr/>
-        </p:nvSpPr>
-        <p:spPr>
-          <a:xfrm>
-            <a:off x="1874519" y="4201999"/>
-            <a:ext cx="4572000" cy="548640"/>
-          </a:xfrm>
-          <a:prstGeom prst="rect">
-            <a:avLst/>
-          </a:prstGeom>
-          <a:noFill/>
-        </p:spPr>
-        <p:txBody>
-          <a:bodyPr wrap="square" lIns="45720" rIns="45720" tIns="18288" bIns="18288" anchor="t">
-            <a:spAutoFit/>
-          </a:bodyPr>
-          <a:lstStyle/>
-          <a:p>
-            <a:pPr algn="l"/>
-            <a:r>
-              <a:rPr sz="2400" b="1" i="0">
-                <a:solidFill>
-                  <a:srgbClr val="1A1A1A"/>
-                </a:solidFill>
-                <a:latin typeface="Century Schoolbook"/>
-              </a:rPr>
-              <a:t>C.   </a:t>
-            </a:r>
-            <a:r>
-              <a:rPr sz="2400" b="0" i="0">
-                <a:solidFill>
-                  <a:srgbClr val="1A1A1A"/>
-                </a:solidFill>
-                <a:latin typeface="Century Schoolbook"/>
-              </a:rPr>
-              <a:t>25m</a:t>
-            </a:r>
-            <a:r>
-              <a:rPr sz="2400" b="0" i="0" baseline="30000">
-                <a:solidFill>
-                  <a:srgbClr val="1A1A1A"/>
-                </a:solidFill>
-                <a:latin typeface="Century Schoolbook"/>
-              </a:rPr>
-              <a:t>5</a:t>
-            </a:r>
-          </a:p>
-        </p:txBody>
-      </p:sp>
-      <p:sp>
-        <p:nvSpPr>
-          <p:cNvPr id="13" name="TextBox 12"/>
-          <p:cNvSpPr txBox="1"/>
-          <p:nvPr/>
-        </p:nvSpPr>
-        <p:spPr>
-          <a:xfrm>
-            <a:off x="6629400" y="4201999"/>
-            <a:ext cx="4572000" cy="548640"/>
-          </a:xfrm>
-          <a:prstGeom prst="rect">
-            <a:avLst/>
-          </a:prstGeom>
-          <a:noFill/>
-        </p:spPr>
-        <p:txBody>
-          <a:bodyPr wrap="square" lIns="45720" rIns="45720" tIns="18288" bIns="18288" anchor="t">
-            <a:spAutoFit/>
-          </a:bodyPr>
-          <a:lstStyle/>
-          <a:p>
-            <a:pPr algn="l"/>
-            <a:r>
-              <a:rPr sz="2400" b="1" i="0">
-                <a:solidFill>
-                  <a:srgbClr val="1A1A1A"/>
-                </a:solidFill>
-                <a:latin typeface="Century Schoolbook"/>
-              </a:rPr>
-              <a:t>D.   </a:t>
-            </a:r>
-            <a:r>
-              <a:rPr sz="2400" b="0" i="0">
-                <a:solidFill>
-                  <a:srgbClr val="1A1A1A"/>
-                </a:solidFill>
-                <a:latin typeface="Century Schoolbook"/>
-              </a:rPr>
-              <a:t>5m</a:t>
-            </a:r>
-            <a:r>
-              <a:rPr sz="2400" b="0" i="0" baseline="30000">
-                <a:solidFill>
-                  <a:srgbClr val="1A1A1A"/>
-                </a:solidFill>
-                <a:latin typeface="Century Schoolbook"/>
-              </a:rPr>
-              <a:t>6</a:t>
-            </a:r>
-          </a:p>
-        </p:txBody>
-      </p:sp>
-      <p:sp>
-        <p:nvSpPr>
-          <p:cNvPr id="14" name="TextBox 13"/>
-          <p:cNvSpPr txBox="1"/>
-          <p:nvPr/>
-        </p:nvSpPr>
-        <p:spPr>
-          <a:xfrm>
-            <a:off x="777240" y="5207839"/>
-            <a:ext cx="10607040" cy="548640"/>
-          </a:xfrm>
-          <a:prstGeom prst="rect">
-            <a:avLst/>
-          </a:prstGeom>
-          <a:noFill/>
-        </p:spPr>
-        <p:txBody>
-          <a:bodyPr wrap="square" lIns="45720" rIns="45720" tIns="18288" bIns="18288" anchor="t">
-            <a:spAutoFit/>
-          </a:bodyPr>
-          <a:lstStyle/>
-          <a:p>
-            <a:pPr algn="ctr"/>
-            <a:r>
-              <a:rPr sz="3200" b="1" i="0">
-                <a:solidFill>
-                  <a:srgbClr val="9E1B32"/>
-                </a:solidFill>
-                <a:latin typeface="Century Schoolbook"/>
-              </a:rPr>
-              <a:t>Answer:   A — 25m</a:t>
-            </a:r>
-            <a:r>
-              <a:rPr sz="3200" b="1" i="0" baseline="30000">
-                <a:solidFill>
-                  <a:srgbClr val="9E1B32"/>
-                </a:solidFill>
-                <a:latin typeface="Century Schoolbook"/>
+                <a:latin typeface="Lexend"/>
               </a:rPr>
               <a:t>6</a:t>
             </a:r>
@@ -9436,11 +9910,11 @@
           <a:p>
             <a:pPr algn="l"/>
             <a:r>
-              <a:rPr sz="3400" b="1" i="0">
+              <a:rPr sz="3229" b="1" i="0">
                 <a:solidFill>
                   <a:srgbClr val="1A1A1A"/>
                 </a:solidFill>
-                <a:latin typeface="Century Schoolbook"/>
+                <a:latin typeface="Lexend"/>
               </a:rPr>
               <a:t>Whiteboards   ·   Question 6 of 9</a:t>
             </a:r>
@@ -9576,11 +10050,11 @@
           <a:p>
             <a:pPr algn="l"/>
             <a:r>
-              <a:rPr sz="1100" b="0" i="1">
+              <a:rPr sz="1040" b="0" i="0">
                 <a:solidFill>
                   <a:srgbClr val="6B6B6B"/>
                 </a:solidFill>
-                <a:latin typeface="Century Schoolbook"/>
+                <a:latin typeface="Lexend"/>
               </a:rPr>
               <a:t>Grade 7 Accelerated · Unit 3 · Thread A · Day 1 — Exponent Laws with Variable Bases</a:t>
             </a:r>
@@ -9611,11 +10085,11 @@
           <a:p>
             <a:pPr algn="r"/>
             <a:r>
-              <a:rPr sz="1100" b="0" i="0">
+              <a:rPr sz="1040" b="0" i="0">
                 <a:solidFill>
                   <a:srgbClr val="6B6B6B"/>
                 </a:solidFill>
-                <a:latin typeface="Century Schoolbook"/>
+                <a:latin typeface="Lexend"/>
               </a:rPr>
               <a:t>25</a:t>
             </a:r>
@@ -9624,7 +10098,7 @@
       </p:sp>
       <p:pic>
         <p:nvPicPr>
-          <p:cNvPr id="8" name="Picture 7" descr="a9b3bfaec72a6e92.png"/>
+          <p:cNvPr id="8" name="Picture 7" descr="a573a675710e2259.png"/>
           <p:cNvPicPr>
             <a:picLocks noChangeAspect="1"/>
           </p:cNvPicPr>
@@ -9638,8 +10112,8 @@
         </p:blipFill>
         <p:spPr>
           <a:xfrm>
-            <a:off x="5596127" y="2194560"/>
-            <a:ext cx="969264" cy="1011936"/>
+            <a:off x="5574791" y="2194560"/>
+            <a:ext cx="1011936" cy="990599"/>
           </a:xfrm>
           <a:prstGeom prst="rect">
             <a:avLst/>
@@ -9654,7 +10128,7 @@
         </p:nvSpPr>
         <p:spPr>
           <a:xfrm>
-            <a:off x="777240" y="3435096"/>
+            <a:off x="777240" y="3413760"/>
             <a:ext cx="10607040" cy="465151"/>
           </a:xfrm>
           <a:prstGeom prst="rect">
@@ -9670,11 +10144,11 @@
           <a:p>
             <a:pPr algn="ctr"/>
             <a:r>
-              <a:rPr sz="2600" b="0" i="0">
+              <a:rPr sz="2470" b="0" i="0">
                 <a:solidFill>
                   <a:srgbClr val="1A1A1A"/>
                 </a:solidFill>
-                <a:latin typeface="Century Schoolbook"/>
+                <a:latin typeface="Lexend"/>
               </a:rPr>
               <a:t>Which expression is equivalent?</a:t>
             </a:r>
@@ -9689,7 +10163,7 @@
         </p:nvSpPr>
         <p:spPr>
           <a:xfrm>
-            <a:off x="1874519" y="4101415"/>
+            <a:off x="1874519" y="4080079"/>
             <a:ext cx="4572000" cy="548640"/>
           </a:xfrm>
           <a:prstGeom prst="rect">
@@ -9705,29 +10179,29 @@
           <a:p>
             <a:pPr algn="l"/>
             <a:r>
-              <a:rPr sz="2400" b="1" i="0">
+              <a:rPr sz="2280" b="1" i="0">
                 <a:solidFill>
                   <a:srgbClr val="1A1A1A"/>
                 </a:solidFill>
-                <a:latin typeface="Century Schoolbook"/>
+                <a:latin typeface="Lexend"/>
               </a:rPr>
               <a:t>A.   </a:t>
             </a:r>
             <a:r>
-              <a:rPr sz="2400" b="0" i="0">
+              <a:rPr sz="2280" b="0" i="0">
                 <a:solidFill>
                   <a:srgbClr val="1A1A1A"/>
                 </a:solidFill>
-                <a:latin typeface="Century Schoolbook"/>
+                <a:latin typeface="Lexend"/>
               </a:rPr>
               <a:t>4x</a:t>
             </a:r>
             <a:r>
-              <a:rPr sz="2400" b="0" i="0" baseline="30000">
+              <a:rPr sz="2280" b="0" i="0" baseline="30000">
                 <a:solidFill>
                   <a:srgbClr val="1A1A1A"/>
                 </a:solidFill>
-                <a:latin typeface="Century Schoolbook"/>
+                <a:latin typeface="Lexend"/>
               </a:rPr>
               <a:t>10</a:t>
             </a:r>
@@ -9742,7 +10216,7 @@
         </p:nvSpPr>
         <p:spPr>
           <a:xfrm>
-            <a:off x="6629400" y="4101415"/>
+            <a:off x="6629400" y="4080079"/>
             <a:ext cx="4572000" cy="548640"/>
           </a:xfrm>
           <a:prstGeom prst="rect">
@@ -9758,29 +10232,29 @@
           <a:p>
             <a:pPr algn="l"/>
             <a:r>
-              <a:rPr sz="2400" b="1" i="0">
+              <a:rPr sz="2280" b="1" i="0">
                 <a:solidFill>
                   <a:srgbClr val="1A1A1A"/>
                 </a:solidFill>
-                <a:latin typeface="Century Schoolbook"/>
+                <a:latin typeface="Lexend"/>
               </a:rPr>
               <a:t>B.   </a:t>
             </a:r>
             <a:r>
-              <a:rPr sz="2400" b="0" i="0">
+              <a:rPr sz="2280" b="0" i="0">
                 <a:solidFill>
                   <a:srgbClr val="1A1A1A"/>
                 </a:solidFill>
-                <a:latin typeface="Century Schoolbook"/>
+                <a:latin typeface="Lexend"/>
               </a:rPr>
               <a:t>4x</a:t>
             </a:r>
             <a:r>
-              <a:rPr sz="2400" b="0" i="0" baseline="30000">
+              <a:rPr sz="2280" b="0" i="0" baseline="30000">
                 <a:solidFill>
                   <a:srgbClr val="1A1A1A"/>
                 </a:solidFill>
-                <a:latin typeface="Century Schoolbook"/>
+                <a:latin typeface="Lexend"/>
               </a:rPr>
               <a:t>6</a:t>
             </a:r>
@@ -9795,7 +10269,7 @@
         </p:nvSpPr>
         <p:spPr>
           <a:xfrm>
-            <a:off x="1874519" y="4787215"/>
+            <a:off x="1874519" y="4765879"/>
             <a:ext cx="4572000" cy="548640"/>
           </a:xfrm>
           <a:prstGeom prst="rect">
@@ -9811,29 +10285,29 @@
           <a:p>
             <a:pPr algn="l"/>
             <a:r>
-              <a:rPr sz="2400" b="1" i="0">
+              <a:rPr sz="2280" b="1" i="0">
                 <a:solidFill>
                   <a:srgbClr val="1A1A1A"/>
                 </a:solidFill>
-                <a:latin typeface="Century Schoolbook"/>
+                <a:latin typeface="Lexend"/>
               </a:rPr>
               <a:t>C.   </a:t>
             </a:r>
             <a:r>
-              <a:rPr sz="2400" b="0" i="0">
+              <a:rPr sz="2280" b="0" i="0">
                 <a:solidFill>
                   <a:srgbClr val="1A1A1A"/>
                 </a:solidFill>
-                <a:latin typeface="Century Schoolbook"/>
+                <a:latin typeface="Lexend"/>
               </a:rPr>
               <a:t>9x</a:t>
             </a:r>
             <a:r>
-              <a:rPr sz="2400" b="0" i="0" baseline="30000">
+              <a:rPr sz="2280" b="0" i="0" baseline="30000">
                 <a:solidFill>
                   <a:srgbClr val="1A1A1A"/>
                 </a:solidFill>
-                <a:latin typeface="Century Schoolbook"/>
+                <a:latin typeface="Lexend"/>
               </a:rPr>
               <a:t>6</a:t>
             </a:r>
@@ -9848,7 +10322,7 @@
         </p:nvSpPr>
         <p:spPr>
           <a:xfrm>
-            <a:off x="6629400" y="4787215"/>
+            <a:off x="6629400" y="4765879"/>
             <a:ext cx="4572000" cy="548640"/>
           </a:xfrm>
           <a:prstGeom prst="rect">
@@ -9864,29 +10338,29 @@
           <a:p>
             <a:pPr algn="l"/>
             <a:r>
-              <a:rPr sz="2400" b="1" i="0">
+              <a:rPr sz="2280" b="1" i="0">
                 <a:solidFill>
                   <a:srgbClr val="1A1A1A"/>
                 </a:solidFill>
-                <a:latin typeface="Century Schoolbook"/>
+                <a:latin typeface="Lexend"/>
               </a:rPr>
               <a:t>D.   </a:t>
             </a:r>
             <a:r>
-              <a:rPr sz="2400" b="0" i="0">
+              <a:rPr sz="2280" b="0" i="0">
                 <a:solidFill>
                   <a:srgbClr val="1A1A1A"/>
                 </a:solidFill>
-                <a:latin typeface="Century Schoolbook"/>
+                <a:latin typeface="Lexend"/>
               </a:rPr>
               <a:t>4x</a:t>
             </a:r>
             <a:r>
-              <a:rPr sz="2400" b="0" i="0" baseline="30000">
+              <a:rPr sz="2280" b="0" i="0" baseline="30000">
                 <a:solidFill>
                   <a:srgbClr val="1A1A1A"/>
                 </a:solidFill>
-                <a:latin typeface="Century Schoolbook"/>
+                <a:latin typeface="Lexend"/>
               </a:rPr>
               <a:t>4</a:t>
             </a:r>
@@ -9917,11 +10391,11 @@
           <a:p>
             <a:pPr algn="ctr"/>
             <a:r>
-              <a:rPr sz="2600" b="1" i="0">
+              <a:rPr sz="2470" b="1" i="0">
                 <a:solidFill>
                   <a:srgbClr val="1A1A1A"/>
                 </a:solidFill>
-                <a:latin typeface="Century Schoolbook"/>
+                <a:latin typeface="Lexend"/>
               </a:rPr>
               <a:t>Answer it.</a:t>
             </a:r>
@@ -9970,11 +10444,11 @@
           <a:p>
             <a:pPr algn="l"/>
             <a:r>
-              <a:rPr sz="3400" b="1" i="0">
+              <a:rPr sz="3229" b="1" i="0">
                 <a:solidFill>
                   <a:srgbClr val="1A1A1A"/>
                 </a:solidFill>
-                <a:latin typeface="Century Schoolbook"/>
+                <a:latin typeface="Lexend"/>
               </a:rPr>
               <a:t>Whiteboards   ·   Question 6 of 9</a:t>
             </a:r>
@@ -10110,11 +10584,11 @@
           <a:p>
             <a:pPr algn="l"/>
             <a:r>
-              <a:rPr sz="1100" b="0" i="1">
+              <a:rPr sz="1040" b="0" i="0">
                 <a:solidFill>
                   <a:srgbClr val="6B6B6B"/>
                 </a:solidFill>
-                <a:latin typeface="Century Schoolbook"/>
+                <a:latin typeface="Lexend"/>
               </a:rPr>
               <a:t>Grade 7 Accelerated · Unit 3 · Thread A · Day 1 — Exponent Laws with Variable Bases</a:t>
             </a:r>
@@ -10145,11 +10619,11 @@
           <a:p>
             <a:pPr algn="r"/>
             <a:r>
-              <a:rPr sz="1100" b="0" i="0">
+              <a:rPr sz="1040" b="0" i="0">
                 <a:solidFill>
                   <a:srgbClr val="6B6B6B"/>
                 </a:solidFill>
-                <a:latin typeface="Century Schoolbook"/>
+                <a:latin typeface="Lexend"/>
               </a:rPr>
               <a:t>26</a:t>
             </a:r>
@@ -10158,7 +10632,7 @@
       </p:sp>
       <p:pic>
         <p:nvPicPr>
-          <p:cNvPr id="8" name="Picture 7" descr="57f74e63f18b45cb.png"/>
+          <p:cNvPr id="8" name="Picture 7" descr="662958141cc8769f.png"/>
           <p:cNvPicPr>
             <a:picLocks noChangeAspect="1"/>
           </p:cNvPicPr>
@@ -10172,8 +10646,8 @@
         </p:blipFill>
         <p:spPr>
           <a:xfrm>
-            <a:off x="5597651" y="2103120"/>
-            <a:ext cx="966216" cy="1011936"/>
+            <a:off x="5577840" y="2103120"/>
+            <a:ext cx="1005840" cy="993648"/>
           </a:xfrm>
           <a:prstGeom prst="rect">
             <a:avLst/>
@@ -10188,7 +10662,7 @@
         </p:nvSpPr>
         <p:spPr>
           <a:xfrm>
-            <a:off x="777240" y="3343655"/>
+            <a:off x="777240" y="3325368"/>
             <a:ext cx="10607040" cy="465151"/>
           </a:xfrm>
           <a:prstGeom prst="rect">
@@ -10204,11 +10678,11 @@
           <a:p>
             <a:pPr algn="ctr"/>
             <a:r>
-              <a:rPr sz="2600" b="0" i="0">
+              <a:rPr sz="2470" b="0" i="0">
                 <a:solidFill>
                   <a:srgbClr val="1A1A1A"/>
                 </a:solidFill>
-                <a:latin typeface="Century Schoolbook"/>
+                <a:latin typeface="Lexend"/>
               </a:rPr>
               <a:t>Which expression is equivalent?</a:t>
             </a:r>
@@ -10223,8 +10697,126 @@
         </p:nvSpPr>
         <p:spPr>
           <a:xfrm>
-            <a:off x="1874519" y="4009975"/>
-            <a:ext cx="4572000" cy="548640"/>
+            <a:off x="1790227" y="3950539"/>
+            <a:ext cx="2140786" cy="457200"/>
+          </a:xfrm>
+          <a:prstGeom prst="rect">
+            <a:avLst/>
+          </a:prstGeom>
+          <a:noFill/>
+        </p:spPr>
+        <p:txBody>
+          <a:bodyPr wrap="none" lIns="45720" rIns="45720" tIns="18288" bIns="18288" anchor="ctr">
+            <a:noAutofit/>
+          </a:bodyPr>
+          <a:lstStyle/>
+          <a:p>
+            <a:pPr algn="l"/>
+            <a:r>
+              <a:rPr sz="2750" b="0" i="0">
+                <a:solidFill>
+                  <a:srgbClr val="1A1A1A"/>
+                </a:solidFill>
+                <a:latin typeface="Lexend"/>
+              </a:rPr>
+              <a:t>Numbers:  </a:t>
+            </a:r>
+          </a:p>
+        </p:txBody>
+      </p:sp>
+      <p:pic>
+        <p:nvPicPr>
+          <p:cNvPr id="11" name="Picture 10" descr="2908f8b113149456.png"/>
+          <p:cNvPicPr>
+            <a:picLocks noChangeAspect="1"/>
+          </p:cNvPicPr>
+          <p:nvPr/>
+        </p:nvPicPr>
+        <p:blipFill>
+          <a:blip r:embed="rId3"/>
+          <a:stretch>
+            <a:fillRect/>
+          </a:stretch>
+        </p:blipFill>
+        <p:spPr>
+          <a:xfrm>
+            <a:off x="3793854" y="4052647"/>
+            <a:ext cx="1389888" cy="252984"/>
+          </a:xfrm>
+          <a:prstGeom prst="rect">
+            <a:avLst/>
+          </a:prstGeom>
+        </p:spPr>
+      </p:pic>
+      <p:sp>
+        <p:nvSpPr>
+          <p:cNvPr id="12" name="TextBox 11"/>
+          <p:cNvSpPr txBox="1"/>
+          <p:nvPr/>
+        </p:nvSpPr>
+        <p:spPr>
+          <a:xfrm>
+            <a:off x="5183742" y="3950539"/>
+            <a:ext cx="2551030" cy="457200"/>
+          </a:xfrm>
+          <a:prstGeom prst="rect">
+            <a:avLst/>
+          </a:prstGeom>
+          <a:noFill/>
+        </p:spPr>
+        <p:txBody>
+          <a:bodyPr wrap="none" lIns="45720" rIns="45720" tIns="18288" bIns="18288" anchor="ctr">
+            <a:noAutofit/>
+          </a:bodyPr>
+          <a:lstStyle/>
+          <a:p>
+            <a:pPr algn="l"/>
+            <a:r>
+              <a:rPr sz="2750" b="0" i="0">
+                <a:solidFill>
+                  <a:srgbClr val="1A1A1A"/>
+                </a:solidFill>
+                <a:latin typeface="Lexend"/>
+              </a:rPr>
+              <a:t>        The x's:  </a:t>
+            </a:r>
+          </a:p>
+        </p:txBody>
+      </p:sp>
+      <p:pic>
+        <p:nvPicPr>
+          <p:cNvPr id="13" name="Picture 12" descr="3aeb7558cdc9ff35.png"/>
+          <p:cNvPicPr>
+            <a:picLocks noChangeAspect="1"/>
+          </p:cNvPicPr>
+          <p:nvPr/>
+        </p:nvPicPr>
+        <p:blipFill>
+          <a:blip r:embed="rId4"/>
+          <a:stretch>
+            <a:fillRect/>
+          </a:stretch>
+        </p:blipFill>
+        <p:spPr>
+          <a:xfrm>
+            <a:off x="7597612" y="4026739"/>
+            <a:ext cx="2770632" cy="304800"/>
+          </a:xfrm>
+          <a:prstGeom prst="rect">
+            <a:avLst/>
+          </a:prstGeom>
+        </p:spPr>
+      </p:pic>
+      <p:sp>
+        <p:nvSpPr>
+          <p:cNvPr id="14" name="TextBox 13"/>
+          <p:cNvSpPr txBox="1"/>
+          <p:nvPr/>
+        </p:nvSpPr>
+        <p:spPr>
+          <a:xfrm>
+            <a:off x="777240" y="4663440"/>
+            <a:ext cx="10607040" cy="548640"/>
           </a:xfrm>
           <a:prstGeom prst="rect">
             <a:avLst/>
@@ -10237,234 +10829,22 @@
           </a:bodyPr>
           <a:lstStyle/>
           <a:p>
-            <a:pPr algn="l"/>
-            <a:r>
-              <a:rPr sz="2400" b="1" i="0">
-                <a:solidFill>
-                  <a:srgbClr val="1A1A1A"/>
-                </a:solidFill>
-                <a:latin typeface="Century Schoolbook"/>
-              </a:rPr>
-              <a:t>A.   </a:t>
-            </a:r>
-            <a:r>
-              <a:rPr sz="2400" b="0" i="0">
-                <a:solidFill>
-                  <a:srgbClr val="1A1A1A"/>
-                </a:solidFill>
-                <a:latin typeface="Century Schoolbook"/>
-              </a:rPr>
-              <a:t>4x</a:t>
-            </a:r>
-            <a:r>
-              <a:rPr sz="2400" b="0" i="0" baseline="30000">
-                <a:solidFill>
-                  <a:srgbClr val="1A1A1A"/>
-                </a:solidFill>
-                <a:latin typeface="Century Schoolbook"/>
-              </a:rPr>
-              <a:t>10</a:t>
-            </a:r>
-          </a:p>
-        </p:txBody>
-      </p:sp>
-      <p:sp>
-        <p:nvSpPr>
-          <p:cNvPr id="11" name="TextBox 10"/>
-          <p:cNvSpPr txBox="1"/>
-          <p:nvPr/>
-        </p:nvSpPr>
-        <p:spPr>
-          <a:xfrm>
-            <a:off x="6629400" y="4009975"/>
-            <a:ext cx="4572000" cy="548640"/>
-          </a:xfrm>
-          <a:prstGeom prst="rect">
-            <a:avLst/>
-          </a:prstGeom>
-          <a:noFill/>
-        </p:spPr>
-        <p:txBody>
-          <a:bodyPr wrap="square" lIns="45720" rIns="45720" tIns="18288" bIns="18288" anchor="t">
-            <a:spAutoFit/>
-          </a:bodyPr>
-          <a:lstStyle/>
-          <a:p>
-            <a:pPr algn="l"/>
-            <a:r>
-              <a:rPr sz="2400" b="1" i="0">
+            <a:pPr algn="ctr"/>
+            <a:r>
+              <a:rPr sz="3040" b="1" i="0">
                 <a:solidFill>
                   <a:srgbClr val="9E1B32"/>
                 </a:solidFill>
-                <a:latin typeface="Century Schoolbook"/>
-              </a:rPr>
-              <a:t>B.   </a:t>
-            </a:r>
-            <a:r>
-              <a:rPr sz="2400" b="1" i="0">
+                <a:latin typeface="Lexend"/>
+              </a:rPr>
+              <a:t>Answer:   B — 4x</a:t>
+            </a:r>
+            <a:r>
+              <a:rPr sz="3040" b="1" i="0" baseline="30000">
                 <a:solidFill>
                   <a:srgbClr val="9E1B32"/>
                 </a:solidFill>
-                <a:latin typeface="Century Schoolbook"/>
-              </a:rPr>
-              <a:t>4x</a:t>
-            </a:r>
-            <a:r>
-              <a:rPr sz="2400" b="1" i="0" baseline="30000">
-                <a:solidFill>
-                  <a:srgbClr val="9E1B32"/>
-                </a:solidFill>
-                <a:latin typeface="Century Schoolbook"/>
-              </a:rPr>
-              <a:t>6</a:t>
-            </a:r>
-          </a:p>
-        </p:txBody>
-      </p:sp>
-      <p:sp>
-        <p:nvSpPr>
-          <p:cNvPr id="12" name="TextBox 11"/>
-          <p:cNvSpPr txBox="1"/>
-          <p:nvPr/>
-        </p:nvSpPr>
-        <p:spPr>
-          <a:xfrm>
-            <a:off x="1874519" y="4695775"/>
-            <a:ext cx="4572000" cy="548640"/>
-          </a:xfrm>
-          <a:prstGeom prst="rect">
-            <a:avLst/>
-          </a:prstGeom>
-          <a:noFill/>
-        </p:spPr>
-        <p:txBody>
-          <a:bodyPr wrap="square" lIns="45720" rIns="45720" tIns="18288" bIns="18288" anchor="t">
-            <a:spAutoFit/>
-          </a:bodyPr>
-          <a:lstStyle/>
-          <a:p>
-            <a:pPr algn="l"/>
-            <a:r>
-              <a:rPr sz="2400" b="1" i="0">
-                <a:solidFill>
-                  <a:srgbClr val="1A1A1A"/>
-                </a:solidFill>
-                <a:latin typeface="Century Schoolbook"/>
-              </a:rPr>
-              <a:t>C.   </a:t>
-            </a:r>
-            <a:r>
-              <a:rPr sz="2400" b="0" i="0">
-                <a:solidFill>
-                  <a:srgbClr val="1A1A1A"/>
-                </a:solidFill>
-                <a:latin typeface="Century Schoolbook"/>
-              </a:rPr>
-              <a:t>9x</a:t>
-            </a:r>
-            <a:r>
-              <a:rPr sz="2400" b="0" i="0" baseline="30000">
-                <a:solidFill>
-                  <a:srgbClr val="1A1A1A"/>
-                </a:solidFill>
-                <a:latin typeface="Century Schoolbook"/>
-              </a:rPr>
-              <a:t>6</a:t>
-            </a:r>
-          </a:p>
-        </p:txBody>
-      </p:sp>
-      <p:sp>
-        <p:nvSpPr>
-          <p:cNvPr id="13" name="TextBox 12"/>
-          <p:cNvSpPr txBox="1"/>
-          <p:nvPr/>
-        </p:nvSpPr>
-        <p:spPr>
-          <a:xfrm>
-            <a:off x="6629400" y="4695775"/>
-            <a:ext cx="4572000" cy="548640"/>
-          </a:xfrm>
-          <a:prstGeom prst="rect">
-            <a:avLst/>
-          </a:prstGeom>
-          <a:noFill/>
-        </p:spPr>
-        <p:txBody>
-          <a:bodyPr wrap="square" lIns="45720" rIns="45720" tIns="18288" bIns="18288" anchor="t">
-            <a:spAutoFit/>
-          </a:bodyPr>
-          <a:lstStyle/>
-          <a:p>
-            <a:pPr algn="l"/>
-            <a:r>
-              <a:rPr sz="2400" b="1" i="0">
-                <a:solidFill>
-                  <a:srgbClr val="1A1A1A"/>
-                </a:solidFill>
-                <a:latin typeface="Century Schoolbook"/>
-              </a:rPr>
-              <a:t>D.   </a:t>
-            </a:r>
-            <a:r>
-              <a:rPr sz="2400" b="0" i="0">
-                <a:solidFill>
-                  <a:srgbClr val="1A1A1A"/>
-                </a:solidFill>
-                <a:latin typeface="Century Schoolbook"/>
-              </a:rPr>
-              <a:t>4x</a:t>
-            </a:r>
-            <a:r>
-              <a:rPr sz="2400" b="0" i="0" baseline="30000">
-                <a:solidFill>
-                  <a:srgbClr val="1A1A1A"/>
-                </a:solidFill>
-                <a:latin typeface="Century Schoolbook"/>
-              </a:rPr>
-              <a:t>4</a:t>
-            </a:r>
-          </a:p>
-        </p:txBody>
-      </p:sp>
-      <p:sp>
-        <p:nvSpPr>
-          <p:cNvPr id="14" name="TextBox 13"/>
-          <p:cNvSpPr txBox="1"/>
-          <p:nvPr/>
-        </p:nvSpPr>
-        <p:spPr>
-          <a:xfrm>
-            <a:off x="777240" y="5632704"/>
-            <a:ext cx="10607040" cy="548640"/>
-          </a:xfrm>
-          <a:prstGeom prst="rect">
-            <a:avLst/>
-          </a:prstGeom>
-          <a:noFill/>
-        </p:spPr>
-        <p:txBody>
-          <a:bodyPr wrap="square" lIns="45720" rIns="45720" tIns="18288" bIns="18288" anchor="t">
-            <a:spAutoFit/>
-          </a:bodyPr>
-          <a:lstStyle/>
-          <a:p>
-            <a:pPr algn="ctr"/>
-            <a:r>
-              <a:rPr sz="3200" b="1" i="0">
-                <a:solidFill>
-                  <a:srgbClr val="9E1B32"/>
-                </a:solidFill>
-                <a:latin typeface="Century Schoolbook"/>
-              </a:rPr>
-              <a:t>Answer:   B — 4x</a:t>
-            </a:r>
-            <a:r>
-              <a:rPr sz="3200" b="1" i="0" baseline="30000">
-                <a:solidFill>
-                  <a:srgbClr val="9E1B32"/>
-                </a:solidFill>
-                <a:latin typeface="Century Schoolbook"/>
+                <a:latin typeface="Lexend"/>
               </a:rPr>
               <a:t>6</a:t>
             </a:r>
@@ -10513,11 +10893,11 @@
           <a:p>
             <a:pPr algn="l"/>
             <a:r>
-              <a:rPr sz="3400" b="1" i="0">
+              <a:rPr sz="3229" b="1" i="0">
                 <a:solidFill>
                   <a:srgbClr val="1A1A1A"/>
                 </a:solidFill>
-                <a:latin typeface="Century Schoolbook"/>
+                <a:latin typeface="Lexend"/>
               </a:rPr>
               <a:t>Whiteboards   ·   Question 7 of 9</a:t>
             </a:r>
@@ -10653,11 +11033,11 @@
           <a:p>
             <a:pPr algn="l"/>
             <a:r>
-              <a:rPr sz="1100" b="0" i="1">
+              <a:rPr sz="1040" b="0" i="0">
                 <a:solidFill>
                   <a:srgbClr val="6B6B6B"/>
                 </a:solidFill>
-                <a:latin typeface="Century Schoolbook"/>
+                <a:latin typeface="Lexend"/>
               </a:rPr>
               <a:t>Grade 7 Accelerated · Unit 3 · Thread A · Day 1 — Exponent Laws with Variable Bases</a:t>
             </a:r>
@@ -10688,11 +11068,11 @@
           <a:p>
             <a:pPr algn="r"/>
             <a:r>
-              <a:rPr sz="1100" b="0" i="0">
+              <a:rPr sz="1040" b="0" i="0">
                 <a:solidFill>
                   <a:srgbClr val="6B6B6B"/>
                 </a:solidFill>
-                <a:latin typeface="Century Schoolbook"/>
+                <a:latin typeface="Lexend"/>
               </a:rPr>
               <a:t>27</a:t>
             </a:r>
@@ -10701,7 +11081,7 @@
       </p:sp>
       <p:pic>
         <p:nvPicPr>
-          <p:cNvPr id="8" name="Picture 7" descr="85c3b95db630c6f5.png"/>
+          <p:cNvPr id="8" name="Picture 7" descr="15eaf6bc755cbb62.png"/>
           <p:cNvPicPr>
             <a:picLocks noChangeAspect="1"/>
           </p:cNvPicPr>
@@ -10715,8 +11095,8 @@
         </p:blipFill>
         <p:spPr>
           <a:xfrm>
-            <a:off x="5536692" y="2194560"/>
-            <a:ext cx="1088136" cy="1021080"/>
+            <a:off x="5480304" y="2194560"/>
+            <a:ext cx="1200912" cy="990599"/>
           </a:xfrm>
           <a:prstGeom prst="rect">
             <a:avLst/>
@@ -10747,11 +11127,11 @@
           <a:p>
             <a:pPr algn="ctr"/>
             <a:r>
-              <a:rPr sz="2600" b="1" i="0">
+              <a:rPr sz="2470" b="1" i="0">
                 <a:solidFill>
                   <a:srgbClr val="1A1A1A"/>
                 </a:solidFill>
-                <a:latin typeface="Century Schoolbook"/>
+                <a:latin typeface="Lexend"/>
               </a:rPr>
               <a:t>Answer it.</a:t>
             </a:r>
@@ -10800,11 +11180,11 @@
           <a:p>
             <a:pPr algn="l"/>
             <a:r>
-              <a:rPr sz="3400" b="1" i="0">
+              <a:rPr sz="3229" b="1" i="0">
                 <a:solidFill>
                   <a:srgbClr val="1A1A1A"/>
                 </a:solidFill>
-                <a:latin typeface="Century Schoolbook"/>
+                <a:latin typeface="Lexend"/>
               </a:rPr>
               <a:t>Whiteboards   ·   Question 7 of 9</a:t>
             </a:r>
@@ -10940,11 +11320,11 @@
           <a:p>
             <a:pPr algn="l"/>
             <a:r>
-              <a:rPr sz="1100" b="0" i="1">
+              <a:rPr sz="1040" b="0" i="0">
                 <a:solidFill>
                   <a:srgbClr val="6B6B6B"/>
                 </a:solidFill>
-                <a:latin typeface="Century Schoolbook"/>
+                <a:latin typeface="Lexend"/>
               </a:rPr>
               <a:t>Grade 7 Accelerated · Unit 3 · Thread A · Day 1 — Exponent Laws with Variable Bases</a:t>
             </a:r>
@@ -10975,11 +11355,11 @@
           <a:p>
             <a:pPr algn="r"/>
             <a:r>
-              <a:rPr sz="1100" b="0" i="0">
+              <a:rPr sz="1040" b="0" i="0">
                 <a:solidFill>
                   <a:srgbClr val="6B6B6B"/>
                 </a:solidFill>
-                <a:latin typeface="Century Schoolbook"/>
+                <a:latin typeface="Lexend"/>
               </a:rPr>
               <a:t>28</a:t>
             </a:r>
@@ -10988,7 +11368,7 @@
       </p:sp>
       <p:pic>
         <p:nvPicPr>
-          <p:cNvPr id="8" name="Picture 7" descr="b4ec42ed5af64daf.png"/>
+          <p:cNvPr id="8" name="Picture 7" descr="1f89042524950c8b.png"/>
           <p:cNvPicPr>
             <a:picLocks noChangeAspect="1"/>
           </p:cNvPicPr>
@@ -11002,8 +11382,8 @@
         </p:blipFill>
         <p:spPr>
           <a:xfrm>
-            <a:off x="5538215" y="2103120"/>
-            <a:ext cx="1085088" cy="1014984"/>
+            <a:off x="5481827" y="2103120"/>
+            <a:ext cx="1197864" cy="987552"/>
           </a:xfrm>
           <a:prstGeom prst="rect">
             <a:avLst/>
@@ -11018,36 +11398,36 @@
         </p:nvSpPr>
         <p:spPr>
           <a:xfrm>
-            <a:off x="4840224" y="4605528"/>
-            <a:ext cx="1920240" cy="548640"/>
-          </a:xfrm>
-          <a:prstGeom prst="rect">
-            <a:avLst/>
-          </a:prstGeom>
-          <a:noFill/>
-        </p:spPr>
-        <p:txBody>
-          <a:bodyPr wrap="square" lIns="45720" rIns="45720" tIns="18288" bIns="18288" anchor="ctr">
-            <a:spAutoFit/>
+            <a:off x="3591992" y="3369564"/>
+            <a:ext cx="1853335" cy="457200"/>
+          </a:xfrm>
+          <a:prstGeom prst="rect">
+            <a:avLst/>
+          </a:prstGeom>
+          <a:noFill/>
+        </p:spPr>
+        <p:txBody>
+          <a:bodyPr wrap="none" lIns="45720" rIns="45720" tIns="18288" bIns="18288" anchor="ctr">
+            <a:noAutofit/>
           </a:bodyPr>
           <a:lstStyle/>
           <a:p>
             <a:pPr algn="l"/>
             <a:r>
-              <a:rPr sz="3200" b="1" i="0">
-                <a:solidFill>
-                  <a:srgbClr val="9E1B32"/>
-                </a:solidFill>
-                <a:latin typeface="Century Schoolbook"/>
-              </a:rPr>
-              <a:t>Answer:</a:t>
+              <a:rPr sz="2750" b="0" i="0">
+                <a:solidFill>
+                  <a:srgbClr val="1A1A1A"/>
+                </a:solidFill>
+                <a:latin typeface="Lexend"/>
+              </a:rPr>
+              <a:t>The m's:  </a:t>
             </a:r>
           </a:p>
         </p:txBody>
       </p:sp>
       <p:pic>
         <p:nvPicPr>
-          <p:cNvPr id="10" name="Picture 9" descr="c33514adb2311b6f.png"/>
+          <p:cNvPr id="10" name="Picture 9" descr="f17cd6c71b560f6e.png"/>
           <p:cNvPicPr>
             <a:picLocks noChangeAspect="1"/>
           </p:cNvPicPr>
@@ -11061,8 +11441,126 @@
         </p:blipFill>
         <p:spPr>
           <a:xfrm>
-            <a:off x="6760463" y="4663440"/>
-            <a:ext cx="560832" cy="432816"/>
+            <a:off x="5308167" y="3445764"/>
+            <a:ext cx="3261360" cy="304800"/>
+          </a:xfrm>
+          <a:prstGeom prst="rect">
+            <a:avLst/>
+          </a:prstGeom>
+        </p:spPr>
+      </p:pic>
+      <p:sp>
+        <p:nvSpPr>
+          <p:cNvPr id="11" name="TextBox 10"/>
+          <p:cNvSpPr txBox="1"/>
+          <p:nvPr/>
+        </p:nvSpPr>
+        <p:spPr>
+          <a:xfrm>
+            <a:off x="3591992" y="3909059"/>
+            <a:ext cx="1732390" cy="457200"/>
+          </a:xfrm>
+          <a:prstGeom prst="rect">
+            <a:avLst/>
+          </a:prstGeom>
+          <a:noFill/>
+        </p:spPr>
+        <p:txBody>
+          <a:bodyPr wrap="none" lIns="45720" rIns="45720" tIns="18288" bIns="18288" anchor="ctr">
+            <a:noAutofit/>
+          </a:bodyPr>
+          <a:lstStyle/>
+          <a:p>
+            <a:pPr algn="l"/>
+            <a:r>
+              <a:rPr sz="2750" b="0" i="0">
+                <a:solidFill>
+                  <a:srgbClr val="1A1A1A"/>
+                </a:solidFill>
+                <a:latin typeface="Lexend"/>
+              </a:rPr>
+              <a:t>The n's:  </a:t>
+            </a:r>
+          </a:p>
+        </p:txBody>
+      </p:sp>
+      <p:pic>
+        <p:nvPicPr>
+          <p:cNvPr id="12" name="Picture 11" descr="928f349ecf76cfb6.png"/>
+          <p:cNvPicPr>
+            <a:picLocks noChangeAspect="1"/>
+          </p:cNvPicPr>
+          <p:nvPr/>
+        </p:nvPicPr>
+        <p:blipFill>
+          <a:blip r:embed="rId4"/>
+          <a:stretch>
+            <a:fillRect/>
+          </a:stretch>
+        </p:blipFill>
+        <p:spPr>
+          <a:xfrm>
+            <a:off x="5187222" y="3986783"/>
+            <a:ext cx="3371088" cy="301752"/>
+          </a:xfrm>
+          <a:prstGeom prst="rect">
+            <a:avLst/>
+          </a:prstGeom>
+        </p:spPr>
+      </p:pic>
+      <p:sp>
+        <p:nvSpPr>
+          <p:cNvPr id="13" name="TextBox 12"/>
+          <p:cNvSpPr txBox="1"/>
+          <p:nvPr/>
+        </p:nvSpPr>
+        <p:spPr>
+          <a:xfrm>
+            <a:off x="4808220" y="4596384"/>
+            <a:ext cx="1920240" cy="548640"/>
+          </a:xfrm>
+          <a:prstGeom prst="rect">
+            <a:avLst/>
+          </a:prstGeom>
+          <a:noFill/>
+        </p:spPr>
+        <p:txBody>
+          <a:bodyPr wrap="square" lIns="45720" rIns="45720" tIns="18288" bIns="18288" anchor="ctr">
+            <a:spAutoFit/>
+          </a:bodyPr>
+          <a:lstStyle/>
+          <a:p>
+            <a:pPr algn="l"/>
+            <a:r>
+              <a:rPr sz="3040" b="1" i="0">
+                <a:solidFill>
+                  <a:srgbClr val="9E1B32"/>
+                </a:solidFill>
+                <a:latin typeface="Lexend"/>
+              </a:rPr>
+              <a:t>Answer:</a:t>
+            </a:r>
+          </a:p>
+        </p:txBody>
+      </p:sp>
+      <p:pic>
+        <p:nvPicPr>
+          <p:cNvPr id="14" name="Picture 13" descr="9f07b18d81f5938b.png"/>
+          <p:cNvPicPr>
+            <a:picLocks noChangeAspect="1"/>
+          </p:cNvPicPr>
+          <p:nvPr/>
+        </p:nvPicPr>
+        <p:blipFill>
+          <a:blip r:embed="rId5"/>
+          <a:stretch>
+            <a:fillRect/>
+          </a:stretch>
+        </p:blipFill>
+        <p:spPr>
+          <a:xfrm>
+            <a:off x="6728459" y="4663440"/>
+            <a:ext cx="624840" cy="414528"/>
           </a:xfrm>
           <a:prstGeom prst="rect">
             <a:avLst/>
@@ -11111,11 +11609,11 @@
           <a:p>
             <a:pPr algn="l"/>
             <a:r>
-              <a:rPr sz="3400" b="1" i="0">
+              <a:rPr sz="3229" b="1" i="0">
                 <a:solidFill>
                   <a:srgbClr val="1A1A1A"/>
                 </a:solidFill>
-                <a:latin typeface="Century Schoolbook"/>
+                <a:latin typeface="Lexend"/>
               </a:rPr>
               <a:t>Whiteboards   ·   Question 8 of 9</a:t>
             </a:r>
@@ -11251,11 +11749,11 @@
           <a:p>
             <a:pPr algn="l"/>
             <a:r>
-              <a:rPr sz="1100" b="0" i="1">
+              <a:rPr sz="1040" b="0" i="0">
                 <a:solidFill>
                   <a:srgbClr val="6B6B6B"/>
                 </a:solidFill>
-                <a:latin typeface="Century Schoolbook"/>
+                <a:latin typeface="Lexend"/>
               </a:rPr>
               <a:t>Grade 7 Accelerated · Unit 3 · Thread A · Day 1 — Exponent Laws with Variable Bases</a:t>
             </a:r>
@@ -11286,11 +11784,11 @@
           <a:p>
             <a:pPr algn="r"/>
             <a:r>
-              <a:rPr sz="1100" b="0" i="0">
+              <a:rPr sz="1040" b="0" i="0">
                 <a:solidFill>
                   <a:srgbClr val="6B6B6B"/>
                 </a:solidFill>
-                <a:latin typeface="Century Schoolbook"/>
+                <a:latin typeface="Lexend"/>
               </a:rPr>
               <a:t>29</a:t>
             </a:r>
@@ -11305,8 +11803,8 @@
         </p:nvSpPr>
         <p:spPr>
           <a:xfrm>
-            <a:off x="4444343" y="2171700"/>
-            <a:ext cx="3047533" cy="457200"/>
+            <a:off x="4483087" y="2171700"/>
+            <a:ext cx="3006734" cy="457200"/>
           </a:xfrm>
           <a:prstGeom prst="rect">
             <a:avLst/>
@@ -11321,11 +11819,11 @@
           <a:p>
             <a:pPr algn="l"/>
             <a:r>
-              <a:rPr sz="2600" b="0" i="0">
+              <a:rPr sz="2470" b="0" i="0">
                 <a:solidFill>
                   <a:srgbClr val="1A1A1A"/>
                 </a:solidFill>
-                <a:latin typeface="Century Schoolbook"/>
+                <a:latin typeface="Lexend"/>
               </a:rPr>
               <a:t>Find the value of </a:t>
             </a:r>
@@ -11334,7 +11832,7 @@
       </p:sp>
       <p:pic>
         <p:nvPicPr>
-          <p:cNvPr id="9" name="Picture 8" descr="ce9b607ea85ce740.png"/>
+          <p:cNvPr id="9" name="Picture 8" descr="f14fce7cf077cd07.png"/>
           <p:cNvPicPr>
             <a:picLocks noChangeAspect="1"/>
           </p:cNvPicPr>
@@ -11348,8 +11846,8 @@
         </p:blipFill>
         <p:spPr>
           <a:xfrm>
-            <a:off x="7354716" y="2308860"/>
-            <a:ext cx="192024" cy="182880"/>
+            <a:off x="7352662" y="2296668"/>
+            <a:ext cx="176784" cy="207264"/>
           </a:xfrm>
           <a:prstGeom prst="rect">
             <a:avLst/>
@@ -11364,8 +11862,8 @@
         </p:nvSpPr>
         <p:spPr>
           <a:xfrm>
-            <a:off x="7546740" y="2171700"/>
-            <a:ext cx="307595" cy="457200"/>
+            <a:off x="7529446" y="2171700"/>
+            <a:ext cx="286146" cy="457200"/>
           </a:xfrm>
           <a:prstGeom prst="rect">
             <a:avLst/>
@@ -11380,11 +11878,11 @@
           <a:p>
             <a:pPr algn="l"/>
             <a:r>
-              <a:rPr sz="2600" b="0" i="0">
+              <a:rPr sz="2470" b="0" i="0">
                 <a:solidFill>
                   <a:srgbClr val="1A1A1A"/>
                 </a:solidFill>
-                <a:latin typeface="Century Schoolbook"/>
+                <a:latin typeface="Lexend"/>
               </a:rPr>
               <a:t>:</a:t>
             </a:r>
@@ -11393,7 +11891,7 @@
       </p:sp>
       <p:pic>
         <p:nvPicPr>
-          <p:cNvPr id="11" name="Picture 10" descr="6af21d554c0d0371.png"/>
+          <p:cNvPr id="11" name="Picture 10" descr="a981bea298d1f2d2.png"/>
           <p:cNvPicPr>
             <a:picLocks noChangeAspect="1"/>
           </p:cNvPicPr>
@@ -11407,8 +11905,8 @@
         </p:blipFill>
         <p:spPr>
           <a:xfrm>
-            <a:off x="5163312" y="2913888"/>
-            <a:ext cx="1834896" cy="344424"/>
+            <a:off x="5145023" y="2916936"/>
+            <a:ext cx="1871472" cy="338328"/>
           </a:xfrm>
           <a:prstGeom prst="rect">
             <a:avLst/>
@@ -11439,11 +11937,11 @@
           <a:p>
             <a:pPr algn="ctr"/>
             <a:r>
-              <a:rPr sz="2600" b="1" i="0">
+              <a:rPr sz="2470" b="1" i="0">
                 <a:solidFill>
                   <a:srgbClr val="1A1A1A"/>
                 </a:solidFill>
-                <a:latin typeface="Century Schoolbook"/>
+                <a:latin typeface="Lexend"/>
               </a:rPr>
               <a:t>Answer it.</a:t>
             </a:r>
@@ -11492,11 +11990,11 @@
           <a:p>
             <a:pPr algn="l"/>
             <a:r>
-              <a:rPr sz="3600" b="1" i="0">
+              <a:rPr sz="3420" b="1" i="0">
                 <a:solidFill>
                   <a:srgbClr val="1A1A1A"/>
                 </a:solidFill>
-                <a:latin typeface="Century Schoolbook"/>
+                <a:latin typeface="Lexend"/>
               </a:rPr>
               <a:t>Warm-Up</a:t>
             </a:r>
@@ -11632,11 +12130,11 @@
           <a:p>
             <a:pPr algn="l"/>
             <a:r>
-              <a:rPr sz="1100" b="0" i="1">
+              <a:rPr sz="1040" b="0" i="0">
                 <a:solidFill>
                   <a:srgbClr val="6B6B6B"/>
                 </a:solidFill>
-                <a:latin typeface="Century Schoolbook"/>
+                <a:latin typeface="Lexend"/>
               </a:rPr>
               <a:t>Grade 7 Accelerated · Unit 3 · Thread A · Day 1 — Exponent Laws with Variable Bases</a:t>
             </a:r>
@@ -11667,11 +12165,11 @@
           <a:p>
             <a:pPr algn="r"/>
             <a:r>
-              <a:rPr sz="1100" b="0" i="0">
+              <a:rPr sz="1040" b="0" i="0">
                 <a:solidFill>
                   <a:srgbClr val="6B6B6B"/>
                 </a:solidFill>
-                <a:latin typeface="Century Schoolbook"/>
+                <a:latin typeface="Lexend"/>
               </a:rPr>
               <a:t>3</a:t>
             </a:r>
@@ -11687,7 +12185,7 @@
         <p:spPr>
           <a:xfrm>
             <a:off x="1874519" y="1440180"/>
-            <a:ext cx="3058734" cy="457200"/>
+            <a:ext cx="2921808" cy="457200"/>
           </a:xfrm>
           <a:prstGeom prst="rect">
             <a:avLst/>
@@ -11702,11 +12200,11 @@
           <a:p>
             <a:pPr algn="l"/>
             <a:r>
-              <a:rPr sz="2300" b="0" i="0">
+              <a:rPr sz="2180" b="0" i="0">
                 <a:solidFill>
                   <a:srgbClr val="1A1A1A"/>
                 </a:solidFill>
-                <a:latin typeface="Century Schoolbook"/>
+                <a:latin typeface="Lexend"/>
               </a:rPr>
               <a:t>1.   Find the value:  </a:t>
             </a:r>
@@ -11715,7 +12213,7 @@
       </p:sp>
       <p:pic>
         <p:nvPicPr>
-          <p:cNvPr id="9" name="Picture 8" descr="d93a40084748b626.png"/>
+          <p:cNvPr id="9" name="Picture 8" descr="84532672c5136f11.png"/>
           <p:cNvPicPr>
             <a:picLocks noChangeAspect="1"/>
           </p:cNvPicPr>
@@ -11729,7 +12227,7 @@
         </p:blipFill>
         <p:spPr>
           <a:xfrm>
-            <a:off x="4796094" y="1501140"/>
+            <a:off x="4659168" y="1501140"/>
             <a:ext cx="1267968" cy="335280"/>
           </a:xfrm>
           <a:prstGeom prst="rect">
@@ -11745,8 +12243,8 @@
         </p:nvSpPr>
         <p:spPr>
           <a:xfrm>
-            <a:off x="6612702" y="1440180"/>
-            <a:ext cx="388052" cy="457200"/>
+            <a:off x="6475776" y="1440180"/>
+            <a:ext cx="405042" cy="457200"/>
           </a:xfrm>
           <a:prstGeom prst="rect">
             <a:avLst/>
@@ -11761,11 +12259,11 @@
           <a:p>
             <a:pPr algn="l"/>
             <a:r>
-              <a:rPr sz="2300" b="1" i="0">
+              <a:rPr sz="2180" b="1" i="0">
                 <a:solidFill>
                   <a:srgbClr val="9E1B32"/>
                 </a:solidFill>
-                <a:latin typeface="Century Schoolbook"/>
+                <a:latin typeface="Lexend"/>
               </a:rPr>
               <a:t>4</a:t>
             </a:r>
@@ -11780,8 +12278,8 @@
         </p:nvSpPr>
         <p:spPr>
           <a:xfrm>
-            <a:off x="1874519" y="2179320"/>
-            <a:ext cx="3704805" cy="457200"/>
+            <a:off x="1874519" y="2164080"/>
+            <a:ext cx="3678551" cy="457200"/>
           </a:xfrm>
           <a:prstGeom prst="rect">
             <a:avLst/>
@@ -11796,11 +12294,11 @@
           <a:p>
             <a:pPr algn="l"/>
             <a:r>
-              <a:rPr sz="2300" b="0" i="0">
+              <a:rPr sz="2180" b="0" i="0">
                 <a:solidFill>
                   <a:srgbClr val="1A1A1A"/>
                 </a:solidFill>
-                <a:latin typeface="Century Schoolbook"/>
+                <a:latin typeface="Lexend"/>
               </a:rPr>
               <a:t>2.   Write as one power:  </a:t>
             </a:r>
@@ -11809,7 +12307,7 @@
       </p:sp>
       <p:pic>
         <p:nvPicPr>
-          <p:cNvPr id="12" name="Picture 11" descr="9d90cf2f49ecc87f.png"/>
+          <p:cNvPr id="12" name="Picture 11" descr="dea7bce85a13542a.png"/>
           <p:cNvPicPr>
             <a:picLocks noChangeAspect="1"/>
           </p:cNvPicPr>
@@ -11823,8 +12321,8 @@
         </p:blipFill>
         <p:spPr>
           <a:xfrm>
-            <a:off x="5442165" y="2075688"/>
-            <a:ext cx="304800" cy="664464"/>
+            <a:off x="5415911" y="2075688"/>
+            <a:ext cx="313944" cy="633984"/>
           </a:xfrm>
           <a:prstGeom prst="rect">
             <a:avLst/>
@@ -11839,8 +12337,8 @@
         </p:nvSpPr>
         <p:spPr>
           <a:xfrm>
-            <a:off x="6295605" y="2052828"/>
-            <a:ext cx="1215387" cy="457200"/>
+            <a:off x="6278495" y="2052828"/>
+            <a:ext cx="1203300" cy="457200"/>
           </a:xfrm>
           <a:prstGeom prst="rect">
             <a:avLst/>
@@ -11855,29 +12353,29 @@
           <a:p>
             <a:pPr algn="l"/>
             <a:r>
-              <a:rPr sz="2300" b="1" i="0">
+              <a:rPr sz="2180" b="1" i="0">
                 <a:solidFill>
                   <a:srgbClr val="9E1B32"/>
                 </a:solidFill>
-                <a:latin typeface="Century Schoolbook"/>
+                <a:latin typeface="Lexend"/>
               </a:rPr>
               <a:t>6</a:t>
             </a:r>
             <a:r>
-              <a:rPr sz="2300" b="1" i="0" baseline="30000">
+              <a:rPr sz="2180" b="1" i="0" baseline="30000">
                 <a:solidFill>
                   <a:srgbClr val="9E1B32"/>
                 </a:solidFill>
-                <a:latin typeface="Century Schoolbook"/>
+                <a:latin typeface="Lexend"/>
               </a:rPr>
               <a:t>2</a:t>
             </a:r>
             <a:r>
-              <a:rPr sz="2300" b="1" i="0">
+              <a:rPr sz="2180" b="1" i="0">
                 <a:solidFill>
                   <a:srgbClr val="9E1B32"/>
                 </a:solidFill>
-                <a:latin typeface="Century Schoolbook"/>
+                <a:latin typeface="Lexend"/>
               </a:rPr>
               <a:t> = 36</a:t>
             </a:r>
@@ -11892,8 +12390,8 @@
         </p:nvSpPr>
         <p:spPr>
           <a:xfrm>
-            <a:off x="1874519" y="2918460"/>
-            <a:ext cx="726811" cy="457200"/>
+            <a:off x="1874519" y="2887980"/>
+            <a:ext cx="680104" cy="457200"/>
           </a:xfrm>
           <a:prstGeom prst="rect">
             <a:avLst/>
@@ -11908,11 +12406,11 @@
           <a:p>
             <a:pPr algn="l"/>
             <a:r>
-              <a:rPr sz="2300" b="0" i="0">
+              <a:rPr sz="2180" b="0" i="0">
                 <a:solidFill>
                   <a:srgbClr val="1A1A1A"/>
                 </a:solidFill>
-                <a:latin typeface="Century Schoolbook"/>
+                <a:latin typeface="Lexend"/>
               </a:rPr>
               <a:t>3.   </a:t>
             </a:r>
@@ -11921,7 +12419,7 @@
       </p:sp>
       <p:pic>
         <p:nvPicPr>
-          <p:cNvPr id="15" name="Picture 14" descr="697434924d454a71.png"/>
+          <p:cNvPr id="15" name="Picture 14" descr="bcdd97740536927b.png"/>
           <p:cNvPicPr>
             <a:picLocks noChangeAspect="1"/>
           </p:cNvPicPr>
@@ -11935,8 +12433,8 @@
         </p:blipFill>
         <p:spPr>
           <a:xfrm>
-            <a:off x="2464171" y="2942844"/>
-            <a:ext cx="688848" cy="408432"/>
+            <a:off x="2417464" y="2921508"/>
+            <a:ext cx="710184" cy="390144"/>
           </a:xfrm>
           <a:prstGeom prst="rect">
             <a:avLst/>
@@ -11951,8 +12449,8 @@
         </p:nvSpPr>
         <p:spPr>
           <a:xfrm>
-            <a:off x="3153019" y="2918460"/>
-            <a:ext cx="5733570" cy="457200"/>
+            <a:off x="3127648" y="2887980"/>
+            <a:ext cx="5723277" cy="457200"/>
           </a:xfrm>
           <a:prstGeom prst="rect">
             <a:avLst/>
@@ -11967,11 +12465,11 @@
           <a:p>
             <a:pPr algn="l"/>
             <a:r>
-              <a:rPr sz="2300" b="0" i="0">
+              <a:rPr sz="2180" b="0" i="0">
                 <a:solidFill>
                   <a:srgbClr val="1A1A1A"/>
                 </a:solidFill>
-                <a:latin typeface="Century Schoolbook"/>
+                <a:latin typeface="Lexend"/>
               </a:rPr>
               <a:t> is between which two whole numbers?</a:t>
             </a:r>
@@ -11986,8 +12484,8 @@
         </p:nvSpPr>
         <p:spPr>
           <a:xfrm>
-            <a:off x="9298069" y="2918460"/>
-            <a:ext cx="1351321" cy="457200"/>
+            <a:off x="9262405" y="2887980"/>
+            <a:ext cx="1310407" cy="457200"/>
           </a:xfrm>
           <a:prstGeom prst="rect">
             <a:avLst/>
@@ -12002,11 +12500,11 @@
           <a:p>
             <a:pPr algn="l"/>
             <a:r>
-              <a:rPr sz="2300" b="1" i="0">
+              <a:rPr sz="2180" b="1" i="0">
                 <a:solidFill>
                   <a:srgbClr val="9E1B32"/>
                 </a:solidFill>
-                <a:latin typeface="Century Schoolbook"/>
+                <a:latin typeface="Lexend"/>
               </a:rPr>
               <a:t>7 and 8</a:t>
             </a:r>
@@ -12021,8 +12519,8 @@
         </p:nvSpPr>
         <p:spPr>
           <a:xfrm>
-            <a:off x="1874519" y="3531108"/>
-            <a:ext cx="4347668" cy="457200"/>
+            <a:off x="1874519" y="3500628"/>
+            <a:ext cx="4266791" cy="457200"/>
           </a:xfrm>
           <a:prstGeom prst="rect">
             <a:avLst/>
@@ -12037,11 +12535,11 @@
           <a:p>
             <a:pPr algn="l"/>
             <a:r>
-              <a:rPr sz="2300" b="0" i="0">
+              <a:rPr sz="2180" b="0" i="0">
                 <a:solidFill>
                   <a:srgbClr val="1A1A1A"/>
                 </a:solidFill>
-                <a:latin typeface="Century Schoolbook"/>
+                <a:latin typeface="Lexend"/>
               </a:rPr>
               <a:t>4.   Write with an exponent:  </a:t>
             </a:r>
@@ -12050,7 +12548,7 @@
       </p:sp>
       <p:pic>
         <p:nvPicPr>
-          <p:cNvPr id="19" name="Picture 18" descr="2cd7015fba8991e1.png"/>
+          <p:cNvPr id="19" name="Picture 18" descr="10f3e19ce6b19344.png"/>
           <p:cNvPicPr>
             <a:picLocks noChangeAspect="1"/>
           </p:cNvPicPr>
@@ -12064,8 +12562,8 @@
         </p:blipFill>
         <p:spPr>
           <a:xfrm>
-            <a:off x="6085028" y="3653028"/>
-            <a:ext cx="1499616" cy="213360"/>
+            <a:off x="6004151" y="3610356"/>
+            <a:ext cx="1679448" cy="237744"/>
           </a:xfrm>
           <a:prstGeom prst="rect">
             <a:avLst/>
@@ -12074,7 +12572,7 @@
       </p:pic>
       <p:pic>
         <p:nvPicPr>
-          <p:cNvPr id="20" name="Picture 19" descr="cb1e58e520118543.png"/>
+          <p:cNvPr id="20" name="Picture 19" descr="6318b2f43b5ea309.png"/>
           <p:cNvPicPr>
             <a:picLocks noChangeAspect="1"/>
           </p:cNvPicPr>
@@ -12088,8 +12586,8 @@
         </p:blipFill>
         <p:spPr>
           <a:xfrm>
-            <a:off x="8133284" y="3589020"/>
-            <a:ext cx="280416" cy="341376"/>
+            <a:off x="8232239" y="3558540"/>
+            <a:ext cx="307848" cy="341376"/>
           </a:xfrm>
           <a:prstGeom prst="rect">
             <a:avLst/>
@@ -12138,11 +12636,11 @@
           <a:p>
             <a:pPr algn="l"/>
             <a:r>
-              <a:rPr sz="3400" b="1" i="0">
+              <a:rPr sz="3229" b="1" i="0">
                 <a:solidFill>
                   <a:srgbClr val="1A1A1A"/>
                 </a:solidFill>
-                <a:latin typeface="Century Schoolbook"/>
+                <a:latin typeface="Lexend"/>
               </a:rPr>
               <a:t>Whiteboards   ·   Question 8 of 9</a:t>
             </a:r>
@@ -12278,11 +12776,11 @@
           <a:p>
             <a:pPr algn="l"/>
             <a:r>
-              <a:rPr sz="1100" b="0" i="1">
+              <a:rPr sz="1040" b="0" i="0">
                 <a:solidFill>
                   <a:srgbClr val="6B6B6B"/>
                 </a:solidFill>
-                <a:latin typeface="Century Schoolbook"/>
+                <a:latin typeface="Lexend"/>
               </a:rPr>
               <a:t>Grade 7 Accelerated · Unit 3 · Thread A · Day 1 — Exponent Laws with Variable Bases</a:t>
             </a:r>
@@ -12313,11 +12811,11 @@
           <a:p>
             <a:pPr algn="r"/>
             <a:r>
-              <a:rPr sz="1100" b="0" i="0">
+              <a:rPr sz="1040" b="0" i="0">
                 <a:solidFill>
                   <a:srgbClr val="6B6B6B"/>
                 </a:solidFill>
-                <a:latin typeface="Century Schoolbook"/>
+                <a:latin typeface="Lexend"/>
               </a:rPr>
               <a:t>30</a:t>
             </a:r>
@@ -12332,8 +12830,8 @@
         </p:nvSpPr>
         <p:spPr>
           <a:xfrm>
-            <a:off x="4444343" y="2080260"/>
-            <a:ext cx="3047533" cy="457200"/>
+            <a:off x="4483087" y="2080260"/>
+            <a:ext cx="3006734" cy="457200"/>
           </a:xfrm>
           <a:prstGeom prst="rect">
             <a:avLst/>
@@ -12348,11 +12846,11 @@
           <a:p>
             <a:pPr algn="l"/>
             <a:r>
-              <a:rPr sz="2600" b="0" i="0">
+              <a:rPr sz="2470" b="0" i="0">
                 <a:solidFill>
                   <a:srgbClr val="1A1A1A"/>
                 </a:solidFill>
-                <a:latin typeface="Century Schoolbook"/>
+                <a:latin typeface="Lexend"/>
               </a:rPr>
               <a:t>Find the value of </a:t>
             </a:r>
@@ -12361,7 +12859,7 @@
       </p:sp>
       <p:pic>
         <p:nvPicPr>
-          <p:cNvPr id="9" name="Picture 8" descr="ce9b607ea85ce740.png"/>
+          <p:cNvPr id="9" name="Picture 8" descr="f14fce7cf077cd07.png"/>
           <p:cNvPicPr>
             <a:picLocks noChangeAspect="1"/>
           </p:cNvPicPr>
@@ -12375,8 +12873,8 @@
         </p:blipFill>
         <p:spPr>
           <a:xfrm>
-            <a:off x="7354716" y="2217420"/>
-            <a:ext cx="192024" cy="182880"/>
+            <a:off x="7352662" y="2205228"/>
+            <a:ext cx="176784" cy="207264"/>
           </a:xfrm>
           <a:prstGeom prst="rect">
             <a:avLst/>
@@ -12391,8 +12889,8 @@
         </p:nvSpPr>
         <p:spPr>
           <a:xfrm>
-            <a:off x="7546740" y="2080260"/>
-            <a:ext cx="307595" cy="457200"/>
+            <a:off x="7529446" y="2080260"/>
+            <a:ext cx="286146" cy="457200"/>
           </a:xfrm>
           <a:prstGeom prst="rect">
             <a:avLst/>
@@ -12407,11 +12905,11 @@
           <a:p>
             <a:pPr algn="l"/>
             <a:r>
-              <a:rPr sz="2600" b="0" i="0">
+              <a:rPr sz="2470" b="0" i="0">
                 <a:solidFill>
                   <a:srgbClr val="1A1A1A"/>
                 </a:solidFill>
-                <a:latin typeface="Century Schoolbook"/>
+                <a:latin typeface="Lexend"/>
               </a:rPr>
               <a:t>:</a:t>
             </a:r>
@@ -12420,7 +12918,7 @@
       </p:sp>
       <p:pic>
         <p:nvPicPr>
-          <p:cNvPr id="11" name="Picture 10" descr="9b87377120470530.png"/>
+          <p:cNvPr id="11" name="Picture 10" descr="8d2620ce0f386fc3.png"/>
           <p:cNvPicPr>
             <a:picLocks noChangeAspect="1"/>
           </p:cNvPicPr>
@@ -12434,8 +12932,8 @@
         </p:blipFill>
         <p:spPr>
           <a:xfrm>
-            <a:off x="5163312" y="2822448"/>
-            <a:ext cx="1834896" cy="344424"/>
+            <a:off x="5145023" y="2825496"/>
+            <a:ext cx="1871472" cy="338328"/>
           </a:xfrm>
           <a:prstGeom prst="rect">
             <a:avLst/>
@@ -12445,6 +12943,89 @@
       <p:sp>
         <p:nvSpPr>
           <p:cNvPr id="12" name="TextBox 11"/>
+          <p:cNvSpPr txBox="1"/>
+          <p:nvPr/>
+        </p:nvSpPr>
+        <p:spPr>
+          <a:xfrm>
+            <a:off x="2173772" y="3525012"/>
+            <a:ext cx="6573439" cy="457200"/>
+          </a:xfrm>
+          <a:prstGeom prst="rect">
+            <a:avLst/>
+          </a:prstGeom>
+          <a:noFill/>
+        </p:spPr>
+        <p:txBody>
+          <a:bodyPr wrap="none" lIns="45720" rIns="45720" tIns="18288" bIns="18288" anchor="ctr">
+            <a:noAutofit/>
+          </a:bodyPr>
+          <a:lstStyle/>
+          <a:p>
+            <a:pPr algn="l"/>
+            <a:r>
+              <a:rPr sz="2750" b="0" i="0">
+                <a:solidFill>
+                  <a:srgbClr val="1A1A1A"/>
+                </a:solidFill>
+                <a:latin typeface="Lexend"/>
+              </a:rPr>
+              <a:t>Same base, so the exponents add:  </a:t>
+            </a:r>
+          </a:p>
+        </p:txBody>
+      </p:sp>
+      <p:pic>
+        <p:nvPicPr>
+          <p:cNvPr id="13" name="Picture 12" descr="b4a56cf80f14210a.png"/>
+          <p:cNvPicPr>
+            <a:picLocks noChangeAspect="1"/>
+          </p:cNvPicPr>
+          <p:nvPr/>
+        </p:nvPicPr>
+        <p:blipFill>
+          <a:blip r:embed="rId4"/>
+          <a:stretch>
+            <a:fillRect/>
+          </a:stretch>
+        </p:blipFill>
+        <p:spPr>
+          <a:xfrm>
+            <a:off x="8610051" y="3627120"/>
+            <a:ext cx="1383792" cy="252984"/>
+          </a:xfrm>
+          <a:prstGeom prst="rect">
+            <a:avLst/>
+          </a:prstGeom>
+        </p:spPr>
+      </p:pic>
+      <p:pic>
+        <p:nvPicPr>
+          <p:cNvPr id="14" name="Picture 13" descr="faf016cfea52a868.png"/>
+          <p:cNvPicPr>
+            <a:picLocks noChangeAspect="1"/>
+          </p:cNvPicPr>
+          <p:nvPr/>
+        </p:nvPicPr>
+        <p:blipFill>
+          <a:blip r:embed="rId5"/>
+          <a:stretch>
+            <a:fillRect/>
+          </a:stretch>
+        </p:blipFill>
+        <p:spPr>
+          <a:xfrm>
+            <a:off x="2228636" y="4166616"/>
+            <a:ext cx="1889760" cy="252984"/>
+          </a:xfrm>
+          <a:prstGeom prst="rect">
+            <a:avLst/>
+          </a:prstGeom>
+        </p:spPr>
+      </p:pic>
+      <p:sp>
+        <p:nvSpPr>
+          <p:cNvPr id="15" name="TextBox 14"/>
           <p:cNvSpPr txBox="1"/>
           <p:nvPr/>
         </p:nvSpPr>
@@ -12466,11 +13047,11 @@
           <a:p>
             <a:pPr algn="ctr"/>
             <a:r>
-              <a:rPr sz="3200" b="1" i="0">
+              <a:rPr sz="3040" b="1" i="0">
                 <a:solidFill>
                   <a:srgbClr val="9E1B32"/>
                 </a:solidFill>
-                <a:latin typeface="Century Schoolbook"/>
+                <a:latin typeface="Lexend"/>
               </a:rPr>
               <a:t>Answer:   n = 8</a:t>
             </a:r>
@@ -12519,11 +13100,11 @@
           <a:p>
             <a:pPr algn="l"/>
             <a:r>
-              <a:rPr sz="3400" b="1" i="0">
+              <a:rPr sz="3229" b="1" i="0">
                 <a:solidFill>
                   <a:srgbClr val="1A1A1A"/>
                 </a:solidFill>
-                <a:latin typeface="Century Schoolbook"/>
+                <a:latin typeface="Lexend"/>
               </a:rPr>
               <a:t>Whiteboards   ·   Question 9 of 9</a:t>
             </a:r>
@@ -12659,11 +13240,11 @@
           <a:p>
             <a:pPr algn="l"/>
             <a:r>
-              <a:rPr sz="1100" b="0" i="1">
+              <a:rPr sz="1040" b="0" i="0">
                 <a:solidFill>
                   <a:srgbClr val="6B6B6B"/>
                 </a:solidFill>
-                <a:latin typeface="Century Schoolbook"/>
+                <a:latin typeface="Lexend"/>
               </a:rPr>
               <a:t>Grade 7 Accelerated · Unit 3 · Thread A · Day 1 — Exponent Laws with Variable Bases</a:t>
             </a:r>
@@ -12694,11 +13275,11 @@
           <a:p>
             <a:pPr algn="r"/>
             <a:r>
-              <a:rPr sz="1100" b="0" i="0">
+              <a:rPr sz="1040" b="0" i="0">
                 <a:solidFill>
                   <a:srgbClr val="6B6B6B"/>
                 </a:solidFill>
-                <a:latin typeface="Century Schoolbook"/>
+                <a:latin typeface="Lexend"/>
               </a:rPr>
               <a:t>31</a:t>
             </a:r>
@@ -12713,8 +13294,8 @@
         </p:nvSpPr>
         <p:spPr>
           <a:xfrm>
-            <a:off x="997268" y="2176272"/>
-            <a:ext cx="2615224" cy="457200"/>
+            <a:off x="776649" y="2179320"/>
+            <a:ext cx="2551180" cy="457200"/>
           </a:xfrm>
           <a:prstGeom prst="rect">
             <a:avLst/>
@@ -12729,11 +13310,11 @@
           <a:p>
             <a:pPr algn="l"/>
             <a:r>
-              <a:rPr sz="2600" b="0" i="0">
+              <a:rPr sz="2470" b="0" i="0">
                 <a:solidFill>
                   <a:srgbClr val="1A1A1A"/>
                 </a:solidFill>
-                <a:latin typeface="Century Schoolbook"/>
+                <a:latin typeface="Lexend"/>
               </a:rPr>
               <a:t>Rachel writes  </a:t>
             </a:r>
@@ -12742,7 +13323,7 @@
       </p:sp>
       <p:pic>
         <p:nvPicPr>
-          <p:cNvPr id="9" name="Picture 8" descr="a608046776132776.png"/>
+          <p:cNvPr id="9" name="Picture 8" descr="cfeea6bcd2283eb6.png"/>
           <p:cNvPicPr>
             <a:picLocks noChangeAspect="1"/>
           </p:cNvPicPr>
@@ -12756,8 +13337,8 @@
         </p:blipFill>
         <p:spPr>
           <a:xfrm>
-            <a:off x="3475333" y="2194560"/>
-            <a:ext cx="1335024" cy="420624"/>
+            <a:off x="3190670" y="2194560"/>
+            <a:ext cx="1432560" cy="426720"/>
           </a:xfrm>
           <a:prstGeom prst="rect">
             <a:avLst/>
@@ -12772,8 +13353,8 @@
         </p:nvSpPr>
         <p:spPr>
           <a:xfrm>
-            <a:off x="4810357" y="2176272"/>
-            <a:ext cx="956138" cy="457200"/>
+            <a:off x="4623230" y="2179320"/>
+            <a:ext cx="952517" cy="457200"/>
           </a:xfrm>
           <a:prstGeom prst="rect">
             <a:avLst/>
@@ -12788,11 +13369,11 @@
           <a:p>
             <a:pPr algn="l"/>
             <a:r>
-              <a:rPr sz="2600" b="0" i="0">
+              <a:rPr sz="2470" b="0" i="0">
                 <a:solidFill>
                   <a:srgbClr val="1A1A1A"/>
                 </a:solidFill>
-                <a:latin typeface="Century Schoolbook"/>
+                <a:latin typeface="Lexend"/>
               </a:rPr>
               <a:t>  as  </a:t>
             </a:r>
@@ -12801,7 +13382,7 @@
       </p:sp>
       <p:pic>
         <p:nvPicPr>
-          <p:cNvPr id="11" name="Picture 10" descr="300f952ef0d53b3a.png"/>
+          <p:cNvPr id="11" name="Picture 10" descr="bb618bfdbdefcd62.png"/>
           <p:cNvPicPr>
             <a:picLocks noChangeAspect="1"/>
           </p:cNvPicPr>
@@ -12815,8 +13396,8 @@
         </p:blipFill>
         <p:spPr>
           <a:xfrm>
-            <a:off x="5629335" y="2225040"/>
-            <a:ext cx="5364480" cy="359664"/>
+            <a:off x="5438587" y="2226564"/>
+            <a:ext cx="5797296" cy="362712"/>
           </a:xfrm>
           <a:prstGeom prst="rect">
             <a:avLst/>
@@ -12831,8 +13412,8 @@
         </p:nvSpPr>
         <p:spPr>
           <a:xfrm>
-            <a:off x="10993815" y="2176272"/>
-            <a:ext cx="307595" cy="457200"/>
+            <a:off x="11235883" y="2179320"/>
+            <a:ext cx="286146" cy="457200"/>
           </a:xfrm>
           <a:prstGeom prst="rect">
             <a:avLst/>
@@ -12847,11 +13428,11 @@
           <a:p>
             <a:pPr algn="l"/>
             <a:r>
-              <a:rPr sz="2600" b="0" i="0">
+              <a:rPr sz="2470" b="0" i="0">
                 <a:solidFill>
                   <a:srgbClr val="1A1A1A"/>
                 </a:solidFill>
-                <a:latin typeface="Century Schoolbook"/>
+                <a:latin typeface="Lexend"/>
               </a:rPr>
               <a:t>.</a:t>
             </a:r>
@@ -12866,8 +13447,8 @@
         </p:nvSpPr>
         <p:spPr>
           <a:xfrm>
-            <a:off x="1430629" y="2872739"/>
-            <a:ext cx="3534689" cy="457200"/>
+            <a:off x="1500114" y="2878835"/>
+            <a:ext cx="3423972" cy="457200"/>
           </a:xfrm>
           <a:prstGeom prst="rect">
             <a:avLst/>
@@ -12882,11 +13463,11 @@
           <a:p>
             <a:pPr algn="l"/>
             <a:r>
-              <a:rPr sz="2600" b="0" i="0">
+              <a:rPr sz="2470" b="0" i="0">
                 <a:solidFill>
                   <a:srgbClr val="1A1A1A"/>
                 </a:solidFill>
-                <a:latin typeface="Century Schoolbook"/>
+                <a:latin typeface="Lexend"/>
               </a:rPr>
               <a:t>Justina writes it as  </a:t>
             </a:r>
@@ -12895,7 +13476,7 @@
       </p:sp>
       <p:pic>
         <p:nvPicPr>
-          <p:cNvPr id="14" name="Picture 13" descr="7c47cd9abe6657c3.png"/>
+          <p:cNvPr id="14" name="Picture 13" descr="1693b7be1771319b.png"/>
           <p:cNvPicPr>
             <a:picLocks noChangeAspect="1"/>
           </p:cNvPicPr>
@@ -12909,8 +13490,8 @@
         </p:blipFill>
         <p:spPr>
           <a:xfrm>
-            <a:off x="4828159" y="2889503"/>
-            <a:ext cx="1603248" cy="423672"/>
+            <a:off x="4786927" y="2895600"/>
+            <a:ext cx="1703832" cy="423672"/>
           </a:xfrm>
           <a:prstGeom prst="rect">
             <a:avLst/>
@@ -12925,8 +13506,8 @@
         </p:nvSpPr>
         <p:spPr>
           <a:xfrm>
-            <a:off x="6431407" y="2872739"/>
-            <a:ext cx="4436643" cy="457200"/>
+            <a:off x="6490759" y="2878835"/>
+            <a:ext cx="4307805" cy="457200"/>
           </a:xfrm>
           <a:prstGeom prst="rect">
             <a:avLst/>
@@ -12941,11 +13522,11 @@
           <a:p>
             <a:pPr algn="l"/>
             <a:r>
-              <a:rPr sz="2600" b="0" i="0">
+              <a:rPr sz="2470" b="0" i="0">
                 <a:solidFill>
                   <a:srgbClr val="1A1A1A"/>
                 </a:solidFill>
-                <a:latin typeface="Century Schoolbook"/>
+                <a:latin typeface="Lexend"/>
               </a:rPr>
               <a:t>.  Who is correct? Explain.</a:t>
             </a:r>
@@ -12976,11 +13557,11 @@
           <a:p>
             <a:pPr algn="ctr"/>
             <a:r>
-              <a:rPr sz="2600" b="1" i="0">
+              <a:rPr sz="2470" b="1" i="0">
                 <a:solidFill>
                   <a:srgbClr val="1A1A1A"/>
                 </a:solidFill>
-                <a:latin typeface="Century Schoolbook"/>
+                <a:latin typeface="Lexend"/>
               </a:rPr>
               <a:t>Write your answer in sentences.</a:t>
             </a:r>
@@ -13029,11 +13610,11 @@
           <a:p>
             <a:pPr algn="l"/>
             <a:r>
-              <a:rPr sz="3400" b="1" i="0">
+              <a:rPr sz="3229" b="1" i="0">
                 <a:solidFill>
                   <a:srgbClr val="1A1A1A"/>
                 </a:solidFill>
-                <a:latin typeface="Century Schoolbook"/>
+                <a:latin typeface="Lexend"/>
               </a:rPr>
               <a:t>Whiteboards   ·   Question 9 of 9</a:t>
             </a:r>
@@ -13169,11 +13750,11 @@
           <a:p>
             <a:pPr algn="l"/>
             <a:r>
-              <a:rPr sz="1100" b="0" i="1">
+              <a:rPr sz="1040" b="0" i="0">
                 <a:solidFill>
                   <a:srgbClr val="6B6B6B"/>
                 </a:solidFill>
-                <a:latin typeface="Century Schoolbook"/>
+                <a:latin typeface="Lexend"/>
               </a:rPr>
               <a:t>Grade 7 Accelerated · Unit 3 · Thread A · Day 1 — Exponent Laws with Variable Bases</a:t>
             </a:r>
@@ -13204,11 +13785,11 @@
           <a:p>
             <a:pPr algn="r"/>
             <a:r>
-              <a:rPr sz="1100" b="0" i="0">
+              <a:rPr sz="1040" b="0" i="0">
                 <a:solidFill>
                   <a:srgbClr val="6B6B6B"/>
                 </a:solidFill>
-                <a:latin typeface="Century Schoolbook"/>
+                <a:latin typeface="Lexend"/>
               </a:rPr>
               <a:t>32</a:t>
             </a:r>
@@ -13223,8 +13804,8 @@
         </p:nvSpPr>
         <p:spPr>
           <a:xfrm>
-            <a:off x="995744" y="2084831"/>
-            <a:ext cx="2615224" cy="457200"/>
+            <a:off x="775125" y="2087880"/>
+            <a:ext cx="2551180" cy="457200"/>
           </a:xfrm>
           <a:prstGeom prst="rect">
             <a:avLst/>
@@ -13239,11 +13820,11 @@
           <a:p>
             <a:pPr algn="l"/>
             <a:r>
-              <a:rPr sz="2600" b="0" i="0">
+              <a:rPr sz="2470" b="0" i="0">
                 <a:solidFill>
                   <a:srgbClr val="1A1A1A"/>
                 </a:solidFill>
-                <a:latin typeface="Century Schoolbook"/>
+                <a:latin typeface="Lexend"/>
               </a:rPr>
               <a:t>Rachel writes  </a:t>
             </a:r>
@@ -13252,7 +13833,7 @@
       </p:sp>
       <p:pic>
         <p:nvPicPr>
-          <p:cNvPr id="9" name="Picture 8" descr="c182d5e9af300148.png"/>
+          <p:cNvPr id="9" name="Picture 8" descr="2e7c8f87b9f4d0a8.png"/>
           <p:cNvPicPr>
             <a:picLocks noChangeAspect="1"/>
           </p:cNvPicPr>
@@ -13266,8 +13847,8 @@
         </p:blipFill>
         <p:spPr>
           <a:xfrm>
-            <a:off x="3473809" y="2103120"/>
-            <a:ext cx="1338072" cy="420624"/>
+            <a:off x="3189146" y="2103120"/>
+            <a:ext cx="1435608" cy="426720"/>
           </a:xfrm>
           <a:prstGeom prst="rect">
             <a:avLst/>
@@ -13282,8 +13863,8 @@
         </p:nvSpPr>
         <p:spPr>
           <a:xfrm>
-            <a:off x="4811881" y="2084831"/>
-            <a:ext cx="956138" cy="457200"/>
+            <a:off x="4624754" y="2087880"/>
+            <a:ext cx="952517" cy="457200"/>
           </a:xfrm>
           <a:prstGeom prst="rect">
             <a:avLst/>
@@ -13298,11 +13879,11 @@
           <a:p>
             <a:pPr algn="l"/>
             <a:r>
-              <a:rPr sz="2600" b="0" i="0">
+              <a:rPr sz="2470" b="0" i="0">
                 <a:solidFill>
                   <a:srgbClr val="1A1A1A"/>
                 </a:solidFill>
-                <a:latin typeface="Century Schoolbook"/>
+                <a:latin typeface="Lexend"/>
               </a:rPr>
               <a:t>  as  </a:t>
             </a:r>
@@ -13311,7 +13892,7 @@
       </p:sp>
       <p:pic>
         <p:nvPicPr>
-          <p:cNvPr id="11" name="Picture 10" descr="633192d31288b52d.png"/>
+          <p:cNvPr id="11" name="Picture 10" descr="010d92783b6e2460.png"/>
           <p:cNvPicPr>
             <a:picLocks noChangeAspect="1"/>
           </p:cNvPicPr>
@@ -13325,8 +13906,8 @@
         </p:blipFill>
         <p:spPr>
           <a:xfrm>
-            <a:off x="5630859" y="2133599"/>
-            <a:ext cx="5364480" cy="359664"/>
+            <a:off x="5440111" y="2135124"/>
+            <a:ext cx="5797296" cy="362712"/>
           </a:xfrm>
           <a:prstGeom prst="rect">
             <a:avLst/>
@@ -13341,8 +13922,8 @@
         </p:nvSpPr>
         <p:spPr>
           <a:xfrm>
-            <a:off x="10995339" y="2084831"/>
-            <a:ext cx="307595" cy="457200"/>
+            <a:off x="11237407" y="2087880"/>
+            <a:ext cx="286146" cy="457200"/>
           </a:xfrm>
           <a:prstGeom prst="rect">
             <a:avLst/>
@@ -13357,11 +13938,11 @@
           <a:p>
             <a:pPr algn="l"/>
             <a:r>
-              <a:rPr sz="2600" b="0" i="0">
+              <a:rPr sz="2470" b="0" i="0">
                 <a:solidFill>
                   <a:srgbClr val="1A1A1A"/>
                 </a:solidFill>
-                <a:latin typeface="Century Schoolbook"/>
+                <a:latin typeface="Lexend"/>
               </a:rPr>
               <a:t>.</a:t>
             </a:r>
@@ -13376,8 +13957,8 @@
         </p:nvSpPr>
         <p:spPr>
           <a:xfrm>
-            <a:off x="1429105" y="2781299"/>
-            <a:ext cx="3534689" cy="457200"/>
+            <a:off x="1498590" y="2788920"/>
+            <a:ext cx="3423972" cy="457200"/>
           </a:xfrm>
           <a:prstGeom prst="rect">
             <a:avLst/>
@@ -13392,11 +13973,11 @@
           <a:p>
             <a:pPr algn="l"/>
             <a:r>
-              <a:rPr sz="2600" b="0" i="0">
+              <a:rPr sz="2470" b="0" i="0">
                 <a:solidFill>
                   <a:srgbClr val="1A1A1A"/>
                 </a:solidFill>
-                <a:latin typeface="Century Schoolbook"/>
+                <a:latin typeface="Lexend"/>
               </a:rPr>
               <a:t>Justina writes it as  </a:t>
             </a:r>
@@ -13405,7 +13986,7 @@
       </p:sp>
       <p:pic>
         <p:nvPicPr>
-          <p:cNvPr id="14" name="Picture 13" descr="9c1cc680a1f0e7b2.png"/>
+          <p:cNvPr id="14" name="Picture 13" descr="95db59124d1ea518.png"/>
           <p:cNvPicPr>
             <a:picLocks noChangeAspect="1"/>
           </p:cNvPicPr>
@@ -13419,8 +14000,8 @@
         </p:blipFill>
         <p:spPr>
           <a:xfrm>
-            <a:off x="4826635" y="2798063"/>
-            <a:ext cx="1606296" cy="423672"/>
+            <a:off x="4785403" y="2804160"/>
+            <a:ext cx="1706880" cy="426720"/>
           </a:xfrm>
           <a:prstGeom prst="rect">
             <a:avLst/>
@@ -13435,8 +14016,8 @@
         </p:nvSpPr>
         <p:spPr>
           <a:xfrm>
-            <a:off x="6432931" y="2781299"/>
-            <a:ext cx="4436643" cy="457200"/>
+            <a:off x="6492283" y="2788920"/>
+            <a:ext cx="4307805" cy="457200"/>
           </a:xfrm>
           <a:prstGeom prst="rect">
             <a:avLst/>
@@ -13451,26 +14032,98 @@
           <a:p>
             <a:pPr algn="l"/>
             <a:r>
-              <a:rPr sz="2600" b="0" i="0">
+              <a:rPr sz="2470" b="0" i="0">
                 <a:solidFill>
                   <a:srgbClr val="1A1A1A"/>
                 </a:solidFill>
-                <a:latin typeface="Century Schoolbook"/>
+                <a:latin typeface="Lexend"/>
               </a:rPr>
               <a:t>.  Who is correct? Explain.</a:t>
             </a:r>
           </a:p>
         </p:txBody>
       </p:sp>
-      <p:sp>
-        <p:nvSpPr>
-          <p:cNvPr id="16" name="TextBox 15"/>
-          <p:cNvSpPr txBox="1"/>
-          <p:nvPr/>
-        </p:nvSpPr>
-        <p:spPr>
-          <a:xfrm>
-            <a:off x="777240" y="4663440"/>
+      <p:pic>
+        <p:nvPicPr>
+          <p:cNvPr id="16" name="Picture 15" descr="cb983d4a48c3fca1.png"/>
+          <p:cNvPicPr>
+            <a:picLocks noChangeAspect="1"/>
+          </p:cNvPicPr>
+          <p:nvPr/>
+        </p:nvPicPr>
+        <p:blipFill>
+          <a:blip r:embed="rId5"/>
+          <a:stretch>
+            <a:fillRect/>
+          </a:stretch>
+        </p:blipFill>
+        <p:spPr>
+          <a:xfrm>
+            <a:off x="4882895" y="3649979"/>
+            <a:ext cx="2267712" cy="268224"/>
+          </a:xfrm>
+          <a:prstGeom prst="rect">
+            <a:avLst/>
+          </a:prstGeom>
+        </p:spPr>
+      </p:pic>
+      <p:pic>
+        <p:nvPicPr>
+          <p:cNvPr id="17" name="Picture 16" descr="7d1d579d9371e633.png"/>
+          <p:cNvPicPr>
+            <a:picLocks noChangeAspect="1"/>
+          </p:cNvPicPr>
+          <p:nvPr/>
+        </p:nvPicPr>
+        <p:blipFill>
+          <a:blip r:embed="rId6"/>
+          <a:stretch>
+            <a:fillRect/>
+          </a:stretch>
+        </p:blipFill>
+        <p:spPr>
+          <a:xfrm>
+            <a:off x="4882895" y="4160520"/>
+            <a:ext cx="1417320" cy="252984"/>
+          </a:xfrm>
+          <a:prstGeom prst="rect">
+            <a:avLst/>
+          </a:prstGeom>
+        </p:spPr>
+      </p:pic>
+      <p:pic>
+        <p:nvPicPr>
+          <p:cNvPr id="18" name="Picture 17" descr="f6926bf22434ff2e.png"/>
+          <p:cNvPicPr>
+            <a:picLocks noChangeAspect="1"/>
+          </p:cNvPicPr>
+          <p:nvPr/>
+        </p:nvPicPr>
+        <p:blipFill>
+          <a:blip r:embed="rId7"/>
+          <a:stretch>
+            <a:fillRect/>
+          </a:stretch>
+        </p:blipFill>
+        <p:spPr>
+          <a:xfrm>
+            <a:off x="4882895" y="4626864"/>
+            <a:ext cx="2508504" cy="326136"/>
+          </a:xfrm>
+          <a:prstGeom prst="rect">
+            <a:avLst/>
+          </a:prstGeom>
+        </p:spPr>
+      </p:pic>
+      <p:sp>
+        <p:nvSpPr>
+          <p:cNvPr id="19" name="TextBox 18"/>
+          <p:cNvSpPr txBox="1"/>
+          <p:nvPr/>
+        </p:nvSpPr>
+        <p:spPr>
+          <a:xfrm>
+            <a:off x="777240" y="5132832"/>
             <a:ext cx="10607040" cy="1072896"/>
           </a:xfrm>
           <a:prstGeom prst="rect">
@@ -13486,65 +14139,65 @@
           <a:p>
             <a:pPr algn="ctr"/>
             <a:r>
-              <a:rPr sz="3200" b="1" i="0">
+              <a:rPr sz="3040" b="1" i="0">
                 <a:solidFill>
                   <a:srgbClr val="9E1B32"/>
                 </a:solidFill>
-                <a:latin typeface="Century Schoolbook"/>
+                <a:latin typeface="Lexend"/>
               </a:rPr>
               <a:t>Answer:   Both are correct; 15</a:t>
             </a:r>
             <a:r>
-              <a:rPr sz="3200" b="1" i="0" baseline="30000">
+              <a:rPr sz="3040" b="1" i="0" baseline="30000">
                 <a:solidFill>
                   <a:srgbClr val="9E1B32"/>
                 </a:solidFill>
-                <a:latin typeface="Century Schoolbook"/>
+                <a:latin typeface="Lexend"/>
               </a:rPr>
               <a:t>3</a:t>
             </a:r>
             <a:r>
-              <a:rPr sz="3200" b="1" i="0">
+              <a:rPr sz="3040" b="1" i="0">
                 <a:solidFill>
                   <a:srgbClr val="9E1B32"/>
                 </a:solidFill>
-                <a:latin typeface="Century Schoolbook"/>
+                <a:latin typeface="Lexend"/>
               </a:rPr>
               <a:t> = 3,375, x · x · x = x</a:t>
             </a:r>
             <a:r>
-              <a:rPr sz="3200" b="1" i="0" baseline="30000">
+              <a:rPr sz="3040" b="1" i="0" baseline="30000">
                 <a:solidFill>
                   <a:srgbClr val="9E1B32"/>
                 </a:solidFill>
-                <a:latin typeface="Century Schoolbook"/>
+                <a:latin typeface="Lexend"/>
               </a:rPr>
               <a:t>3</a:t>
             </a:r>
             <a:r>
-              <a:rPr sz="3200" b="1" i="0">
+              <a:rPr sz="3040" b="1" i="0">
                 <a:solidFill>
                   <a:srgbClr val="9E1B32"/>
                 </a:solidFill>
-                <a:latin typeface="Century Schoolbook"/>
+                <a:latin typeface="Lexend"/>
               </a:rPr>
               <a:t>, and six y's make y</a:t>
             </a:r>
             <a:r>
-              <a:rPr sz="3200" b="1" i="0" baseline="30000">
+              <a:rPr sz="3040" b="1" i="0" baseline="30000">
                 <a:solidFill>
                   <a:srgbClr val="9E1B32"/>
                 </a:solidFill>
-                <a:latin typeface="Century Schoolbook"/>
+                <a:latin typeface="Lexend"/>
               </a:rPr>
               <a:t>6</a:t>
             </a:r>
             <a:r>
-              <a:rPr sz="3200" b="1" i="0">
+              <a:rPr sz="3040" b="1" i="0">
                 <a:solidFill>
                   <a:srgbClr val="9E1B32"/>
                 </a:solidFill>
-                <a:latin typeface="Century Schoolbook"/>
+                <a:latin typeface="Lexend"/>
               </a:rPr>
               <a:t>.</a:t>
             </a:r>
@@ -13593,11 +14246,11 @@
           <a:p>
             <a:pPr algn="l"/>
             <a:r>
-              <a:rPr sz="3600" b="1" i="0">
+              <a:rPr sz="3420" b="1" i="0">
                 <a:solidFill>
                   <a:srgbClr val="1A1A1A"/>
                 </a:solidFill>
-                <a:latin typeface="Century Schoolbook"/>
+                <a:latin typeface="Lexend"/>
               </a:rPr>
               <a:t>Independent Set</a:t>
             </a:r>
@@ -13733,11 +14386,11 @@
           <a:p>
             <a:pPr algn="l"/>
             <a:r>
-              <a:rPr sz="1100" b="0" i="1">
+              <a:rPr sz="1040" b="0" i="0">
                 <a:solidFill>
                   <a:srgbClr val="6B6B6B"/>
                 </a:solidFill>
-                <a:latin typeface="Century Schoolbook"/>
+                <a:latin typeface="Lexend"/>
               </a:rPr>
               <a:t>Grade 7 Accelerated · Unit 3 · Thread A · Day 1 — Exponent Laws with Variable Bases</a:t>
             </a:r>
@@ -13768,11 +14421,11 @@
           <a:p>
             <a:pPr algn="r"/>
             <a:r>
-              <a:rPr sz="1100" b="0" i="0">
+              <a:rPr sz="1040" b="0" i="0">
                 <a:solidFill>
                   <a:srgbClr val="6B6B6B"/>
                 </a:solidFill>
-                <a:latin typeface="Century Schoolbook"/>
+                <a:latin typeface="Lexend"/>
               </a:rPr>
               <a:t>33</a:t>
             </a:r>
@@ -13803,11 +14456,11 @@
           <a:p>
             <a:pPr algn="l"/>
             <a:r>
-              <a:rPr sz="2300" b="1" i="0">
+              <a:rPr sz="2180" b="1" i="0">
                 <a:solidFill>
                   <a:srgbClr val="0B5394"/>
                 </a:solidFill>
-                <a:latin typeface="Century Schoolbook"/>
+                <a:latin typeface="Lexend"/>
               </a:rPr>
               <a:t>1.</a:t>
             </a:r>
@@ -13823,7 +14476,7 @@
         <p:spPr>
           <a:xfrm>
             <a:off x="1554480" y="1495044"/>
-            <a:ext cx="3168165" cy="457200"/>
+            <a:ext cx="3169643" cy="457200"/>
           </a:xfrm>
           <a:prstGeom prst="rect">
             <a:avLst/>
@@ -13838,11 +14491,11 @@
           <a:p>
             <a:pPr algn="l"/>
             <a:r>
-              <a:rPr sz="2300" b="0" i="0">
+              <a:rPr sz="2180" b="0" i="0">
                 <a:solidFill>
                   <a:srgbClr val="1A1A1A"/>
                 </a:solidFill>
-                <a:latin typeface="Century Schoolbook"/>
+                <a:latin typeface="Lexend"/>
               </a:rPr>
               <a:t>Write as one power.  </a:t>
             </a:r>
@@ -13851,7 +14504,7 @@
       </p:sp>
       <p:pic>
         <p:nvPicPr>
-          <p:cNvPr id="10" name="Picture 9" descr="f0610eb235266464.png"/>
+          <p:cNvPr id="10" name="Picture 9" descr="2eaabd0e034350d7.png"/>
           <p:cNvPicPr>
             <a:picLocks noChangeAspect="1"/>
           </p:cNvPicPr>
@@ -13865,8 +14518,8 @@
         </p:blipFill>
         <p:spPr>
           <a:xfrm>
-            <a:off x="4585485" y="1584959"/>
-            <a:ext cx="771144" cy="277368"/>
+            <a:off x="4586963" y="1588008"/>
+            <a:ext cx="813816" cy="271272"/>
           </a:xfrm>
           <a:prstGeom prst="rect">
             <a:avLst/>
@@ -13897,11 +14550,11 @@
           <a:p>
             <a:pPr algn="l"/>
             <a:r>
-              <a:rPr sz="2300" b="1" i="0">
+              <a:rPr sz="2180" b="1" i="0">
                 <a:solidFill>
                   <a:srgbClr val="0B5394"/>
                 </a:solidFill>
-                <a:latin typeface="Century Schoolbook"/>
+                <a:latin typeface="Lexend"/>
               </a:rPr>
               <a:t>2.</a:t>
             </a:r>
@@ -13917,7 +14570,7 @@
         <p:spPr>
           <a:xfrm>
             <a:off x="1554480" y="2089403"/>
-            <a:ext cx="4364338" cy="457200"/>
+            <a:ext cx="4313300" cy="457200"/>
           </a:xfrm>
           <a:prstGeom prst="rect">
             <a:avLst/>
@@ -13932,11 +14585,11 @@
           <a:p>
             <a:pPr algn="l"/>
             <a:r>
-              <a:rPr sz="2300" b="0" i="0">
+              <a:rPr sz="2180" b="0" i="0">
                 <a:solidFill>
                   <a:srgbClr val="1A1A1A"/>
                 </a:solidFill>
-                <a:latin typeface="Century Schoolbook"/>
+                <a:latin typeface="Lexend"/>
               </a:rPr>
               <a:t>Write as a single monomial.  </a:t>
             </a:r>
@@ -13945,7 +14598,7 @@
       </p:sp>
       <p:pic>
         <p:nvPicPr>
-          <p:cNvPr id="13" name="Picture 12" descr="f4d6cfbb8675d9ad.png"/>
+          <p:cNvPr id="13" name="Picture 12" descr="759d173ab3ce1af1.png"/>
           <p:cNvPicPr>
             <a:picLocks noChangeAspect="1"/>
           </p:cNvPicPr>
@@ -13959,8 +14612,8 @@
         </p:blipFill>
         <p:spPr>
           <a:xfrm>
-            <a:off x="5781658" y="2150363"/>
-            <a:ext cx="633984" cy="335280"/>
+            <a:off x="5730620" y="2154936"/>
+            <a:ext cx="670560" cy="326136"/>
           </a:xfrm>
           <a:prstGeom prst="rect">
             <a:avLst/>
@@ -13991,11 +14644,11 @@
           <a:p>
             <a:pPr algn="l"/>
             <a:r>
-              <a:rPr sz="2300" b="1" i="0">
+              <a:rPr sz="2180" b="1" i="0">
                 <a:solidFill>
                   <a:srgbClr val="0B5394"/>
                 </a:solidFill>
-                <a:latin typeface="Century Schoolbook"/>
+                <a:latin typeface="Lexend"/>
               </a:rPr>
               <a:t>3.</a:t>
             </a:r>
@@ -14011,7 +14664,7 @@
         <p:spPr>
           <a:xfrm>
             <a:off x="1554480" y="2683763"/>
-            <a:ext cx="4364338" cy="457200"/>
+            <a:ext cx="4313300" cy="457200"/>
           </a:xfrm>
           <a:prstGeom prst="rect">
             <a:avLst/>
@@ -14026,11 +14679,11 @@
           <a:p>
             <a:pPr algn="l"/>
             <a:r>
-              <a:rPr sz="2300" b="0" i="0">
+              <a:rPr sz="2180" b="0" i="0">
                 <a:solidFill>
                   <a:srgbClr val="1A1A1A"/>
                 </a:solidFill>
-                <a:latin typeface="Century Schoolbook"/>
+                <a:latin typeface="Lexend"/>
               </a:rPr>
               <a:t>Write as a single monomial.  </a:t>
             </a:r>
@@ -14039,7 +14692,7 @@
       </p:sp>
       <p:pic>
         <p:nvPicPr>
-          <p:cNvPr id="16" name="Picture 15" descr="620cb7f114546ac7.png"/>
+          <p:cNvPr id="16" name="Picture 15" descr="21810693e2eaa115.png"/>
           <p:cNvPicPr>
             <a:picLocks noChangeAspect="1"/>
           </p:cNvPicPr>
@@ -14053,8 +14706,8 @@
         </p:blipFill>
         <p:spPr>
           <a:xfrm>
-            <a:off x="5781658" y="2741675"/>
-            <a:ext cx="786384" cy="341376"/>
+            <a:off x="5730620" y="2738627"/>
+            <a:ext cx="826008" cy="347472"/>
           </a:xfrm>
           <a:prstGeom prst="rect">
             <a:avLst/>
@@ -14085,11 +14738,11 @@
           <a:p>
             <a:pPr algn="l"/>
             <a:r>
-              <a:rPr sz="2300" b="1" i="0">
+              <a:rPr sz="2180" b="1" i="0">
                 <a:solidFill>
                   <a:srgbClr val="0B5394"/>
                 </a:solidFill>
-                <a:latin typeface="Century Schoolbook"/>
+                <a:latin typeface="Lexend"/>
               </a:rPr>
               <a:t>4.</a:t>
             </a:r>
@@ -14105,7 +14758,7 @@
         <p:spPr>
           <a:xfrm>
             <a:off x="1554480" y="3278123"/>
-            <a:ext cx="4364338" cy="457200"/>
+            <a:ext cx="4313300" cy="457200"/>
           </a:xfrm>
           <a:prstGeom prst="rect">
             <a:avLst/>
@@ -14120,11 +14773,11 @@
           <a:p>
             <a:pPr algn="l"/>
             <a:r>
-              <a:rPr sz="2300" b="0" i="0">
+              <a:rPr sz="2180" b="0" i="0">
                 <a:solidFill>
                   <a:srgbClr val="1A1A1A"/>
                 </a:solidFill>
-                <a:latin typeface="Century Schoolbook"/>
+                <a:latin typeface="Lexend"/>
               </a:rPr>
               <a:t>Write as a single monomial.  </a:t>
             </a:r>
@@ -14133,7 +14786,7 @@
       </p:sp>
       <p:pic>
         <p:nvPicPr>
-          <p:cNvPr id="19" name="Picture 18" descr="c3a1d706675437f4.png"/>
+          <p:cNvPr id="19" name="Picture 18" descr="b4d4ab21b5b301af.png"/>
           <p:cNvPicPr>
             <a:picLocks noChangeAspect="1"/>
           </p:cNvPicPr>
@@ -14147,8 +14800,8 @@
         </p:blipFill>
         <p:spPr>
           <a:xfrm>
-            <a:off x="5781658" y="3339083"/>
-            <a:ext cx="1517904" cy="335280"/>
+            <a:off x="5730620" y="3343655"/>
+            <a:ext cx="1615440" cy="326136"/>
           </a:xfrm>
           <a:prstGeom prst="rect">
             <a:avLst/>
@@ -14163,7 +14816,7 @@
         </p:nvSpPr>
         <p:spPr>
           <a:xfrm>
-            <a:off x="960120" y="3997451"/>
+            <a:off x="960120" y="3988307"/>
             <a:ext cx="548640" cy="457200"/>
           </a:xfrm>
           <a:prstGeom prst="rect">
@@ -14179,11 +14832,11 @@
           <a:p>
             <a:pPr algn="l"/>
             <a:r>
-              <a:rPr sz="2300" b="1" i="0">
+              <a:rPr sz="2180" b="1" i="0">
                 <a:solidFill>
                   <a:srgbClr val="0B5394"/>
                 </a:solidFill>
-                <a:latin typeface="Century Schoolbook"/>
+                <a:latin typeface="Lexend"/>
               </a:rPr>
               <a:t>5.</a:t>
             </a:r>
@@ -14198,8 +14851,8 @@
         </p:nvSpPr>
         <p:spPr>
           <a:xfrm>
-            <a:off x="1554480" y="3997451"/>
-            <a:ext cx="4364338" cy="457200"/>
+            <a:off x="1554480" y="3988307"/>
+            <a:ext cx="4313300" cy="457200"/>
           </a:xfrm>
           <a:prstGeom prst="rect">
             <a:avLst/>
@@ -14214,11 +14867,11 @@
           <a:p>
             <a:pPr algn="l"/>
             <a:r>
-              <a:rPr sz="2300" b="0" i="0">
+              <a:rPr sz="2180" b="0" i="0">
                 <a:solidFill>
                   <a:srgbClr val="1A1A1A"/>
                 </a:solidFill>
-                <a:latin typeface="Century Schoolbook"/>
+                <a:latin typeface="Lexend"/>
               </a:rPr>
               <a:t>Write as a single monomial.  </a:t>
             </a:r>
@@ -14227,7 +14880,7 @@
       </p:sp>
       <p:pic>
         <p:nvPicPr>
-          <p:cNvPr id="22" name="Picture 21" descr="0130a9e18efff1cc.png"/>
+          <p:cNvPr id="22" name="Picture 21" descr="8715ef2ef01682a3.png"/>
           <p:cNvPicPr>
             <a:picLocks noChangeAspect="1"/>
           </p:cNvPicPr>
@@ -14241,8 +14894,8 @@
         </p:blipFill>
         <p:spPr>
           <a:xfrm>
-            <a:off x="5781658" y="3895344"/>
-            <a:ext cx="630936" cy="661416"/>
+            <a:off x="5730620" y="3895344"/>
+            <a:ext cx="685800" cy="643128"/>
           </a:xfrm>
           <a:prstGeom prst="rect">
             <a:avLst/>
@@ -14257,7 +14910,7 @@
         </p:nvSpPr>
         <p:spPr>
           <a:xfrm>
-            <a:off x="960120" y="4716780"/>
+            <a:off x="960120" y="4698491"/>
             <a:ext cx="548640" cy="457200"/>
           </a:xfrm>
           <a:prstGeom prst="rect">
@@ -14273,11 +14926,11 @@
           <a:p>
             <a:pPr algn="l"/>
             <a:r>
-              <a:rPr sz="2300" b="1" i="0">
+              <a:rPr sz="2180" b="1" i="0">
                 <a:solidFill>
                   <a:srgbClr val="0B5394"/>
                 </a:solidFill>
-                <a:latin typeface="Century Schoolbook"/>
+                <a:latin typeface="Lexend"/>
               </a:rPr>
               <a:t>6.</a:t>
             </a:r>
@@ -14292,8 +14945,8 @@
         </p:nvSpPr>
         <p:spPr>
           <a:xfrm>
-            <a:off x="1554480" y="4716780"/>
-            <a:ext cx="2720291" cy="457200"/>
+            <a:off x="1554480" y="4698491"/>
+            <a:ext cx="2684114" cy="457200"/>
           </a:xfrm>
           <a:prstGeom prst="rect">
             <a:avLst/>
@@ -14308,11 +14961,11 @@
           <a:p>
             <a:pPr algn="l"/>
             <a:r>
-              <a:rPr sz="2300" b="0" i="0">
+              <a:rPr sz="2180" b="0" i="0">
                 <a:solidFill>
                   <a:srgbClr val="1A1A1A"/>
                 </a:solidFill>
-                <a:latin typeface="Century Schoolbook"/>
+                <a:latin typeface="Lexend"/>
               </a:rPr>
               <a:t>Find the value of </a:t>
             </a:r>
@@ -14321,7 +14974,7 @@
       </p:sp>
       <p:pic>
         <p:nvPicPr>
-          <p:cNvPr id="25" name="Picture 24" descr="0afe177f69dd5e06.png"/>
+          <p:cNvPr id="25" name="Picture 24" descr="6d78c2be12150bf5.png"/>
           <p:cNvPicPr>
             <a:picLocks noChangeAspect="1"/>
           </p:cNvPicPr>
@@ -14335,8 +14988,8 @@
         </p:blipFill>
         <p:spPr>
           <a:xfrm>
-            <a:off x="4137611" y="4870704"/>
-            <a:ext cx="155448" cy="149352"/>
+            <a:off x="4101434" y="4843272"/>
+            <a:ext cx="146304" cy="167640"/>
           </a:xfrm>
           <a:prstGeom prst="rect">
             <a:avLst/>
@@ -14351,8 +15004,8 @@
         </p:nvSpPr>
         <p:spPr>
           <a:xfrm>
-            <a:off x="4293059" y="4716780"/>
-            <a:ext cx="468561" cy="457200"/>
+            <a:off x="4247738" y="4698491"/>
+            <a:ext cx="442110" cy="457200"/>
           </a:xfrm>
           <a:prstGeom prst="rect">
             <a:avLst/>
@@ -14367,11 +15020,11 @@
           <a:p>
             <a:pPr algn="l"/>
             <a:r>
-              <a:rPr sz="2300" b="0" i="0">
+              <a:rPr sz="2180" b="0" i="0">
                 <a:solidFill>
                   <a:srgbClr val="1A1A1A"/>
                 </a:solidFill>
-                <a:latin typeface="Century Schoolbook"/>
+                <a:latin typeface="Lexend"/>
               </a:rPr>
               <a:t>.  </a:t>
             </a:r>
@@ -14380,7 +15033,7 @@
       </p:sp>
       <p:pic>
         <p:nvPicPr>
-          <p:cNvPr id="27" name="Picture 26" descr="a0f60224273681e1.png"/>
+          <p:cNvPr id="27" name="Picture 26" descr="7739f2fcdf71af31.png"/>
           <p:cNvPicPr>
             <a:picLocks noChangeAspect="1"/>
           </p:cNvPicPr>
@@ -14394,8 +15047,8 @@
         </p:blipFill>
         <p:spPr>
           <a:xfrm>
-            <a:off x="4624460" y="4774692"/>
-            <a:ext cx="1511808" cy="341376"/>
+            <a:off x="4552689" y="4753356"/>
+            <a:ext cx="1588008" cy="347472"/>
           </a:xfrm>
           <a:prstGeom prst="rect">
             <a:avLst/>
@@ -14444,11 +15097,11 @@
           <a:p>
             <a:pPr algn="l"/>
             <a:r>
-              <a:rPr sz="3600" b="1" i="0">
+              <a:rPr sz="3420" b="1" i="0">
                 <a:solidFill>
                   <a:srgbClr val="1A1A1A"/>
                 </a:solidFill>
-                <a:latin typeface="Century Schoolbook"/>
+                <a:latin typeface="Lexend"/>
               </a:rPr>
               <a:t>IXL</a:t>
             </a:r>
@@ -14584,11 +15237,11 @@
           <a:p>
             <a:pPr algn="l"/>
             <a:r>
-              <a:rPr sz="1100" b="0" i="1">
+              <a:rPr sz="1040" b="0" i="0">
                 <a:solidFill>
                   <a:srgbClr val="6B6B6B"/>
                 </a:solidFill>
-                <a:latin typeface="Century Schoolbook"/>
+                <a:latin typeface="Lexend"/>
               </a:rPr>
               <a:t>Grade 7 Accelerated · Unit 3 · Thread A · Day 1 — Exponent Laws with Variable Bases</a:t>
             </a:r>
@@ -14619,11 +15272,11 @@
           <a:p>
             <a:pPr algn="r"/>
             <a:r>
-              <a:rPr sz="1100" b="0" i="0">
+              <a:rPr sz="1040" b="0" i="0">
                 <a:solidFill>
                   <a:srgbClr val="6B6B6B"/>
                 </a:solidFill>
-                <a:latin typeface="Century Schoolbook"/>
+                <a:latin typeface="Lexend"/>
               </a:rPr>
               <a:t>34</a:t>
             </a:r>
@@ -14654,11 +15307,11 @@
           <a:p>
             <a:pPr algn="l"/>
             <a:r>
-              <a:rPr sz="2100" b="1" i="0">
+              <a:rPr sz="1989" b="1" i="0">
                 <a:solidFill>
                   <a:srgbClr val="0B5394"/>
                 </a:solidFill>
-                <a:latin typeface="Century Schoolbook"/>
+                <a:latin typeface="Lexend"/>
               </a:rPr>
               <a:t>1.</a:t>
             </a:r>
@@ -14689,11 +15342,11 @@
           <a:p>
             <a:pPr algn="l"/>
             <a:r>
-              <a:rPr sz="2100" b="0" i="0">
+              <a:rPr sz="1989" b="0" i="0">
                 <a:solidFill>
                   <a:srgbClr val="1A1A1A"/>
                 </a:solidFill>
-                <a:latin typeface="Century Schoolbook"/>
+                <a:latin typeface="Lexend"/>
               </a:rPr>
               <a:t>Open IXL and start today's skills.</a:t>
             </a:r>
@@ -14724,11 +15377,11 @@
           <a:p>
             <a:pPr algn="l"/>
             <a:r>
-              <a:rPr sz="2100" b="1" i="0">
+              <a:rPr sz="1989" b="1" i="0">
                 <a:solidFill>
                   <a:srgbClr val="0B5394"/>
                 </a:solidFill>
-                <a:latin typeface="Century Schoolbook"/>
+                <a:latin typeface="Lexend"/>
               </a:rPr>
               <a:t>2.</a:t>
             </a:r>
@@ -14759,11 +15412,11 @@
           <a:p>
             <a:pPr algn="l"/>
             <a:r>
-              <a:rPr sz="2100" b="0" i="0">
+              <a:rPr sz="1989" b="0" i="0">
                 <a:solidFill>
                   <a:srgbClr val="1A1A1A"/>
                 </a:solidFill>
-                <a:latin typeface="Century Schoolbook"/>
+                <a:latin typeface="Lexend"/>
               </a:rPr>
               <a:t>Work on paper where the question needs work. The answer box does not show it.</a:t>
             </a:r>
@@ -14794,11 +15447,11 @@
           <a:p>
             <a:pPr algn="l"/>
             <a:r>
-              <a:rPr sz="2100" b="1" i="0">
+              <a:rPr sz="1989" b="1" i="0">
                 <a:solidFill>
                   <a:srgbClr val="0B5394"/>
                 </a:solidFill>
-                <a:latin typeface="Century Schoolbook"/>
+                <a:latin typeface="Lexend"/>
               </a:rPr>
               <a:t>3.</a:t>
             </a:r>
@@ -14829,11 +15482,11 @@
           <a:p>
             <a:pPr algn="l"/>
             <a:r>
-              <a:rPr sz="2100" b="0" i="0">
+              <a:rPr sz="1989" b="0" i="0">
                 <a:solidFill>
                   <a:srgbClr val="1A1A1A"/>
                 </a:solidFill>
-                <a:latin typeface="Century Schoolbook"/>
+                <a:latin typeface="Lexend"/>
               </a:rPr>
               <a:t>Every skill listed is required, to a SmartScore of 67. Due at the start of the next class.</a:t>
             </a:r>
@@ -14864,11 +15517,11 @@
           <a:p>
             <a:pPr algn="l"/>
             <a:r>
-              <a:rPr sz="2100" b="1" i="0">
+              <a:rPr sz="1989" b="1" i="0">
                 <a:solidFill>
                   <a:srgbClr val="1A1A1A"/>
                 </a:solidFill>
-                <a:latin typeface="Century Schoolbook"/>
+                <a:latin typeface="Lexend"/>
               </a:rPr>
               <a:t>Today's skills — all required</a:t>
             </a:r>
@@ -14899,11 +15552,11 @@
           <a:p>
             <a:pPr algn="l"/>
             <a:r>
-              <a:rPr sz="1900" b="0" i="0">
+              <a:rPr sz="1810" b="0" i="0">
                 <a:solidFill>
                   <a:srgbClr val="1A1A1A"/>
                 </a:solidFill>
-                <a:latin typeface="Century Schoolbook"/>
+                <a:latin typeface="Lexend"/>
               </a:rPr>
               <a:t>Multiply powers: variable bases — TR9</a:t>
             </a:r>
@@ -14934,11 +15587,11 @@
           <a:p>
             <a:pPr algn="l"/>
             <a:r>
-              <a:rPr sz="1900" b="0" i="0">
+              <a:rPr sz="1810" b="0" i="0">
                 <a:solidFill>
                   <a:srgbClr val="1A1A1A"/>
                 </a:solidFill>
-                <a:latin typeface="Century Schoolbook"/>
+                <a:latin typeface="Lexend"/>
               </a:rPr>
               <a:t>Powers of a power: variable bases — 2CU</a:t>
             </a:r>
@@ -14969,11 +15622,11 @@
           <a:p>
             <a:pPr algn="l"/>
             <a:r>
-              <a:rPr sz="1900" b="0" i="0">
+              <a:rPr sz="1810" b="0" i="0">
                 <a:solidFill>
                   <a:srgbClr val="1A1A1A"/>
                 </a:solidFill>
-                <a:latin typeface="Century Schoolbook"/>
+                <a:latin typeface="Lexend"/>
               </a:rPr>
               <a:t>Divide monomials with positive exponents — C8L</a:t>
             </a:r>
@@ -15022,11 +15675,11 @@
           <a:p>
             <a:pPr algn="l"/>
             <a:r>
-              <a:rPr sz="3600" b="1" i="0">
+              <a:rPr sz="3420" b="1" i="0">
                 <a:solidFill>
                   <a:srgbClr val="1A1A1A"/>
                 </a:solidFill>
-                <a:latin typeface="Century Schoolbook"/>
+                <a:latin typeface="Lexend"/>
               </a:rPr>
               <a:t>Notes</a:t>
             </a:r>
@@ -15162,11 +15815,11 @@
           <a:p>
             <a:pPr algn="l"/>
             <a:r>
-              <a:rPr sz="1100" b="0" i="1">
+              <a:rPr sz="1040" b="0" i="0">
                 <a:solidFill>
                   <a:srgbClr val="6B6B6B"/>
                 </a:solidFill>
-                <a:latin typeface="Century Schoolbook"/>
+                <a:latin typeface="Lexend"/>
               </a:rPr>
               <a:t>Grade 7 Accelerated · Unit 3 · Thread A · Day 1 — Exponent Laws with Variable Bases</a:t>
             </a:r>
@@ -15197,11 +15850,11 @@
           <a:p>
             <a:pPr algn="r"/>
             <a:r>
-              <a:rPr sz="1100" b="0" i="0">
+              <a:rPr sz="1040" b="0" i="0">
                 <a:solidFill>
                   <a:srgbClr val="6B6B6B"/>
                 </a:solidFill>
-                <a:latin typeface="Century Schoolbook"/>
+                <a:latin typeface="Lexend"/>
               </a:rPr>
               <a:t>4</a:t>
             </a:r>
@@ -15232,11 +15885,11 @@
           <a:p>
             <a:pPr algn="l"/>
             <a:r>
-              <a:rPr sz="2500" b="1" i="0">
+              <a:rPr sz="2380" b="1" i="0">
                 <a:solidFill>
                   <a:srgbClr val="1A1A1A"/>
                 </a:solidFill>
-                <a:latin typeface="Century Schoolbook"/>
+                <a:latin typeface="Lexend"/>
               </a:rPr>
               <a:t>I.  Product of powers — the base is a letter now</a:t>
             </a:r>
@@ -15280,7 +15933,7 @@
       </p:cxnSp>
       <p:pic>
         <p:nvPicPr>
-          <p:cNvPr id="10" name="Picture 9" descr="7f4dc7bb52f34966.png"/>
+          <p:cNvPr id="10" name="Picture 9" descr="6d4fe73c289b0ea5.png"/>
           <p:cNvPicPr>
             <a:picLocks noChangeAspect="1"/>
           </p:cNvPicPr>
@@ -15294,8 +15947,8 @@
         </p:blipFill>
         <p:spPr>
           <a:xfrm>
-            <a:off x="2304024" y="1993392"/>
-            <a:ext cx="4245864" cy="411480"/>
+            <a:off x="2161780" y="1993392"/>
+            <a:ext cx="4459224" cy="411480"/>
           </a:xfrm>
           <a:prstGeom prst="rect">
             <a:avLst/>
@@ -15310,8 +15963,8 @@
         </p:nvSpPr>
         <p:spPr>
           <a:xfrm>
-            <a:off x="6549888" y="1970532"/>
-            <a:ext cx="1183151" cy="457200"/>
+            <a:off x="6621004" y="1970532"/>
+            <a:ext cx="1141503" cy="457200"/>
           </a:xfrm>
           <a:prstGeom prst="rect">
             <a:avLst/>
@@ -15326,11 +15979,11 @@
           <a:p>
             <a:pPr algn="l"/>
             <a:r>
-              <a:rPr sz="2600" b="0" i="0">
+              <a:rPr sz="2470" b="0" i="0">
                 <a:solidFill>
                   <a:srgbClr val="1A1A1A"/>
                 </a:solidFill>
-                <a:latin typeface="Century Schoolbook"/>
+                <a:latin typeface="Lexend"/>
               </a:rPr>
               <a:t>          </a:t>
             </a:r>
@@ -15339,7 +15992,7 @@
       </p:sp>
       <p:pic>
         <p:nvPicPr>
-          <p:cNvPr id="12" name="Picture 11" descr="4bb1e456c94b13a6.png"/>
+          <p:cNvPr id="12" name="Picture 11" descr="531b3ca0b6947c4d.png"/>
           <p:cNvPicPr>
             <a:picLocks noChangeAspect="1"/>
           </p:cNvPicPr>
@@ -15353,8 +16006,8 @@
         </p:blipFill>
         <p:spPr>
           <a:xfrm>
-            <a:off x="7595879" y="2043684"/>
-            <a:ext cx="2261616" cy="310896"/>
+            <a:off x="7625347" y="2055876"/>
+            <a:ext cx="2374392" cy="286512"/>
           </a:xfrm>
           <a:prstGeom prst="rect">
             <a:avLst/>
@@ -15363,7 +16016,7 @@
       </p:pic>
       <p:pic>
         <p:nvPicPr>
-          <p:cNvPr id="13" name="Picture 12" descr="a285865d99a08fcf.png"/>
+          <p:cNvPr id="13" name="Picture 12" descr="3a24062b248a79f1.png"/>
           <p:cNvPicPr>
             <a:picLocks noChangeAspect="1"/>
           </p:cNvPicPr>
@@ -15377,8 +16030,8 @@
         </p:blipFill>
         <p:spPr>
           <a:xfrm>
-            <a:off x="3560064" y="2679192"/>
-            <a:ext cx="5041392" cy="411480"/>
+            <a:off x="3464052" y="2679192"/>
+            <a:ext cx="5233416" cy="414528"/>
           </a:xfrm>
           <a:prstGeom prst="rect">
             <a:avLst/>
@@ -15393,7 +16046,7 @@
         </p:nvSpPr>
         <p:spPr>
           <a:xfrm>
-            <a:off x="987552" y="3429000"/>
+            <a:off x="987552" y="3432047"/>
             <a:ext cx="10131551" cy="475488"/>
           </a:xfrm>
           <a:prstGeom prst="rect">
@@ -15409,11 +16062,11 @@
           <a:p>
             <a:pPr algn="l"/>
             <a:r>
-              <a:rPr sz="2300" b="1" i="0">
+              <a:rPr sz="2180" b="1" i="0">
                 <a:solidFill>
                   <a:srgbClr val="1A1A1A"/>
                 </a:solidFill>
-                <a:latin typeface="Century Schoolbook"/>
+                <a:latin typeface="Lexend"/>
               </a:rPr>
               <a:t>Multiply the coefficients. Add the exponents of like bases.</a:t>
             </a:r>
@@ -15428,8 +16081,8 @@
         </p:nvSpPr>
         <p:spPr>
           <a:xfrm>
-            <a:off x="987552" y="4125468"/>
-            <a:ext cx="5144240" cy="457200"/>
+            <a:off x="987552" y="4130040"/>
+            <a:ext cx="5140333" cy="457200"/>
           </a:xfrm>
           <a:prstGeom prst="rect">
             <a:avLst/>
@@ -15444,11 +16097,11 @@
           <a:p>
             <a:pPr algn="l"/>
             <a:r>
-              <a:rPr sz="2300" b="0" i="0">
+              <a:rPr sz="2180" b="0" i="0">
                 <a:solidFill>
                   <a:srgbClr val="1A1A1A"/>
                 </a:solidFill>
-                <a:latin typeface="Century Schoolbook"/>
+                <a:latin typeface="Lexend"/>
               </a:rPr>
               <a:t>Different variables stay separate:  </a:t>
             </a:r>
@@ -15457,7 +16110,7 @@
       </p:sp>
       <p:pic>
         <p:nvPicPr>
-          <p:cNvPr id="16" name="Picture 15" descr="2a950411e1004bb4.png"/>
+          <p:cNvPr id="16" name="Picture 15" descr="cb5cb67ed0c2e133.png"/>
           <p:cNvPicPr>
             <a:picLocks noChangeAspect="1"/>
           </p:cNvPicPr>
@@ -15471,8 +16124,8 @@
         </p:blipFill>
         <p:spPr>
           <a:xfrm>
-            <a:off x="5994632" y="4142232"/>
-            <a:ext cx="2618232" cy="423672"/>
+            <a:off x="5990725" y="4145280"/>
+            <a:ext cx="2788920" cy="426720"/>
           </a:xfrm>
           <a:prstGeom prst="rect">
             <a:avLst/>
@@ -15521,11 +16174,11 @@
           <a:p>
             <a:pPr algn="l"/>
             <a:r>
-              <a:rPr sz="3600" b="1" i="0">
+              <a:rPr sz="3420" b="1" i="0">
                 <a:solidFill>
                   <a:srgbClr val="1A1A1A"/>
                 </a:solidFill>
-                <a:latin typeface="Century Schoolbook"/>
+                <a:latin typeface="Lexend"/>
               </a:rPr>
               <a:t>Notes</a:t>
             </a:r>
@@ -15661,11 +16314,11 @@
           <a:p>
             <a:pPr algn="l"/>
             <a:r>
-              <a:rPr sz="1100" b="0" i="1">
+              <a:rPr sz="1040" b="0" i="0">
                 <a:solidFill>
                   <a:srgbClr val="6B6B6B"/>
                 </a:solidFill>
-                <a:latin typeface="Century Schoolbook"/>
+                <a:latin typeface="Lexend"/>
               </a:rPr>
               <a:t>Grade 7 Accelerated · Unit 3 · Thread A · Day 1 — Exponent Laws with Variable Bases</a:t>
             </a:r>
@@ -15696,11 +16349,11 @@
           <a:p>
             <a:pPr algn="r"/>
             <a:r>
-              <a:rPr sz="1100" b="0" i="0">
+              <a:rPr sz="1040" b="0" i="0">
                 <a:solidFill>
                   <a:srgbClr val="6B6B6B"/>
                 </a:solidFill>
-                <a:latin typeface="Century Schoolbook"/>
+                <a:latin typeface="Lexend"/>
               </a:rPr>
               <a:t>5</a:t>
             </a:r>
@@ -15731,11 +16384,11 @@
           <a:p>
             <a:pPr algn="l"/>
             <a:r>
-              <a:rPr sz="2500" b="1" i="0">
+              <a:rPr sz="2380" b="1" i="0">
                 <a:solidFill>
                   <a:srgbClr val="1A1A1A"/>
                 </a:solidFill>
-                <a:latin typeface="Century Schoolbook"/>
+                <a:latin typeface="Lexend"/>
               </a:rPr>
               <a:t>II.  Power of a power, power of a product</a:t>
             </a:r>
@@ -15779,7 +16432,7 @@
       </p:cxnSp>
       <p:pic>
         <p:nvPicPr>
-          <p:cNvPr id="10" name="Picture 9" descr="fe72c58bfa2a95e5.png"/>
+          <p:cNvPr id="10" name="Picture 9" descr="d6bfdf3d19b6c693.png"/>
           <p:cNvPicPr>
             <a:picLocks noChangeAspect="1"/>
           </p:cNvPicPr>
@@ -15793,8 +16446,8 @@
         </p:blipFill>
         <p:spPr>
           <a:xfrm>
-            <a:off x="2547864" y="1993392"/>
-            <a:ext cx="4227576" cy="411480"/>
+            <a:off x="2457436" y="1993392"/>
+            <a:ext cx="4322064" cy="411480"/>
           </a:xfrm>
           <a:prstGeom prst="rect">
             <a:avLst/>
@@ -15809,8 +16462,8 @@
         </p:nvSpPr>
         <p:spPr>
           <a:xfrm>
-            <a:off x="6775440" y="1970532"/>
-            <a:ext cx="1183151" cy="457200"/>
+            <a:off x="6779500" y="1970532"/>
+            <a:ext cx="1141503" cy="457200"/>
           </a:xfrm>
           <a:prstGeom prst="rect">
             <a:avLst/>
@@ -15825,11 +16478,11 @@
           <a:p>
             <a:pPr algn="l"/>
             <a:r>
-              <a:rPr sz="2600" b="0" i="0">
+              <a:rPr sz="2470" b="0" i="0">
                 <a:solidFill>
                   <a:srgbClr val="1A1A1A"/>
                 </a:solidFill>
-                <a:latin typeface="Century Schoolbook"/>
+                <a:latin typeface="Lexend"/>
               </a:rPr>
               <a:t>          </a:t>
             </a:r>
@@ -15838,7 +16491,7 @@
       </p:sp>
       <p:pic>
         <p:nvPicPr>
-          <p:cNvPr id="12" name="Picture 11" descr="f6f2fe1277a80fa5.png"/>
+          <p:cNvPr id="12" name="Picture 11" descr="fccf0a74e9f8b115.png"/>
           <p:cNvPicPr>
             <a:picLocks noChangeAspect="1"/>
           </p:cNvPicPr>
@@ -15852,8 +16505,8 @@
         </p:blipFill>
         <p:spPr>
           <a:xfrm>
-            <a:off x="7821431" y="2025396"/>
-            <a:ext cx="1792224" cy="347472"/>
+            <a:off x="7783843" y="2017776"/>
+            <a:ext cx="1920240" cy="362712"/>
           </a:xfrm>
           <a:prstGeom prst="rect">
             <a:avLst/>
@@ -15862,7 +16515,7 @@
       </p:pic>
       <p:pic>
         <p:nvPicPr>
-          <p:cNvPr id="13" name="Picture 12" descr="783225cb699ff896.png"/>
+          <p:cNvPr id="13" name="Picture 12" descr="ae79d4a9e407b4a9.png"/>
           <p:cNvPicPr>
             <a:picLocks noChangeAspect="1"/>
           </p:cNvPicPr>
@@ -15876,8 +16529,8 @@
         </p:blipFill>
         <p:spPr>
           <a:xfrm>
-            <a:off x="1999224" y="2679192"/>
-            <a:ext cx="3727704" cy="423672"/>
+            <a:off x="1913368" y="2679192"/>
+            <a:ext cx="3806952" cy="426720"/>
           </a:xfrm>
           <a:prstGeom prst="rect">
             <a:avLst/>
@@ -15892,8 +16545,8 @@
         </p:nvSpPr>
         <p:spPr>
           <a:xfrm>
-            <a:off x="5726928" y="2662428"/>
-            <a:ext cx="1183151" cy="457200"/>
+            <a:off x="5720320" y="2663952"/>
+            <a:ext cx="1141503" cy="457200"/>
           </a:xfrm>
           <a:prstGeom prst="rect">
             <a:avLst/>
@@ -15908,11 +16561,11 @@
           <a:p>
             <a:pPr algn="l"/>
             <a:r>
-              <a:rPr sz="2600" b="0" i="0">
+              <a:rPr sz="2470" b="0" i="0">
                 <a:solidFill>
                   <a:srgbClr val="1A1A1A"/>
                 </a:solidFill>
-                <a:latin typeface="Century Schoolbook"/>
+                <a:latin typeface="Lexend"/>
               </a:rPr>
               <a:t>          </a:t>
             </a:r>
@@ -15921,7 +16574,7 @@
       </p:sp>
       <p:pic>
         <p:nvPicPr>
-          <p:cNvPr id="15" name="Picture 14" descr="1389c559d7859cab.png"/>
+          <p:cNvPr id="15" name="Picture 14" descr="4c84c2e4af97e3da.png"/>
           <p:cNvPicPr>
             <a:picLocks noChangeAspect="1"/>
           </p:cNvPicPr>
@@ -15935,8 +16588,8 @@
         </p:blipFill>
         <p:spPr>
           <a:xfrm>
-            <a:off x="6772919" y="2679192"/>
-            <a:ext cx="3389376" cy="423672"/>
+            <a:off x="6724663" y="2679192"/>
+            <a:ext cx="3523488" cy="426720"/>
           </a:xfrm>
           <a:prstGeom prst="rect">
             <a:avLst/>
@@ -15951,7 +16604,7 @@
         </p:nvSpPr>
         <p:spPr>
           <a:xfrm>
-            <a:off x="987552" y="3441192"/>
+            <a:off x="987552" y="3444240"/>
             <a:ext cx="10131551" cy="950976"/>
           </a:xfrm>
           <a:prstGeom prst="rect">
@@ -15967,11 +16620,11 @@
           <a:p>
             <a:pPr algn="l"/>
             <a:r>
-              <a:rPr sz="2300" b="1" i="0">
+              <a:rPr sz="2180" b="1" i="0">
                 <a:solidFill>
                   <a:srgbClr val="1A1A1A"/>
                 </a:solidFill>
-                <a:latin typeface="Century Schoolbook"/>
+                <a:latin typeface="Lexend"/>
               </a:rPr>
               <a:t>Power of a power: multiply the exponents.  Power of a product: raise every factor.</a:t>
             </a:r>
@@ -16020,11 +16673,11 @@
           <a:p>
             <a:pPr algn="l"/>
             <a:r>
-              <a:rPr sz="3600" b="1" i="0">
+              <a:rPr sz="3420" b="1" i="0">
                 <a:solidFill>
                   <a:srgbClr val="1A1A1A"/>
                 </a:solidFill>
-                <a:latin typeface="Century Schoolbook"/>
+                <a:latin typeface="Lexend"/>
               </a:rPr>
               <a:t>Notes</a:t>
             </a:r>
@@ -16160,11 +16813,11 @@
           <a:p>
             <a:pPr algn="l"/>
             <a:r>
-              <a:rPr sz="1100" b="0" i="1">
+              <a:rPr sz="1040" b="0" i="0">
                 <a:solidFill>
                   <a:srgbClr val="6B6B6B"/>
                 </a:solidFill>
-                <a:latin typeface="Century Schoolbook"/>
+                <a:latin typeface="Lexend"/>
               </a:rPr>
               <a:t>Grade 7 Accelerated · Unit 3 · Thread A · Day 1 — Exponent Laws with Variable Bases</a:t>
             </a:r>
@@ -16195,11 +16848,11 @@
           <a:p>
             <a:pPr algn="r"/>
             <a:r>
-              <a:rPr sz="1100" b="0" i="0">
+              <a:rPr sz="1040" b="0" i="0">
                 <a:solidFill>
                   <a:srgbClr val="6B6B6B"/>
                 </a:solidFill>
-                <a:latin typeface="Century Schoolbook"/>
+                <a:latin typeface="Lexend"/>
               </a:rPr>
               <a:t>6</a:t>
             </a:r>
@@ -16230,11 +16883,11 @@
           <a:p>
             <a:pPr algn="l"/>
             <a:r>
-              <a:rPr sz="2500" b="1" i="0">
+              <a:rPr sz="2380" b="1" i="0">
                 <a:solidFill>
                   <a:srgbClr val="1A1A1A"/>
                 </a:solidFill>
-                <a:latin typeface="Century Schoolbook"/>
+                <a:latin typeface="Lexend"/>
               </a:rPr>
               <a:t>III.  Quotient of powers — dividing monomials</a:t>
             </a:r>
@@ -16278,7 +16931,7 @@
       </p:cxnSp>
       <p:pic>
         <p:nvPicPr>
-          <p:cNvPr id="10" name="Picture 9" descr="63942cbc98c315f3.png"/>
+          <p:cNvPr id="10" name="Picture 9" descr="5992b07e12d929b8.png"/>
           <p:cNvPicPr>
             <a:picLocks noChangeAspect="1"/>
           </p:cNvPicPr>
@@ -16292,8 +16945,8 @@
         </p:blipFill>
         <p:spPr>
           <a:xfrm>
-            <a:off x="2566152" y="1993392"/>
-            <a:ext cx="4270248" cy="804672"/>
+            <a:off x="2428480" y="1993392"/>
+            <a:ext cx="4517136" cy="786384"/>
           </a:xfrm>
           <a:prstGeom prst="rect">
             <a:avLst/>
@@ -16308,8 +16961,8 @@
         </p:nvSpPr>
         <p:spPr>
           <a:xfrm>
-            <a:off x="6836400" y="2167128"/>
-            <a:ext cx="1183151" cy="457200"/>
+            <a:off x="6945616" y="2157984"/>
+            <a:ext cx="1141503" cy="457200"/>
           </a:xfrm>
           <a:prstGeom prst="rect">
             <a:avLst/>
@@ -16324,11 +16977,11 @@
           <a:p>
             <a:pPr algn="l"/>
             <a:r>
-              <a:rPr sz="2600" b="0" i="0">
+              <a:rPr sz="2470" b="0" i="0">
                 <a:solidFill>
                   <a:srgbClr val="1A1A1A"/>
                 </a:solidFill>
-                <a:latin typeface="Century Schoolbook"/>
+                <a:latin typeface="Lexend"/>
               </a:rPr>
               <a:t>          </a:t>
             </a:r>
@@ -16337,7 +16990,7 @@
       </p:sp>
       <p:pic>
         <p:nvPicPr>
-          <p:cNvPr id="12" name="Picture 11" descr="90de12726cf0d0d8.png"/>
+          <p:cNvPr id="12" name="Picture 11" descr="e5743ba7bca77de7.png"/>
           <p:cNvPicPr>
             <a:picLocks noChangeAspect="1"/>
           </p:cNvPicPr>
@@ -16351,8 +17004,8 @@
         </p:blipFill>
         <p:spPr>
           <a:xfrm>
-            <a:off x="7882391" y="2058924"/>
-            <a:ext cx="1712976" cy="673608"/>
+            <a:off x="7949959" y="2037588"/>
+            <a:ext cx="1783080" cy="697992"/>
           </a:xfrm>
           <a:prstGeom prst="rect">
             <a:avLst/>
@@ -16361,7 +17014,7 @@
       </p:pic>
       <p:pic>
         <p:nvPicPr>
-          <p:cNvPr id="13" name="Picture 12" descr="56477ae8447c4609.png"/>
+          <p:cNvPr id="13" name="Picture 12" descr="bff3d968f5264f45.png"/>
           <p:cNvPicPr>
             <a:picLocks noChangeAspect="1"/>
           </p:cNvPicPr>
@@ -16375,8 +17028,8 @@
         </p:blipFill>
         <p:spPr>
           <a:xfrm>
-            <a:off x="3140700" y="3072384"/>
-            <a:ext cx="1801368" cy="810768"/>
+            <a:off x="3042652" y="3054096"/>
+            <a:ext cx="1840991" cy="795528"/>
           </a:xfrm>
           <a:prstGeom prst="rect">
             <a:avLst/>
@@ -16391,8 +17044,8 @@
         </p:nvSpPr>
         <p:spPr>
           <a:xfrm>
-            <a:off x="4942068" y="3249168"/>
-            <a:ext cx="1183151" cy="457200"/>
+            <a:off x="4883644" y="3223260"/>
+            <a:ext cx="1141503" cy="457200"/>
           </a:xfrm>
           <a:prstGeom prst="rect">
             <a:avLst/>
@@ -16407,11 +17060,11 @@
           <a:p>
             <a:pPr algn="l"/>
             <a:r>
-              <a:rPr sz="2600" b="0" i="0">
+              <a:rPr sz="2470" b="0" i="0">
                 <a:solidFill>
                   <a:srgbClr val="1A1A1A"/>
                 </a:solidFill>
-                <a:latin typeface="Century Schoolbook"/>
+                <a:latin typeface="Lexend"/>
               </a:rPr>
               <a:t>          </a:t>
             </a:r>
@@ -16420,7 +17073,7 @@
       </p:sp>
       <p:pic>
         <p:nvPicPr>
-          <p:cNvPr id="15" name="Picture 14" descr="7b39cdb0ef566bc5.png"/>
+          <p:cNvPr id="15" name="Picture 14" descr="babaa48f738357ba.png"/>
           <p:cNvPicPr>
             <a:picLocks noChangeAspect="1"/>
           </p:cNvPicPr>
@@ -16434,8 +17087,8 @@
         </p:blipFill>
         <p:spPr>
           <a:xfrm>
-            <a:off x="5988059" y="3073907"/>
-            <a:ext cx="3032760" cy="807720"/>
+            <a:off x="5887987" y="3055619"/>
+            <a:ext cx="3230880" cy="792480"/>
           </a:xfrm>
           <a:prstGeom prst="rect">
             <a:avLst/>
@@ -16450,7 +17103,7 @@
         </p:nvSpPr>
         <p:spPr>
           <a:xfrm>
-            <a:off x="987552" y="4221480"/>
+            <a:off x="987552" y="4187952"/>
             <a:ext cx="10131551" cy="475488"/>
           </a:xfrm>
           <a:prstGeom prst="rect">
@@ -16466,11 +17119,11 @@
           <a:p>
             <a:pPr algn="l"/>
             <a:r>
-              <a:rPr sz="2300" b="1" i="0">
+              <a:rPr sz="2180" b="1" i="0">
                 <a:solidFill>
                   <a:srgbClr val="1A1A1A"/>
                 </a:solidFill>
-                <a:latin typeface="Century Schoolbook"/>
+                <a:latin typeface="Lexend"/>
               </a:rPr>
               <a:t>Divide the coefficients. Subtract the exponents of like bases.</a:t>
             </a:r>
@@ -16519,11 +17172,11 @@
           <a:p>
             <a:pPr algn="l"/>
             <a:r>
-              <a:rPr sz="3600" b="1" i="0">
+              <a:rPr sz="3420" b="1" i="0">
                 <a:solidFill>
                   <a:srgbClr val="1A1A1A"/>
                 </a:solidFill>
-                <a:latin typeface="Century Schoolbook"/>
+                <a:latin typeface="Lexend"/>
               </a:rPr>
               <a:t>Example 1</a:t>
             </a:r>
@@ -16659,11 +17312,11 @@
           <a:p>
             <a:pPr algn="l"/>
             <a:r>
-              <a:rPr sz="1100" b="0" i="1">
+              <a:rPr sz="1040" b="0" i="0">
                 <a:solidFill>
                   <a:srgbClr val="6B6B6B"/>
                 </a:solidFill>
-                <a:latin typeface="Century Schoolbook"/>
+                <a:latin typeface="Lexend"/>
               </a:rPr>
               <a:t>Grade 7 Accelerated · Unit 3 · Thread A · Day 1 — Exponent Laws with Variable Bases</a:t>
             </a:r>
@@ -16694,11 +17347,11 @@
           <a:p>
             <a:pPr algn="r"/>
             <a:r>
-              <a:rPr sz="1100" b="0" i="0">
+              <a:rPr sz="1040" b="0" i="0">
                 <a:solidFill>
                   <a:srgbClr val="6B6B6B"/>
                 </a:solidFill>
-                <a:latin typeface="Century Schoolbook"/>
+                <a:latin typeface="Lexend"/>
               </a:rPr>
               <a:t>7</a:t>
             </a:r>
@@ -16707,7 +17360,7 @@
       </p:sp>
       <p:pic>
         <p:nvPicPr>
-          <p:cNvPr id="8" name="Picture 7" descr="a0894cd9a5ccf63d.png"/>
+          <p:cNvPr id="8" name="Picture 7" descr="f82502c420b1e854.png"/>
           <p:cNvPicPr>
             <a:picLocks noChangeAspect="1"/>
           </p:cNvPicPr>
@@ -16721,8 +17374,8 @@
         </p:blipFill>
         <p:spPr>
           <a:xfrm>
-            <a:off x="4847843" y="2103120"/>
-            <a:ext cx="2465832" cy="423672"/>
+            <a:off x="4771644" y="2103120"/>
+            <a:ext cx="2618232" cy="426720"/>
           </a:xfrm>
           <a:prstGeom prst="rect">
             <a:avLst/>
@@ -16737,7 +17390,7 @@
         </p:nvSpPr>
         <p:spPr>
           <a:xfrm>
-            <a:off x="777240" y="3029712"/>
+            <a:off x="777240" y="3032760"/>
             <a:ext cx="10607040" cy="429370"/>
           </a:xfrm>
           <a:prstGeom prst="rect">
@@ -16753,11 +17406,11 @@
           <a:p>
             <a:pPr algn="ctr"/>
             <a:r>
-              <a:rPr sz="2400" b="1" i="0">
+              <a:rPr sz="2280" b="1" i="0">
                 <a:solidFill>
                   <a:srgbClr val="1A1A1A"/>
                 </a:solidFill>
-                <a:latin typeface="Century Schoolbook"/>
+                <a:latin typeface="Lexend"/>
               </a:rPr>
               <a:t>Write an equivalent expression as a single monomial.</a:t>
             </a:r>
@@ -16806,11 +17459,11 @@
           <a:p>
             <a:pPr algn="l"/>
             <a:r>
-              <a:rPr sz="3600" b="1" i="0">
+              <a:rPr sz="3420" b="1" i="0">
                 <a:solidFill>
                   <a:srgbClr val="1A1A1A"/>
                 </a:solidFill>
-                <a:latin typeface="Century Schoolbook"/>
+                <a:latin typeface="Lexend"/>
               </a:rPr>
               <a:t>Example 1</a:t>
             </a:r>
@@ -16946,11 +17599,11 @@
           <a:p>
             <a:pPr algn="l"/>
             <a:r>
-              <a:rPr sz="1100" b="0" i="1">
+              <a:rPr sz="1040" b="0" i="0">
                 <a:solidFill>
                   <a:srgbClr val="6B6B6B"/>
                 </a:solidFill>
-                <a:latin typeface="Century Schoolbook"/>
+                <a:latin typeface="Lexend"/>
               </a:rPr>
               <a:t>Grade 7 Accelerated · Unit 3 · Thread A · Day 1 — Exponent Laws with Variable Bases</a:t>
             </a:r>
@@ -16981,11 +17634,11 @@
           <a:p>
             <a:pPr algn="r"/>
             <a:r>
-              <a:rPr sz="1100" b="0" i="0">
+              <a:rPr sz="1040" b="0" i="0">
                 <a:solidFill>
                   <a:srgbClr val="6B6B6B"/>
                 </a:solidFill>
-                <a:latin typeface="Century Schoolbook"/>
+                <a:latin typeface="Lexend"/>
               </a:rPr>
               <a:t>8</a:t>
             </a:r>
@@ -16994,7 +17647,7 @@
       </p:sp>
       <p:pic>
         <p:nvPicPr>
-          <p:cNvPr id="8" name="Picture 7" descr="de63dedae86b58c0.png"/>
+          <p:cNvPr id="8" name="Picture 7" descr="d34a71302951cdd3.png"/>
           <p:cNvPicPr>
             <a:picLocks noChangeAspect="1"/>
           </p:cNvPicPr>
@@ -17009,7 +17662,7 @@
         <p:spPr>
           <a:xfrm>
             <a:off x="1828800" y="1920240"/>
-            <a:ext cx="6004560" cy="423672"/>
+            <a:ext cx="6248400" cy="426720"/>
           </a:xfrm>
           <a:prstGeom prst="rect">
             <a:avLst/>
@@ -17018,7 +17671,7 @@
       </p:pic>
       <p:pic>
         <p:nvPicPr>
-          <p:cNvPr id="9" name="Picture 8" descr="2f53120bf9dfffe2.png"/>
+          <p:cNvPr id="9" name="Picture 8" descr="9880f38cb80c4028.png"/>
           <p:cNvPicPr>
             <a:picLocks noChangeAspect="1"/>
           </p:cNvPicPr>
@@ -17032,8 +17685,8 @@
         </p:blipFill>
         <p:spPr>
           <a:xfrm>
-            <a:off x="1828800" y="2618232"/>
-            <a:ext cx="3581400" cy="423672"/>
+            <a:off x="1828800" y="2621280"/>
+            <a:ext cx="3578352" cy="426720"/>
           </a:xfrm>
           <a:prstGeom prst="rect">
             <a:avLst/>
@@ -17064,38 +17717,38 @@
           <a:p>
             <a:pPr algn="ctr"/>
             <a:r>
-              <a:rPr sz="3200" b="1" i="0">
+              <a:rPr sz="3040" b="1" i="0">
                 <a:solidFill>
                   <a:srgbClr val="9E1B32"/>
                 </a:solidFill>
-                <a:latin typeface="Century Schoolbook"/>
+                <a:latin typeface="Lexend"/>
               </a:rPr>
               <a:t>Answer:   −8x</a:t>
             </a:r>
             <a:r>
-              <a:rPr sz="3200" b="1" i="0" baseline="30000">
+              <a:rPr sz="3040" b="1" i="0" baseline="30000">
                 <a:solidFill>
                   <a:srgbClr val="9E1B32"/>
                 </a:solidFill>
-                <a:latin typeface="Century Schoolbook"/>
+                <a:latin typeface="Lexend"/>
               </a:rPr>
               <a:t>5</a:t>
             </a:r>
             <a:r>
-              <a:rPr sz="3200" b="1" i="0">
+              <a:rPr sz="3040" b="1" i="0">
                 <a:solidFill>
                   <a:srgbClr val="9E1B32"/>
                 </a:solidFill>
-                <a:latin typeface="Century Schoolbook"/>
+                <a:latin typeface="Lexend"/>
               </a:rPr>
               <a:t>y</a:t>
             </a:r>
             <a:r>
-              <a:rPr sz="3200" b="1" i="0" baseline="30000">
+              <a:rPr sz="3040" b="1" i="0" baseline="30000">
                 <a:solidFill>
                   <a:srgbClr val="9E1B32"/>
                 </a:solidFill>
-                <a:latin typeface="Century Schoolbook"/>
+                <a:latin typeface="Lexend"/>
               </a:rPr>
               <a:t>6</a:t>
             </a:r>
@@ -17144,11 +17797,11 @@
           <a:p>
             <a:pPr algn="l"/>
             <a:r>
-              <a:rPr sz="3600" b="1" i="0">
+              <a:rPr sz="3420" b="1" i="0">
                 <a:solidFill>
                   <a:srgbClr val="1A1A1A"/>
                 </a:solidFill>
-                <a:latin typeface="Century Schoolbook"/>
+                <a:latin typeface="Lexend"/>
               </a:rPr>
               <a:t>Your Turn</a:t>
             </a:r>
@@ -17284,11 +17937,11 @@
           <a:p>
             <a:pPr algn="l"/>
             <a:r>
-              <a:rPr sz="1100" b="0" i="1">
+              <a:rPr sz="1040" b="0" i="0">
                 <a:solidFill>
                   <a:srgbClr val="6B6B6B"/>
                 </a:solidFill>
-                <a:latin typeface="Century Schoolbook"/>
+                <a:latin typeface="Lexend"/>
               </a:rPr>
               <a:t>Grade 7 Accelerated · Unit 3 · Thread A · Day 1 — Exponent Laws with Variable Bases</a:t>
             </a:r>
@@ -17319,11 +17972,11 @@
           <a:p>
             <a:pPr algn="r"/>
             <a:r>
-              <a:rPr sz="1100" b="0" i="0">
+              <a:rPr sz="1040" b="0" i="0">
                 <a:solidFill>
                   <a:srgbClr val="6B6B6B"/>
                 </a:solidFill>
-                <a:latin typeface="Century Schoolbook"/>
+                <a:latin typeface="Lexend"/>
               </a:rPr>
               <a:t>9</a:t>
             </a:r>
@@ -17332,7 +17985,7 @@
       </p:sp>
       <p:pic>
         <p:nvPicPr>
-          <p:cNvPr id="8" name="Picture 7" descr="83ae14ddaf39e79e.png"/>
+          <p:cNvPr id="8" name="Picture 7" descr="cebc1086f5007b0c.png"/>
           <p:cNvPicPr>
             <a:picLocks noChangeAspect="1"/>
           </p:cNvPicPr>
@@ -17346,8 +17999,8 @@
         </p:blipFill>
         <p:spPr>
           <a:xfrm>
-            <a:off x="4629911" y="2194560"/>
-            <a:ext cx="2901696" cy="518160"/>
+            <a:off x="4517136" y="1600200"/>
+            <a:ext cx="3127248" cy="509016"/>
           </a:xfrm>
           <a:prstGeom prst="rect">
             <a:avLst/>
@@ -17362,7 +18015,7 @@
         </p:nvSpPr>
         <p:spPr>
           <a:xfrm>
-            <a:off x="777240" y="3215640"/>
+            <a:off x="777240" y="2612136"/>
             <a:ext cx="10607040" cy="429370"/>
           </a:xfrm>
           <a:prstGeom prst="rect">
@@ -17378,11 +18031,11 @@
           <a:p>
             <a:pPr algn="ctr"/>
             <a:r>
-              <a:rPr sz="2400" b="1" i="0">
+              <a:rPr sz="2280" b="1" i="0">
                 <a:solidFill>
                   <a:srgbClr val="1A1A1A"/>
                 </a:solidFill>
-                <a:latin typeface="Century Schoolbook"/>
+                <a:latin typeface="Lexend"/>
               </a:rPr>
               <a:t>Write an equivalent expression as a single monomial.</a:t>
             </a:r>

--- a/a7/build/out/u3/A7 3.T1 Exponent Laws with Variable Bases - Slides.pptx
+++ b/a7/build/out/u3/A7 3.T1 Exponent Laws with Variable Bases - Slides.pptx
@@ -11081,7 +11081,7 @@
       </p:sp>
       <p:pic>
         <p:nvPicPr>
-          <p:cNvPr id="8" name="Picture 7" descr="15eaf6bc755cbb62.png"/>
+          <p:cNvPr id="8" name="Picture 7" descr="09665619072acc8c.png"/>
           <p:cNvPicPr>
             <a:picLocks noChangeAspect="1"/>
           </p:cNvPicPr>
@@ -11095,8 +11095,8 @@
         </p:blipFill>
         <p:spPr>
           <a:xfrm>
-            <a:off x="5480304" y="2194560"/>
-            <a:ext cx="1200912" cy="990599"/>
+            <a:off x="5478780" y="2194560"/>
+            <a:ext cx="1203960" cy="1002792"/>
           </a:xfrm>
           <a:prstGeom prst="rect">
             <a:avLst/>
@@ -11368,7 +11368,7 @@
       </p:sp>
       <p:pic>
         <p:nvPicPr>
-          <p:cNvPr id="8" name="Picture 7" descr="1f89042524950c8b.png"/>
+          <p:cNvPr id="8" name="Picture 7" descr="fa028d663fe2fd7c.png"/>
           <p:cNvPicPr>
             <a:picLocks noChangeAspect="1"/>
           </p:cNvPicPr>
@@ -11383,7 +11383,7 @@
         <p:spPr>
           <a:xfrm>
             <a:off x="5481827" y="2103120"/>
-            <a:ext cx="1197864" cy="987552"/>
+            <a:ext cx="1197864" cy="996696"/>
           </a:xfrm>
           <a:prstGeom prst="rect">
             <a:avLst/>
@@ -11398,8 +11398,8 @@
         </p:nvSpPr>
         <p:spPr>
           <a:xfrm>
-            <a:off x="3591992" y="3369564"/>
-            <a:ext cx="1853335" cy="457200"/>
+            <a:off x="3582736" y="3378708"/>
+            <a:ext cx="1710160" cy="457200"/>
           </a:xfrm>
           <a:prstGeom prst="rect">
             <a:avLst/>
@@ -11420,14 +11420,14 @@
                 </a:solidFill>
                 <a:latin typeface="Lexend"/>
               </a:rPr>
-              <a:t>The m's:  </a:t>
+              <a:t>The c's:  </a:t>
             </a:r>
           </a:p>
         </p:txBody>
       </p:sp>
       <p:pic>
         <p:nvPicPr>
-          <p:cNvPr id="10" name="Picture 9" descr="f17cd6c71b560f6e.png"/>
+          <p:cNvPr id="10" name="Picture 9" descr="41cf13457f6ca208.png"/>
           <p:cNvPicPr>
             <a:picLocks noChangeAspect="1"/>
           </p:cNvPicPr>
@@ -11441,8 +11441,8 @@
         </p:blipFill>
         <p:spPr>
           <a:xfrm>
-            <a:off x="5308167" y="3445764"/>
-            <a:ext cx="3261360" cy="304800"/>
+            <a:off x="5155737" y="3454908"/>
+            <a:ext cx="2990088" cy="304800"/>
           </a:xfrm>
           <a:prstGeom prst="rect">
             <a:avLst/>
@@ -11457,8 +11457,8 @@
         </p:nvSpPr>
         <p:spPr>
           <a:xfrm>
-            <a:off x="3591992" y="3909059"/>
-            <a:ext cx="1732390" cy="457200"/>
+            <a:off x="3582736" y="3918203"/>
+            <a:ext cx="1746878" cy="457200"/>
           </a:xfrm>
           <a:prstGeom prst="rect">
             <a:avLst/>
@@ -11479,14 +11479,14 @@
                 </a:solidFill>
                 <a:latin typeface="Lexend"/>
               </a:rPr>
-              <a:t>The n's:  </a:t>
+              <a:t>The d's:  </a:t>
             </a:r>
           </a:p>
         </p:txBody>
       </p:sp>
       <p:pic>
         <p:nvPicPr>
-          <p:cNvPr id="12" name="Picture 11" descr="928f349ecf76cfb6.png"/>
+          <p:cNvPr id="12" name="Picture 11" descr="3cec43e7944d313c.png"/>
           <p:cNvPicPr>
             <a:picLocks noChangeAspect="1"/>
           </p:cNvPicPr>
@@ -11500,8 +11500,8 @@
         </p:blipFill>
         <p:spPr>
           <a:xfrm>
-            <a:off x="5187222" y="3986783"/>
-            <a:ext cx="3371088" cy="301752"/>
+            <a:off x="5192455" y="3994404"/>
+            <a:ext cx="3386328" cy="304800"/>
           </a:xfrm>
           <a:prstGeom prst="rect">
             <a:avLst/>
@@ -11516,7 +11516,7 @@
         </p:nvSpPr>
         <p:spPr>
           <a:xfrm>
-            <a:off x="4808220" y="4596384"/>
+            <a:off x="4901183" y="4600956"/>
             <a:ext cx="1920240" cy="548640"/>
           </a:xfrm>
           <a:prstGeom prst="rect">
@@ -11545,7 +11545,7 @@
       </p:sp>
       <p:pic>
         <p:nvPicPr>
-          <p:cNvPr id="14" name="Picture 13" descr="9f07b18d81f5938b.png"/>
+          <p:cNvPr id="14" name="Picture 13" descr="c4c6f47ddd42acca.png"/>
           <p:cNvPicPr>
             <a:picLocks noChangeAspect="1"/>
           </p:cNvPicPr>
@@ -11559,8 +11559,8 @@
         </p:blipFill>
         <p:spPr>
           <a:xfrm>
-            <a:off x="6728459" y="4663440"/>
-            <a:ext cx="624840" cy="414528"/>
+            <a:off x="6821423" y="4663440"/>
+            <a:ext cx="438912" cy="423672"/>
           </a:xfrm>
           <a:prstGeom prst="rect">
             <a:avLst/>
@@ -13294,7 +13294,7 @@
         </p:nvSpPr>
         <p:spPr>
           <a:xfrm>
-            <a:off x="776649" y="2179320"/>
+            <a:off x="3812430" y="1623060"/>
             <a:ext cx="2551180" cy="457200"/>
           </a:xfrm>
           <a:prstGeom prst="rect">
@@ -13323,7 +13323,7 @@
       </p:sp>
       <p:pic>
         <p:nvPicPr>
-          <p:cNvPr id="9" name="Picture 8" descr="cfeea6bcd2283eb6.png"/>
+          <p:cNvPr id="9" name="Picture 8" descr="0f4a528fb553ff1b.png"/>
           <p:cNvPicPr>
             <a:picLocks noChangeAspect="1"/>
           </p:cNvPicPr>
@@ -13337,8 +13337,8 @@
         </p:blipFill>
         <p:spPr>
           <a:xfrm>
-            <a:off x="3190670" y="2194560"/>
-            <a:ext cx="1432560" cy="426720"/>
+            <a:off x="6226450" y="1647444"/>
+            <a:ext cx="1493520" cy="408432"/>
           </a:xfrm>
           <a:prstGeom prst="rect">
             <a:avLst/>
@@ -13353,8 +13353,8 @@
         </p:nvSpPr>
         <p:spPr>
           <a:xfrm>
-            <a:off x="4623230" y="2179320"/>
-            <a:ext cx="952517" cy="457200"/>
+            <a:off x="7719970" y="1623060"/>
+            <a:ext cx="766279" cy="457200"/>
           </a:xfrm>
           <a:prstGeom prst="rect">
             <a:avLst/>
@@ -13375,14 +13375,14 @@
                 </a:solidFill>
                 <a:latin typeface="Lexend"/>
               </a:rPr>
-              <a:t>  as  </a:t>
+              <a:t>  as</a:t>
             </a:r>
           </a:p>
         </p:txBody>
       </p:sp>
       <p:pic>
         <p:nvPicPr>
-          <p:cNvPr id="11" name="Picture 10" descr="bb618bfdbdefcd62.png"/>
+          <p:cNvPr id="11" name="Picture 10" descr="e0c3dd1cea0c7232.png"/>
           <p:cNvPicPr>
             <a:picLocks noChangeAspect="1"/>
           </p:cNvPicPr>
@@ -13396,8 +13396,8 @@
         </p:blipFill>
         <p:spPr>
           <a:xfrm>
-            <a:off x="5438587" y="2226564"/>
-            <a:ext cx="5797296" cy="362712"/>
+            <a:off x="2263322" y="2392680"/>
+            <a:ext cx="7485888" cy="289560"/>
           </a:xfrm>
           <a:prstGeom prst="rect">
             <a:avLst/>
@@ -13412,7 +13412,7 @@
         </p:nvSpPr>
         <p:spPr>
           <a:xfrm>
-            <a:off x="11235883" y="2179320"/>
+            <a:off x="9749210" y="2308860"/>
             <a:ext cx="286146" cy="457200"/>
           </a:xfrm>
           <a:prstGeom prst="rect">
@@ -13447,7 +13447,7 @@
         </p:nvSpPr>
         <p:spPr>
           <a:xfrm>
-            <a:off x="1500114" y="2878835"/>
+            <a:off x="1448298" y="2994660"/>
             <a:ext cx="3423972" cy="457200"/>
           </a:xfrm>
           <a:prstGeom prst="rect">
@@ -13476,7 +13476,7 @@
       </p:sp>
       <p:pic>
         <p:nvPicPr>
-          <p:cNvPr id="14" name="Picture 13" descr="1693b7be1771319b.png"/>
+          <p:cNvPr id="14" name="Picture 13" descr="141b9ad3a73872cc.png"/>
           <p:cNvPicPr>
             <a:picLocks noChangeAspect="1"/>
           </p:cNvPicPr>
@@ -13490,8 +13490,8 @@
         </p:blipFill>
         <p:spPr>
           <a:xfrm>
-            <a:off x="4786927" y="2895600"/>
-            <a:ext cx="1703832" cy="423672"/>
+            <a:off x="4735111" y="3020568"/>
+            <a:ext cx="1807464" cy="405384"/>
           </a:xfrm>
           <a:prstGeom prst="rect">
             <a:avLst/>
@@ -13506,7 +13506,7 @@
         </p:nvSpPr>
         <p:spPr>
           <a:xfrm>
-            <a:off x="6490759" y="2878835"/>
+            <a:off x="6542575" y="2994660"/>
             <a:ext cx="4307805" cy="457200"/>
           </a:xfrm>
           <a:prstGeom prst="rect">
@@ -13804,7 +13804,7 @@
         </p:nvSpPr>
         <p:spPr>
           <a:xfrm>
-            <a:off x="775125" y="2087880"/>
+            <a:off x="3810906" y="1623060"/>
             <a:ext cx="2551180" cy="457200"/>
           </a:xfrm>
           <a:prstGeom prst="rect">
@@ -13833,7 +13833,7 @@
       </p:sp>
       <p:pic>
         <p:nvPicPr>
-          <p:cNvPr id="9" name="Picture 8" descr="2e7c8f87b9f4d0a8.png"/>
+          <p:cNvPr id="9" name="Picture 8" descr="a3dcfdf926345ae1.png"/>
           <p:cNvPicPr>
             <a:picLocks noChangeAspect="1"/>
           </p:cNvPicPr>
@@ -13847,8 +13847,8 @@
         </p:blipFill>
         <p:spPr>
           <a:xfrm>
-            <a:off x="3189146" y="2103120"/>
-            <a:ext cx="1435608" cy="426720"/>
+            <a:off x="6224926" y="1647444"/>
+            <a:ext cx="1496568" cy="408432"/>
           </a:xfrm>
           <a:prstGeom prst="rect">
             <a:avLst/>
@@ -13863,8 +13863,8 @@
         </p:nvSpPr>
         <p:spPr>
           <a:xfrm>
-            <a:off x="4624754" y="2087880"/>
-            <a:ext cx="952517" cy="457200"/>
+            <a:off x="7721494" y="1623060"/>
+            <a:ext cx="766279" cy="457200"/>
           </a:xfrm>
           <a:prstGeom prst="rect">
             <a:avLst/>
@@ -13885,14 +13885,14 @@
                 </a:solidFill>
                 <a:latin typeface="Lexend"/>
               </a:rPr>
-              <a:t>  as  </a:t>
+              <a:t>  as</a:t>
             </a:r>
           </a:p>
         </p:txBody>
       </p:sp>
       <p:pic>
         <p:nvPicPr>
-          <p:cNvPr id="11" name="Picture 10" descr="010d92783b6e2460.png"/>
+          <p:cNvPr id="11" name="Picture 10" descr="1584e3327bf07021.png"/>
           <p:cNvPicPr>
             <a:picLocks noChangeAspect="1"/>
           </p:cNvPicPr>
@@ -13906,8 +13906,8 @@
         </p:blipFill>
         <p:spPr>
           <a:xfrm>
-            <a:off x="5440111" y="2135124"/>
-            <a:ext cx="5797296" cy="362712"/>
+            <a:off x="2264846" y="2392680"/>
+            <a:ext cx="7482840" cy="289560"/>
           </a:xfrm>
           <a:prstGeom prst="rect">
             <a:avLst/>
@@ -13922,7 +13922,7 @@
         </p:nvSpPr>
         <p:spPr>
           <a:xfrm>
-            <a:off x="11237407" y="2087880"/>
+            <a:off x="9747686" y="2308860"/>
             <a:ext cx="286146" cy="457200"/>
           </a:xfrm>
           <a:prstGeom prst="rect">
@@ -13957,7 +13957,7 @@
         </p:nvSpPr>
         <p:spPr>
           <a:xfrm>
-            <a:off x="1498590" y="2788920"/>
+            <a:off x="1445250" y="2994660"/>
             <a:ext cx="3423972" cy="457200"/>
           </a:xfrm>
           <a:prstGeom prst="rect">
@@ -13986,7 +13986,7 @@
       </p:sp>
       <p:pic>
         <p:nvPicPr>
-          <p:cNvPr id="14" name="Picture 13" descr="95db59124d1ea518.png"/>
+          <p:cNvPr id="14" name="Picture 13" descr="a051b135e43659a8.png"/>
           <p:cNvPicPr>
             <a:picLocks noChangeAspect="1"/>
           </p:cNvPicPr>
@@ -14000,8 +14000,8 @@
         </p:blipFill>
         <p:spPr>
           <a:xfrm>
-            <a:off x="4785403" y="2804160"/>
-            <a:ext cx="1706880" cy="426720"/>
+            <a:off x="4732063" y="3017520"/>
+            <a:ext cx="1813560" cy="411480"/>
           </a:xfrm>
           <a:prstGeom prst="rect">
             <a:avLst/>
@@ -14016,7 +14016,7 @@
         </p:nvSpPr>
         <p:spPr>
           <a:xfrm>
-            <a:off x="6492283" y="2788920"/>
+            <a:off x="6545623" y="2994660"/>
             <a:ext cx="4307805" cy="457200"/>
           </a:xfrm>
           <a:prstGeom prst="rect">
@@ -14045,7 +14045,7 @@
       </p:sp>
       <p:pic>
         <p:nvPicPr>
-          <p:cNvPr id="16" name="Picture 15" descr="cb983d4a48c3fca1.png"/>
+          <p:cNvPr id="16" name="Picture 15" descr="a5dbe839110f56ac.png"/>
           <p:cNvPicPr>
             <a:picLocks noChangeAspect="1"/>
           </p:cNvPicPr>
@@ -14059,8 +14059,8 @@
         </p:blipFill>
         <p:spPr>
           <a:xfrm>
-            <a:off x="4882895" y="3649979"/>
-            <a:ext cx="2267712" cy="268224"/>
+            <a:off x="2371333" y="3825240"/>
+            <a:ext cx="2798064" cy="313944"/>
           </a:xfrm>
           <a:prstGeom prst="rect">
             <a:avLst/>
@@ -14069,7 +14069,7 @@
       </p:pic>
       <p:pic>
         <p:nvPicPr>
-          <p:cNvPr id="17" name="Picture 16" descr="7d1d579d9371e633.png"/>
+          <p:cNvPr id="17" name="Picture 16" descr="cb303afaf851bbdd.png"/>
           <p:cNvPicPr>
             <a:picLocks noChangeAspect="1"/>
           </p:cNvPicPr>
@@ -14083,17 +14083,52 @@
         </p:blipFill>
         <p:spPr>
           <a:xfrm>
-            <a:off x="4882895" y="4160520"/>
-            <a:ext cx="1417320" cy="252984"/>
+            <a:off x="2371333" y="4366259"/>
+            <a:ext cx="4386072" cy="310896"/>
           </a:xfrm>
           <a:prstGeom prst="rect">
             <a:avLst/>
           </a:prstGeom>
         </p:spPr>
       </p:pic>
+      <p:sp>
+        <p:nvSpPr>
+          <p:cNvPr id="18" name="TextBox 17"/>
+          <p:cNvSpPr txBox="1"/>
+          <p:nvPr/>
+        </p:nvSpPr>
+        <p:spPr>
+          <a:xfrm>
+            <a:off x="6757405" y="4293107"/>
+            <a:ext cx="1524021" cy="457200"/>
+          </a:xfrm>
+          <a:prstGeom prst="rect">
+            <a:avLst/>
+          </a:prstGeom>
+          <a:noFill/>
+        </p:spPr>
+        <p:txBody>
+          <a:bodyPr wrap="none" lIns="45720" rIns="45720" tIns="18288" bIns="18288" anchor="ctr">
+            <a:noAutofit/>
+          </a:bodyPr>
+          <a:lstStyle/>
+          <a:p>
+            <a:pPr algn="l"/>
+            <a:r>
+              <a:rPr sz="2750" b="0" i="0">
+                <a:solidFill>
+                  <a:srgbClr val="1A1A1A"/>
+                </a:solidFill>
+                <a:latin typeface="Lexend"/>
+              </a:rPr>
+              <a:t>   and   </a:t>
+            </a:r>
+          </a:p>
+        </p:txBody>
+      </p:sp>
       <p:pic>
         <p:nvPicPr>
-          <p:cNvPr id="18" name="Picture 17" descr="f6926bf22434ff2e.png"/>
+          <p:cNvPr id="19" name="Picture 18" descr="e58666b48c970316.png"/>
           <p:cNvPicPr>
             <a:picLocks noChangeAspect="1"/>
           </p:cNvPicPr>
@@ -14107,8 +14142,8 @@
         </p:blipFill>
         <p:spPr>
           <a:xfrm>
-            <a:off x="4882895" y="4626864"/>
-            <a:ext cx="2508504" cy="326136"/>
+            <a:off x="8144266" y="4369308"/>
+            <a:ext cx="1761744" cy="304800"/>
           </a:xfrm>
           <a:prstGeom prst="rect">
             <a:avLst/>
@@ -14117,13 +14152,13 @@
       </p:pic>
       <p:sp>
         <p:nvSpPr>
-          <p:cNvPr id="19" name="TextBox 18"/>
-          <p:cNvSpPr txBox="1"/>
-          <p:nvPr/>
-        </p:nvSpPr>
-        <p:spPr>
-          <a:xfrm>
-            <a:off x="777240" y="5132832"/>
+          <p:cNvPr id="20" name="TextBox 19"/>
+          <p:cNvSpPr txBox="1"/>
+          <p:nvPr/>
+        </p:nvSpPr>
+        <p:spPr>
+          <a:xfrm>
+            <a:off x="777240" y="4864608"/>
             <a:ext cx="10607040" cy="1072896"/>
           </a:xfrm>
           <a:prstGeom prst="rect">
@@ -14145,7 +14180,7 @@
                 </a:solidFill>
                 <a:latin typeface="Lexend"/>
               </a:rPr>
-              <a:t>Answer:   Both are correct; 15</a:t>
+              <a:t>Answer:   Both are correct; 14</a:t>
             </a:r>
             <a:r>
               <a:rPr sz="3040" b="1" i="0" baseline="30000">
@@ -14163,7 +14198,7 @@
                 </a:solidFill>
                 <a:latin typeface="Lexend"/>
               </a:rPr>
-              <a:t> = 3,375, x · x · x = x</a:t>
+              <a:t> = 2,744, nine a's make a</a:t>
             </a:r>
             <a:r>
               <a:rPr sz="3040" b="1" i="0" baseline="30000">
@@ -14172,25 +14207,25 @@
                 </a:solidFill>
                 <a:latin typeface="Lexend"/>
               </a:rPr>
+              <a:t>9</a:t>
+            </a:r>
+            <a:r>
+              <a:rPr sz="3040" b="1" i="0">
+                <a:solidFill>
+                  <a:srgbClr val="9E1B32"/>
+                </a:solidFill>
+                <a:latin typeface="Lexend"/>
+              </a:rPr>
+              <a:t>, and b · b · b = b</a:t>
+            </a:r>
+            <a:r>
+              <a:rPr sz="3040" b="1" i="0" baseline="30000">
+                <a:solidFill>
+                  <a:srgbClr val="9E1B32"/>
+                </a:solidFill>
+                <a:latin typeface="Lexend"/>
+              </a:rPr>
               <a:t>3</a:t>
-            </a:r>
-            <a:r>
-              <a:rPr sz="3040" b="1" i="0">
-                <a:solidFill>
-                  <a:srgbClr val="9E1B32"/>
-                </a:solidFill>
-                <a:latin typeface="Lexend"/>
-              </a:rPr>
-              <a:t>, and six y's make y</a:t>
-            </a:r>
-            <a:r>
-              <a:rPr sz="3040" b="1" i="0" baseline="30000">
-                <a:solidFill>
-                  <a:srgbClr val="9E1B32"/>
-                </a:solidFill>
-                <a:latin typeface="Lexend"/>
-              </a:rPr>
-              <a:t>6</a:t>
             </a:r>
             <a:r>
               <a:rPr sz="3040" b="1" i="0">
@@ -14692,7 +14727,7 @@
       </p:sp>
       <p:pic>
         <p:nvPicPr>
-          <p:cNvPr id="16" name="Picture 15" descr="21810693e2eaa115.png"/>
+          <p:cNvPr id="16" name="Picture 15" descr="b2f7ca41cd8de695.png"/>
           <p:cNvPicPr>
             <a:picLocks noChangeAspect="1"/>
           </p:cNvPicPr>
@@ -14706,8 +14741,8 @@
         </p:blipFill>
         <p:spPr>
           <a:xfrm>
-            <a:off x="5730620" y="2738627"/>
-            <a:ext cx="826008" cy="347472"/>
+            <a:off x="5730620" y="2740151"/>
+            <a:ext cx="856488" cy="344424"/>
           </a:xfrm>
           <a:prstGeom prst="rect">
             <a:avLst/>

--- a/a7/build/out/u3/A7 3.T1 Exponent Laws with Variable Bases - Slides.pptx
+++ b/a7/build/out/u3/A7 3.T1 Exponent Laws with Variable Bases - Slides.pptx
@@ -6234,7 +6234,7 @@
       </p:sp>
       <p:pic>
         <p:nvPicPr>
-          <p:cNvPr id="8" name="Picture 7" descr="d27a1b65e2e808f9.png"/>
+          <p:cNvPr id="8" name="Picture 7" descr="fc4ca0383286bbd0.png"/>
           <p:cNvPicPr>
             <a:picLocks noChangeAspect="1"/>
           </p:cNvPicPr>
@@ -6248,8 +6248,8 @@
         </p:blipFill>
         <p:spPr>
           <a:xfrm>
-            <a:off x="5565647" y="2194560"/>
-            <a:ext cx="1030224" cy="524256"/>
+            <a:off x="5574791" y="2194560"/>
+            <a:ext cx="1011936" cy="524256"/>
           </a:xfrm>
           <a:prstGeom prst="rect">
             <a:avLst/>
@@ -6521,7 +6521,7 @@
       </p:sp>
       <p:pic>
         <p:nvPicPr>
-          <p:cNvPr id="8" name="Picture 7" descr="b08eef5dde2a507c.png"/>
+          <p:cNvPr id="8" name="Picture 7" descr="39b1b73431d5a113.png"/>
           <p:cNvPicPr>
             <a:picLocks noChangeAspect="1"/>
           </p:cNvPicPr>
@@ -6535,8 +6535,8 @@
         </p:blipFill>
         <p:spPr>
           <a:xfrm>
-            <a:off x="5565647" y="2103120"/>
-            <a:ext cx="1030224" cy="524256"/>
+            <a:off x="5573268" y="2103120"/>
+            <a:ext cx="1014984" cy="524256"/>
           </a:xfrm>
           <a:prstGeom prst="rect">
             <a:avLst/>
@@ -6545,7 +6545,7 @@
       </p:pic>
       <p:pic>
         <p:nvPicPr>
-          <p:cNvPr id="9" name="Picture 8" descr="4ee0afac3f899134.png"/>
+          <p:cNvPr id="9" name="Picture 8" descr="142a7df11ceea4a2.png"/>
           <p:cNvPicPr>
             <a:picLocks noChangeAspect="1"/>
           </p:cNvPicPr>
@@ -6559,8 +6559,8 @@
         </p:blipFill>
         <p:spPr>
           <a:xfrm>
-            <a:off x="4863083" y="2942844"/>
-            <a:ext cx="2542032" cy="384048"/>
+            <a:off x="4876799" y="2942844"/>
+            <a:ext cx="2514600" cy="384048"/>
           </a:xfrm>
           <a:prstGeom prst="rect">
             <a:avLst/>
@@ -6575,7 +6575,7 @@
         </p:nvSpPr>
         <p:spPr>
           <a:xfrm>
-            <a:off x="4797551" y="4654296"/>
+            <a:off x="4799076" y="4654296"/>
             <a:ext cx="1920240" cy="548640"/>
           </a:xfrm>
           <a:prstGeom prst="rect">
@@ -6604,7 +6604,7 @@
       </p:sp>
       <p:pic>
         <p:nvPicPr>
-          <p:cNvPr id="11" name="Picture 10" descr="aa93a227db193edf.png"/>
+          <p:cNvPr id="11" name="Picture 10" descr="88d04d46c5235ef5.png"/>
           <p:cNvPicPr>
             <a:picLocks noChangeAspect="1"/>
           </p:cNvPicPr>
@@ -6618,8 +6618,8 @@
         </p:blipFill>
         <p:spPr>
           <a:xfrm>
-            <a:off x="6717791" y="4663440"/>
-            <a:ext cx="646176" cy="530352"/>
+            <a:off x="6719315" y="4663440"/>
+            <a:ext cx="643128" cy="530352"/>
           </a:xfrm>
           <a:prstGeom prst="rect">
             <a:avLst/>
